--- a/slides/2026-07-01-ai-projects-intro.pptx
+++ b/slides/2026-07-01-ai-projects-intro.pptx
@@ -4,6 +4,9 @@
   <p:sldMasterIdLst>
     <p:sldMasterId id="2147483648" r:id="rId1"/>
   </p:sldMasterIdLst>
+  <p:notesMasterIdLst>
+    <p:notesMasterId r:id="rId14"/>
+  </p:notesMasterIdLst>
   <p:sldIdLst>
     <p:sldId id="256" r:id="rId2"/>
     <p:sldId id="257" r:id="rId3"/>
@@ -18,9 +21,6 @@
     <p:sldId id="266" r:id="rId12"/>
     <p:sldId id="267" r:id="rId13"/>
   </p:sldIdLst>
-  <p:notesMasterIdLst>
-    <p:notesMasterId r:id="rId14"/>
-  </p:notesMasterIdLst>
   <p:sldSz cx="12192000" cy="6858000"/>
   <p:notesSz cx="6858000" cy="12192000"/>
   <p:defaultTextStyle>
@@ -115,6 +115,11 @@
       </a:defRPr>
     </a:lvl9pPr>
   </p:defaultTextStyle>
+  <p:extLst>
+    <p:ext uri="{EFAFB233-063F-42B5-8137-9DF3F51BA10A}">
+      <p15:sldGuideLst xmlns:p15="http://schemas.microsoft.com/office/powerpoint/2012/main"/>
+    </p:ext>
+  </p:extLst>
 </p:presentation>
 </file>
 
@@ -140,241 +145,17 @@
           <a:chExt cx="0" cy="0"/>
         </a:xfrm>
       </p:grpSpPr>
-      <p:sp>
-        <p:nvSpPr>
-          <p:cNvPr id="2" name="Header Placeholder 1"/>
-          <p:cNvSpPr>
-            <a:spLocks noGrp="1"/>
-          </p:cNvSpPr>
-          <p:nvPr>
-            <p:ph type="hdr" sz="quarter"/>
-          </p:nvPr>
-        </p:nvSpPr>
-        <p:spPr>
-          <a:xfrm>
-            <a:off x="0" y="0"/>
-            <a:ext cx="2971800" cy="458788"/>
-          </a:xfrm>
-          <a:prstGeom prst="rect">
-            <a:avLst/>
-          </a:prstGeom>
-        </p:spPr>
-        <p:txBody>
-          <a:bodyPr vert="horz" lIns="91440" tIns="45720" rIns="91440" bIns="45720" rtlCol="0"/>
-          <a:lstStyle>
-            <a:lvl1pPr algn="l">
-              <a:defRPr sz="1200"/>
-            </a:lvl1pPr>
-          </a:lstStyle>
-          <a:p>
-            <a:endParaRPr lang="en-US"/>
-          </a:p>
-        </p:txBody>
-      </p:sp>
-      <p:sp>
-        <p:nvSpPr>
-          <p:cNvPr id="3" name="Date Placeholder 2"/>
-          <p:cNvSpPr>
-            <a:spLocks noGrp="1"/>
-          </p:cNvSpPr>
-          <p:nvPr>
-            <p:ph type="dt" idx="1"/>
-          </p:nvPr>
-        </p:nvSpPr>
-        <p:spPr>
-          <a:xfrm>
-            <a:off x="3884613" y="0"/>
-            <a:ext cx="2971800" cy="458788"/>
-          </a:xfrm>
-          <a:prstGeom prst="rect">
-            <a:avLst/>
-          </a:prstGeom>
-        </p:spPr>
-        <p:txBody>
-          <a:bodyPr vert="horz" lIns="91440" tIns="45720" rIns="91440" bIns="45720" rtlCol="0"/>
-          <a:lstStyle>
-            <a:lvl1pPr algn="r">
-              <a:defRPr sz="1200"/>
-            </a:lvl1pPr>
-          </a:lstStyle>
-          <a:p>
-            <a:fld id="{5282F153-3F37-0F45-9E97-73ACFA13230C}" type="datetimeFigureOut">
-              <a:rPr lang="en-US"/>
-              <a:t>7/23/19</a:t>
-            </a:fld>
-            <a:endParaRPr lang="en-US"/>
-          </a:p>
-        </p:txBody>
-      </p:sp>
-      <p:sp>
-        <p:nvSpPr>
-          <p:cNvPr id="4" name="Slide Image Placeholder 3"/>
-          <p:cNvSpPr>
-            <a:spLocks noGrp="1" noRot="1" noChangeAspect="1"/>
-          </p:cNvSpPr>
-          <p:nvPr>
-            <p:ph type="sldImg" idx="2"/>
-          </p:nvPr>
-        </p:nvSpPr>
-        <p:spPr>
-          <a:xfrm>
-            <a:off x="685800" y="1143000"/>
-            <a:ext cx="5486400" cy="3086100"/>
-          </a:xfrm>
-          <a:prstGeom prst="rect">
-            <a:avLst/>
-          </a:prstGeom>
-          <a:noFill/>
-          <a:ln w="12700">
-            <a:solidFill>
-              <a:prstClr val="black"/>
-            </a:solidFill>
-          </a:ln>
-        </p:spPr>
-        <p:txBody>
-          <a:bodyPr vert="horz" lIns="91440" tIns="45720" rIns="91440" bIns="45720" rtlCol="0" anchor="ctr"/>
-          <a:lstStyle/>
-          <a:p>
-            <a:endParaRPr lang="en-US"/>
-          </a:p>
-        </p:txBody>
-      </p:sp>
-      <p:sp>
-        <p:nvSpPr>
-          <p:cNvPr id="5" name="Notes Placeholder 4"/>
-          <p:cNvSpPr>
-            <a:spLocks noGrp="1"/>
-          </p:cNvSpPr>
-          <p:nvPr>
-            <p:ph type="body" sz="quarter" idx="3"/>
-          </p:nvPr>
-        </p:nvSpPr>
-        <p:spPr>
-          <a:xfrm>
-            <a:off x="685800" y="4400550"/>
-            <a:ext cx="5486400" cy="3600450"/>
-          </a:xfrm>
-          <a:prstGeom prst="rect">
-            <a:avLst/>
-          </a:prstGeom>
-        </p:spPr>
-        <p:txBody>
-          <a:bodyPr vert="horz" lIns="91440" tIns="45720" rIns="91440" bIns="45720" rtlCol="0"/>
-          <a:lstStyle/>
-          <a:p>
-            <a:pPr lvl="0"/>
-            <a:r>
-              <a:rPr lang="en-US"/>
-              <a:t>Click to edit Master text styles</a:t>
-            </a:r>
-          </a:p>
-          <a:p>
-            <a:pPr lvl="1"/>
-            <a:r>
-              <a:rPr lang="en-US"/>
-              <a:t>Second level</a:t>
-            </a:r>
-          </a:p>
-          <a:p>
-            <a:pPr lvl="2"/>
-            <a:r>
-              <a:rPr lang="en-US"/>
-              <a:t>Third level</a:t>
-            </a:r>
-          </a:p>
-          <a:p>
-            <a:pPr lvl="3"/>
-            <a:r>
-              <a:rPr lang="en-US"/>
-              <a:t>Fourth level</a:t>
-            </a:r>
-          </a:p>
-          <a:p>
-            <a:pPr lvl="4"/>
-            <a:r>
-              <a:rPr lang="en-US"/>
-              <a:t>Fifth level</a:t>
-            </a:r>
-          </a:p>
-        </p:txBody>
-      </p:sp>
-      <p:sp>
-        <p:nvSpPr>
-          <p:cNvPr id="6" name="Footer Placeholder 5"/>
-          <p:cNvSpPr>
-            <a:spLocks noGrp="1"/>
-          </p:cNvSpPr>
-          <p:nvPr>
-            <p:ph type="ftr" sz="quarter" idx="4"/>
-          </p:nvPr>
-        </p:nvSpPr>
-        <p:spPr>
-          <a:xfrm>
-            <a:off x="0" y="8685213"/>
-            <a:ext cx="2971800" cy="458787"/>
-          </a:xfrm>
-          <a:prstGeom prst="rect">
-            <a:avLst/>
-          </a:prstGeom>
-        </p:spPr>
-        <p:txBody>
-          <a:bodyPr vert="horz" lIns="91440" tIns="45720" rIns="91440" bIns="45720" rtlCol="0" anchor="b"/>
-          <a:lstStyle>
-            <a:lvl1pPr algn="l">
-              <a:defRPr sz="1200"/>
-            </a:lvl1pPr>
-          </a:lstStyle>
-          <a:p>
-            <a:endParaRPr lang="en-US"/>
-          </a:p>
-        </p:txBody>
-      </p:sp>
-      <p:sp>
-        <p:nvSpPr>
-          <p:cNvPr id="7" name="Slide Number Placeholder 6"/>
-          <p:cNvSpPr>
-            <a:spLocks noGrp="1"/>
-          </p:cNvSpPr>
-          <p:nvPr>
-            <p:ph type="sldNum" sz="quarter" idx="5"/>
-          </p:nvPr>
-        </p:nvSpPr>
-        <p:spPr>
-          <a:xfrm>
-            <a:off x="3884613" y="8685213"/>
-            <a:ext cx="2971800" cy="458787"/>
-          </a:xfrm>
-          <a:prstGeom prst="rect">
-            <a:avLst/>
-          </a:prstGeom>
-        </p:spPr>
-        <p:txBody>
-          <a:bodyPr vert="horz" lIns="91440" tIns="45720" rIns="91440" bIns="45720" rtlCol="0" anchor="b"/>
-          <a:lstStyle>
-            <a:lvl1pPr algn="r">
-              <a:defRPr sz="1200"/>
-            </a:lvl1pPr>
-          </a:lstStyle>
-          <a:p>
-            <a:fld id="{CE5E9CC1-C706-0F49-92D6-E571CC5EEA8F}" type="slidenum">
-              <a:rPr lang="en-US"/>
-              <a:t>‹#›</a:t>
-            </a:fld>
-            <a:endParaRPr lang="en-US"/>
-          </a:p>
-        </p:txBody>
-      </p:sp>
     </p:spTree>
     <p:extLst>
       <p:ext uri="{BB962C8B-B14F-4D97-AF65-F5344CB8AC3E}">
-        <p14:creationId xmlns:p14="http://schemas.microsoft.com/office/powerpoint/2010/main" val="1024086991"/>
+        <p14:creationId xmlns:p14="http://schemas.microsoft.com/office/powerpoint/2010/main" val="1478193065"/>
       </p:ext>
     </p:extLst>
   </p:cSld>
   <p:clrMap bg1="lt1" tx1="dk1" bg2="lt2" tx2="dk2" accent1="accent1" accent2="accent2" accent3="accent3" accent4="accent4" accent5="accent5" accent6="accent6" hlink="hlink" folHlink="folHlink"/>
   <p:notesStyle>
     <a:lvl1pPr marL="0" algn="l" defTabSz="914400" rtl="0" eaLnBrk="1" latinLnBrk="0" hangingPunct="1">
-      <a:defRPr sz="1200" kern="1200">
+      <a:defRPr kumimoji="1" sz="1200" kern="1200">
         <a:solidFill>
           <a:schemeClr val="tx1"/>
         </a:solidFill>
@@ -384,7 +165,7 @@
       </a:defRPr>
     </a:lvl1pPr>
     <a:lvl2pPr marL="457200" algn="l" defTabSz="914400" rtl="0" eaLnBrk="1" latinLnBrk="0" hangingPunct="1">
-      <a:defRPr sz="1200" kern="1200">
+      <a:defRPr kumimoji="1" sz="1200" kern="1200">
         <a:solidFill>
           <a:schemeClr val="tx1"/>
         </a:solidFill>
@@ -394,7 +175,7 @@
       </a:defRPr>
     </a:lvl2pPr>
     <a:lvl3pPr marL="914400" algn="l" defTabSz="914400" rtl="0" eaLnBrk="1" latinLnBrk="0" hangingPunct="1">
-      <a:defRPr sz="1200" kern="1200">
+      <a:defRPr kumimoji="1" sz="1200" kern="1200">
         <a:solidFill>
           <a:schemeClr val="tx1"/>
         </a:solidFill>
@@ -404,7 +185,7 @@
       </a:defRPr>
     </a:lvl3pPr>
     <a:lvl4pPr marL="1371600" algn="l" defTabSz="914400" rtl="0" eaLnBrk="1" latinLnBrk="0" hangingPunct="1">
-      <a:defRPr sz="1200" kern="1200">
+      <a:defRPr kumimoji="1" sz="1200" kern="1200">
         <a:solidFill>
           <a:schemeClr val="tx1"/>
         </a:solidFill>
@@ -414,7 +195,7 @@
       </a:defRPr>
     </a:lvl4pPr>
     <a:lvl5pPr marL="1828800" algn="l" defTabSz="914400" rtl="0" eaLnBrk="1" latinLnBrk="0" hangingPunct="1">
-      <a:defRPr sz="1200" kern="1200">
+      <a:defRPr kumimoji="1" sz="1200" kern="1200">
         <a:solidFill>
           <a:schemeClr val="tx1"/>
         </a:solidFill>
@@ -424,7 +205,7 @@
       </a:defRPr>
     </a:lvl5pPr>
     <a:lvl6pPr marL="2286000" algn="l" defTabSz="914400" rtl="0" eaLnBrk="1" latinLnBrk="0" hangingPunct="1">
-      <a:defRPr sz="1200" kern="1200">
+      <a:defRPr kumimoji="1" sz="1200" kern="1200">
         <a:solidFill>
           <a:schemeClr val="tx1"/>
         </a:solidFill>
@@ -434,7 +215,7 @@
       </a:defRPr>
     </a:lvl6pPr>
     <a:lvl7pPr marL="2743200" algn="l" defTabSz="914400" rtl="0" eaLnBrk="1" latinLnBrk="0" hangingPunct="1">
-      <a:defRPr sz="1200" kern="1200">
+      <a:defRPr kumimoji="1" sz="1200" kern="1200">
         <a:solidFill>
           <a:schemeClr val="tx1"/>
         </a:solidFill>
@@ -444,7 +225,7 @@
       </a:defRPr>
     </a:lvl7pPr>
     <a:lvl8pPr marL="3200400" algn="l" defTabSz="914400" rtl="0" eaLnBrk="1" latinLnBrk="0" hangingPunct="1">
-      <a:defRPr sz="1200" kern="1200">
+      <a:defRPr kumimoji="1" sz="1200" kern="1200">
         <a:solidFill>
           <a:schemeClr val="tx1"/>
         </a:solidFill>
@@ -454,7 +235,7 @@
       </a:defRPr>
     </a:lvl8pPr>
     <a:lvl9pPr marL="3657600" algn="l" defTabSz="914400" rtl="0" eaLnBrk="1" latinLnBrk="0" hangingPunct="1">
-      <a:defRPr sz="1200" kern="1200">
+      <a:defRPr kumimoji="1" sz="1200" kern="1200">
         <a:solidFill>
           <a:schemeClr val="tx1"/>
         </a:solidFill>
@@ -511,10 +292,6 @@
           <a:bodyPr/>
           <a:lstStyle/>
           <a:p>
-            <a:r>
-              <a:rPr lang="en-US" dirty="0"/>
-              <a:t/>
-            </a:r>
             <a:endParaRPr lang="en-US" dirty="0"/>
           </a:p>
         </p:txBody>
@@ -599,10 +376,6 @@
           <a:bodyPr/>
           <a:lstStyle/>
           <a:p>
-            <a:r>
-              <a:rPr lang="en-US" dirty="0"/>
-              <a:t/>
-            </a:r>
             <a:endParaRPr lang="en-US" dirty="0"/>
           </a:p>
         </p:txBody>
@@ -687,10 +460,6 @@
           <a:bodyPr/>
           <a:lstStyle/>
           <a:p>
-            <a:r>
-              <a:rPr lang="en-US" dirty="0"/>
-              <a:t/>
-            </a:r>
             <a:endParaRPr lang="en-US" dirty="0"/>
           </a:p>
         </p:txBody>
@@ -775,10 +544,6 @@
           <a:bodyPr/>
           <a:lstStyle/>
           <a:p>
-            <a:r>
-              <a:rPr lang="en-US" dirty="0"/>
-              <a:t/>
-            </a:r>
             <a:endParaRPr lang="en-US" dirty="0"/>
           </a:p>
         </p:txBody>
@@ -863,10 +628,6 @@
           <a:bodyPr/>
           <a:lstStyle/>
           <a:p>
-            <a:r>
-              <a:rPr lang="en-US" dirty="0"/>
-              <a:t/>
-            </a:r>
             <a:endParaRPr lang="en-US" dirty="0"/>
           </a:p>
         </p:txBody>
@@ -951,10 +712,6 @@
           <a:bodyPr/>
           <a:lstStyle/>
           <a:p>
-            <a:r>
-              <a:rPr lang="en-US" dirty="0"/>
-              <a:t/>
-            </a:r>
             <a:endParaRPr lang="en-US" dirty="0"/>
           </a:p>
         </p:txBody>
@@ -1039,10 +796,6 @@
           <a:bodyPr/>
           <a:lstStyle/>
           <a:p>
-            <a:r>
-              <a:rPr lang="en-US" dirty="0"/>
-              <a:t/>
-            </a:r>
             <a:endParaRPr lang="en-US" dirty="0"/>
           </a:p>
         </p:txBody>
@@ -1127,10 +880,6 @@
           <a:bodyPr/>
           <a:lstStyle/>
           <a:p>
-            <a:r>
-              <a:rPr lang="en-US" dirty="0"/>
-              <a:t/>
-            </a:r>
             <a:endParaRPr lang="en-US" dirty="0"/>
           </a:p>
         </p:txBody>
@@ -1215,10 +964,6 @@
           <a:bodyPr/>
           <a:lstStyle/>
           <a:p>
-            <a:r>
-              <a:rPr lang="en-US" dirty="0"/>
-              <a:t/>
-            </a:r>
             <a:endParaRPr lang="en-US" dirty="0"/>
           </a:p>
         </p:txBody>
@@ -1308,7 +1053,6 @@
               <a:t>TODO: mobile_app のスクリーンショットを用意し次のように差し替える
 ![w:600](../../mobile_app/screenshots/radar.png)</a:t>
             </a:r>
-            <a:endParaRPr lang="en-US" dirty="0"/>
           </a:p>
         </p:txBody>
       </p:sp>
@@ -1392,10 +1136,6 @@
           <a:bodyPr/>
           <a:lstStyle/>
           <a:p>
-            <a:r>
-              <a:rPr lang="en-US" dirty="0"/>
-              <a:t/>
-            </a:r>
             <a:endParaRPr lang="en-US" dirty="0"/>
           </a:p>
         </p:txBody>
@@ -1480,10 +1220,6 @@
           <a:bodyPr/>
           <a:lstStyle/>
           <a:p>
-            <a:r>
-              <a:rPr lang="en-US" dirty="0"/>
-              <a:t/>
-            </a:r>
             <a:endParaRPr lang="en-US" dirty="0"/>
           </a:p>
         </p:txBody>
@@ -1557,6 +1293,11 @@
 <file path=ppt/slideMasters/slideMaster1.xml><?xml version="1.0" encoding="utf-8"?>
 <p:sldMaster xmlns:a="http://schemas.openxmlformats.org/drawingml/2006/main" xmlns:r="http://schemas.openxmlformats.org/officeDocument/2006/relationships" xmlns:p="http://schemas.openxmlformats.org/presentationml/2006/main">
   <p:cSld>
+    <p:bg>
+      <p:bgRef idx="1001">
+        <a:schemeClr val="bg1"/>
+      </p:bgRef>
+    </p:bg>
     <p:spTree>
       <p:nvGrpSpPr>
         <p:cNvPr id="1" name=""/>
@@ -1837,7 +1578,7 @@
     <p:bg>
       <p:bgPr>
         <a:blipFill dpi="0" rotWithShape="1">
-          <a:blip r:embed="rId1">
+          <a:blip r:embed="rId3">
             <a:lum/>
           </a:blip>
           <a:srcRect/>
@@ -1876,7 +1617,7 @@
     <p:bg>
       <p:bgPr>
         <a:blipFill dpi="0" rotWithShape="1">
-          <a:blip r:embed="rId1">
+          <a:blip r:embed="rId3">
             <a:lum/>
           </a:blip>
           <a:srcRect/>
@@ -1915,7 +1656,7 @@
     <p:bg>
       <p:bgPr>
         <a:blipFill dpi="0" rotWithShape="1">
-          <a:blip r:embed="rId1">
+          <a:blip r:embed="rId3">
             <a:lum/>
           </a:blip>
           <a:srcRect/>
@@ -1954,7 +1695,7 @@
     <p:bg>
       <p:bgPr>
         <a:blipFill dpi="0" rotWithShape="1">
-          <a:blip r:embed="rId1">
+          <a:blip r:embed="rId3">
             <a:lum/>
           </a:blip>
           <a:srcRect/>
@@ -1993,7 +1734,7 @@
     <p:bg>
       <p:bgPr>
         <a:blipFill dpi="0" rotWithShape="1">
-          <a:blip r:embed="rId1">
+          <a:blip r:embed="rId3">
             <a:lum/>
           </a:blip>
           <a:srcRect/>
@@ -2032,7 +1773,7 @@
     <p:bg>
       <p:bgPr>
         <a:blipFill dpi="0" rotWithShape="1">
-          <a:blip r:embed="rId1">
+          <a:blip r:embed="rId3">
             <a:lum/>
           </a:blip>
           <a:srcRect/>
@@ -2071,7 +1812,7 @@
     <p:bg>
       <p:bgPr>
         <a:blipFill dpi="0" rotWithShape="1">
-          <a:blip r:embed="rId1">
+          <a:blip r:embed="rId3">
             <a:lum/>
           </a:blip>
           <a:srcRect/>
@@ -2110,7 +1851,7 @@
     <p:bg>
       <p:bgPr>
         <a:blipFill dpi="0" rotWithShape="1">
-          <a:blip r:embed="rId1">
+          <a:blip r:embed="rId3">
             <a:lum/>
           </a:blip>
           <a:srcRect/>
@@ -2149,7 +1890,76 @@
     <p:bg>
       <p:bgPr>
         <a:blipFill dpi="0" rotWithShape="1">
-          <a:blip r:embed="rId1">
+          <a:blip r:embed="rId3">
+            <a:lum/>
+          </a:blip>
+          <a:srcRect/>
+          <a:stretch>
+            <a:fillRect/>
+          </a:stretch>
+        </a:blipFill>
+        <a:effectLst/>
+      </p:bgPr>
+    </p:bg>
+    <p:spTree>
+      <p:nvGrpSpPr>
+        <p:cNvPr id="1" name=""/>
+        <p:cNvGrpSpPr/>
+        <p:nvPr/>
+      </p:nvGrpSpPr>
+      <p:grpSpPr>
+        <a:xfrm>
+          <a:off x="0" y="0"/>
+          <a:ext cx="0" cy="0"/>
+          <a:chOff x="0" y="0"/>
+          <a:chExt cx="0" cy="0"/>
+        </a:xfrm>
+      </p:grpSpPr>
+      <p:pic>
+        <p:nvPicPr>
+          <p:cNvPr id="2" name="図 1">
+            <a:extLst>
+              <a:ext uri="{FF2B5EF4-FFF2-40B4-BE49-F238E27FC236}">
+                <a16:creationId xmlns:a16="http://schemas.microsoft.com/office/drawing/2014/main" id="{BD822DB8-C724-5EB8-56B9-9377A860682F}"/>
+              </a:ext>
+            </a:extLst>
+          </p:cNvPr>
+          <p:cNvPicPr>
+            <a:picLocks noChangeAspect="1"/>
+          </p:cNvPicPr>
+          <p:nvPr/>
+        </p:nvPicPr>
+        <p:blipFill>
+          <a:blip r:embed="rId4"/>
+          <a:stretch>
+            <a:fillRect/>
+          </a:stretch>
+        </p:blipFill>
+        <p:spPr>
+          <a:xfrm>
+            <a:off x="3587376" y="2833660"/>
+            <a:ext cx="7772400" cy="2805522"/>
+          </a:xfrm>
+          <a:prstGeom prst="rect">
+            <a:avLst/>
+          </a:prstGeom>
+        </p:spPr>
+      </p:pic>
+    </p:spTree>
+  </p:cSld>
+  <p:clrMapOvr>
+    <a:masterClrMapping/>
+  </p:clrMapOvr>
+</p:sld>
+</file>
+
+<file path=ppt/slides/slide7.xml><?xml version="1.0" encoding="utf-8"?>
+<p:sld xmlns:a="http://schemas.openxmlformats.org/drawingml/2006/main" xmlns:r="http://schemas.openxmlformats.org/officeDocument/2006/relationships" xmlns:p="http://schemas.openxmlformats.org/presentationml/2006/main">
+  <p:cSld name="Slide 7">
+    <p:bg>
+      <p:bgPr>
+        <a:blipFill dpi="0" rotWithShape="1">
+          <a:blip r:embed="rId3">
             <a:lum/>
           </a:blip>
           <a:srcRect/>
@@ -2182,13 +1992,13 @@
 </p:sld>
 </file>
 
-<file path=ppt/slides/slide7.xml><?xml version="1.0" encoding="utf-8"?>
+<file path=ppt/slides/slide8.xml><?xml version="1.0" encoding="utf-8"?>
 <p:sld xmlns:a="http://schemas.openxmlformats.org/drawingml/2006/main" xmlns:r="http://schemas.openxmlformats.org/officeDocument/2006/relationships" xmlns:p="http://schemas.openxmlformats.org/presentationml/2006/main">
-  <p:cSld name="Slide 7">
+  <p:cSld name="Slide 8">
     <p:bg>
       <p:bgPr>
         <a:blipFill dpi="0" rotWithShape="1">
-          <a:blip r:embed="rId1">
+          <a:blip r:embed="rId3">
             <a:lum/>
           </a:blip>
           <a:srcRect/>
@@ -2221,52 +2031,13 @@
 </p:sld>
 </file>
 
-<file path=ppt/slides/slide8.xml><?xml version="1.0" encoding="utf-8"?>
-<p:sld xmlns:a="http://schemas.openxmlformats.org/drawingml/2006/main" xmlns:r="http://schemas.openxmlformats.org/officeDocument/2006/relationships" xmlns:p="http://schemas.openxmlformats.org/presentationml/2006/main">
-  <p:cSld name="Slide 8">
-    <p:bg>
-      <p:bgPr>
-        <a:blipFill dpi="0" rotWithShape="1">
-          <a:blip r:embed="rId1">
-            <a:lum/>
-          </a:blip>
-          <a:srcRect/>
-          <a:stretch>
-            <a:fillRect/>
-          </a:stretch>
-        </a:blipFill>
-        <a:effectLst/>
-      </p:bgPr>
-    </p:bg>
-    <p:spTree>
-      <p:nvGrpSpPr>
-        <p:cNvPr id="1" name=""/>
-        <p:cNvGrpSpPr/>
-        <p:nvPr/>
-      </p:nvGrpSpPr>
-      <p:grpSpPr>
-        <a:xfrm>
-          <a:off x="0" y="0"/>
-          <a:ext cx="0" cy="0"/>
-          <a:chOff x="0" y="0"/>
-          <a:chExt cx="0" cy="0"/>
-        </a:xfrm>
-      </p:grpSpPr>
-    </p:spTree>
-  </p:cSld>
-  <p:clrMapOvr>
-    <a:masterClrMapping/>
-  </p:clrMapOvr>
-</p:sld>
-</file>
-
 <file path=ppt/slides/slide9.xml><?xml version="1.0" encoding="utf-8"?>
 <p:sld xmlns:a="http://schemas.openxmlformats.org/drawingml/2006/main" xmlns:r="http://schemas.openxmlformats.org/officeDocument/2006/relationships" xmlns:p="http://schemas.openxmlformats.org/presentationml/2006/main">
   <p:cSld name="Slide 9">
     <p:bg>
       <p:bgPr>
         <a:blipFill dpi="0" rotWithShape="1">
-          <a:blip r:embed="rId1">
+          <a:blip r:embed="rId3">
             <a:lum/>
           </a:blip>
           <a:srcRect/>
@@ -2592,4 +2363,319 @@
     </a:ext>
   </a:extLst>
 </a:theme>
+</file>
+
+<file path=ppt/theme/theme2.xml><?xml version="1.0" encoding="utf-8"?>
+<a:theme xmlns:a="http://schemas.openxmlformats.org/drawingml/2006/main" name="Office テーマ">
+  <a:themeElements>
+    <a:clrScheme name="Office">
+      <a:dk1>
+        <a:sysClr val="windowText" lastClr="000000"/>
+      </a:dk1>
+      <a:lt1>
+        <a:sysClr val="window" lastClr="FFFFFF"/>
+      </a:lt1>
+      <a:dk2>
+        <a:srgbClr val="0E2841"/>
+      </a:dk2>
+      <a:lt2>
+        <a:srgbClr val="E8E8E8"/>
+      </a:lt2>
+      <a:accent1>
+        <a:srgbClr val="156082"/>
+      </a:accent1>
+      <a:accent2>
+        <a:srgbClr val="E97132"/>
+      </a:accent2>
+      <a:accent3>
+        <a:srgbClr val="196B24"/>
+      </a:accent3>
+      <a:accent4>
+        <a:srgbClr val="0F9ED5"/>
+      </a:accent4>
+      <a:accent5>
+        <a:srgbClr val="A02B93"/>
+      </a:accent5>
+      <a:accent6>
+        <a:srgbClr val="4EA72E"/>
+      </a:accent6>
+      <a:hlink>
+        <a:srgbClr val="467886"/>
+      </a:hlink>
+      <a:folHlink>
+        <a:srgbClr val="96607D"/>
+      </a:folHlink>
+    </a:clrScheme>
+    <a:fontScheme name="Office">
+      <a:majorFont>
+        <a:latin typeface="游ゴシック Light" panose="02110004020202020204"/>
+        <a:ea typeface=""/>
+        <a:cs typeface=""/>
+        <a:font script="Jpan" typeface="游ゴシック Light"/>
+        <a:font script="Hang" typeface="맑은 고딕"/>
+        <a:font script="Hans" typeface="等线 Light"/>
+        <a:font script="Hant" typeface="新細明體"/>
+        <a:font script="Arab" typeface="Times New Roman"/>
+        <a:font script="Hebr" typeface="Times New Roman"/>
+        <a:font script="Thai" typeface="Angsana New"/>
+        <a:font script="Ethi" typeface="Nyala"/>
+        <a:font script="Beng" typeface="Vrinda"/>
+        <a:font script="Gujr" typeface="Shruti"/>
+        <a:font script="Khmr" typeface="MoolBoran"/>
+        <a:font script="Knda" typeface="Tunga"/>
+        <a:font script="Guru" typeface="Raavi"/>
+        <a:font script="Cans" typeface="Euphemia"/>
+        <a:font script="Cher" typeface="Plantagenet Cherokee"/>
+        <a:font script="Yiii" typeface="Microsoft Yi Baiti"/>
+        <a:font script="Tibt" typeface="Microsoft Himalaya"/>
+        <a:font script="Thaa" typeface="MV Boli"/>
+        <a:font script="Deva" typeface="Mangal"/>
+        <a:font script="Telu" typeface="Gautami"/>
+        <a:font script="Taml" typeface="Latha"/>
+        <a:font script="Syrc" typeface="Estrangelo Edessa"/>
+        <a:font script="Orya" typeface="Kalinga"/>
+        <a:font script="Mlym" typeface="Kartika"/>
+        <a:font script="Laoo" typeface="DokChampa"/>
+        <a:font script="Sinh" typeface="Iskoola Pota"/>
+        <a:font script="Mong" typeface="Mongolian Baiti"/>
+        <a:font script="Viet" typeface="Times New Roman"/>
+        <a:font script="Uigh" typeface="Microsoft Uighur"/>
+        <a:font script="Geor" typeface="Sylfaen"/>
+        <a:font script="Armn" typeface="Arial"/>
+        <a:font script="Bugi" typeface="Leelawadee UI"/>
+        <a:font script="Bopo" typeface="Microsoft JhengHei"/>
+        <a:font script="Java" typeface="Javanese Text"/>
+        <a:font script="Lisu" typeface="Segoe UI"/>
+        <a:font script="Mymr" typeface="Myanmar Text"/>
+        <a:font script="Nkoo" typeface="Ebrima"/>
+        <a:font script="Olck" typeface="Nirmala UI"/>
+        <a:font script="Osma" typeface="Ebrima"/>
+        <a:font script="Phag" typeface="Phagspa"/>
+        <a:font script="Syrn" typeface="Estrangelo Edessa"/>
+        <a:font script="Syrj" typeface="Estrangelo Edessa"/>
+        <a:font script="Syre" typeface="Estrangelo Edessa"/>
+        <a:font script="Sora" typeface="Nirmala UI"/>
+        <a:font script="Tale" typeface="Microsoft Tai Le"/>
+        <a:font script="Talu" typeface="Microsoft New Tai Lue"/>
+        <a:font script="Tfng" typeface="Ebrima"/>
+      </a:majorFont>
+      <a:minorFont>
+        <a:latin typeface="游ゴシック" panose="02110004020202020204"/>
+        <a:ea typeface=""/>
+        <a:cs typeface=""/>
+        <a:font script="Jpan" typeface="游ゴシック"/>
+        <a:font script="Hang" typeface="맑은 고딕"/>
+        <a:font script="Hans" typeface="等线"/>
+        <a:font script="Hant" typeface="新細明體"/>
+        <a:font script="Arab" typeface="Arial"/>
+        <a:font script="Hebr" typeface="Arial"/>
+        <a:font script="Thai" typeface="Cordia New"/>
+        <a:font script="Ethi" typeface="Nyala"/>
+        <a:font script="Beng" typeface="Vrinda"/>
+        <a:font script="Gujr" typeface="Shruti"/>
+        <a:font script="Khmr" typeface="DaunPenh"/>
+        <a:font script="Knda" typeface="Tunga"/>
+        <a:font script="Guru" typeface="Raavi"/>
+        <a:font script="Cans" typeface="Euphemia"/>
+        <a:font script="Cher" typeface="Plantagenet Cherokee"/>
+        <a:font script="Yiii" typeface="Microsoft Yi Baiti"/>
+        <a:font script="Tibt" typeface="Microsoft Himalaya"/>
+        <a:font script="Thaa" typeface="MV Boli"/>
+        <a:font script="Deva" typeface="Mangal"/>
+        <a:font script="Telu" typeface="Gautami"/>
+        <a:font script="Taml" typeface="Latha"/>
+        <a:font script="Syrc" typeface="Estrangelo Edessa"/>
+        <a:font script="Orya" typeface="Kalinga"/>
+        <a:font script="Mlym" typeface="Kartika"/>
+        <a:font script="Laoo" typeface="DokChampa"/>
+        <a:font script="Sinh" typeface="Iskoola Pota"/>
+        <a:font script="Mong" typeface="Mongolian Baiti"/>
+        <a:font script="Viet" typeface="Arial"/>
+        <a:font script="Uigh" typeface="Microsoft Uighur"/>
+        <a:font script="Geor" typeface="Sylfaen"/>
+        <a:font script="Armn" typeface="Arial"/>
+        <a:font script="Bugi" typeface="Leelawadee UI"/>
+        <a:font script="Bopo" typeface="Microsoft JhengHei"/>
+        <a:font script="Java" typeface="Javanese Text"/>
+        <a:font script="Lisu" typeface="Segoe UI"/>
+        <a:font script="Mymr" typeface="Myanmar Text"/>
+        <a:font script="Nkoo" typeface="Ebrima"/>
+        <a:font script="Olck" typeface="Nirmala UI"/>
+        <a:font script="Osma" typeface="Ebrima"/>
+        <a:font script="Phag" typeface="Phagspa"/>
+        <a:font script="Syrn" typeface="Estrangelo Edessa"/>
+        <a:font script="Syrj" typeface="Estrangelo Edessa"/>
+        <a:font script="Syre" typeface="Estrangelo Edessa"/>
+        <a:font script="Sora" typeface="Nirmala UI"/>
+        <a:font script="Tale" typeface="Microsoft Tai Le"/>
+        <a:font script="Talu" typeface="Microsoft New Tai Lue"/>
+        <a:font script="Tfng" typeface="Ebrima"/>
+      </a:minorFont>
+    </a:fontScheme>
+    <a:fmtScheme name="Office">
+      <a:fillStyleLst>
+        <a:solidFill>
+          <a:schemeClr val="phClr"/>
+        </a:solidFill>
+        <a:gradFill rotWithShape="1">
+          <a:gsLst>
+            <a:gs pos="0">
+              <a:schemeClr val="phClr">
+                <a:lumMod val="110000"/>
+                <a:satMod val="105000"/>
+                <a:tint val="67000"/>
+              </a:schemeClr>
+            </a:gs>
+            <a:gs pos="50000">
+              <a:schemeClr val="phClr">
+                <a:lumMod val="105000"/>
+                <a:satMod val="103000"/>
+                <a:tint val="73000"/>
+              </a:schemeClr>
+            </a:gs>
+            <a:gs pos="100000">
+              <a:schemeClr val="phClr">
+                <a:lumMod val="105000"/>
+                <a:satMod val="109000"/>
+                <a:tint val="81000"/>
+              </a:schemeClr>
+            </a:gs>
+          </a:gsLst>
+          <a:lin ang="5400000" scaled="0"/>
+        </a:gradFill>
+        <a:gradFill rotWithShape="1">
+          <a:gsLst>
+            <a:gs pos="0">
+              <a:schemeClr val="phClr">
+                <a:satMod val="103000"/>
+                <a:lumMod val="102000"/>
+                <a:tint val="94000"/>
+              </a:schemeClr>
+            </a:gs>
+            <a:gs pos="50000">
+              <a:schemeClr val="phClr">
+                <a:satMod val="110000"/>
+                <a:lumMod val="100000"/>
+                <a:shade val="100000"/>
+              </a:schemeClr>
+            </a:gs>
+            <a:gs pos="100000">
+              <a:schemeClr val="phClr">
+                <a:lumMod val="99000"/>
+                <a:satMod val="120000"/>
+                <a:shade val="78000"/>
+              </a:schemeClr>
+            </a:gs>
+          </a:gsLst>
+          <a:lin ang="5400000" scaled="0"/>
+        </a:gradFill>
+      </a:fillStyleLst>
+      <a:lnStyleLst>
+        <a:ln w="12700" cap="flat" cmpd="sng" algn="ctr">
+          <a:solidFill>
+            <a:schemeClr val="phClr"/>
+          </a:solidFill>
+          <a:prstDash val="solid"/>
+          <a:miter lim="800000"/>
+        </a:ln>
+        <a:ln w="19050" cap="flat" cmpd="sng" algn="ctr">
+          <a:solidFill>
+            <a:schemeClr val="phClr"/>
+          </a:solidFill>
+          <a:prstDash val="solid"/>
+          <a:miter lim="800000"/>
+        </a:ln>
+        <a:ln w="25400" cap="flat" cmpd="sng" algn="ctr">
+          <a:solidFill>
+            <a:schemeClr val="phClr"/>
+          </a:solidFill>
+          <a:prstDash val="solid"/>
+          <a:miter lim="800000"/>
+        </a:ln>
+      </a:lnStyleLst>
+      <a:effectStyleLst>
+        <a:effectStyle>
+          <a:effectLst/>
+        </a:effectStyle>
+        <a:effectStyle>
+          <a:effectLst/>
+        </a:effectStyle>
+        <a:effectStyle>
+          <a:effectLst>
+            <a:outerShdw blurRad="57150" dist="19050" dir="5400000" algn="ctr" rotWithShape="0">
+              <a:srgbClr val="000000">
+                <a:alpha val="63000"/>
+              </a:srgbClr>
+            </a:outerShdw>
+          </a:effectLst>
+        </a:effectStyle>
+      </a:effectStyleLst>
+      <a:bgFillStyleLst>
+        <a:solidFill>
+          <a:schemeClr val="phClr"/>
+        </a:solidFill>
+        <a:solidFill>
+          <a:schemeClr val="phClr">
+            <a:tint val="95000"/>
+            <a:satMod val="170000"/>
+          </a:schemeClr>
+        </a:solidFill>
+        <a:gradFill rotWithShape="1">
+          <a:gsLst>
+            <a:gs pos="0">
+              <a:schemeClr val="phClr">
+                <a:tint val="93000"/>
+                <a:satMod val="150000"/>
+                <a:shade val="98000"/>
+                <a:lumMod val="102000"/>
+              </a:schemeClr>
+            </a:gs>
+            <a:gs pos="50000">
+              <a:schemeClr val="phClr">
+                <a:tint val="98000"/>
+                <a:satMod val="130000"/>
+                <a:shade val="90000"/>
+                <a:lumMod val="103000"/>
+              </a:schemeClr>
+            </a:gs>
+            <a:gs pos="100000">
+              <a:schemeClr val="phClr">
+                <a:shade val="63000"/>
+                <a:satMod val="120000"/>
+              </a:schemeClr>
+            </a:gs>
+          </a:gsLst>
+          <a:lin ang="5400000" scaled="0"/>
+        </a:gradFill>
+      </a:bgFillStyleLst>
+    </a:fmtScheme>
+  </a:themeElements>
+  <a:objectDefaults>
+    <a:lnDef>
+      <a:spPr/>
+      <a:bodyPr/>
+      <a:lstStyle/>
+      <a:style>
+        <a:lnRef idx="2">
+          <a:schemeClr val="accent1"/>
+        </a:lnRef>
+        <a:fillRef idx="0">
+          <a:schemeClr val="accent1"/>
+        </a:fillRef>
+        <a:effectRef idx="1">
+          <a:schemeClr val="accent1"/>
+        </a:effectRef>
+        <a:fontRef idx="minor">
+          <a:schemeClr val="tx1"/>
+        </a:fontRef>
+      </a:style>
+    </a:lnDef>
+  </a:objectDefaults>
+  <a:extraClrSchemeLst/>
+  <a:extLst>
+    <a:ext uri="{05A4C25C-085E-4340-85A3-A5531E510DB2}">
+      <thm15:themeFamily xmlns:thm15="http://schemas.microsoft.com/office/thememl/2012/main" name="Office Theme" id="{2E142A2C-CD16-42D6-873A-C26D2A0506FA}" vid="{1BDDFF52-6CD6-40A5-AB3C-68EB2F1E4D0A}"/>
+    </a:ext>
+  </a:extLst>
+</a:theme>
 </file>
--- a/slides/2026-07-01-ai-projects-intro.pptx
+++ b/slides/2026-07-01-ai-projects-intro.pptx
@@ -1558,7 +1558,7 @@
       </p:grpSpPr>
       <p:sp>
         <p:nvSpPr>
-          <p:cNvPr id="274" name=""/>
+          <p:cNvPr id="275" name=""/>
           <p:cNvSpPr/>
           <p:nvPr/>
         </p:nvSpPr>
@@ -1618,7 +1618,7 @@
       </p:sp>
       <p:sp>
         <p:nvSpPr>
-          <p:cNvPr id="275" name=""/>
+          <p:cNvPr id="276" name=""/>
           <p:cNvSpPr/>
           <p:nvPr/>
         </p:nvSpPr>
@@ -1678,7 +1678,7 @@
       </p:sp>
       <p:sp>
         <p:nvSpPr>
-          <p:cNvPr id="276" name=""/>
+          <p:cNvPr id="277" name=""/>
           <p:cNvSpPr/>
           <p:nvPr/>
         </p:nvSpPr>
@@ -1738,7 +1738,7 @@
       </p:sp>
       <p:sp>
         <p:nvSpPr>
-          <p:cNvPr id="277" name=""/>
+          <p:cNvPr id="278" name=""/>
           <p:cNvSpPr/>
           <p:nvPr/>
         </p:nvSpPr>
@@ -1798,7 +1798,7 @@
       </p:sp>
       <p:sp>
         <p:nvSpPr>
-          <p:cNvPr id="278" name=""/>
+          <p:cNvPr id="279" name=""/>
           <p:cNvSpPr/>
           <p:nvPr/>
         </p:nvSpPr>
@@ -1926,7 +1926,7 @@
       </p:sp>
       <p:sp>
         <p:nvSpPr>
-          <p:cNvPr id="279" name=""/>
+          <p:cNvPr id="280" name=""/>
           <p:cNvSpPr txBox="1"/>
           <p:nvPr/>
         </p:nvSpPr>
@@ -1974,7 +1974,7 @@
       </p:sp>
       <p:sp>
         <p:nvSpPr>
-          <p:cNvPr id="280" name=""/>
+          <p:cNvPr id="281" name=""/>
           <p:cNvSpPr txBox="1"/>
           <p:nvPr/>
         </p:nvSpPr>
@@ -2022,7 +2022,7 @@
       </p:sp>
       <p:sp>
         <p:nvSpPr>
-          <p:cNvPr id="281" name=""/>
+          <p:cNvPr id="282" name=""/>
           <p:cNvSpPr txBox="1"/>
           <p:nvPr/>
         </p:nvSpPr>
@@ -2070,7 +2070,7 @@
       </p:sp>
       <p:sp>
         <p:nvSpPr>
-          <p:cNvPr id="282" name=""/>
+          <p:cNvPr id="283" name=""/>
           <p:cNvSpPr txBox="1"/>
           <p:nvPr/>
         </p:nvSpPr>
@@ -2118,7 +2118,7 @@
       </p:sp>
       <p:sp>
         <p:nvSpPr>
-          <p:cNvPr id="283" name=""/>
+          <p:cNvPr id="284" name=""/>
           <p:cNvSpPr txBox="1"/>
           <p:nvPr/>
         </p:nvSpPr>
@@ -2166,7 +2166,7 @@
       </p:sp>
       <p:sp>
         <p:nvSpPr>
-          <p:cNvPr id="284" name=""/>
+          <p:cNvPr id="285" name=""/>
           <p:cNvSpPr/>
           <p:nvPr/>
         </p:nvSpPr>
@@ -2294,7 +2294,7 @@
       </p:sp>
       <p:sp>
         <p:nvSpPr>
-          <p:cNvPr id="285" name=""/>
+          <p:cNvPr id="286" name=""/>
           <p:cNvSpPr txBox="1"/>
           <p:nvPr/>
         </p:nvSpPr>
@@ -2342,7 +2342,7 @@
       </p:sp>
       <p:sp>
         <p:nvSpPr>
-          <p:cNvPr id="286" name=""/>
+          <p:cNvPr id="287" name=""/>
           <p:cNvSpPr txBox="1"/>
           <p:nvPr/>
         </p:nvSpPr>
@@ -2390,7 +2390,7 @@
       </p:sp>
       <p:sp>
         <p:nvSpPr>
-          <p:cNvPr id="287" name=""/>
+          <p:cNvPr id="288" name=""/>
           <p:cNvSpPr/>
           <p:nvPr/>
         </p:nvSpPr>
@@ -2518,7 +2518,7 @@
       </p:sp>
       <p:sp>
         <p:nvSpPr>
-          <p:cNvPr id="288" name=""/>
+          <p:cNvPr id="289" name=""/>
           <p:cNvSpPr txBox="1"/>
           <p:nvPr/>
         </p:nvSpPr>
@@ -2566,7 +2566,7 @@
       </p:sp>
       <p:sp>
         <p:nvSpPr>
-          <p:cNvPr id="289" name=""/>
+          <p:cNvPr id="290" name=""/>
           <p:cNvSpPr txBox="1"/>
           <p:nvPr/>
         </p:nvSpPr>
@@ -2614,7 +2614,7 @@
       </p:sp>
       <p:sp>
         <p:nvSpPr>
-          <p:cNvPr id="290" name=""/>
+          <p:cNvPr id="291" name=""/>
           <p:cNvSpPr txBox="1"/>
           <p:nvPr/>
         </p:nvSpPr>
@@ -2662,7 +2662,7 @@
       </p:sp>
       <p:sp>
         <p:nvSpPr>
-          <p:cNvPr id="291" name=""/>
+          <p:cNvPr id="292" name=""/>
           <p:cNvSpPr txBox="1"/>
           <p:nvPr/>
         </p:nvSpPr>
@@ -2710,7 +2710,7 @@
       </p:sp>
       <p:sp>
         <p:nvSpPr>
-          <p:cNvPr id="292" name=""/>
+          <p:cNvPr id="293" name=""/>
           <p:cNvSpPr txBox="1"/>
           <p:nvPr/>
         </p:nvSpPr>
@@ -2758,7 +2758,7 @@
       </p:sp>
       <p:sp>
         <p:nvSpPr>
-          <p:cNvPr id="293" name=""/>
+          <p:cNvPr id="294" name=""/>
           <p:cNvSpPr/>
           <p:nvPr/>
         </p:nvSpPr>
@@ -2886,7 +2886,7 @@
       </p:sp>
       <p:sp>
         <p:nvSpPr>
-          <p:cNvPr id="294" name=""/>
+          <p:cNvPr id="295" name=""/>
           <p:cNvSpPr txBox="1"/>
           <p:nvPr/>
         </p:nvSpPr>
@@ -2934,7 +2934,7 @@
       </p:sp>
       <p:sp>
         <p:nvSpPr>
-          <p:cNvPr id="295" name=""/>
+          <p:cNvPr id="296" name=""/>
           <p:cNvSpPr txBox="1"/>
           <p:nvPr/>
         </p:nvSpPr>
@@ -2982,7 +2982,7 @@
       </p:sp>
       <p:sp>
         <p:nvSpPr>
-          <p:cNvPr id="296" name=""/>
+          <p:cNvPr id="297" name=""/>
           <p:cNvSpPr txBox="1"/>
           <p:nvPr/>
         </p:nvSpPr>
@@ -3042,7 +3042,7 @@
       </p:sp>
       <p:sp>
         <p:nvSpPr>
-          <p:cNvPr id="297" name=""/>
+          <p:cNvPr id="298" name=""/>
           <p:cNvSpPr txBox="1"/>
           <p:nvPr/>
         </p:nvSpPr>
@@ -3090,7 +3090,7 @@
       </p:sp>
       <p:sp>
         <p:nvSpPr>
-          <p:cNvPr id="298" name=""/>
+          <p:cNvPr id="299" name=""/>
           <p:cNvSpPr txBox="1"/>
           <p:nvPr/>
         </p:nvSpPr>
@@ -3138,7 +3138,7 @@
       </p:sp>
       <p:sp>
         <p:nvSpPr>
-          <p:cNvPr id="299" name=""/>
+          <p:cNvPr id="300" name=""/>
           <p:cNvSpPr txBox="1"/>
           <p:nvPr/>
         </p:nvSpPr>
@@ -3186,7 +3186,7 @@
       </p:sp>
       <p:sp>
         <p:nvSpPr>
-          <p:cNvPr id="300" name=""/>
+          <p:cNvPr id="301" name=""/>
           <p:cNvSpPr txBox="1"/>
           <p:nvPr/>
         </p:nvSpPr>
@@ -3234,7 +3234,7 @@
       </p:sp>
       <p:sp>
         <p:nvSpPr>
-          <p:cNvPr id="301" name=""/>
+          <p:cNvPr id="302" name=""/>
           <p:cNvSpPr txBox="1"/>
           <p:nvPr/>
         </p:nvSpPr>
@@ -3282,7 +3282,7 @@
       </p:sp>
       <p:sp>
         <p:nvSpPr>
-          <p:cNvPr id="302" name=""/>
+          <p:cNvPr id="303" name=""/>
           <p:cNvSpPr txBox="1"/>
           <p:nvPr/>
         </p:nvSpPr>
@@ -3360,7 +3360,7 @@
       </p:grpSpPr>
       <p:sp>
         <p:nvSpPr>
-          <p:cNvPr id="303" name=""/>
+          <p:cNvPr id="304" name=""/>
           <p:cNvSpPr/>
           <p:nvPr/>
         </p:nvSpPr>
@@ -3420,7 +3420,7 @@
       </p:sp>
       <p:sp>
         <p:nvSpPr>
-          <p:cNvPr id="304" name=""/>
+          <p:cNvPr id="305" name=""/>
           <p:cNvSpPr/>
           <p:nvPr/>
         </p:nvSpPr>
@@ -3480,7 +3480,7 @@
       </p:sp>
       <p:sp>
         <p:nvSpPr>
-          <p:cNvPr id="305" name=""/>
+          <p:cNvPr id="306" name=""/>
           <p:cNvSpPr/>
           <p:nvPr/>
         </p:nvSpPr>
@@ -3540,7 +3540,7 @@
       </p:sp>
       <p:sp>
         <p:nvSpPr>
-          <p:cNvPr id="306" name=""/>
+          <p:cNvPr id="307" name=""/>
           <p:cNvSpPr/>
           <p:nvPr/>
         </p:nvSpPr>
@@ -3600,7 +3600,7 @@
       </p:sp>
       <p:sp>
         <p:nvSpPr>
-          <p:cNvPr id="307" name=""/>
+          <p:cNvPr id="308" name=""/>
           <p:cNvSpPr/>
           <p:nvPr/>
         </p:nvSpPr>
@@ -3700,7 +3700,7 @@
       </p:sp>
       <p:sp>
         <p:nvSpPr>
-          <p:cNvPr id="308" name=""/>
+          <p:cNvPr id="309" name=""/>
           <p:cNvSpPr/>
           <p:nvPr/>
         </p:nvSpPr>
@@ -3760,7 +3760,7 @@
       </p:sp>
       <p:pic>
         <p:nvPicPr>
-          <p:cNvPr id="309" name=""/>
+          <p:cNvPr id="310" name=""/>
           <p:cNvPicPr/>
           <p:nvPr/>
         </p:nvPicPr>
@@ -3784,7 +3784,7 @@
       </p:pic>
       <p:pic>
         <p:nvPicPr>
-          <p:cNvPr id="310" name=""/>
+          <p:cNvPr id="311" name=""/>
           <p:cNvPicPr/>
           <p:nvPr/>
         </p:nvPicPr>
@@ -3808,7 +3808,7 @@
       </p:pic>
       <p:sp>
         <p:nvSpPr>
-          <p:cNvPr id="311" name=""/>
+          <p:cNvPr id="312" name=""/>
           <p:cNvSpPr txBox="1"/>
           <p:nvPr/>
         </p:nvSpPr>
@@ -3856,7 +3856,7 @@
       </p:sp>
       <p:sp>
         <p:nvSpPr>
-          <p:cNvPr id="312" name=""/>
+          <p:cNvPr id="313" name=""/>
           <p:cNvSpPr txBox="1"/>
           <p:nvPr/>
         </p:nvSpPr>
@@ -3904,7 +3904,7 @@
       </p:sp>
       <p:sp>
         <p:nvSpPr>
-          <p:cNvPr id="313" name=""/>
+          <p:cNvPr id="314" name=""/>
           <p:cNvSpPr txBox="1"/>
           <p:nvPr/>
         </p:nvSpPr>
@@ -3982,7 +3982,7 @@
       </p:grpSpPr>
       <p:sp>
         <p:nvSpPr>
-          <p:cNvPr id="314" name=""/>
+          <p:cNvPr id="315" name=""/>
           <p:cNvSpPr/>
           <p:nvPr/>
         </p:nvSpPr>
@@ -4042,7 +4042,7 @@
       </p:sp>
       <p:sp>
         <p:nvSpPr>
-          <p:cNvPr id="315" name=""/>
+          <p:cNvPr id="316" name=""/>
           <p:cNvSpPr/>
           <p:nvPr/>
         </p:nvSpPr>
@@ -4102,7 +4102,7 @@
       </p:sp>
       <p:sp>
         <p:nvSpPr>
-          <p:cNvPr id="316" name=""/>
+          <p:cNvPr id="317" name=""/>
           <p:cNvSpPr/>
           <p:nvPr/>
         </p:nvSpPr>
@@ -4162,7 +4162,7 @@
       </p:sp>
       <p:sp>
         <p:nvSpPr>
-          <p:cNvPr id="317" name=""/>
+          <p:cNvPr id="318" name=""/>
           <p:cNvSpPr/>
           <p:nvPr/>
         </p:nvSpPr>
@@ -4222,7 +4222,7 @@
       </p:sp>
       <p:sp>
         <p:nvSpPr>
-          <p:cNvPr id="318" name=""/>
+          <p:cNvPr id="319" name=""/>
           <p:cNvSpPr/>
           <p:nvPr/>
         </p:nvSpPr>
@@ -4322,7 +4322,7 @@
       </p:sp>
       <p:sp>
         <p:nvSpPr>
-          <p:cNvPr id="319" name=""/>
+          <p:cNvPr id="320" name=""/>
           <p:cNvSpPr/>
           <p:nvPr/>
         </p:nvSpPr>
@@ -4382,7 +4382,7 @@
       </p:sp>
       <p:sp>
         <p:nvSpPr>
-          <p:cNvPr id="320" name=""/>
+          <p:cNvPr id="321" name=""/>
           <p:cNvSpPr/>
           <p:nvPr/>
         </p:nvSpPr>
@@ -4510,7 +4510,7 @@
       </p:sp>
       <p:sp>
         <p:nvSpPr>
-          <p:cNvPr id="321" name=""/>
+          <p:cNvPr id="322" name=""/>
           <p:cNvSpPr txBox="1"/>
           <p:nvPr/>
         </p:nvSpPr>
@@ -4558,7 +4558,7 @@
       </p:sp>
       <p:sp>
         <p:nvSpPr>
-          <p:cNvPr id="322" name=""/>
+          <p:cNvPr id="323" name=""/>
           <p:cNvSpPr txBox="1"/>
           <p:nvPr/>
         </p:nvSpPr>
@@ -4606,7 +4606,7 @@
       </p:sp>
       <p:sp>
         <p:nvSpPr>
-          <p:cNvPr id="323" name=""/>
+          <p:cNvPr id="324" name=""/>
           <p:cNvSpPr txBox="1"/>
           <p:nvPr/>
         </p:nvSpPr>
@@ -4654,7 +4654,7 @@
       </p:sp>
       <p:sp>
         <p:nvSpPr>
-          <p:cNvPr id="324" name=""/>
+          <p:cNvPr id="325" name=""/>
           <p:cNvSpPr/>
           <p:nvPr/>
         </p:nvSpPr>
@@ -4782,7 +4782,7 @@
       </p:sp>
       <p:sp>
         <p:nvSpPr>
-          <p:cNvPr id="325" name=""/>
+          <p:cNvPr id="326" name=""/>
           <p:cNvSpPr txBox="1"/>
           <p:nvPr/>
         </p:nvSpPr>
@@ -4830,7 +4830,7 @@
       </p:sp>
       <p:sp>
         <p:nvSpPr>
-          <p:cNvPr id="326" name=""/>
+          <p:cNvPr id="327" name=""/>
           <p:cNvSpPr txBox="1"/>
           <p:nvPr/>
         </p:nvSpPr>
@@ -4878,7 +4878,7 @@
       </p:sp>
       <p:sp>
         <p:nvSpPr>
-          <p:cNvPr id="327" name=""/>
+          <p:cNvPr id="328" name=""/>
           <p:cNvSpPr txBox="1"/>
           <p:nvPr/>
         </p:nvSpPr>
@@ -4926,7 +4926,7 @@
       </p:sp>
       <p:sp>
         <p:nvSpPr>
-          <p:cNvPr id="328" name=""/>
+          <p:cNvPr id="329" name=""/>
           <p:cNvSpPr/>
           <p:nvPr/>
         </p:nvSpPr>
@@ -5054,7 +5054,7 @@
       </p:sp>
       <p:sp>
         <p:nvSpPr>
-          <p:cNvPr id="329" name=""/>
+          <p:cNvPr id="330" name=""/>
           <p:cNvSpPr txBox="1"/>
           <p:nvPr/>
         </p:nvSpPr>
@@ -5102,7 +5102,7 @@
       </p:sp>
       <p:sp>
         <p:nvSpPr>
-          <p:cNvPr id="330" name=""/>
+          <p:cNvPr id="331" name=""/>
           <p:cNvSpPr txBox="1"/>
           <p:nvPr/>
         </p:nvSpPr>
@@ -5150,7 +5150,7 @@
       </p:sp>
       <p:sp>
         <p:nvSpPr>
-          <p:cNvPr id="331" name=""/>
+          <p:cNvPr id="332" name=""/>
           <p:cNvSpPr/>
           <p:nvPr/>
         </p:nvSpPr>
@@ -5278,7 +5278,7 @@
       </p:sp>
       <p:sp>
         <p:nvSpPr>
-          <p:cNvPr id="332" name=""/>
+          <p:cNvPr id="333" name=""/>
           <p:cNvSpPr txBox="1"/>
           <p:nvPr/>
         </p:nvSpPr>
@@ -5326,7 +5326,7 @@
       </p:sp>
       <p:sp>
         <p:nvSpPr>
-          <p:cNvPr id="333" name=""/>
+          <p:cNvPr id="334" name=""/>
           <p:cNvSpPr txBox="1"/>
           <p:nvPr/>
         </p:nvSpPr>
@@ -5374,7 +5374,7 @@
       </p:sp>
       <p:sp>
         <p:nvSpPr>
-          <p:cNvPr id="334" name=""/>
+          <p:cNvPr id="335" name=""/>
           <p:cNvSpPr txBox="1"/>
           <p:nvPr/>
         </p:nvSpPr>
@@ -5422,7 +5422,7 @@
       </p:sp>
       <p:sp>
         <p:nvSpPr>
-          <p:cNvPr id="335" name=""/>
+          <p:cNvPr id="336" name=""/>
           <p:cNvSpPr txBox="1"/>
           <p:nvPr/>
         </p:nvSpPr>
@@ -5500,7 +5500,7 @@
       </p:grpSpPr>
       <p:sp>
         <p:nvSpPr>
-          <p:cNvPr id="336" name=""/>
+          <p:cNvPr id="337" name=""/>
           <p:cNvSpPr/>
           <p:nvPr/>
         </p:nvSpPr>
@@ -5560,7 +5560,7 @@
       </p:sp>
       <p:sp>
         <p:nvSpPr>
-          <p:cNvPr id="337" name=""/>
+          <p:cNvPr id="338" name=""/>
           <p:cNvSpPr/>
           <p:nvPr/>
         </p:nvSpPr>
@@ -5620,7 +5620,7 @@
       </p:sp>
       <p:sp>
         <p:nvSpPr>
-          <p:cNvPr id="338" name=""/>
+          <p:cNvPr id="339" name=""/>
           <p:cNvSpPr/>
           <p:nvPr/>
         </p:nvSpPr>
@@ -5680,7 +5680,7 @@
       </p:sp>
       <p:sp>
         <p:nvSpPr>
-          <p:cNvPr id="339" name=""/>
+          <p:cNvPr id="340" name=""/>
           <p:cNvSpPr/>
           <p:nvPr/>
         </p:nvSpPr>
@@ -5740,7 +5740,7 @@
       </p:sp>
       <p:sp>
         <p:nvSpPr>
-          <p:cNvPr id="340" name=""/>
+          <p:cNvPr id="341" name=""/>
           <p:cNvSpPr/>
           <p:nvPr/>
         </p:nvSpPr>
@@ -5868,7 +5868,7 @@
       </p:sp>
       <p:sp>
         <p:nvSpPr>
-          <p:cNvPr id="341" name=""/>
+          <p:cNvPr id="342" name=""/>
           <p:cNvSpPr txBox="1"/>
           <p:nvPr/>
         </p:nvSpPr>
@@ -5916,7 +5916,7 @@
       </p:sp>
       <p:sp>
         <p:nvSpPr>
-          <p:cNvPr id="342" name=""/>
+          <p:cNvPr id="343" name=""/>
           <p:cNvSpPr/>
           <p:nvPr/>
         </p:nvSpPr>
@@ -6044,7 +6044,7 @@
       </p:sp>
       <p:sp>
         <p:nvSpPr>
-          <p:cNvPr id="343" name=""/>
+          <p:cNvPr id="344" name=""/>
           <p:cNvSpPr txBox="1"/>
           <p:nvPr/>
         </p:nvSpPr>
@@ -6092,7 +6092,7 @@
       </p:sp>
       <p:sp>
         <p:nvSpPr>
-          <p:cNvPr id="344" name=""/>
+          <p:cNvPr id="345" name=""/>
           <p:cNvSpPr txBox="1"/>
           <p:nvPr/>
         </p:nvSpPr>
@@ -6140,7 +6140,7 @@
       </p:sp>
       <p:sp>
         <p:nvSpPr>
-          <p:cNvPr id="345" name=""/>
+          <p:cNvPr id="346" name=""/>
           <p:cNvSpPr txBox="1"/>
           <p:nvPr/>
         </p:nvSpPr>
@@ -6188,7 +6188,7 @@
       </p:sp>
       <p:sp>
         <p:nvSpPr>
-          <p:cNvPr id="346" name=""/>
+          <p:cNvPr id="347" name=""/>
           <p:cNvSpPr/>
           <p:nvPr/>
         </p:nvSpPr>
@@ -6316,7 +6316,7 @@
       </p:sp>
       <p:sp>
         <p:nvSpPr>
-          <p:cNvPr id="347" name=""/>
+          <p:cNvPr id="348" name=""/>
           <p:cNvSpPr txBox="1"/>
           <p:nvPr/>
         </p:nvSpPr>
@@ -6364,7 +6364,7 @@
       </p:sp>
       <p:sp>
         <p:nvSpPr>
-          <p:cNvPr id="348" name=""/>
+          <p:cNvPr id="349" name=""/>
           <p:cNvSpPr txBox="1"/>
           <p:nvPr/>
         </p:nvSpPr>
@@ -6412,7 +6412,7 @@
       </p:sp>
       <p:sp>
         <p:nvSpPr>
-          <p:cNvPr id="349" name=""/>
+          <p:cNvPr id="350" name=""/>
           <p:cNvSpPr txBox="1"/>
           <p:nvPr/>
         </p:nvSpPr>
@@ -6460,7 +6460,7 @@
       </p:sp>
       <p:sp>
         <p:nvSpPr>
-          <p:cNvPr id="350" name=""/>
+          <p:cNvPr id="351" name=""/>
           <p:cNvSpPr txBox="1"/>
           <p:nvPr/>
         </p:nvSpPr>
@@ -6508,7 +6508,7 @@
       </p:sp>
       <p:sp>
         <p:nvSpPr>
-          <p:cNvPr id="351" name=""/>
+          <p:cNvPr id="352" name=""/>
           <p:cNvSpPr txBox="1"/>
           <p:nvPr/>
         </p:nvSpPr>
@@ -6833,7 +6833,7 @@
         <p:spPr>
           <a:xfrm>
             <a:off x="533520" y="2284200"/>
-            <a:ext cx="1905840" cy="381240"/>
+            <a:ext cx="762840" cy="381240"/>
           </a:xfrm>
           <a:prstGeom prst="rect">
             <a:avLst/>
@@ -6859,7 +6859,7 @@
                 <a:latin typeface="HiraginoSans-W7"/>
                 <a:ea typeface="HiraginoSans-W7"/>
               </a:rPr>
-              <a:t>アジェンダ</a:t>
+              <a:t>⽬次</a:t>
             </a:r>
             <a:endParaRPr lang="en-US" sz="3000" b="0" u="none" strike="noStrike">
               <a:solidFill>
@@ -7714,7 +7714,7 @@
         </p:nvSpPr>
         <p:spPr>
           <a:xfrm>
-            <a:off x="533160" y="2504880"/>
+            <a:off x="533160" y="1009440"/>
             <a:ext cx="11125440" cy="28800"/>
           </a:xfrm>
           <a:custGeom>
@@ -7774,7 +7774,7 @@
         </p:nvSpPr>
         <p:spPr>
           <a:xfrm>
-            <a:off x="552240" y="4438440"/>
+            <a:off x="552240" y="2943000"/>
             <a:ext cx="11106360" cy="467280"/>
           </a:xfrm>
           <a:custGeom>
@@ -7814,22 +7814,22 @@
                   <a:pt x="30851" y="106"/>
                 </a:cubicBezTo>
                 <a:lnTo>
-                  <a:pt x="30851" y="1191"/>
-                </a:lnTo>
-                <a:cubicBezTo>
-                  <a:pt x="30851" y="1205"/>
-                  <a:pt x="30849" y="1218"/>
-                  <a:pt x="30843" y="1231"/>
-                </a:cubicBezTo>
-                <a:cubicBezTo>
-                  <a:pt x="30838" y="1244"/>
-                  <a:pt x="30830" y="1256"/>
-                  <a:pt x="30820" y="1266"/>
-                </a:cubicBezTo>
-                <a:cubicBezTo>
-                  <a:pt x="30811" y="1275"/>
+                  <a:pt x="30851" y="1192"/>
+                </a:lnTo>
+                <a:cubicBezTo>
+                  <a:pt x="30851" y="1206"/>
+                  <a:pt x="30849" y="1219"/>
+                  <a:pt x="30843" y="1232"/>
+                </a:cubicBezTo>
+                <a:cubicBezTo>
+                  <a:pt x="30838" y="1245"/>
+                  <a:pt x="30830" y="1257"/>
+                  <a:pt x="30820" y="1267"/>
+                </a:cubicBezTo>
+                <a:cubicBezTo>
+                  <a:pt x="30811" y="1277"/>
                   <a:pt x="30799" y="1284"/>
-                  <a:pt x="30786" y="1289"/>
+                  <a:pt x="30786" y="1290"/>
                 </a:cubicBezTo>
                 <a:cubicBezTo>
                   <a:pt x="30773" y="1295"/>
@@ -7874,7 +7874,7 @@
         </p:nvSpPr>
         <p:spPr>
           <a:xfrm>
-            <a:off x="533160" y="4438440"/>
+            <a:off x="533160" y="2943000"/>
             <a:ext cx="38520" cy="467280"/>
           </a:xfrm>
           <a:custGeom>
@@ -7934,7 +7934,7 @@
         </p:nvSpPr>
         <p:spPr>
           <a:xfrm>
-            <a:off x="533520" y="1988640"/>
+            <a:off x="533520" y="493560"/>
             <a:ext cx="762840" cy="381240"/>
           </a:xfrm>
           <a:prstGeom prst="rect">
@@ -7982,7 +7982,7 @@
         </p:nvSpPr>
         <p:spPr>
           <a:xfrm>
-            <a:off x="1295280" y="1971000"/>
+            <a:off x="1295280" y="475560"/>
             <a:ext cx="380520" cy="454680"/>
           </a:xfrm>
           <a:prstGeom prst="rect">
@@ -8030,7 +8030,7 @@
         </p:nvSpPr>
         <p:spPr>
           <a:xfrm>
-            <a:off x="1668600" y="1988640"/>
+            <a:off x="1668600" y="493560"/>
             <a:ext cx="1524600" cy="381240"/>
           </a:xfrm>
           <a:prstGeom prst="rect">
@@ -8078,7 +8078,7 @@
         </p:nvSpPr>
         <p:spPr>
           <a:xfrm>
-            <a:off x="3192840" y="1971000"/>
+            <a:off x="3192840" y="475560"/>
             <a:ext cx="2561760" cy="454680"/>
           </a:xfrm>
           <a:prstGeom prst="rect">
@@ -8126,8 +8126,8 @@
         </p:nvSpPr>
         <p:spPr>
           <a:xfrm>
-            <a:off x="618840" y="2914560"/>
-            <a:ext cx="57600" cy="57240"/>
+            <a:off x="618840" y="1419120"/>
+            <a:ext cx="57600" cy="57600"/>
           </a:xfrm>
           <a:custGeom>
             <a:avLst/>
@@ -8135,14 +8135,14 @@
             <a:ahLst/>
             <a:rect l="0" t="0" r="r" b="b"/>
             <a:pathLst>
-              <a:path w="160" h="159">
-                <a:moveTo>
-                  <a:pt x="160" y="80"/>
+              <a:path w="160" h="160">
+                <a:moveTo>
+                  <a:pt x="160" y="79"/>
                 </a:moveTo>
                 <a:cubicBezTo>
                   <a:pt x="160" y="91"/>
                   <a:pt x="158" y="101"/>
-                  <a:pt x="154" y="110"/>
+                  <a:pt x="154" y="111"/>
                 </a:cubicBezTo>
                 <a:cubicBezTo>
                   <a:pt x="150" y="120"/>
@@ -8155,13 +8155,13 @@
                   <a:pt x="111" y="153"/>
                 </a:cubicBezTo>
                 <a:cubicBezTo>
-                  <a:pt x="101" y="157"/>
-                  <a:pt x="90" y="159"/>
-                  <a:pt x="80" y="159"/>
-                </a:cubicBezTo>
-                <a:cubicBezTo>
-                  <a:pt x="69" y="159"/>
-                  <a:pt x="59" y="157"/>
+                  <a:pt x="101" y="158"/>
+                  <a:pt x="90" y="160"/>
+                  <a:pt x="80" y="160"/>
+                </a:cubicBezTo>
+                <a:cubicBezTo>
+                  <a:pt x="69" y="160"/>
+                  <a:pt x="59" y="158"/>
                   <a:pt x="49" y="153"/>
                 </a:cubicBezTo>
                 <a:cubicBezTo>
@@ -8172,17 +8172,17 @@
                 <a:cubicBezTo>
                   <a:pt x="16" y="129"/>
                   <a:pt x="10" y="120"/>
-                  <a:pt x="6" y="110"/>
+                  <a:pt x="6" y="111"/>
                 </a:cubicBezTo>
                 <a:cubicBezTo>
                   <a:pt x="2" y="101"/>
                   <a:pt x="0" y="91"/>
-                  <a:pt x="0" y="80"/>
-                </a:cubicBezTo>
-                <a:cubicBezTo>
-                  <a:pt x="0" y="70"/>
+                  <a:pt x="0" y="79"/>
+                </a:cubicBezTo>
+                <a:cubicBezTo>
+                  <a:pt x="0" y="69"/>
                   <a:pt x="2" y="59"/>
-                  <a:pt x="6" y="50"/>
+                  <a:pt x="6" y="49"/>
                 </a:cubicBezTo>
                 <a:cubicBezTo>
                   <a:pt x="10" y="39"/>
@@ -8212,12 +8212,12 @@
                 <a:cubicBezTo>
                   <a:pt x="144" y="30"/>
                   <a:pt x="150" y="39"/>
-                  <a:pt x="154" y="50"/>
+                  <a:pt x="154" y="49"/>
                 </a:cubicBezTo>
                 <a:cubicBezTo>
                   <a:pt x="158" y="59"/>
-                  <a:pt x="160" y="70"/>
-                  <a:pt x="160" y="80"/>
+                  <a:pt x="160" y="69"/>
+                  <a:pt x="160" y="79"/>
                 </a:cubicBezTo>
                 <a:close/>
               </a:path>
@@ -8254,7 +8254,7 @@
         </p:nvSpPr>
         <p:spPr>
           <a:xfrm>
-            <a:off x="5753880" y="1988640"/>
+            <a:off x="5753880" y="493560"/>
             <a:ext cx="2286720" cy="381240"/>
           </a:xfrm>
           <a:prstGeom prst="rect">
@@ -8302,7 +8302,7 @@
         </p:nvSpPr>
         <p:spPr>
           <a:xfrm>
-            <a:off x="799920" y="2827800"/>
+            <a:off x="799920" y="1332720"/>
             <a:ext cx="191160" cy="191160"/>
           </a:xfrm>
           <a:prstGeom prst="rect">
@@ -8350,7 +8350,7 @@
         </p:nvSpPr>
         <p:spPr>
           <a:xfrm>
-            <a:off x="990720" y="2819160"/>
+            <a:off x="990720" y="1323720"/>
             <a:ext cx="190080" cy="222840"/>
           </a:xfrm>
           <a:prstGeom prst="rect">
@@ -8398,7 +8398,7 @@
         </p:nvSpPr>
         <p:spPr>
           <a:xfrm>
-            <a:off x="1096560" y="2827800"/>
+            <a:off x="1096560" y="1332720"/>
             <a:ext cx="1143720" cy="191160"/>
           </a:xfrm>
           <a:prstGeom prst="rect">
@@ -8446,7 +8446,7 @@
         </p:nvSpPr>
         <p:spPr>
           <a:xfrm>
-            <a:off x="2239560" y="2819160"/>
+            <a:off x="2239560" y="1323720"/>
             <a:ext cx="190080" cy="222840"/>
           </a:xfrm>
           <a:prstGeom prst="rect">
@@ -8494,7 +8494,7 @@
         </p:nvSpPr>
         <p:spPr>
           <a:xfrm>
-            <a:off x="2412360" y="2827800"/>
+            <a:off x="2412360" y="1332720"/>
             <a:ext cx="4191840" cy="191160"/>
           </a:xfrm>
           <a:prstGeom prst="rect">
@@ -8542,7 +8542,7 @@
         </p:nvSpPr>
         <p:spPr>
           <a:xfrm>
-            <a:off x="6576480" y="2819160"/>
+            <a:off x="6576480" y="1323720"/>
             <a:ext cx="392400" cy="222840"/>
           </a:xfrm>
           <a:prstGeom prst="rect">
@@ -8590,7 +8590,7 @@
         </p:nvSpPr>
         <p:spPr>
           <a:xfrm>
-            <a:off x="618840" y="3305160"/>
+            <a:off x="618840" y="1809720"/>
             <a:ext cx="57600" cy="57240"/>
           </a:xfrm>
           <a:custGeom>
@@ -8601,11 +8601,11 @@
             <a:pathLst>
               <a:path w="160" h="159">
                 <a:moveTo>
-                  <a:pt x="160" y="80"/>
-                </a:moveTo>
-                <a:cubicBezTo>
-                  <a:pt x="160" y="90"/>
-                  <a:pt x="158" y="101"/>
+                  <a:pt x="160" y="79"/>
+                </a:moveTo>
+                <a:cubicBezTo>
+                  <a:pt x="160" y="89"/>
+                  <a:pt x="158" y="100"/>
                   <a:pt x="154" y="110"/>
                 </a:cubicBezTo>
                 <a:cubicBezTo>
@@ -8614,7 +8614,7 @@
                   <a:pt x="137" y="136"/>
                 </a:cubicBezTo>
                 <a:cubicBezTo>
-                  <a:pt x="129" y="143"/>
+                  <a:pt x="129" y="144"/>
                   <a:pt x="121" y="149"/>
                   <a:pt x="111" y="153"/>
                 </a:cubicBezTo>
@@ -8630,7 +8630,7 @@
                 </a:cubicBezTo>
                 <a:cubicBezTo>
                   <a:pt x="40" y="149"/>
-                  <a:pt x="31" y="143"/>
+                  <a:pt x="31" y="144"/>
                   <a:pt x="24" y="136"/>
                 </a:cubicBezTo>
                 <a:cubicBezTo>
@@ -8639,12 +8639,12 @@
                   <a:pt x="6" y="110"/>
                 </a:cubicBezTo>
                 <a:cubicBezTo>
-                  <a:pt x="2" y="101"/>
-                  <a:pt x="0" y="90"/>
-                  <a:pt x="0" y="80"/>
-                </a:cubicBezTo>
-                <a:cubicBezTo>
-                  <a:pt x="0" y="69"/>
+                  <a:pt x="2" y="100"/>
+                  <a:pt x="0" y="89"/>
+                  <a:pt x="0" y="79"/>
+                </a:cubicBezTo>
+                <a:cubicBezTo>
+                  <a:pt x="0" y="68"/>
                   <a:pt x="2" y="58"/>
                   <a:pt x="6" y="49"/>
                 </a:cubicBezTo>
@@ -8680,8 +8680,8 @@
                 </a:cubicBezTo>
                 <a:cubicBezTo>
                   <a:pt x="158" y="58"/>
-                  <a:pt x="160" y="69"/>
-                  <a:pt x="160" y="80"/>
+                  <a:pt x="160" y="68"/>
+                  <a:pt x="160" y="79"/>
                 </a:cubicBezTo>
                 <a:close/>
               </a:path>
@@ -8718,7 +8718,7 @@
         </p:nvSpPr>
         <p:spPr>
           <a:xfrm>
-            <a:off x="6957360" y="2827800"/>
+            <a:off x="6957360" y="1332720"/>
             <a:ext cx="1715400" cy="191160"/>
           </a:xfrm>
           <a:prstGeom prst="rect">
@@ -8766,7 +8766,7 @@
         </p:nvSpPr>
         <p:spPr>
           <a:xfrm>
-            <a:off x="799920" y="3218400"/>
+            <a:off x="799920" y="1722960"/>
             <a:ext cx="572400" cy="191160"/>
           </a:xfrm>
           <a:prstGeom prst="rect">
@@ -8814,7 +8814,7 @@
         </p:nvSpPr>
         <p:spPr>
           <a:xfrm>
-            <a:off x="1371600" y="3209400"/>
+            <a:off x="1371600" y="1713960"/>
             <a:ext cx="279360" cy="222840"/>
           </a:xfrm>
           <a:prstGeom prst="rect">
@@ -8862,7 +8862,7 @@
         </p:nvSpPr>
         <p:spPr>
           <a:xfrm>
-            <a:off x="1650240" y="3218400"/>
+            <a:off x="1650240" y="1722960"/>
             <a:ext cx="2858400" cy="191160"/>
           </a:xfrm>
           <a:prstGeom prst="rect">
@@ -8910,7 +8910,7 @@
         </p:nvSpPr>
         <p:spPr>
           <a:xfrm>
-            <a:off x="4492440" y="3209400"/>
+            <a:off x="4492440" y="1713960"/>
             <a:ext cx="1083960" cy="222840"/>
           </a:xfrm>
           <a:prstGeom prst="rect">
@@ -8958,7 +8958,7 @@
         </p:nvSpPr>
         <p:spPr>
           <a:xfrm>
-            <a:off x="5576040" y="3218400"/>
+            <a:off x="5576040" y="1722960"/>
             <a:ext cx="191160" cy="191160"/>
           </a:xfrm>
           <a:prstGeom prst="rect">
@@ -9006,7 +9006,7 @@
         </p:nvSpPr>
         <p:spPr>
           <a:xfrm>
-            <a:off x="5766480" y="3209400"/>
+            <a:off x="5766480" y="1713960"/>
             <a:ext cx="745560" cy="222840"/>
           </a:xfrm>
           <a:prstGeom prst="rect">
@@ -9054,7 +9054,7 @@
         </p:nvSpPr>
         <p:spPr>
           <a:xfrm>
-            <a:off x="6511320" y="3218400"/>
+            <a:off x="6511320" y="1722960"/>
             <a:ext cx="762840" cy="191160"/>
           </a:xfrm>
           <a:prstGeom prst="rect">
@@ -9102,7 +9102,7 @@
         </p:nvSpPr>
         <p:spPr>
           <a:xfrm>
-            <a:off x="7273440" y="3209400"/>
+            <a:off x="7273440" y="1713960"/>
             <a:ext cx="1225080" cy="222840"/>
           </a:xfrm>
           <a:prstGeom prst="rect">
@@ -9150,7 +9150,7 @@
         </p:nvSpPr>
         <p:spPr>
           <a:xfrm>
-            <a:off x="618840" y="3695400"/>
+            <a:off x="618840" y="2199960"/>
             <a:ext cx="57600" cy="57600"/>
           </a:xfrm>
           <a:custGeom>
@@ -9164,13 +9164,13 @@
                   <a:pt x="160" y="80"/>
                 </a:moveTo>
                 <a:cubicBezTo>
-                  <a:pt x="160" y="91"/>
-                  <a:pt x="158" y="101"/>
-                  <a:pt x="154" y="111"/>
-                </a:cubicBezTo>
-                <a:cubicBezTo>
-                  <a:pt x="150" y="121"/>
-                  <a:pt x="144" y="129"/>
+                  <a:pt x="160" y="90"/>
+                  <a:pt x="158" y="100"/>
+                  <a:pt x="154" y="110"/>
+                </a:cubicBezTo>
+                <a:cubicBezTo>
+                  <a:pt x="150" y="120"/>
+                  <a:pt x="144" y="128"/>
                   <a:pt x="137" y="137"/>
                 </a:cubicBezTo>
                 <a:cubicBezTo>
@@ -9194,13 +9194,13 @@
                   <a:pt x="24" y="137"/>
                 </a:cubicBezTo>
                 <a:cubicBezTo>
-                  <a:pt x="16" y="129"/>
-                  <a:pt x="10" y="121"/>
-                  <a:pt x="6" y="111"/>
-                </a:cubicBezTo>
-                <a:cubicBezTo>
-                  <a:pt x="2" y="101"/>
-                  <a:pt x="0" y="91"/>
+                  <a:pt x="16" y="128"/>
+                  <a:pt x="10" y="120"/>
+                  <a:pt x="6" y="110"/>
+                </a:cubicBezTo>
+                <a:cubicBezTo>
+                  <a:pt x="2" y="100"/>
+                  <a:pt x="0" y="90"/>
                   <a:pt x="0" y="80"/>
                 </a:cubicBezTo>
                 <a:cubicBezTo>
@@ -9278,7 +9278,7 @@
         </p:nvSpPr>
         <p:spPr>
           <a:xfrm>
-            <a:off x="8497800" y="3218400"/>
+            <a:off x="8497800" y="1722960"/>
             <a:ext cx="1905840" cy="191160"/>
           </a:xfrm>
           <a:prstGeom prst="rect">
@@ -9326,7 +9326,7 @@
         </p:nvSpPr>
         <p:spPr>
           <a:xfrm>
-            <a:off x="799920" y="3609000"/>
+            <a:off x="799920" y="2113560"/>
             <a:ext cx="1905840" cy="191160"/>
           </a:xfrm>
           <a:prstGeom prst="rect">
@@ -9374,7 +9374,7 @@
         </p:nvSpPr>
         <p:spPr>
           <a:xfrm>
-            <a:off x="2705040" y="3600000"/>
+            <a:off x="2705040" y="2104560"/>
             <a:ext cx="190080" cy="222840"/>
           </a:xfrm>
           <a:prstGeom prst="rect">
@@ -9422,7 +9422,7 @@
         </p:nvSpPr>
         <p:spPr>
           <a:xfrm>
-            <a:off x="2757960" y="3609000"/>
+            <a:off x="2757960" y="2113560"/>
             <a:ext cx="191160" cy="212040"/>
           </a:xfrm>
           <a:prstGeom prst="rect">
@@ -9470,7 +9470,7 @@
         </p:nvSpPr>
         <p:spPr>
           <a:xfrm>
-            <a:off x="2948400" y="3600000"/>
+            <a:off x="2948400" y="2104560"/>
             <a:ext cx="709920" cy="222840"/>
           </a:xfrm>
           <a:prstGeom prst="rect">
@@ -9518,7 +9518,7 @@
         </p:nvSpPr>
         <p:spPr>
           <a:xfrm>
-            <a:off x="3657960" y="3609000"/>
+            <a:off x="3657960" y="2113560"/>
             <a:ext cx="381600" cy="191160"/>
           </a:xfrm>
           <a:prstGeom prst="rect">
@@ -9566,7 +9566,7 @@
         </p:nvSpPr>
         <p:spPr>
           <a:xfrm>
-            <a:off x="4038840" y="3600000"/>
+            <a:off x="4038840" y="2104560"/>
             <a:ext cx="526680" cy="222840"/>
           </a:xfrm>
           <a:prstGeom prst="rect">
@@ -9614,7 +9614,7 @@
         </p:nvSpPr>
         <p:spPr>
           <a:xfrm>
-            <a:off x="4564800" y="3609000"/>
+            <a:off x="4564800" y="2113560"/>
             <a:ext cx="191160" cy="212040"/>
           </a:xfrm>
           <a:prstGeom prst="rect">
@@ -9662,7 +9662,7 @@
         </p:nvSpPr>
         <p:spPr>
           <a:xfrm>
-            <a:off x="4755240" y="3600000"/>
+            <a:off x="4755240" y="2104560"/>
             <a:ext cx="190080" cy="222840"/>
           </a:xfrm>
           <a:prstGeom prst="rect">
@@ -9710,7 +9710,7 @@
         </p:nvSpPr>
         <p:spPr>
           <a:xfrm>
-            <a:off x="618840" y="4095720"/>
+            <a:off x="618840" y="2600280"/>
             <a:ext cx="57600" cy="57240"/>
           </a:xfrm>
           <a:custGeom>
@@ -9721,15 +9721,15 @@
             <a:pathLst>
               <a:path w="160" h="159">
                 <a:moveTo>
-                  <a:pt x="160" y="80"/>
+                  <a:pt x="160" y="79"/>
                 </a:moveTo>
                 <a:cubicBezTo>
                   <a:pt x="160" y="90"/>
-                  <a:pt x="158" y="101"/>
-                  <a:pt x="154" y="110"/>
-                </a:cubicBezTo>
-                <a:cubicBezTo>
-                  <a:pt x="150" y="120"/>
+                  <a:pt x="158" y="100"/>
+                  <a:pt x="154" y="109"/>
+                </a:cubicBezTo>
+                <a:cubicBezTo>
+                  <a:pt x="150" y="119"/>
                   <a:pt x="144" y="129"/>
                   <a:pt x="137" y="136"/>
                 </a:cubicBezTo>
@@ -9755,13 +9755,13 @@
                 </a:cubicBezTo>
                 <a:cubicBezTo>
                   <a:pt x="16" y="129"/>
-                  <a:pt x="10" y="120"/>
-                  <a:pt x="6" y="110"/>
-                </a:cubicBezTo>
-                <a:cubicBezTo>
-                  <a:pt x="2" y="101"/>
+                  <a:pt x="10" y="119"/>
+                  <a:pt x="6" y="109"/>
+                </a:cubicBezTo>
+                <a:cubicBezTo>
+                  <a:pt x="2" y="100"/>
                   <a:pt x="0" y="90"/>
-                  <a:pt x="0" y="80"/>
+                  <a:pt x="0" y="79"/>
                 </a:cubicBezTo>
                 <a:cubicBezTo>
                   <a:pt x="0" y="68"/>
@@ -9801,7 +9801,7 @@
                 <a:cubicBezTo>
                   <a:pt x="158" y="58"/>
                   <a:pt x="160" y="68"/>
-                  <a:pt x="160" y="80"/>
+                  <a:pt x="160" y="79"/>
                 </a:cubicBezTo>
                 <a:close/>
               </a:path>
@@ -9838,7 +9838,7 @@
         </p:nvSpPr>
         <p:spPr>
           <a:xfrm>
-            <a:off x="4808160" y="3609000"/>
+            <a:off x="4808160" y="2113560"/>
             <a:ext cx="3620160" cy="191160"/>
           </a:xfrm>
           <a:prstGeom prst="rect">
@@ -9886,7 +9886,7 @@
         </p:nvSpPr>
         <p:spPr>
           <a:xfrm>
-            <a:off x="799920" y="4008960"/>
+            <a:off x="799920" y="2513520"/>
             <a:ext cx="762840" cy="191160"/>
           </a:xfrm>
           <a:prstGeom prst="rect">
@@ -9934,7 +9934,7 @@
         </p:nvSpPr>
         <p:spPr>
           <a:xfrm>
-            <a:off x="1562040" y="3999960"/>
+            <a:off x="1562040" y="2504520"/>
             <a:ext cx="265320" cy="227520"/>
           </a:xfrm>
           <a:prstGeom prst="rect">
@@ -9994,7 +9994,7 @@
         </p:nvSpPr>
         <p:spPr>
           <a:xfrm>
-            <a:off x="1827000" y="4008960"/>
+            <a:off x="1827000" y="2513520"/>
             <a:ext cx="191160" cy="191160"/>
           </a:xfrm>
           <a:prstGeom prst="rect">
@@ -10042,7 +10042,7 @@
         </p:nvSpPr>
         <p:spPr>
           <a:xfrm>
-            <a:off x="2017440" y="3999960"/>
+            <a:off x="2017440" y="2504520"/>
             <a:ext cx="190080" cy="222840"/>
           </a:xfrm>
           <a:prstGeom prst="rect">
@@ -10090,7 +10090,7 @@
         </p:nvSpPr>
         <p:spPr>
           <a:xfrm>
-            <a:off x="2070360" y="4008960"/>
+            <a:off x="2070360" y="2513520"/>
             <a:ext cx="1715400" cy="191160"/>
           </a:xfrm>
           <a:prstGeom prst="rect">
@@ -10138,7 +10138,7 @@
         </p:nvSpPr>
         <p:spPr>
           <a:xfrm>
-            <a:off x="723960" y="4570200"/>
+            <a:off x="723960" y="3074760"/>
             <a:ext cx="3990600" cy="181800"/>
           </a:xfrm>
           <a:prstGeom prst="rect">
@@ -10186,7 +10186,7 @@
         </p:nvSpPr>
         <p:spPr>
           <a:xfrm>
-            <a:off x="4699800" y="4561560"/>
+            <a:off x="4699800" y="3066120"/>
             <a:ext cx="360360" cy="210600"/>
           </a:xfrm>
           <a:prstGeom prst="rect">
@@ -10226,15 +10226,39 @@
           </a:p>
         </p:txBody>
       </p:sp>
-      <p:sp>
-        <p:nvSpPr>
+      <p:pic>
+        <p:nvPicPr>
           <p:cNvPr id="88" name=""/>
+          <p:cNvPicPr/>
+          <p:nvPr/>
+        </p:nvPicPr>
+        <p:blipFill>
+          <a:blip r:embed="rId1"/>
+          <a:stretch/>
+        </p:blipFill>
+        <p:spPr>
+          <a:xfrm>
+            <a:off x="3619440" y="3552840"/>
+            <a:ext cx="4952520" cy="3009600"/>
+          </a:xfrm>
+          <a:prstGeom prst="rect">
+            <a:avLst/>
+          </a:prstGeom>
+          <a:noFill/>
+          <a:ln w="0">
+            <a:noFill/>
+          </a:ln>
+        </p:spPr>
+      </p:pic>
+      <p:sp>
+        <p:nvSpPr>
+          <p:cNvPr id="89" name=""/>
           <p:cNvSpPr txBox="1"/>
           <p:nvPr/>
         </p:nvSpPr>
         <p:spPr>
           <a:xfrm>
-            <a:off x="5058720" y="4570200"/>
+            <a:off x="5058720" y="3074760"/>
             <a:ext cx="3627720" cy="181800"/>
           </a:xfrm>
           <a:prstGeom prst="rect">
@@ -10276,7 +10300,7 @@
       </p:sp>
       <p:sp>
         <p:nvSpPr>
-          <p:cNvPr id="89" name=""/>
+          <p:cNvPr id="90" name=""/>
           <p:cNvSpPr txBox="1"/>
           <p:nvPr/>
         </p:nvSpPr>
@@ -10354,7 +10378,7 @@
       </p:grpSpPr>
       <p:sp>
         <p:nvSpPr>
-          <p:cNvPr id="90" name=""/>
+          <p:cNvPr id="91" name=""/>
           <p:cNvSpPr/>
           <p:nvPr/>
         </p:nvSpPr>
@@ -10414,7 +10438,7 @@
       </p:sp>
       <p:sp>
         <p:nvSpPr>
-          <p:cNvPr id="91" name=""/>
+          <p:cNvPr id="92" name=""/>
           <p:cNvSpPr/>
           <p:nvPr/>
         </p:nvSpPr>
@@ -10474,7 +10498,7 @@
       </p:sp>
       <p:sp>
         <p:nvSpPr>
-          <p:cNvPr id="92" name=""/>
+          <p:cNvPr id="93" name=""/>
           <p:cNvSpPr/>
           <p:nvPr/>
         </p:nvSpPr>
@@ -10534,7 +10558,7 @@
       </p:sp>
       <p:sp>
         <p:nvSpPr>
-          <p:cNvPr id="93" name=""/>
+          <p:cNvPr id="94" name=""/>
           <p:cNvSpPr/>
           <p:nvPr/>
         </p:nvSpPr>
@@ -10594,7 +10618,7 @@
       </p:sp>
       <p:sp>
         <p:nvSpPr>
-          <p:cNvPr id="94" name=""/>
+          <p:cNvPr id="95" name=""/>
           <p:cNvSpPr txBox="1"/>
           <p:nvPr/>
         </p:nvSpPr>
@@ -10642,7 +10666,7 @@
       </p:sp>
       <p:sp>
         <p:nvSpPr>
-          <p:cNvPr id="95" name=""/>
+          <p:cNvPr id="96" name=""/>
           <p:cNvSpPr txBox="1"/>
           <p:nvPr/>
         </p:nvSpPr>
@@ -10690,7 +10714,7 @@
       </p:sp>
       <p:sp>
         <p:nvSpPr>
-          <p:cNvPr id="96" name=""/>
+          <p:cNvPr id="97" name=""/>
           <p:cNvSpPr txBox="1"/>
           <p:nvPr/>
         </p:nvSpPr>
@@ -10738,7 +10762,7 @@
       </p:sp>
       <p:sp>
         <p:nvSpPr>
-          <p:cNvPr id="97" name=""/>
+          <p:cNvPr id="98" name=""/>
           <p:cNvSpPr txBox="1"/>
           <p:nvPr/>
         </p:nvSpPr>
@@ -10786,7 +10810,7 @@
       </p:sp>
       <p:sp>
         <p:nvSpPr>
-          <p:cNvPr id="98" name=""/>
+          <p:cNvPr id="99" name=""/>
           <p:cNvSpPr/>
           <p:nvPr/>
         </p:nvSpPr>
@@ -10846,7 +10870,7 @@
       </p:sp>
       <p:sp>
         <p:nvSpPr>
-          <p:cNvPr id="99" name=""/>
+          <p:cNvPr id="100" name=""/>
           <p:cNvSpPr/>
           <p:nvPr/>
         </p:nvSpPr>
@@ -11851,7 +11875,7 @@
       </p:sp>
       <p:sp>
         <p:nvSpPr>
-          <p:cNvPr id="100" name=""/>
+          <p:cNvPr id="101" name=""/>
           <p:cNvSpPr/>
           <p:nvPr/>
         </p:nvSpPr>
@@ -12071,7 +12095,7 @@
       </p:sp>
       <p:sp>
         <p:nvSpPr>
-          <p:cNvPr id="101" name=""/>
+          <p:cNvPr id="102" name=""/>
           <p:cNvSpPr txBox="1"/>
           <p:nvPr/>
         </p:nvSpPr>
@@ -12119,7 +12143,7 @@
       </p:sp>
       <p:sp>
         <p:nvSpPr>
-          <p:cNvPr id="102" name=""/>
+          <p:cNvPr id="103" name=""/>
           <p:cNvSpPr/>
           <p:nvPr/>
         </p:nvSpPr>
@@ -12339,7 +12363,7 @@
       </p:sp>
       <p:sp>
         <p:nvSpPr>
-          <p:cNvPr id="103" name=""/>
+          <p:cNvPr id="104" name=""/>
           <p:cNvSpPr/>
           <p:nvPr/>
         </p:nvSpPr>
@@ -12560,7 +12584,7 @@
       </p:sp>
       <p:sp>
         <p:nvSpPr>
-          <p:cNvPr id="104" name=""/>
+          <p:cNvPr id="105" name=""/>
           <p:cNvSpPr/>
           <p:nvPr/>
         </p:nvSpPr>
@@ -12768,7 +12792,7 @@
       </p:sp>
       <p:sp>
         <p:nvSpPr>
-          <p:cNvPr id="105" name=""/>
+          <p:cNvPr id="106" name=""/>
           <p:cNvSpPr txBox="1"/>
           <p:nvPr/>
         </p:nvSpPr>
@@ -12816,7 +12840,7 @@
       </p:sp>
       <p:sp>
         <p:nvSpPr>
-          <p:cNvPr id="106" name=""/>
+          <p:cNvPr id="107" name=""/>
           <p:cNvSpPr txBox="1"/>
           <p:nvPr/>
         </p:nvSpPr>
@@ -12864,7 +12888,7 @@
       </p:sp>
       <p:sp>
         <p:nvSpPr>
-          <p:cNvPr id="107" name=""/>
+          <p:cNvPr id="108" name=""/>
           <p:cNvSpPr txBox="1"/>
           <p:nvPr/>
         </p:nvSpPr>
@@ -12912,7 +12936,7 @@
       </p:sp>
       <p:sp>
         <p:nvSpPr>
-          <p:cNvPr id="108" name=""/>
+          <p:cNvPr id="109" name=""/>
           <p:cNvSpPr/>
           <p:nvPr/>
         </p:nvSpPr>
@@ -12955,7 +12979,7 @@
       </p:sp>
       <p:sp>
         <p:nvSpPr>
-          <p:cNvPr id="109" name=""/>
+          <p:cNvPr id="110" name=""/>
           <p:cNvSpPr/>
           <p:nvPr/>
         </p:nvSpPr>
@@ -13012,7 +13036,7 @@
       </p:sp>
       <p:sp>
         <p:nvSpPr>
-          <p:cNvPr id="110" name=""/>
+          <p:cNvPr id="111" name=""/>
           <p:cNvSpPr/>
           <p:nvPr/>
         </p:nvSpPr>
@@ -13232,7 +13256,7 @@
       </p:sp>
       <p:sp>
         <p:nvSpPr>
-          <p:cNvPr id="111" name=""/>
+          <p:cNvPr id="112" name=""/>
           <p:cNvSpPr/>
           <p:nvPr/>
         </p:nvSpPr>
@@ -13453,7 +13477,7 @@
       </p:sp>
       <p:sp>
         <p:nvSpPr>
-          <p:cNvPr id="112" name=""/>
+          <p:cNvPr id="113" name=""/>
           <p:cNvSpPr/>
           <p:nvPr/>
         </p:nvSpPr>
@@ -13661,7 +13685,7 @@
       </p:sp>
       <p:sp>
         <p:nvSpPr>
-          <p:cNvPr id="113" name=""/>
+          <p:cNvPr id="114" name=""/>
           <p:cNvSpPr txBox="1"/>
           <p:nvPr/>
         </p:nvSpPr>
@@ -13709,7 +13733,7 @@
       </p:sp>
       <p:sp>
         <p:nvSpPr>
-          <p:cNvPr id="114" name=""/>
+          <p:cNvPr id="115" name=""/>
           <p:cNvSpPr txBox="1"/>
           <p:nvPr/>
         </p:nvSpPr>
@@ -13757,7 +13781,7 @@
       </p:sp>
       <p:sp>
         <p:nvSpPr>
-          <p:cNvPr id="115" name=""/>
+          <p:cNvPr id="116" name=""/>
           <p:cNvSpPr txBox="1"/>
           <p:nvPr/>
         </p:nvSpPr>
@@ -13805,7 +13829,7 @@
       </p:sp>
       <p:sp>
         <p:nvSpPr>
-          <p:cNvPr id="116" name=""/>
+          <p:cNvPr id="117" name=""/>
           <p:cNvSpPr/>
           <p:nvPr/>
         </p:nvSpPr>
@@ -13848,7 +13872,7 @@
       </p:sp>
       <p:sp>
         <p:nvSpPr>
-          <p:cNvPr id="117" name=""/>
+          <p:cNvPr id="118" name=""/>
           <p:cNvSpPr/>
           <p:nvPr/>
         </p:nvSpPr>
@@ -13905,7 +13929,7 @@
       </p:sp>
       <p:sp>
         <p:nvSpPr>
-          <p:cNvPr id="118" name=""/>
+          <p:cNvPr id="119" name=""/>
           <p:cNvSpPr/>
           <p:nvPr/>
         </p:nvSpPr>
@@ -14125,7 +14149,7 @@
       </p:sp>
       <p:sp>
         <p:nvSpPr>
-          <p:cNvPr id="119" name=""/>
+          <p:cNvPr id="120" name=""/>
           <p:cNvSpPr/>
           <p:nvPr/>
         </p:nvSpPr>
@@ -14346,7 +14370,7 @@
       </p:sp>
       <p:sp>
         <p:nvSpPr>
-          <p:cNvPr id="120" name=""/>
+          <p:cNvPr id="121" name=""/>
           <p:cNvSpPr/>
           <p:nvPr/>
         </p:nvSpPr>
@@ -14554,7 +14578,7 @@
       </p:sp>
       <p:sp>
         <p:nvSpPr>
-          <p:cNvPr id="121" name=""/>
+          <p:cNvPr id="122" name=""/>
           <p:cNvSpPr txBox="1"/>
           <p:nvPr/>
         </p:nvSpPr>
@@ -14602,7 +14626,7 @@
       </p:sp>
       <p:sp>
         <p:nvSpPr>
-          <p:cNvPr id="122" name=""/>
+          <p:cNvPr id="123" name=""/>
           <p:cNvSpPr txBox="1"/>
           <p:nvPr/>
         </p:nvSpPr>
@@ -14650,7 +14674,7 @@
       </p:sp>
       <p:sp>
         <p:nvSpPr>
-          <p:cNvPr id="123" name=""/>
+          <p:cNvPr id="124" name=""/>
           <p:cNvSpPr txBox="1"/>
           <p:nvPr/>
         </p:nvSpPr>
@@ -14722,7 +14746,7 @@
       </p:sp>
       <p:sp>
         <p:nvSpPr>
-          <p:cNvPr id="124" name=""/>
+          <p:cNvPr id="125" name=""/>
           <p:cNvSpPr/>
           <p:nvPr/>
         </p:nvSpPr>
@@ -14765,7 +14789,7 @@
       </p:sp>
       <p:sp>
         <p:nvSpPr>
-          <p:cNvPr id="125" name=""/>
+          <p:cNvPr id="126" name=""/>
           <p:cNvSpPr/>
           <p:nvPr/>
         </p:nvSpPr>
@@ -14822,7 +14846,7 @@
       </p:sp>
       <p:sp>
         <p:nvSpPr>
-          <p:cNvPr id="126" name=""/>
+          <p:cNvPr id="127" name=""/>
           <p:cNvSpPr/>
           <p:nvPr/>
         </p:nvSpPr>
@@ -15042,7 +15066,7 @@
       </p:sp>
       <p:sp>
         <p:nvSpPr>
-          <p:cNvPr id="127" name=""/>
+          <p:cNvPr id="128" name=""/>
           <p:cNvSpPr/>
           <p:nvPr/>
         </p:nvSpPr>
@@ -15263,7 +15287,7 @@
       </p:sp>
       <p:sp>
         <p:nvSpPr>
-          <p:cNvPr id="128" name=""/>
+          <p:cNvPr id="129" name=""/>
           <p:cNvSpPr/>
           <p:nvPr/>
         </p:nvSpPr>
@@ -15471,7 +15495,7 @@
       </p:sp>
       <p:sp>
         <p:nvSpPr>
-          <p:cNvPr id="129" name=""/>
+          <p:cNvPr id="130" name=""/>
           <p:cNvSpPr txBox="1"/>
           <p:nvPr/>
         </p:nvSpPr>
@@ -15519,7 +15543,7 @@
       </p:sp>
       <p:sp>
         <p:nvSpPr>
-          <p:cNvPr id="130" name=""/>
+          <p:cNvPr id="131" name=""/>
           <p:cNvSpPr txBox="1"/>
           <p:nvPr/>
         </p:nvSpPr>
@@ -15567,7 +15591,7 @@
       </p:sp>
       <p:sp>
         <p:nvSpPr>
-          <p:cNvPr id="131" name=""/>
+          <p:cNvPr id="132" name=""/>
           <p:cNvSpPr txBox="1"/>
           <p:nvPr/>
         </p:nvSpPr>
@@ -15615,7 +15639,7 @@
       </p:sp>
       <p:sp>
         <p:nvSpPr>
-          <p:cNvPr id="132" name=""/>
+          <p:cNvPr id="133" name=""/>
           <p:cNvSpPr/>
           <p:nvPr/>
         </p:nvSpPr>
@@ -15667,7 +15691,7 @@
       </p:sp>
       <p:sp>
         <p:nvSpPr>
-          <p:cNvPr id="133" name=""/>
+          <p:cNvPr id="134" name=""/>
           <p:cNvSpPr/>
           <p:nvPr/>
         </p:nvSpPr>
@@ -15724,7 +15748,7 @@
       </p:sp>
       <p:sp>
         <p:nvSpPr>
-          <p:cNvPr id="134" name=""/>
+          <p:cNvPr id="135" name=""/>
           <p:cNvSpPr txBox="1"/>
           <p:nvPr/>
         </p:nvSpPr>
@@ -15772,7 +15796,7 @@
       </p:sp>
       <p:sp>
         <p:nvSpPr>
-          <p:cNvPr id="135" name=""/>
+          <p:cNvPr id="136" name=""/>
           <p:cNvSpPr/>
           <p:nvPr/>
         </p:nvSpPr>
@@ -15992,7 +16016,7 @@
       </p:sp>
       <p:sp>
         <p:nvSpPr>
-          <p:cNvPr id="136" name=""/>
+          <p:cNvPr id="137" name=""/>
           <p:cNvSpPr/>
           <p:nvPr/>
         </p:nvSpPr>
@@ -17903,7 +17927,7 @@
       </p:sp>
       <p:sp>
         <p:nvSpPr>
-          <p:cNvPr id="137" name=""/>
+          <p:cNvPr id="138" name=""/>
           <p:cNvSpPr txBox="1"/>
           <p:nvPr/>
         </p:nvSpPr>
@@ -17951,7 +17975,7 @@
       </p:sp>
       <p:sp>
         <p:nvSpPr>
-          <p:cNvPr id="138" name=""/>
+          <p:cNvPr id="139" name=""/>
           <p:cNvSpPr txBox="1"/>
           <p:nvPr/>
         </p:nvSpPr>
@@ -17999,7 +18023,7 @@
       </p:sp>
       <p:sp>
         <p:nvSpPr>
-          <p:cNvPr id="139" name=""/>
+          <p:cNvPr id="140" name=""/>
           <p:cNvSpPr/>
           <p:nvPr/>
         </p:nvSpPr>
@@ -18219,7 +18243,7 @@
       </p:sp>
       <p:sp>
         <p:nvSpPr>
-          <p:cNvPr id="140" name=""/>
+          <p:cNvPr id="141" name=""/>
           <p:cNvSpPr txBox="1"/>
           <p:nvPr/>
         </p:nvSpPr>
@@ -18267,7 +18291,7 @@
       </p:sp>
       <p:sp>
         <p:nvSpPr>
-          <p:cNvPr id="141" name=""/>
+          <p:cNvPr id="142" name=""/>
           <p:cNvSpPr/>
           <p:nvPr/>
         </p:nvSpPr>
@@ -18487,7 +18511,7 @@
       </p:sp>
       <p:sp>
         <p:nvSpPr>
-          <p:cNvPr id="142" name=""/>
+          <p:cNvPr id="143" name=""/>
           <p:cNvSpPr/>
           <p:nvPr/>
         </p:nvSpPr>
@@ -18708,7 +18732,7 @@
       </p:sp>
       <p:sp>
         <p:nvSpPr>
-          <p:cNvPr id="143" name=""/>
+          <p:cNvPr id="144" name=""/>
           <p:cNvSpPr/>
           <p:nvPr/>
         </p:nvSpPr>
@@ -18916,7 +18940,7 @@
       </p:sp>
       <p:sp>
         <p:nvSpPr>
-          <p:cNvPr id="144" name=""/>
+          <p:cNvPr id="145" name=""/>
           <p:cNvSpPr txBox="1"/>
           <p:nvPr/>
         </p:nvSpPr>
@@ -19000,7 +19024,7 @@
       </p:sp>
       <p:sp>
         <p:nvSpPr>
-          <p:cNvPr id="145" name=""/>
+          <p:cNvPr id="146" name=""/>
           <p:cNvSpPr txBox="1"/>
           <p:nvPr/>
         </p:nvSpPr>
@@ -19048,7 +19072,7 @@
       </p:sp>
       <p:sp>
         <p:nvSpPr>
-          <p:cNvPr id="146" name=""/>
+          <p:cNvPr id="147" name=""/>
           <p:cNvSpPr txBox="1"/>
           <p:nvPr/>
         </p:nvSpPr>
@@ -19096,7 +19120,7 @@
       </p:sp>
       <p:sp>
         <p:nvSpPr>
-          <p:cNvPr id="147" name=""/>
+          <p:cNvPr id="148" name=""/>
           <p:cNvSpPr/>
           <p:nvPr/>
         </p:nvSpPr>
@@ -19139,7 +19163,7 @@
       </p:sp>
       <p:sp>
         <p:nvSpPr>
-          <p:cNvPr id="148" name=""/>
+          <p:cNvPr id="149" name=""/>
           <p:cNvSpPr/>
           <p:nvPr/>
         </p:nvSpPr>
@@ -19196,7 +19220,7 @@
       </p:sp>
       <p:sp>
         <p:nvSpPr>
-          <p:cNvPr id="149" name=""/>
+          <p:cNvPr id="150" name=""/>
           <p:cNvSpPr/>
           <p:nvPr/>
         </p:nvSpPr>
@@ -19416,7 +19440,7 @@
       </p:sp>
       <p:sp>
         <p:nvSpPr>
-          <p:cNvPr id="150" name=""/>
+          <p:cNvPr id="151" name=""/>
           <p:cNvSpPr/>
           <p:nvPr/>
         </p:nvSpPr>
@@ -19637,7 +19661,7 @@
       </p:sp>
       <p:sp>
         <p:nvSpPr>
-          <p:cNvPr id="151" name=""/>
+          <p:cNvPr id="152" name=""/>
           <p:cNvSpPr/>
           <p:nvPr/>
         </p:nvSpPr>
@@ -19845,7 +19869,7 @@
       </p:sp>
       <p:sp>
         <p:nvSpPr>
-          <p:cNvPr id="152" name=""/>
+          <p:cNvPr id="153" name=""/>
           <p:cNvSpPr txBox="1"/>
           <p:nvPr/>
         </p:nvSpPr>
@@ -19929,7 +19953,7 @@
       </p:sp>
       <p:sp>
         <p:nvSpPr>
-          <p:cNvPr id="153" name=""/>
+          <p:cNvPr id="154" name=""/>
           <p:cNvSpPr txBox="1"/>
           <p:nvPr/>
         </p:nvSpPr>
@@ -19977,7 +20001,7 @@
       </p:sp>
       <p:sp>
         <p:nvSpPr>
-          <p:cNvPr id="154" name=""/>
+          <p:cNvPr id="155" name=""/>
           <p:cNvSpPr txBox="1"/>
           <p:nvPr/>
         </p:nvSpPr>
@@ -20025,7 +20049,7 @@
       </p:sp>
       <p:sp>
         <p:nvSpPr>
-          <p:cNvPr id="155" name=""/>
+          <p:cNvPr id="156" name=""/>
           <p:cNvSpPr/>
           <p:nvPr/>
         </p:nvSpPr>
@@ -20068,7 +20092,7 @@
       </p:sp>
       <p:sp>
         <p:nvSpPr>
-          <p:cNvPr id="156" name=""/>
+          <p:cNvPr id="157" name=""/>
           <p:cNvSpPr/>
           <p:nvPr/>
         </p:nvSpPr>
@@ -20125,7 +20149,7 @@
       </p:sp>
       <p:sp>
         <p:nvSpPr>
-          <p:cNvPr id="157" name=""/>
+          <p:cNvPr id="158" name=""/>
           <p:cNvSpPr/>
           <p:nvPr/>
         </p:nvSpPr>
@@ -20345,7 +20369,7 @@
       </p:sp>
       <p:sp>
         <p:nvSpPr>
-          <p:cNvPr id="158" name=""/>
+          <p:cNvPr id="159" name=""/>
           <p:cNvSpPr/>
           <p:nvPr/>
         </p:nvSpPr>
@@ -20566,7 +20590,7 @@
       </p:sp>
       <p:sp>
         <p:nvSpPr>
-          <p:cNvPr id="159" name=""/>
+          <p:cNvPr id="160" name=""/>
           <p:cNvSpPr/>
           <p:nvPr/>
         </p:nvSpPr>
@@ -20774,7 +20798,7 @@
       </p:sp>
       <p:sp>
         <p:nvSpPr>
-          <p:cNvPr id="160" name=""/>
+          <p:cNvPr id="161" name=""/>
           <p:cNvSpPr txBox="1"/>
           <p:nvPr/>
         </p:nvSpPr>
@@ -20822,7 +20846,7 @@
       </p:sp>
       <p:sp>
         <p:nvSpPr>
-          <p:cNvPr id="161" name=""/>
+          <p:cNvPr id="162" name=""/>
           <p:cNvSpPr txBox="1"/>
           <p:nvPr/>
         </p:nvSpPr>
@@ -20870,7 +20894,7 @@
       </p:sp>
       <p:sp>
         <p:nvSpPr>
-          <p:cNvPr id="162" name=""/>
+          <p:cNvPr id="163" name=""/>
           <p:cNvSpPr txBox="1"/>
           <p:nvPr/>
         </p:nvSpPr>
@@ -20918,7 +20942,7 @@
       </p:sp>
       <p:sp>
         <p:nvSpPr>
-          <p:cNvPr id="163" name=""/>
+          <p:cNvPr id="164" name=""/>
           <p:cNvSpPr/>
           <p:nvPr/>
         </p:nvSpPr>
@@ -20961,7 +20985,7 @@
       </p:sp>
       <p:sp>
         <p:nvSpPr>
-          <p:cNvPr id="164" name=""/>
+          <p:cNvPr id="165" name=""/>
           <p:cNvSpPr/>
           <p:nvPr/>
         </p:nvSpPr>
@@ -21018,7 +21042,7 @@
       </p:sp>
       <p:sp>
         <p:nvSpPr>
-          <p:cNvPr id="165" name=""/>
+          <p:cNvPr id="166" name=""/>
           <p:cNvSpPr/>
           <p:nvPr/>
         </p:nvSpPr>
@@ -21238,7 +21262,7 @@
       </p:sp>
       <p:sp>
         <p:nvSpPr>
-          <p:cNvPr id="166" name=""/>
+          <p:cNvPr id="167" name=""/>
           <p:cNvSpPr/>
           <p:nvPr/>
         </p:nvSpPr>
@@ -21459,7 +21483,7 @@
       </p:sp>
       <p:sp>
         <p:nvSpPr>
-          <p:cNvPr id="167" name=""/>
+          <p:cNvPr id="168" name=""/>
           <p:cNvSpPr/>
           <p:nvPr/>
         </p:nvSpPr>
@@ -21667,7 +21691,7 @@
       </p:sp>
       <p:sp>
         <p:nvSpPr>
-          <p:cNvPr id="168" name=""/>
+          <p:cNvPr id="169" name=""/>
           <p:cNvSpPr txBox="1"/>
           <p:nvPr/>
         </p:nvSpPr>
@@ -21715,7 +21739,7 @@
       </p:sp>
       <p:sp>
         <p:nvSpPr>
-          <p:cNvPr id="169" name=""/>
+          <p:cNvPr id="170" name=""/>
           <p:cNvSpPr txBox="1"/>
           <p:nvPr/>
         </p:nvSpPr>
@@ -21763,7 +21787,7 @@
       </p:sp>
       <p:sp>
         <p:nvSpPr>
-          <p:cNvPr id="170" name=""/>
+          <p:cNvPr id="171" name=""/>
           <p:cNvSpPr txBox="1"/>
           <p:nvPr/>
         </p:nvSpPr>
@@ -21823,7 +21847,7 @@
       </p:sp>
       <p:sp>
         <p:nvSpPr>
-          <p:cNvPr id="171" name=""/>
+          <p:cNvPr id="172" name=""/>
           <p:cNvSpPr/>
           <p:nvPr/>
         </p:nvSpPr>
@@ -21875,7 +21899,7 @@
       </p:sp>
       <p:sp>
         <p:nvSpPr>
-          <p:cNvPr id="172" name=""/>
+          <p:cNvPr id="173" name=""/>
           <p:cNvSpPr/>
           <p:nvPr/>
         </p:nvSpPr>
@@ -21932,7 +21956,7 @@
       </p:sp>
       <p:sp>
         <p:nvSpPr>
-          <p:cNvPr id="173" name=""/>
+          <p:cNvPr id="174" name=""/>
           <p:cNvSpPr txBox="1"/>
           <p:nvPr/>
         </p:nvSpPr>
@@ -21980,7 +22004,7 @@
       </p:sp>
       <p:sp>
         <p:nvSpPr>
-          <p:cNvPr id="174" name=""/>
+          <p:cNvPr id="175" name=""/>
           <p:cNvSpPr/>
           <p:nvPr/>
         </p:nvSpPr>
@@ -22200,7 +22224,7 @@
       </p:sp>
       <p:sp>
         <p:nvSpPr>
-          <p:cNvPr id="175" name=""/>
+          <p:cNvPr id="176" name=""/>
           <p:cNvSpPr txBox="1"/>
           <p:nvPr/>
         </p:nvSpPr>
@@ -22248,7 +22272,7 @@
       </p:sp>
       <p:sp>
         <p:nvSpPr>
-          <p:cNvPr id="176" name=""/>
+          <p:cNvPr id="177" name=""/>
           <p:cNvSpPr txBox="1"/>
           <p:nvPr/>
         </p:nvSpPr>
@@ -22296,7 +22320,7 @@
       </p:sp>
       <p:sp>
         <p:nvSpPr>
-          <p:cNvPr id="177" name=""/>
+          <p:cNvPr id="178" name=""/>
           <p:cNvSpPr txBox="1"/>
           <p:nvPr/>
         </p:nvSpPr>
@@ -22368,7 +22392,7 @@
       </p:sp>
       <p:sp>
         <p:nvSpPr>
-          <p:cNvPr id="178" name=""/>
+          <p:cNvPr id="179" name=""/>
           <p:cNvSpPr txBox="1"/>
           <p:nvPr/>
         </p:nvSpPr>
@@ -22446,7 +22470,7 @@
       </p:grpSpPr>
       <p:sp>
         <p:nvSpPr>
-          <p:cNvPr id="179" name=""/>
+          <p:cNvPr id="180" name=""/>
           <p:cNvSpPr/>
           <p:nvPr/>
         </p:nvSpPr>
@@ -22506,7 +22530,7 @@
       </p:sp>
       <p:sp>
         <p:nvSpPr>
-          <p:cNvPr id="180" name=""/>
+          <p:cNvPr id="181" name=""/>
           <p:cNvSpPr/>
           <p:nvPr/>
         </p:nvSpPr>
@@ -22566,7 +22590,7 @@
       </p:sp>
       <p:sp>
         <p:nvSpPr>
-          <p:cNvPr id="181" name=""/>
+          <p:cNvPr id="182" name=""/>
           <p:cNvSpPr/>
           <p:nvPr/>
         </p:nvSpPr>
@@ -22626,7 +22650,7 @@
       </p:sp>
       <p:sp>
         <p:nvSpPr>
-          <p:cNvPr id="182" name=""/>
+          <p:cNvPr id="183" name=""/>
           <p:cNvSpPr/>
           <p:nvPr/>
         </p:nvSpPr>
@@ -22686,7 +22710,7 @@
       </p:sp>
       <p:sp>
         <p:nvSpPr>
-          <p:cNvPr id="183" name=""/>
+          <p:cNvPr id="184" name=""/>
           <p:cNvSpPr/>
           <p:nvPr/>
         </p:nvSpPr>
@@ -22786,7 +22810,7 @@
       </p:sp>
       <p:sp>
         <p:nvSpPr>
-          <p:cNvPr id="184" name=""/>
+          <p:cNvPr id="185" name=""/>
           <p:cNvSpPr/>
           <p:nvPr/>
         </p:nvSpPr>
@@ -22846,7 +22870,7 @@
       </p:sp>
       <p:sp>
         <p:nvSpPr>
-          <p:cNvPr id="185" name=""/>
+          <p:cNvPr id="186" name=""/>
           <p:cNvSpPr/>
           <p:nvPr/>
         </p:nvSpPr>
@@ -22974,7 +22998,7 @@
       </p:sp>
       <p:sp>
         <p:nvSpPr>
-          <p:cNvPr id="186" name=""/>
+          <p:cNvPr id="187" name=""/>
           <p:cNvSpPr txBox="1"/>
           <p:nvPr/>
         </p:nvSpPr>
@@ -23022,7 +23046,7 @@
       </p:sp>
       <p:sp>
         <p:nvSpPr>
-          <p:cNvPr id="187" name=""/>
+          <p:cNvPr id="188" name=""/>
           <p:cNvSpPr txBox="1"/>
           <p:nvPr/>
         </p:nvSpPr>
@@ -23070,7 +23094,7 @@
       </p:sp>
       <p:sp>
         <p:nvSpPr>
-          <p:cNvPr id="188" name=""/>
+          <p:cNvPr id="189" name=""/>
           <p:cNvSpPr txBox="1"/>
           <p:nvPr/>
         </p:nvSpPr>
@@ -23118,7 +23142,7 @@
       </p:sp>
       <p:sp>
         <p:nvSpPr>
-          <p:cNvPr id="189" name=""/>
+          <p:cNvPr id="190" name=""/>
           <p:cNvSpPr txBox="1"/>
           <p:nvPr/>
         </p:nvSpPr>
@@ -23166,7 +23190,7 @@
       </p:sp>
       <p:sp>
         <p:nvSpPr>
-          <p:cNvPr id="190" name=""/>
+          <p:cNvPr id="191" name=""/>
           <p:cNvSpPr/>
           <p:nvPr/>
         </p:nvSpPr>
@@ -23294,7 +23318,7 @@
       </p:sp>
       <p:sp>
         <p:nvSpPr>
-          <p:cNvPr id="191" name=""/>
+          <p:cNvPr id="192" name=""/>
           <p:cNvSpPr txBox="1"/>
           <p:nvPr/>
         </p:nvSpPr>
@@ -23342,7 +23366,7 @@
       </p:sp>
       <p:sp>
         <p:nvSpPr>
-          <p:cNvPr id="192" name=""/>
+          <p:cNvPr id="193" name=""/>
           <p:cNvSpPr txBox="1"/>
           <p:nvPr/>
         </p:nvSpPr>
@@ -23390,7 +23414,7 @@
       </p:sp>
       <p:sp>
         <p:nvSpPr>
-          <p:cNvPr id="193" name=""/>
+          <p:cNvPr id="194" name=""/>
           <p:cNvSpPr txBox="1"/>
           <p:nvPr/>
         </p:nvSpPr>
@@ -23438,7 +23462,7 @@
       </p:sp>
       <p:sp>
         <p:nvSpPr>
-          <p:cNvPr id="194" name=""/>
+          <p:cNvPr id="195" name=""/>
           <p:cNvSpPr txBox="1"/>
           <p:nvPr/>
         </p:nvSpPr>
@@ -23486,7 +23510,7 @@
       </p:sp>
       <p:sp>
         <p:nvSpPr>
-          <p:cNvPr id="195" name=""/>
+          <p:cNvPr id="196" name=""/>
           <p:cNvSpPr txBox="1"/>
           <p:nvPr/>
         </p:nvSpPr>
@@ -23534,7 +23558,7 @@
       </p:sp>
       <p:sp>
         <p:nvSpPr>
-          <p:cNvPr id="196" name=""/>
+          <p:cNvPr id="197" name=""/>
           <p:cNvSpPr txBox="1"/>
           <p:nvPr/>
         </p:nvSpPr>
@@ -23582,7 +23606,7 @@
       </p:sp>
       <p:sp>
         <p:nvSpPr>
-          <p:cNvPr id="197" name=""/>
+          <p:cNvPr id="198" name=""/>
           <p:cNvSpPr txBox="1"/>
           <p:nvPr/>
         </p:nvSpPr>
@@ -23630,7 +23654,7 @@
       </p:sp>
       <p:sp>
         <p:nvSpPr>
-          <p:cNvPr id="198" name=""/>
+          <p:cNvPr id="199" name=""/>
           <p:cNvSpPr/>
           <p:nvPr/>
         </p:nvSpPr>
@@ -23758,7 +23782,7 @@
       </p:sp>
       <p:sp>
         <p:nvSpPr>
-          <p:cNvPr id="199" name=""/>
+          <p:cNvPr id="200" name=""/>
           <p:cNvSpPr txBox="1"/>
           <p:nvPr/>
         </p:nvSpPr>
@@ -23806,7 +23830,7 @@
       </p:sp>
       <p:sp>
         <p:nvSpPr>
-          <p:cNvPr id="200" name=""/>
+          <p:cNvPr id="201" name=""/>
           <p:cNvSpPr txBox="1"/>
           <p:nvPr/>
         </p:nvSpPr>
@@ -23854,7 +23878,7 @@
       </p:sp>
       <p:sp>
         <p:nvSpPr>
-          <p:cNvPr id="201" name=""/>
+          <p:cNvPr id="202" name=""/>
           <p:cNvSpPr txBox="1"/>
           <p:nvPr/>
         </p:nvSpPr>
@@ -23902,7 +23926,7 @@
       </p:sp>
       <p:sp>
         <p:nvSpPr>
-          <p:cNvPr id="202" name=""/>
+          <p:cNvPr id="203" name=""/>
           <p:cNvSpPr txBox="1"/>
           <p:nvPr/>
         </p:nvSpPr>
@@ -23950,7 +23974,7 @@
       </p:sp>
       <p:sp>
         <p:nvSpPr>
-          <p:cNvPr id="203" name=""/>
+          <p:cNvPr id="204" name=""/>
           <p:cNvSpPr txBox="1"/>
           <p:nvPr/>
         </p:nvSpPr>
@@ -23998,7 +24022,7 @@
       </p:sp>
       <p:sp>
         <p:nvSpPr>
-          <p:cNvPr id="204" name=""/>
+          <p:cNvPr id="205" name=""/>
           <p:cNvSpPr/>
           <p:nvPr/>
         </p:nvSpPr>
@@ -24126,7 +24150,7 @@
       </p:sp>
       <p:sp>
         <p:nvSpPr>
-          <p:cNvPr id="205" name=""/>
+          <p:cNvPr id="206" name=""/>
           <p:cNvSpPr txBox="1"/>
           <p:nvPr/>
         </p:nvSpPr>
@@ -24174,7 +24198,7 @@
       </p:sp>
       <p:sp>
         <p:nvSpPr>
-          <p:cNvPr id="206" name=""/>
+          <p:cNvPr id="207" name=""/>
           <p:cNvSpPr txBox="1"/>
           <p:nvPr/>
         </p:nvSpPr>
@@ -24222,7 +24246,7 @@
       </p:sp>
       <p:sp>
         <p:nvSpPr>
-          <p:cNvPr id="207" name=""/>
+          <p:cNvPr id="208" name=""/>
           <p:cNvSpPr txBox="1"/>
           <p:nvPr/>
         </p:nvSpPr>
@@ -24270,7 +24294,7 @@
       </p:sp>
       <p:sp>
         <p:nvSpPr>
-          <p:cNvPr id="208" name=""/>
+          <p:cNvPr id="209" name=""/>
           <p:cNvSpPr txBox="1"/>
           <p:nvPr/>
         </p:nvSpPr>
@@ -24318,7 +24342,7 @@
       </p:sp>
       <p:sp>
         <p:nvSpPr>
-          <p:cNvPr id="209" name=""/>
+          <p:cNvPr id="210" name=""/>
           <p:cNvSpPr txBox="1"/>
           <p:nvPr/>
         </p:nvSpPr>
@@ -24366,7 +24390,7 @@
       </p:sp>
       <p:sp>
         <p:nvSpPr>
-          <p:cNvPr id="210" name=""/>
+          <p:cNvPr id="211" name=""/>
           <p:cNvSpPr txBox="1"/>
           <p:nvPr/>
         </p:nvSpPr>
@@ -24414,7 +24438,7 @@
       </p:sp>
       <p:sp>
         <p:nvSpPr>
-          <p:cNvPr id="211" name=""/>
+          <p:cNvPr id="212" name=""/>
           <p:cNvSpPr txBox="1"/>
           <p:nvPr/>
         </p:nvSpPr>
@@ -24462,7 +24486,7 @@
       </p:sp>
       <p:sp>
         <p:nvSpPr>
-          <p:cNvPr id="212" name=""/>
+          <p:cNvPr id="213" name=""/>
           <p:cNvSpPr txBox="1"/>
           <p:nvPr/>
         </p:nvSpPr>
@@ -24540,7 +24564,7 @@
       </p:grpSpPr>
       <p:sp>
         <p:nvSpPr>
-          <p:cNvPr id="213" name=""/>
+          <p:cNvPr id="214" name=""/>
           <p:cNvSpPr/>
           <p:nvPr/>
         </p:nvSpPr>
@@ -24600,7 +24624,7 @@
       </p:sp>
       <p:sp>
         <p:nvSpPr>
-          <p:cNvPr id="214" name=""/>
+          <p:cNvPr id="215" name=""/>
           <p:cNvSpPr/>
           <p:nvPr/>
         </p:nvSpPr>
@@ -24660,7 +24684,7 @@
       </p:sp>
       <p:sp>
         <p:nvSpPr>
-          <p:cNvPr id="215" name=""/>
+          <p:cNvPr id="216" name=""/>
           <p:cNvSpPr/>
           <p:nvPr/>
         </p:nvSpPr>
@@ -24720,7 +24744,7 @@
       </p:sp>
       <p:sp>
         <p:nvSpPr>
-          <p:cNvPr id="216" name=""/>
+          <p:cNvPr id="217" name=""/>
           <p:cNvSpPr/>
           <p:nvPr/>
         </p:nvSpPr>
@@ -24780,7 +24804,7 @@
       </p:sp>
       <p:sp>
         <p:nvSpPr>
-          <p:cNvPr id="217" name=""/>
+          <p:cNvPr id="218" name=""/>
           <p:cNvSpPr txBox="1"/>
           <p:nvPr/>
         </p:nvSpPr>
@@ -24858,7 +24882,7 @@
       </p:grpSpPr>
       <p:sp>
         <p:nvSpPr>
-          <p:cNvPr id="218" name=""/>
+          <p:cNvPr id="219" name=""/>
           <p:cNvSpPr/>
           <p:nvPr/>
         </p:nvSpPr>
@@ -24918,7 +24942,7 @@
       </p:sp>
       <p:sp>
         <p:nvSpPr>
-          <p:cNvPr id="219" name=""/>
+          <p:cNvPr id="220" name=""/>
           <p:cNvSpPr/>
           <p:nvPr/>
         </p:nvSpPr>
@@ -24978,7 +25002,7 @@
       </p:sp>
       <p:sp>
         <p:nvSpPr>
-          <p:cNvPr id="220" name=""/>
+          <p:cNvPr id="221" name=""/>
           <p:cNvSpPr/>
           <p:nvPr/>
         </p:nvSpPr>
@@ -25038,7 +25062,7 @@
       </p:sp>
       <p:sp>
         <p:nvSpPr>
-          <p:cNvPr id="221" name=""/>
+          <p:cNvPr id="222" name=""/>
           <p:cNvSpPr/>
           <p:nvPr/>
         </p:nvSpPr>
@@ -25098,7 +25122,7 @@
       </p:sp>
       <p:sp>
         <p:nvSpPr>
-          <p:cNvPr id="222" name=""/>
+          <p:cNvPr id="223" name=""/>
           <p:cNvSpPr txBox="1"/>
           <p:nvPr/>
         </p:nvSpPr>
@@ -25146,7 +25170,7 @@
       </p:sp>
       <p:sp>
         <p:nvSpPr>
-          <p:cNvPr id="223" name=""/>
+          <p:cNvPr id="224" name=""/>
           <p:cNvSpPr txBox="1"/>
           <p:nvPr/>
         </p:nvSpPr>
@@ -25194,7 +25218,7 @@
       </p:sp>
       <p:sp>
         <p:nvSpPr>
-          <p:cNvPr id="224" name=""/>
+          <p:cNvPr id="225" name=""/>
           <p:cNvSpPr txBox="1"/>
           <p:nvPr/>
         </p:nvSpPr>
@@ -25242,7 +25266,7 @@
       </p:sp>
       <p:sp>
         <p:nvSpPr>
-          <p:cNvPr id="225" name=""/>
+          <p:cNvPr id="226" name=""/>
           <p:cNvSpPr txBox="1"/>
           <p:nvPr/>
         </p:nvSpPr>
@@ -25290,7 +25314,7 @@
       </p:sp>
       <p:sp>
         <p:nvSpPr>
-          <p:cNvPr id="226" name=""/>
+          <p:cNvPr id="227" name=""/>
           <p:cNvSpPr txBox="1"/>
           <p:nvPr/>
         </p:nvSpPr>
@@ -25338,7 +25362,7 @@
       </p:sp>
       <p:sp>
         <p:nvSpPr>
-          <p:cNvPr id="227" name=""/>
+          <p:cNvPr id="228" name=""/>
           <p:cNvSpPr txBox="1"/>
           <p:nvPr/>
         </p:nvSpPr>
@@ -25386,7 +25410,7 @@
       </p:sp>
       <p:sp>
         <p:nvSpPr>
-          <p:cNvPr id="228" name=""/>
+          <p:cNvPr id="229" name=""/>
           <p:cNvSpPr txBox="1"/>
           <p:nvPr/>
         </p:nvSpPr>
@@ -25434,7 +25458,7 @@
       </p:sp>
       <p:sp>
         <p:nvSpPr>
-          <p:cNvPr id="229" name=""/>
+          <p:cNvPr id="230" name=""/>
           <p:cNvSpPr txBox="1"/>
           <p:nvPr/>
         </p:nvSpPr>
@@ -25482,7 +25506,7 @@
       </p:sp>
       <p:sp>
         <p:nvSpPr>
-          <p:cNvPr id="230" name=""/>
+          <p:cNvPr id="231" name=""/>
           <p:cNvSpPr txBox="1"/>
           <p:nvPr/>
         </p:nvSpPr>
@@ -25530,7 +25554,7 @@
       </p:sp>
       <p:sp>
         <p:nvSpPr>
-          <p:cNvPr id="231" name=""/>
+          <p:cNvPr id="232" name=""/>
           <p:cNvSpPr txBox="1"/>
           <p:nvPr/>
         </p:nvSpPr>
@@ -25578,7 +25602,7 @@
       </p:sp>
       <p:sp>
         <p:nvSpPr>
-          <p:cNvPr id="232" name=""/>
+          <p:cNvPr id="233" name=""/>
           <p:cNvSpPr txBox="1"/>
           <p:nvPr/>
         </p:nvSpPr>
@@ -25626,7 +25650,7 @@
       </p:sp>
       <p:sp>
         <p:nvSpPr>
-          <p:cNvPr id="233" name=""/>
+          <p:cNvPr id="234" name=""/>
           <p:cNvSpPr txBox="1"/>
           <p:nvPr/>
         </p:nvSpPr>
@@ -25674,7 +25698,7 @@
       </p:sp>
       <p:sp>
         <p:nvSpPr>
-          <p:cNvPr id="234" name=""/>
+          <p:cNvPr id="235" name=""/>
           <p:cNvSpPr txBox="1"/>
           <p:nvPr/>
         </p:nvSpPr>
@@ -25722,7 +25746,7 @@
       </p:sp>
       <p:sp>
         <p:nvSpPr>
-          <p:cNvPr id="235" name=""/>
+          <p:cNvPr id="236" name=""/>
           <p:cNvSpPr txBox="1"/>
           <p:nvPr/>
         </p:nvSpPr>
@@ -25770,7 +25794,7 @@
       </p:sp>
       <p:sp>
         <p:nvSpPr>
-          <p:cNvPr id="236" name=""/>
+          <p:cNvPr id="237" name=""/>
           <p:cNvSpPr txBox="1"/>
           <p:nvPr/>
         </p:nvSpPr>
@@ -25818,7 +25842,7 @@
       </p:sp>
       <p:sp>
         <p:nvSpPr>
-          <p:cNvPr id="237" name=""/>
+          <p:cNvPr id="238" name=""/>
           <p:cNvSpPr txBox="1"/>
           <p:nvPr/>
         </p:nvSpPr>
@@ -25866,7 +25890,7 @@
       </p:sp>
       <p:sp>
         <p:nvSpPr>
-          <p:cNvPr id="238" name=""/>
+          <p:cNvPr id="239" name=""/>
           <p:cNvSpPr txBox="1"/>
           <p:nvPr/>
         </p:nvSpPr>
@@ -25914,7 +25938,7 @@
       </p:sp>
       <p:sp>
         <p:nvSpPr>
-          <p:cNvPr id="239" name=""/>
+          <p:cNvPr id="240" name=""/>
           <p:cNvSpPr txBox="1"/>
           <p:nvPr/>
         </p:nvSpPr>
@@ -25962,7 +25986,7 @@
       </p:sp>
       <p:pic>
         <p:nvPicPr>
-          <p:cNvPr id="240" name=""/>
+          <p:cNvPr id="241" name=""/>
           <p:cNvPicPr/>
           <p:nvPr/>
         </p:nvPicPr>
@@ -25986,7 +26010,7 @@
       </p:pic>
       <p:pic>
         <p:nvPicPr>
-          <p:cNvPr id="241" name=""/>
+          <p:cNvPr id="242" name=""/>
           <p:cNvPicPr/>
           <p:nvPr/>
         </p:nvPicPr>
@@ -26010,7 +26034,7 @@
       </p:pic>
       <p:sp>
         <p:nvSpPr>
-          <p:cNvPr id="242" name=""/>
+          <p:cNvPr id="243" name=""/>
           <p:cNvSpPr txBox="1"/>
           <p:nvPr/>
         </p:nvSpPr>
@@ -26058,7 +26082,7 @@
       </p:sp>
       <p:sp>
         <p:nvSpPr>
-          <p:cNvPr id="243" name=""/>
+          <p:cNvPr id="244" name=""/>
           <p:cNvSpPr txBox="1"/>
           <p:nvPr/>
         </p:nvSpPr>
@@ -26136,7 +26160,7 @@
       </p:grpSpPr>
       <p:sp>
         <p:nvSpPr>
-          <p:cNvPr id="244" name=""/>
+          <p:cNvPr id="245" name=""/>
           <p:cNvSpPr/>
           <p:nvPr/>
         </p:nvSpPr>
@@ -26196,7 +26220,7 @@
       </p:sp>
       <p:sp>
         <p:nvSpPr>
-          <p:cNvPr id="245" name=""/>
+          <p:cNvPr id="246" name=""/>
           <p:cNvSpPr/>
           <p:nvPr/>
         </p:nvSpPr>
@@ -26256,7 +26280,7 @@
       </p:sp>
       <p:sp>
         <p:nvSpPr>
-          <p:cNvPr id="246" name=""/>
+          <p:cNvPr id="247" name=""/>
           <p:cNvSpPr/>
           <p:nvPr/>
         </p:nvSpPr>
@@ -26316,7 +26340,7 @@
       </p:sp>
       <p:sp>
         <p:nvSpPr>
-          <p:cNvPr id="247" name=""/>
+          <p:cNvPr id="248" name=""/>
           <p:cNvSpPr/>
           <p:nvPr/>
         </p:nvSpPr>
@@ -26376,7 +26400,7 @@
       </p:sp>
       <p:sp>
         <p:nvSpPr>
-          <p:cNvPr id="248" name=""/>
+          <p:cNvPr id="249" name=""/>
           <p:cNvSpPr/>
           <p:nvPr/>
         </p:nvSpPr>
@@ -26504,7 +26528,7 @@
       </p:sp>
       <p:sp>
         <p:nvSpPr>
-          <p:cNvPr id="249" name=""/>
+          <p:cNvPr id="250" name=""/>
           <p:cNvSpPr txBox="1"/>
           <p:nvPr/>
         </p:nvSpPr>
@@ -26552,7 +26576,7 @@
       </p:sp>
       <p:sp>
         <p:nvSpPr>
-          <p:cNvPr id="250" name=""/>
+          <p:cNvPr id="251" name=""/>
           <p:cNvSpPr txBox="1"/>
           <p:nvPr/>
         </p:nvSpPr>
@@ -26600,7 +26624,7 @@
       </p:sp>
       <p:sp>
         <p:nvSpPr>
-          <p:cNvPr id="251" name=""/>
+          <p:cNvPr id="252" name=""/>
           <p:cNvSpPr txBox="1"/>
           <p:nvPr/>
         </p:nvSpPr>
@@ -26648,7 +26672,7 @@
       </p:sp>
       <p:sp>
         <p:nvSpPr>
-          <p:cNvPr id="252" name=""/>
+          <p:cNvPr id="253" name=""/>
           <p:cNvSpPr/>
           <p:nvPr/>
         </p:nvSpPr>
@@ -26776,7 +26800,7 @@
       </p:sp>
       <p:sp>
         <p:nvSpPr>
-          <p:cNvPr id="253" name=""/>
+          <p:cNvPr id="254" name=""/>
           <p:cNvSpPr txBox="1"/>
           <p:nvPr/>
         </p:nvSpPr>
@@ -26824,7 +26848,7 @@
       </p:sp>
       <p:sp>
         <p:nvSpPr>
-          <p:cNvPr id="254" name=""/>
+          <p:cNvPr id="255" name=""/>
           <p:cNvSpPr txBox="1"/>
           <p:nvPr/>
         </p:nvSpPr>
@@ -26872,7 +26896,7 @@
       </p:sp>
       <p:sp>
         <p:nvSpPr>
-          <p:cNvPr id="255" name=""/>
+          <p:cNvPr id="256" name=""/>
           <p:cNvSpPr txBox="1"/>
           <p:nvPr/>
         </p:nvSpPr>
@@ -26920,7 +26944,7 @@
       </p:sp>
       <p:sp>
         <p:nvSpPr>
-          <p:cNvPr id="256" name=""/>
+          <p:cNvPr id="257" name=""/>
           <p:cNvSpPr txBox="1"/>
           <p:nvPr/>
         </p:nvSpPr>
@@ -26968,7 +26992,7 @@
       </p:sp>
       <p:sp>
         <p:nvSpPr>
-          <p:cNvPr id="257" name=""/>
+          <p:cNvPr id="258" name=""/>
           <p:cNvSpPr txBox="1"/>
           <p:nvPr/>
         </p:nvSpPr>
@@ -27016,7 +27040,7 @@
       </p:sp>
       <p:sp>
         <p:nvSpPr>
-          <p:cNvPr id="258" name=""/>
+          <p:cNvPr id="259" name=""/>
           <p:cNvSpPr txBox="1"/>
           <p:nvPr/>
         </p:nvSpPr>
@@ -27064,7 +27088,7 @@
       </p:sp>
       <p:sp>
         <p:nvSpPr>
-          <p:cNvPr id="259" name=""/>
+          <p:cNvPr id="260" name=""/>
           <p:cNvSpPr/>
           <p:nvPr/>
         </p:nvSpPr>
@@ -27192,7 +27216,7 @@
       </p:sp>
       <p:sp>
         <p:nvSpPr>
-          <p:cNvPr id="260" name=""/>
+          <p:cNvPr id="261" name=""/>
           <p:cNvSpPr txBox="1"/>
           <p:nvPr/>
         </p:nvSpPr>
@@ -27240,7 +27264,7 @@
       </p:sp>
       <p:sp>
         <p:nvSpPr>
-          <p:cNvPr id="261" name=""/>
+          <p:cNvPr id="262" name=""/>
           <p:cNvSpPr txBox="1"/>
           <p:nvPr/>
         </p:nvSpPr>
@@ -27288,7 +27312,7 @@
       </p:sp>
       <p:sp>
         <p:nvSpPr>
-          <p:cNvPr id="262" name=""/>
+          <p:cNvPr id="263" name=""/>
           <p:cNvSpPr txBox="1"/>
           <p:nvPr/>
         </p:nvSpPr>
@@ -27336,7 +27360,7 @@
       </p:sp>
       <p:sp>
         <p:nvSpPr>
-          <p:cNvPr id="263" name=""/>
+          <p:cNvPr id="264" name=""/>
           <p:cNvSpPr txBox="1"/>
           <p:nvPr/>
         </p:nvSpPr>
@@ -27384,7 +27408,7 @@
       </p:sp>
       <p:sp>
         <p:nvSpPr>
-          <p:cNvPr id="264" name=""/>
+          <p:cNvPr id="265" name=""/>
           <p:cNvSpPr txBox="1"/>
           <p:nvPr/>
         </p:nvSpPr>
@@ -27432,7 +27456,7 @@
       </p:sp>
       <p:sp>
         <p:nvSpPr>
-          <p:cNvPr id="265" name=""/>
+          <p:cNvPr id="266" name=""/>
           <p:cNvSpPr txBox="1"/>
           <p:nvPr/>
         </p:nvSpPr>
@@ -27492,7 +27516,7 @@
       </p:sp>
       <p:sp>
         <p:nvSpPr>
-          <p:cNvPr id="266" name=""/>
+          <p:cNvPr id="267" name=""/>
           <p:cNvSpPr txBox="1"/>
           <p:nvPr/>
         </p:nvSpPr>
@@ -27570,7 +27594,7 @@
       </p:grpSpPr>
       <p:sp>
         <p:nvSpPr>
-          <p:cNvPr id="267" name=""/>
+          <p:cNvPr id="268" name=""/>
           <p:cNvSpPr/>
           <p:nvPr/>
         </p:nvSpPr>
@@ -27630,7 +27654,7 @@
       </p:sp>
       <p:sp>
         <p:nvSpPr>
-          <p:cNvPr id="268" name=""/>
+          <p:cNvPr id="269" name=""/>
           <p:cNvSpPr/>
           <p:nvPr/>
         </p:nvSpPr>
@@ -27690,7 +27714,7 @@
       </p:sp>
       <p:sp>
         <p:nvSpPr>
-          <p:cNvPr id="269" name=""/>
+          <p:cNvPr id="270" name=""/>
           <p:cNvSpPr/>
           <p:nvPr/>
         </p:nvSpPr>
@@ -27750,7 +27774,7 @@
       </p:sp>
       <p:sp>
         <p:nvSpPr>
-          <p:cNvPr id="270" name=""/>
+          <p:cNvPr id="271" name=""/>
           <p:cNvSpPr/>
           <p:nvPr/>
         </p:nvSpPr>
@@ -27810,7 +27834,7 @@
       </p:sp>
       <p:sp>
         <p:nvSpPr>
-          <p:cNvPr id="271" name=""/>
+          <p:cNvPr id="272" name=""/>
           <p:cNvSpPr txBox="1"/>
           <p:nvPr/>
         </p:nvSpPr>
@@ -27858,7 +27882,7 @@
       </p:sp>
       <p:sp>
         <p:nvSpPr>
-          <p:cNvPr id="272" name=""/>
+          <p:cNvPr id="273" name=""/>
           <p:cNvSpPr txBox="1"/>
           <p:nvPr/>
         </p:nvSpPr>
@@ -27906,7 +27930,7 @@
       </p:sp>
       <p:sp>
         <p:nvSpPr>
-          <p:cNvPr id="273" name=""/>
+          <p:cNvPr id="274" name=""/>
           <p:cNvSpPr txBox="1"/>
           <p:nvPr/>
         </p:nvSpPr>

--- a/slides/2026-07-01-ai-projects-intro.pptx
+++ b/slides/2026-07-01-ai-projects-intro.pptx
@@ -1558,7 +1558,7 @@
       </p:grpSpPr>
       <p:sp>
         <p:nvSpPr>
-          <p:cNvPr id="275" name=""/>
+          <p:cNvPr id="279" name=""/>
           <p:cNvSpPr/>
           <p:nvPr/>
         </p:nvSpPr>
@@ -1618,7 +1618,7 @@
       </p:sp>
       <p:sp>
         <p:nvSpPr>
-          <p:cNvPr id="276" name=""/>
+          <p:cNvPr id="280" name=""/>
           <p:cNvSpPr/>
           <p:nvPr/>
         </p:nvSpPr>
@@ -1678,7 +1678,7 @@
       </p:sp>
       <p:sp>
         <p:nvSpPr>
-          <p:cNvPr id="277" name=""/>
+          <p:cNvPr id="281" name=""/>
           <p:cNvSpPr/>
           <p:nvPr/>
         </p:nvSpPr>
@@ -1738,7 +1738,7 @@
       </p:sp>
       <p:sp>
         <p:nvSpPr>
-          <p:cNvPr id="278" name=""/>
+          <p:cNvPr id="282" name=""/>
           <p:cNvSpPr/>
           <p:nvPr/>
         </p:nvSpPr>
@@ -1798,7 +1798,7 @@
       </p:sp>
       <p:sp>
         <p:nvSpPr>
-          <p:cNvPr id="279" name=""/>
+          <p:cNvPr id="283" name=""/>
           <p:cNvSpPr/>
           <p:nvPr/>
         </p:nvSpPr>
@@ -1926,7 +1926,7 @@
       </p:sp>
       <p:sp>
         <p:nvSpPr>
-          <p:cNvPr id="280" name=""/>
+          <p:cNvPr id="284" name=""/>
           <p:cNvSpPr txBox="1"/>
           <p:nvPr/>
         </p:nvSpPr>
@@ -1974,7 +1974,7 @@
       </p:sp>
       <p:sp>
         <p:nvSpPr>
-          <p:cNvPr id="281" name=""/>
+          <p:cNvPr id="285" name=""/>
           <p:cNvSpPr txBox="1"/>
           <p:nvPr/>
         </p:nvSpPr>
@@ -2022,7 +2022,7 @@
       </p:sp>
       <p:sp>
         <p:nvSpPr>
-          <p:cNvPr id="282" name=""/>
+          <p:cNvPr id="286" name=""/>
           <p:cNvSpPr txBox="1"/>
           <p:nvPr/>
         </p:nvSpPr>
@@ -2070,7 +2070,7 @@
       </p:sp>
       <p:sp>
         <p:nvSpPr>
-          <p:cNvPr id="283" name=""/>
+          <p:cNvPr id="287" name=""/>
           <p:cNvSpPr txBox="1"/>
           <p:nvPr/>
         </p:nvSpPr>
@@ -2118,7 +2118,7 @@
       </p:sp>
       <p:sp>
         <p:nvSpPr>
-          <p:cNvPr id="284" name=""/>
+          <p:cNvPr id="288" name=""/>
           <p:cNvSpPr txBox="1"/>
           <p:nvPr/>
         </p:nvSpPr>
@@ -2166,7 +2166,7 @@
       </p:sp>
       <p:sp>
         <p:nvSpPr>
-          <p:cNvPr id="285" name=""/>
+          <p:cNvPr id="289" name=""/>
           <p:cNvSpPr/>
           <p:nvPr/>
         </p:nvSpPr>
@@ -2294,7 +2294,7 @@
       </p:sp>
       <p:sp>
         <p:nvSpPr>
-          <p:cNvPr id="286" name=""/>
+          <p:cNvPr id="290" name=""/>
           <p:cNvSpPr txBox="1"/>
           <p:nvPr/>
         </p:nvSpPr>
@@ -2342,7 +2342,7 @@
       </p:sp>
       <p:sp>
         <p:nvSpPr>
-          <p:cNvPr id="287" name=""/>
+          <p:cNvPr id="291" name=""/>
           <p:cNvSpPr txBox="1"/>
           <p:nvPr/>
         </p:nvSpPr>
@@ -2390,7 +2390,7 @@
       </p:sp>
       <p:sp>
         <p:nvSpPr>
-          <p:cNvPr id="288" name=""/>
+          <p:cNvPr id="292" name=""/>
           <p:cNvSpPr/>
           <p:nvPr/>
         </p:nvSpPr>
@@ -2518,7 +2518,7 @@
       </p:sp>
       <p:sp>
         <p:nvSpPr>
-          <p:cNvPr id="289" name=""/>
+          <p:cNvPr id="293" name=""/>
           <p:cNvSpPr txBox="1"/>
           <p:nvPr/>
         </p:nvSpPr>
@@ -2566,7 +2566,7 @@
       </p:sp>
       <p:sp>
         <p:nvSpPr>
-          <p:cNvPr id="290" name=""/>
+          <p:cNvPr id="294" name=""/>
           <p:cNvSpPr txBox="1"/>
           <p:nvPr/>
         </p:nvSpPr>
@@ -2614,7 +2614,7 @@
       </p:sp>
       <p:sp>
         <p:nvSpPr>
-          <p:cNvPr id="291" name=""/>
+          <p:cNvPr id="295" name=""/>
           <p:cNvSpPr txBox="1"/>
           <p:nvPr/>
         </p:nvSpPr>
@@ -2662,7 +2662,7 @@
       </p:sp>
       <p:sp>
         <p:nvSpPr>
-          <p:cNvPr id="292" name=""/>
+          <p:cNvPr id="296" name=""/>
           <p:cNvSpPr txBox="1"/>
           <p:nvPr/>
         </p:nvSpPr>
@@ -2710,7 +2710,7 @@
       </p:sp>
       <p:sp>
         <p:nvSpPr>
-          <p:cNvPr id="293" name=""/>
+          <p:cNvPr id="297" name=""/>
           <p:cNvSpPr txBox="1"/>
           <p:nvPr/>
         </p:nvSpPr>
@@ -2758,7 +2758,7 @@
       </p:sp>
       <p:sp>
         <p:nvSpPr>
-          <p:cNvPr id="294" name=""/>
+          <p:cNvPr id="298" name=""/>
           <p:cNvSpPr/>
           <p:nvPr/>
         </p:nvSpPr>
@@ -2886,7 +2886,7 @@
       </p:sp>
       <p:sp>
         <p:nvSpPr>
-          <p:cNvPr id="295" name=""/>
+          <p:cNvPr id="299" name=""/>
           <p:cNvSpPr txBox="1"/>
           <p:nvPr/>
         </p:nvSpPr>
@@ -2934,7 +2934,7 @@
       </p:sp>
       <p:sp>
         <p:nvSpPr>
-          <p:cNvPr id="296" name=""/>
+          <p:cNvPr id="300" name=""/>
           <p:cNvSpPr txBox="1"/>
           <p:nvPr/>
         </p:nvSpPr>
@@ -2982,7 +2982,7 @@
       </p:sp>
       <p:sp>
         <p:nvSpPr>
-          <p:cNvPr id="297" name=""/>
+          <p:cNvPr id="301" name=""/>
           <p:cNvSpPr txBox="1"/>
           <p:nvPr/>
         </p:nvSpPr>
@@ -3042,7 +3042,7 @@
       </p:sp>
       <p:sp>
         <p:nvSpPr>
-          <p:cNvPr id="298" name=""/>
+          <p:cNvPr id="302" name=""/>
           <p:cNvSpPr txBox="1"/>
           <p:nvPr/>
         </p:nvSpPr>
@@ -3090,7 +3090,7 @@
       </p:sp>
       <p:sp>
         <p:nvSpPr>
-          <p:cNvPr id="299" name=""/>
+          <p:cNvPr id="303" name=""/>
           <p:cNvSpPr txBox="1"/>
           <p:nvPr/>
         </p:nvSpPr>
@@ -3138,7 +3138,7 @@
       </p:sp>
       <p:sp>
         <p:nvSpPr>
-          <p:cNvPr id="300" name=""/>
+          <p:cNvPr id="304" name=""/>
           <p:cNvSpPr txBox="1"/>
           <p:nvPr/>
         </p:nvSpPr>
@@ -3186,7 +3186,7 @@
       </p:sp>
       <p:sp>
         <p:nvSpPr>
-          <p:cNvPr id="301" name=""/>
+          <p:cNvPr id="305" name=""/>
           <p:cNvSpPr txBox="1"/>
           <p:nvPr/>
         </p:nvSpPr>
@@ -3234,7 +3234,7 @@
       </p:sp>
       <p:sp>
         <p:nvSpPr>
-          <p:cNvPr id="302" name=""/>
+          <p:cNvPr id="306" name=""/>
           <p:cNvSpPr txBox="1"/>
           <p:nvPr/>
         </p:nvSpPr>
@@ -3282,7 +3282,7 @@
       </p:sp>
       <p:sp>
         <p:nvSpPr>
-          <p:cNvPr id="303" name=""/>
+          <p:cNvPr id="307" name=""/>
           <p:cNvSpPr txBox="1"/>
           <p:nvPr/>
         </p:nvSpPr>
@@ -3360,7 +3360,7 @@
       </p:grpSpPr>
       <p:sp>
         <p:nvSpPr>
-          <p:cNvPr id="304" name=""/>
+          <p:cNvPr id="308" name=""/>
           <p:cNvSpPr/>
           <p:nvPr/>
         </p:nvSpPr>
@@ -3420,7 +3420,7 @@
       </p:sp>
       <p:sp>
         <p:nvSpPr>
-          <p:cNvPr id="305" name=""/>
+          <p:cNvPr id="309" name=""/>
           <p:cNvSpPr/>
           <p:nvPr/>
         </p:nvSpPr>
@@ -3480,7 +3480,7 @@
       </p:sp>
       <p:sp>
         <p:nvSpPr>
-          <p:cNvPr id="306" name=""/>
+          <p:cNvPr id="310" name=""/>
           <p:cNvSpPr/>
           <p:nvPr/>
         </p:nvSpPr>
@@ -3540,7 +3540,7 @@
       </p:sp>
       <p:sp>
         <p:nvSpPr>
-          <p:cNvPr id="307" name=""/>
+          <p:cNvPr id="311" name=""/>
           <p:cNvSpPr/>
           <p:nvPr/>
         </p:nvSpPr>
@@ -3600,7 +3600,7 @@
       </p:sp>
       <p:sp>
         <p:nvSpPr>
-          <p:cNvPr id="308" name=""/>
+          <p:cNvPr id="312" name=""/>
           <p:cNvSpPr/>
           <p:nvPr/>
         </p:nvSpPr>
@@ -3700,7 +3700,7 @@
       </p:sp>
       <p:sp>
         <p:nvSpPr>
-          <p:cNvPr id="309" name=""/>
+          <p:cNvPr id="313" name=""/>
           <p:cNvSpPr/>
           <p:nvPr/>
         </p:nvSpPr>
@@ -3760,7 +3760,7 @@
       </p:sp>
       <p:pic>
         <p:nvPicPr>
-          <p:cNvPr id="310" name=""/>
+          <p:cNvPr id="314" name=""/>
           <p:cNvPicPr/>
           <p:nvPr/>
         </p:nvPicPr>
@@ -3784,7 +3784,7 @@
       </p:pic>
       <p:pic>
         <p:nvPicPr>
-          <p:cNvPr id="311" name=""/>
+          <p:cNvPr id="315" name=""/>
           <p:cNvPicPr/>
           <p:nvPr/>
         </p:nvPicPr>
@@ -3808,7 +3808,7 @@
       </p:pic>
       <p:sp>
         <p:nvSpPr>
-          <p:cNvPr id="312" name=""/>
+          <p:cNvPr id="316" name=""/>
           <p:cNvSpPr txBox="1"/>
           <p:nvPr/>
         </p:nvSpPr>
@@ -3856,7 +3856,7 @@
       </p:sp>
       <p:sp>
         <p:nvSpPr>
-          <p:cNvPr id="313" name=""/>
+          <p:cNvPr id="317" name=""/>
           <p:cNvSpPr txBox="1"/>
           <p:nvPr/>
         </p:nvSpPr>
@@ -3904,7 +3904,7 @@
       </p:sp>
       <p:sp>
         <p:nvSpPr>
-          <p:cNvPr id="314" name=""/>
+          <p:cNvPr id="318" name=""/>
           <p:cNvSpPr txBox="1"/>
           <p:nvPr/>
         </p:nvSpPr>
@@ -3982,7 +3982,7 @@
       </p:grpSpPr>
       <p:sp>
         <p:nvSpPr>
-          <p:cNvPr id="315" name=""/>
+          <p:cNvPr id="319" name=""/>
           <p:cNvSpPr/>
           <p:nvPr/>
         </p:nvSpPr>
@@ -4042,7 +4042,7 @@
       </p:sp>
       <p:sp>
         <p:nvSpPr>
-          <p:cNvPr id="316" name=""/>
+          <p:cNvPr id="320" name=""/>
           <p:cNvSpPr/>
           <p:nvPr/>
         </p:nvSpPr>
@@ -4102,7 +4102,7 @@
       </p:sp>
       <p:sp>
         <p:nvSpPr>
-          <p:cNvPr id="317" name=""/>
+          <p:cNvPr id="321" name=""/>
           <p:cNvSpPr/>
           <p:nvPr/>
         </p:nvSpPr>
@@ -4162,7 +4162,7 @@
       </p:sp>
       <p:sp>
         <p:nvSpPr>
-          <p:cNvPr id="318" name=""/>
+          <p:cNvPr id="322" name=""/>
           <p:cNvSpPr/>
           <p:nvPr/>
         </p:nvSpPr>
@@ -4222,7 +4222,7 @@
       </p:sp>
       <p:sp>
         <p:nvSpPr>
-          <p:cNvPr id="319" name=""/>
+          <p:cNvPr id="323" name=""/>
           <p:cNvSpPr/>
           <p:nvPr/>
         </p:nvSpPr>
@@ -4322,7 +4322,7 @@
       </p:sp>
       <p:sp>
         <p:nvSpPr>
-          <p:cNvPr id="320" name=""/>
+          <p:cNvPr id="324" name=""/>
           <p:cNvSpPr/>
           <p:nvPr/>
         </p:nvSpPr>
@@ -4382,7 +4382,7 @@
       </p:sp>
       <p:sp>
         <p:nvSpPr>
-          <p:cNvPr id="321" name=""/>
+          <p:cNvPr id="325" name=""/>
           <p:cNvSpPr/>
           <p:nvPr/>
         </p:nvSpPr>
@@ -4510,7 +4510,7 @@
       </p:sp>
       <p:sp>
         <p:nvSpPr>
-          <p:cNvPr id="322" name=""/>
+          <p:cNvPr id="326" name=""/>
           <p:cNvSpPr txBox="1"/>
           <p:nvPr/>
         </p:nvSpPr>
@@ -4558,7 +4558,7 @@
       </p:sp>
       <p:sp>
         <p:nvSpPr>
-          <p:cNvPr id="323" name=""/>
+          <p:cNvPr id="327" name=""/>
           <p:cNvSpPr txBox="1"/>
           <p:nvPr/>
         </p:nvSpPr>
@@ -4606,7 +4606,7 @@
       </p:sp>
       <p:sp>
         <p:nvSpPr>
-          <p:cNvPr id="324" name=""/>
+          <p:cNvPr id="328" name=""/>
           <p:cNvSpPr txBox="1"/>
           <p:nvPr/>
         </p:nvSpPr>
@@ -4654,7 +4654,7 @@
       </p:sp>
       <p:sp>
         <p:nvSpPr>
-          <p:cNvPr id="325" name=""/>
+          <p:cNvPr id="329" name=""/>
           <p:cNvSpPr/>
           <p:nvPr/>
         </p:nvSpPr>
@@ -4782,7 +4782,7 @@
       </p:sp>
       <p:sp>
         <p:nvSpPr>
-          <p:cNvPr id="326" name=""/>
+          <p:cNvPr id="330" name=""/>
           <p:cNvSpPr txBox="1"/>
           <p:nvPr/>
         </p:nvSpPr>
@@ -4830,7 +4830,7 @@
       </p:sp>
       <p:sp>
         <p:nvSpPr>
-          <p:cNvPr id="327" name=""/>
+          <p:cNvPr id="331" name=""/>
           <p:cNvSpPr txBox="1"/>
           <p:nvPr/>
         </p:nvSpPr>
@@ -4878,7 +4878,7 @@
       </p:sp>
       <p:sp>
         <p:nvSpPr>
-          <p:cNvPr id="328" name=""/>
+          <p:cNvPr id="332" name=""/>
           <p:cNvSpPr txBox="1"/>
           <p:nvPr/>
         </p:nvSpPr>
@@ -4926,7 +4926,7 @@
       </p:sp>
       <p:sp>
         <p:nvSpPr>
-          <p:cNvPr id="329" name=""/>
+          <p:cNvPr id="333" name=""/>
           <p:cNvSpPr/>
           <p:nvPr/>
         </p:nvSpPr>
@@ -5054,7 +5054,7 @@
       </p:sp>
       <p:sp>
         <p:nvSpPr>
-          <p:cNvPr id="330" name=""/>
+          <p:cNvPr id="334" name=""/>
           <p:cNvSpPr txBox="1"/>
           <p:nvPr/>
         </p:nvSpPr>
@@ -5102,7 +5102,7 @@
       </p:sp>
       <p:sp>
         <p:nvSpPr>
-          <p:cNvPr id="331" name=""/>
+          <p:cNvPr id="335" name=""/>
           <p:cNvSpPr txBox="1"/>
           <p:nvPr/>
         </p:nvSpPr>
@@ -5150,7 +5150,7 @@
       </p:sp>
       <p:sp>
         <p:nvSpPr>
-          <p:cNvPr id="332" name=""/>
+          <p:cNvPr id="336" name=""/>
           <p:cNvSpPr/>
           <p:nvPr/>
         </p:nvSpPr>
@@ -5278,7 +5278,7 @@
       </p:sp>
       <p:sp>
         <p:nvSpPr>
-          <p:cNvPr id="333" name=""/>
+          <p:cNvPr id="337" name=""/>
           <p:cNvSpPr txBox="1"/>
           <p:nvPr/>
         </p:nvSpPr>
@@ -5326,7 +5326,7 @@
       </p:sp>
       <p:sp>
         <p:nvSpPr>
-          <p:cNvPr id="334" name=""/>
+          <p:cNvPr id="338" name=""/>
           <p:cNvSpPr txBox="1"/>
           <p:nvPr/>
         </p:nvSpPr>
@@ -5374,7 +5374,7 @@
       </p:sp>
       <p:sp>
         <p:nvSpPr>
-          <p:cNvPr id="335" name=""/>
+          <p:cNvPr id="339" name=""/>
           <p:cNvSpPr txBox="1"/>
           <p:nvPr/>
         </p:nvSpPr>
@@ -5422,7 +5422,7 @@
       </p:sp>
       <p:sp>
         <p:nvSpPr>
-          <p:cNvPr id="336" name=""/>
+          <p:cNvPr id="340" name=""/>
           <p:cNvSpPr txBox="1"/>
           <p:nvPr/>
         </p:nvSpPr>
@@ -5500,7 +5500,7 @@
       </p:grpSpPr>
       <p:sp>
         <p:nvSpPr>
-          <p:cNvPr id="337" name=""/>
+          <p:cNvPr id="341" name=""/>
           <p:cNvSpPr/>
           <p:nvPr/>
         </p:nvSpPr>
@@ -5560,7 +5560,7 @@
       </p:sp>
       <p:sp>
         <p:nvSpPr>
-          <p:cNvPr id="338" name=""/>
+          <p:cNvPr id="342" name=""/>
           <p:cNvSpPr/>
           <p:nvPr/>
         </p:nvSpPr>
@@ -5620,7 +5620,7 @@
       </p:sp>
       <p:sp>
         <p:nvSpPr>
-          <p:cNvPr id="339" name=""/>
+          <p:cNvPr id="343" name=""/>
           <p:cNvSpPr/>
           <p:nvPr/>
         </p:nvSpPr>
@@ -5680,7 +5680,7 @@
       </p:sp>
       <p:sp>
         <p:nvSpPr>
-          <p:cNvPr id="340" name=""/>
+          <p:cNvPr id="344" name=""/>
           <p:cNvSpPr/>
           <p:nvPr/>
         </p:nvSpPr>
@@ -5740,7 +5740,7 @@
       </p:sp>
       <p:sp>
         <p:nvSpPr>
-          <p:cNvPr id="341" name=""/>
+          <p:cNvPr id="345" name=""/>
           <p:cNvSpPr/>
           <p:nvPr/>
         </p:nvSpPr>
@@ -5868,7 +5868,7 @@
       </p:sp>
       <p:sp>
         <p:nvSpPr>
-          <p:cNvPr id="342" name=""/>
+          <p:cNvPr id="346" name=""/>
           <p:cNvSpPr txBox="1"/>
           <p:nvPr/>
         </p:nvSpPr>
@@ -5916,7 +5916,7 @@
       </p:sp>
       <p:sp>
         <p:nvSpPr>
-          <p:cNvPr id="343" name=""/>
+          <p:cNvPr id="347" name=""/>
           <p:cNvSpPr/>
           <p:nvPr/>
         </p:nvSpPr>
@@ -6044,7 +6044,7 @@
       </p:sp>
       <p:sp>
         <p:nvSpPr>
-          <p:cNvPr id="344" name=""/>
+          <p:cNvPr id="348" name=""/>
           <p:cNvSpPr txBox="1"/>
           <p:nvPr/>
         </p:nvSpPr>
@@ -6092,7 +6092,7 @@
       </p:sp>
       <p:sp>
         <p:nvSpPr>
-          <p:cNvPr id="345" name=""/>
+          <p:cNvPr id="349" name=""/>
           <p:cNvSpPr txBox="1"/>
           <p:nvPr/>
         </p:nvSpPr>
@@ -6140,7 +6140,7 @@
       </p:sp>
       <p:sp>
         <p:nvSpPr>
-          <p:cNvPr id="346" name=""/>
+          <p:cNvPr id="350" name=""/>
           <p:cNvSpPr txBox="1"/>
           <p:nvPr/>
         </p:nvSpPr>
@@ -6188,7 +6188,7 @@
       </p:sp>
       <p:sp>
         <p:nvSpPr>
-          <p:cNvPr id="347" name=""/>
+          <p:cNvPr id="351" name=""/>
           <p:cNvSpPr/>
           <p:nvPr/>
         </p:nvSpPr>
@@ -6316,7 +6316,7 @@
       </p:sp>
       <p:sp>
         <p:nvSpPr>
-          <p:cNvPr id="348" name=""/>
+          <p:cNvPr id="352" name=""/>
           <p:cNvSpPr txBox="1"/>
           <p:nvPr/>
         </p:nvSpPr>
@@ -6364,7 +6364,7 @@
       </p:sp>
       <p:sp>
         <p:nvSpPr>
-          <p:cNvPr id="349" name=""/>
+          <p:cNvPr id="353" name=""/>
           <p:cNvSpPr txBox="1"/>
           <p:nvPr/>
         </p:nvSpPr>
@@ -6412,7 +6412,7 @@
       </p:sp>
       <p:sp>
         <p:nvSpPr>
-          <p:cNvPr id="350" name=""/>
+          <p:cNvPr id="354" name=""/>
           <p:cNvSpPr txBox="1"/>
           <p:nvPr/>
         </p:nvSpPr>
@@ -6460,7 +6460,7 @@
       </p:sp>
       <p:sp>
         <p:nvSpPr>
-          <p:cNvPr id="351" name=""/>
+          <p:cNvPr id="355" name=""/>
           <p:cNvSpPr txBox="1"/>
           <p:nvPr/>
         </p:nvSpPr>
@@ -6508,7 +6508,7 @@
       </p:sp>
       <p:sp>
         <p:nvSpPr>
-          <p:cNvPr id="352" name=""/>
+          <p:cNvPr id="356" name=""/>
           <p:cNvSpPr txBox="1"/>
           <p:nvPr/>
         </p:nvSpPr>
@@ -26346,7 +26346,7 @@
         </p:nvSpPr>
         <p:spPr>
           <a:xfrm>
-            <a:off x="533160" y="2800080"/>
+            <a:off x="533160" y="1180800"/>
             <a:ext cx="11125440" cy="29160"/>
           </a:xfrm>
           <a:custGeom>
@@ -26406,7 +26406,7 @@
         </p:nvSpPr>
         <p:spPr>
           <a:xfrm>
-            <a:off x="618840" y="3209760"/>
+            <a:off x="618840" y="1590480"/>
             <a:ext cx="57600" cy="57600"/>
           </a:xfrm>
           <a:custGeom>
@@ -26417,7 +26417,7 @@
             <a:pathLst>
               <a:path w="160" h="160">
                 <a:moveTo>
-                  <a:pt x="160" y="80"/>
+                  <a:pt x="160" y="79"/>
                 </a:moveTo>
                 <a:cubicBezTo>
                   <a:pt x="160" y="91"/>
@@ -26425,9 +26425,9 @@
                   <a:pt x="154" y="111"/>
                 </a:cubicBezTo>
                 <a:cubicBezTo>
-                  <a:pt x="150" y="120"/>
+                  <a:pt x="150" y="121"/>
                   <a:pt x="144" y="129"/>
-                  <a:pt x="137" y="136"/>
+                  <a:pt x="137" y="137"/>
                 </a:cubicBezTo>
                 <a:cubicBezTo>
                   <a:pt x="129" y="144"/>
@@ -26447,30 +26447,30 @@
                 <a:cubicBezTo>
                   <a:pt x="40" y="150"/>
                   <a:pt x="31" y="144"/>
-                  <a:pt x="24" y="136"/>
+                  <a:pt x="24" y="137"/>
                 </a:cubicBezTo>
                 <a:cubicBezTo>
                   <a:pt x="16" y="129"/>
-                  <a:pt x="10" y="120"/>
+                  <a:pt x="10" y="121"/>
                   <a:pt x="6" y="111"/>
                 </a:cubicBezTo>
                 <a:cubicBezTo>
                   <a:pt x="2" y="101"/>
                   <a:pt x="0" y="91"/>
-                  <a:pt x="0" y="80"/>
-                </a:cubicBezTo>
-                <a:cubicBezTo>
-                  <a:pt x="0" y="70"/>
-                  <a:pt x="2" y="60"/>
-                  <a:pt x="6" y="50"/>
-                </a:cubicBezTo>
-                <a:cubicBezTo>
-                  <a:pt x="10" y="40"/>
-                  <a:pt x="16" y="32"/>
-                  <a:pt x="24" y="24"/>
-                </a:cubicBezTo>
-                <a:cubicBezTo>
-                  <a:pt x="31" y="17"/>
+                  <a:pt x="0" y="79"/>
+                </a:cubicBezTo>
+                <a:cubicBezTo>
+                  <a:pt x="0" y="69"/>
+                  <a:pt x="2" y="59"/>
+                  <a:pt x="6" y="49"/>
+                </a:cubicBezTo>
+                <a:cubicBezTo>
+                  <a:pt x="10" y="39"/>
+                  <a:pt x="16" y="31"/>
+                  <a:pt x="24" y="23"/>
+                </a:cubicBezTo>
+                <a:cubicBezTo>
+                  <a:pt x="31" y="16"/>
                   <a:pt x="40" y="10"/>
                   <a:pt x="49" y="6"/>
                 </a:cubicBezTo>
@@ -26486,18 +26486,18 @@
                 </a:cubicBezTo>
                 <a:cubicBezTo>
                   <a:pt x="121" y="10"/>
-                  <a:pt x="129" y="17"/>
-                  <a:pt x="137" y="24"/>
-                </a:cubicBezTo>
-                <a:cubicBezTo>
-                  <a:pt x="144" y="32"/>
-                  <a:pt x="150" y="40"/>
-                  <a:pt x="154" y="50"/>
-                </a:cubicBezTo>
-                <a:cubicBezTo>
-                  <a:pt x="158" y="60"/>
-                  <a:pt x="160" y="70"/>
-                  <a:pt x="160" y="80"/>
+                  <a:pt x="129" y="16"/>
+                  <a:pt x="137" y="23"/>
+                </a:cubicBezTo>
+                <a:cubicBezTo>
+                  <a:pt x="144" y="31"/>
+                  <a:pt x="150" y="39"/>
+                  <a:pt x="154" y="49"/>
+                </a:cubicBezTo>
+                <a:cubicBezTo>
+                  <a:pt x="158" y="59"/>
+                  <a:pt x="160" y="69"/>
+                  <a:pt x="160" y="79"/>
                 </a:cubicBezTo>
                 <a:close/>
               </a:path>
@@ -26534,7 +26534,7 @@
         </p:nvSpPr>
         <p:spPr>
           <a:xfrm>
-            <a:off x="533520" y="2284200"/>
+            <a:off x="533520" y="664920"/>
             <a:ext cx="6096600" cy="381240"/>
           </a:xfrm>
           <a:prstGeom prst="rect">
@@ -26582,7 +26582,7 @@
         </p:nvSpPr>
         <p:spPr>
           <a:xfrm>
-            <a:off x="799920" y="3123360"/>
+            <a:off x="799920" y="1504080"/>
             <a:ext cx="1905840" cy="191160"/>
           </a:xfrm>
           <a:prstGeom prst="rect">
@@ -26630,7 +26630,7 @@
         </p:nvSpPr>
         <p:spPr>
           <a:xfrm>
-            <a:off x="2697480" y="3114360"/>
+            <a:off x="2697480" y="1495080"/>
             <a:ext cx="1225080" cy="222840"/>
           </a:xfrm>
           <a:prstGeom prst="rect">
@@ -26673,141 +26673,13 @@
       <p:sp>
         <p:nvSpPr>
           <p:cNvPr id="253" name=""/>
-          <p:cNvSpPr/>
-          <p:nvPr/>
-        </p:nvSpPr>
-        <p:spPr>
-          <a:xfrm>
-            <a:off x="618840" y="3600360"/>
-            <a:ext cx="57600" cy="57240"/>
-          </a:xfrm>
-          <a:custGeom>
-            <a:avLst/>
-            <a:gdLst/>
-            <a:ahLst/>
-            <a:rect l="0" t="0" r="r" b="b"/>
-            <a:pathLst>
-              <a:path w="160" h="159">
-                <a:moveTo>
-                  <a:pt x="160" y="80"/>
-                </a:moveTo>
-                <a:cubicBezTo>
-                  <a:pt x="160" y="91"/>
-                  <a:pt x="158" y="101"/>
-                  <a:pt x="154" y="110"/>
-                </a:cubicBezTo>
-                <a:cubicBezTo>
-                  <a:pt x="150" y="120"/>
-                  <a:pt x="144" y="129"/>
-                  <a:pt x="137" y="136"/>
-                </a:cubicBezTo>
-                <a:cubicBezTo>
-                  <a:pt x="129" y="144"/>
-                  <a:pt x="121" y="149"/>
-                  <a:pt x="111" y="153"/>
-                </a:cubicBezTo>
-                <a:cubicBezTo>
-                  <a:pt x="101" y="157"/>
-                  <a:pt x="90" y="159"/>
-                  <a:pt x="80" y="159"/>
-                </a:cubicBezTo>
-                <a:cubicBezTo>
-                  <a:pt x="69" y="159"/>
-                  <a:pt x="59" y="157"/>
-                  <a:pt x="49" y="153"/>
-                </a:cubicBezTo>
-                <a:cubicBezTo>
-                  <a:pt x="40" y="149"/>
-                  <a:pt x="31" y="144"/>
-                  <a:pt x="24" y="136"/>
-                </a:cubicBezTo>
-                <a:cubicBezTo>
-                  <a:pt x="16" y="129"/>
-                  <a:pt x="10" y="120"/>
-                  <a:pt x="6" y="110"/>
-                </a:cubicBezTo>
-                <a:cubicBezTo>
-                  <a:pt x="2" y="101"/>
-                  <a:pt x="0" y="91"/>
-                  <a:pt x="0" y="80"/>
-                </a:cubicBezTo>
-                <a:cubicBezTo>
-                  <a:pt x="0" y="70"/>
-                  <a:pt x="2" y="59"/>
-                  <a:pt x="6" y="50"/>
-                </a:cubicBezTo>
-                <a:cubicBezTo>
-                  <a:pt x="10" y="40"/>
-                  <a:pt x="16" y="30"/>
-                  <a:pt x="24" y="23"/>
-                </a:cubicBezTo>
-                <a:cubicBezTo>
-                  <a:pt x="31" y="16"/>
-                  <a:pt x="40" y="10"/>
-                  <a:pt x="49" y="6"/>
-                </a:cubicBezTo>
-                <a:cubicBezTo>
-                  <a:pt x="59" y="2"/>
-                  <a:pt x="69" y="0"/>
-                  <a:pt x="80" y="0"/>
-                </a:cubicBezTo>
-                <a:cubicBezTo>
-                  <a:pt x="90" y="0"/>
-                  <a:pt x="101" y="2"/>
-                  <a:pt x="111" y="6"/>
-                </a:cubicBezTo>
-                <a:cubicBezTo>
-                  <a:pt x="121" y="10"/>
-                  <a:pt x="129" y="16"/>
-                  <a:pt x="137" y="23"/>
-                </a:cubicBezTo>
-                <a:cubicBezTo>
-                  <a:pt x="144" y="30"/>
-                  <a:pt x="150" y="40"/>
-                  <a:pt x="154" y="50"/>
-                </a:cubicBezTo>
-                <a:cubicBezTo>
-                  <a:pt x="158" y="59"/>
-                  <a:pt x="160" y="70"/>
-                  <a:pt x="160" y="80"/>
-                </a:cubicBezTo>
-                <a:close/>
-              </a:path>
-            </a:pathLst>
-          </a:custGeom>
-          <a:solidFill>
-            <a:srgbClr val="1A1A2E"/>
-          </a:solidFill>
-          <a:ln w="0">
-            <a:noFill/>
-          </a:ln>
-        </p:spPr>
-        <p:txBody>
-          <a:bodyPr lIns="0" tIns="0" rIns="0" bIns="0" anchor="t">
-            <a:noAutofit/>
-          </a:bodyPr>
-          <a:p>
-            <a:endParaRPr lang="en-US" sz="2400" b="0" u="none" strike="noStrike">
-              <a:solidFill>
-                <a:srgbClr val="FFFFFF"/>
-              </a:solidFill>
-              <a:effectLst/>
-              <a:uFillTx/>
-              <a:latin typeface="游明朝体"/>
-            </a:endParaRPr>
-          </a:p>
-        </p:txBody>
-      </p:sp>
-      <p:sp>
-        <p:nvSpPr>
-          <p:cNvPr id="254" name=""/>
           <p:cNvSpPr txBox="1"/>
           <p:nvPr/>
         </p:nvSpPr>
         <p:spPr>
           <a:xfrm>
-            <a:off x="3921840" y="3123360"/>
-            <a:ext cx="4191840" cy="191160"/>
+            <a:off x="3921840" y="1504080"/>
+            <a:ext cx="1905840" cy="191160"/>
           </a:xfrm>
           <a:prstGeom prst="rect">
             <a:avLst/>
@@ -26833,7 +26705,7 @@
                 <a:latin typeface="HiraginoSans-W4"/>
                 <a:ea typeface="HiraginoSans-W4"/>
               </a:rPr>
-              <a:t>に読み込ませ、機能単位に分割したアプリを開発</a:t>
+              <a:t>に読み込ませ、機能単</a:t>
             </a:r>
             <a:endParaRPr lang="en-US" sz="1500" b="0" u="none" strike="noStrike">
               <a:solidFill>
@@ -26848,13 +26720,189 @@
       </p:sp>
       <p:sp>
         <p:nvSpPr>
+          <p:cNvPr id="254" name=""/>
+          <p:cNvSpPr/>
+          <p:nvPr/>
+        </p:nvSpPr>
+        <p:spPr>
+          <a:xfrm>
+            <a:off x="618840" y="2323800"/>
+            <a:ext cx="57600" cy="57600"/>
+          </a:xfrm>
+          <a:custGeom>
+            <a:avLst/>
+            <a:gdLst/>
+            <a:ahLst/>
+            <a:rect l="0" t="0" r="r" b="b"/>
+            <a:pathLst>
+              <a:path w="160" h="160">
+                <a:moveTo>
+                  <a:pt x="160" y="80"/>
+                </a:moveTo>
+                <a:cubicBezTo>
+                  <a:pt x="160" y="90"/>
+                  <a:pt x="158" y="100"/>
+                  <a:pt x="154" y="111"/>
+                </a:cubicBezTo>
+                <a:cubicBezTo>
+                  <a:pt x="150" y="121"/>
+                  <a:pt x="144" y="129"/>
+                  <a:pt x="137" y="137"/>
+                </a:cubicBezTo>
+                <a:cubicBezTo>
+                  <a:pt x="129" y="144"/>
+                  <a:pt x="121" y="150"/>
+                  <a:pt x="111" y="154"/>
+                </a:cubicBezTo>
+                <a:cubicBezTo>
+                  <a:pt x="101" y="158"/>
+                  <a:pt x="90" y="160"/>
+                  <a:pt x="80" y="160"/>
+                </a:cubicBezTo>
+                <a:cubicBezTo>
+                  <a:pt x="69" y="160"/>
+                  <a:pt x="59" y="158"/>
+                  <a:pt x="49" y="154"/>
+                </a:cubicBezTo>
+                <a:cubicBezTo>
+                  <a:pt x="40" y="150"/>
+                  <a:pt x="31" y="144"/>
+                  <a:pt x="24" y="137"/>
+                </a:cubicBezTo>
+                <a:cubicBezTo>
+                  <a:pt x="16" y="129"/>
+                  <a:pt x="10" y="121"/>
+                  <a:pt x="6" y="111"/>
+                </a:cubicBezTo>
+                <a:cubicBezTo>
+                  <a:pt x="2" y="100"/>
+                  <a:pt x="0" y="90"/>
+                  <a:pt x="0" y="80"/>
+                </a:cubicBezTo>
+                <a:cubicBezTo>
+                  <a:pt x="0" y="69"/>
+                  <a:pt x="2" y="59"/>
+                  <a:pt x="6" y="49"/>
+                </a:cubicBezTo>
+                <a:cubicBezTo>
+                  <a:pt x="10" y="40"/>
+                  <a:pt x="16" y="31"/>
+                  <a:pt x="24" y="24"/>
+                </a:cubicBezTo>
+                <a:cubicBezTo>
+                  <a:pt x="31" y="16"/>
+                  <a:pt x="40" y="10"/>
+                  <a:pt x="49" y="6"/>
+                </a:cubicBezTo>
+                <a:cubicBezTo>
+                  <a:pt x="59" y="2"/>
+                  <a:pt x="69" y="0"/>
+                  <a:pt x="80" y="0"/>
+                </a:cubicBezTo>
+                <a:cubicBezTo>
+                  <a:pt x="90" y="0"/>
+                  <a:pt x="101" y="2"/>
+                  <a:pt x="111" y="6"/>
+                </a:cubicBezTo>
+                <a:cubicBezTo>
+                  <a:pt x="121" y="10"/>
+                  <a:pt x="129" y="16"/>
+                  <a:pt x="137" y="24"/>
+                </a:cubicBezTo>
+                <a:cubicBezTo>
+                  <a:pt x="144" y="31"/>
+                  <a:pt x="150" y="40"/>
+                  <a:pt x="154" y="49"/>
+                </a:cubicBezTo>
+                <a:cubicBezTo>
+                  <a:pt x="158" y="59"/>
+                  <a:pt x="160" y="69"/>
+                  <a:pt x="160" y="80"/>
+                </a:cubicBezTo>
+                <a:close/>
+              </a:path>
+            </a:pathLst>
+          </a:custGeom>
+          <a:solidFill>
+            <a:srgbClr val="1A1A2E"/>
+          </a:solidFill>
+          <a:ln w="0">
+            <a:noFill/>
+          </a:ln>
+        </p:spPr>
+        <p:txBody>
+          <a:bodyPr lIns="0" tIns="0" rIns="0" bIns="0" anchor="t">
+            <a:noAutofit/>
+          </a:bodyPr>
+          <a:p>
+            <a:endParaRPr lang="en-US" sz="2400" b="0" u="none" strike="noStrike">
+              <a:solidFill>
+                <a:srgbClr val="FFFFFF"/>
+              </a:solidFill>
+              <a:effectLst/>
+              <a:uFillTx/>
+              <a:latin typeface="游明朝体"/>
+            </a:endParaRPr>
+          </a:p>
+        </p:txBody>
+      </p:sp>
+      <p:sp>
+        <p:nvSpPr>
           <p:cNvPr id="255" name=""/>
           <p:cNvSpPr txBox="1"/>
           <p:nvPr/>
         </p:nvSpPr>
         <p:spPr>
           <a:xfrm>
-            <a:off x="799920" y="3504960"/>
+            <a:off x="799920" y="1846800"/>
+            <a:ext cx="2286720" cy="191160"/>
+          </a:xfrm>
+          <a:prstGeom prst="rect">
+            <a:avLst/>
+          </a:prstGeom>
+          <a:noFill/>
+          <a:ln w="0">
+            <a:noFill/>
+          </a:ln>
+        </p:spPr>
+        <p:txBody>
+          <a:bodyPr wrap="none" lIns="0" tIns="0" rIns="0" bIns="0" anchor="t">
+            <a:spAutoFit/>
+          </a:bodyPr>
+          <a:p>
+            <a:pPr/>
+            <a:r>
+              <a:rPr lang="ja-JP" sz="1500" b="0" u="none" strike="noStrike">
+                <a:solidFill>
+                  <a:srgbClr val="1A1A2E"/>
+                </a:solidFill>
+                <a:effectLst/>
+                <a:uFillTx/>
+                <a:latin typeface="HiraginoSans-W4"/>
+                <a:ea typeface="HiraginoSans-W4"/>
+              </a:rPr>
+              <a:t>位に分割したアプリを開発</a:t>
+            </a:r>
+            <a:endParaRPr lang="en-US" sz="1500" b="0" u="none" strike="noStrike">
+              <a:solidFill>
+                <a:srgbClr val="000000"/>
+              </a:solidFill>
+              <a:effectLst/>
+              <a:uFillTx/>
+              <a:latin typeface="游明朝体"/>
+            </a:endParaRPr>
+          </a:p>
+        </p:txBody>
+      </p:sp>
+      <p:sp>
+        <p:nvSpPr>
+          <p:cNvPr id="256" name=""/>
+          <p:cNvSpPr txBox="1"/>
+          <p:nvPr/>
+        </p:nvSpPr>
+        <p:spPr>
+          <a:xfrm>
+            <a:off x="799920" y="2228400"/>
             <a:ext cx="445320" cy="222840"/>
           </a:xfrm>
           <a:prstGeom prst="rect">
@@ -26896,13 +26944,13 @@
       </p:sp>
       <p:sp>
         <p:nvSpPr>
-          <p:cNvPr id="256" name=""/>
+          <p:cNvPr id="257" name=""/>
           <p:cNvSpPr txBox="1"/>
           <p:nvPr/>
         </p:nvSpPr>
         <p:spPr>
           <a:xfrm>
-            <a:off x="1233720" y="3513600"/>
+            <a:off x="1233720" y="2237400"/>
             <a:ext cx="762840" cy="191160"/>
           </a:xfrm>
           <a:prstGeom prst="rect">
@@ -26944,13 +26992,13 @@
       </p:sp>
       <p:sp>
         <p:nvSpPr>
-          <p:cNvPr id="257" name=""/>
+          <p:cNvPr id="258" name=""/>
           <p:cNvSpPr txBox="1"/>
           <p:nvPr/>
         </p:nvSpPr>
         <p:spPr>
           <a:xfrm>
-            <a:off x="1995840" y="3504960"/>
+            <a:off x="1995840" y="2228400"/>
             <a:ext cx="364320" cy="222840"/>
           </a:xfrm>
           <a:prstGeom prst="rect">
@@ -26992,13 +27040,13 @@
       </p:sp>
       <p:sp>
         <p:nvSpPr>
-          <p:cNvPr id="258" name=""/>
+          <p:cNvPr id="259" name=""/>
           <p:cNvSpPr txBox="1"/>
           <p:nvPr/>
         </p:nvSpPr>
         <p:spPr>
           <a:xfrm>
-            <a:off x="2359440" y="3513600"/>
+            <a:off x="2359440" y="2237400"/>
             <a:ext cx="762840" cy="191160"/>
           </a:xfrm>
           <a:prstGeom prst="rect">
@@ -27040,13 +27088,13 @@
       </p:sp>
       <p:sp>
         <p:nvSpPr>
-          <p:cNvPr id="259" name=""/>
+          <p:cNvPr id="260" name=""/>
           <p:cNvSpPr txBox="1"/>
           <p:nvPr/>
         </p:nvSpPr>
         <p:spPr>
           <a:xfrm>
-            <a:off x="3121200" y="3504960"/>
+            <a:off x="3121200" y="2228400"/>
             <a:ext cx="723960" cy="222840"/>
           </a:xfrm>
           <a:prstGeom prst="rect">
@@ -27088,142 +27136,14 @@
       </p:sp>
       <p:sp>
         <p:nvSpPr>
-          <p:cNvPr id="260" name=""/>
-          <p:cNvSpPr/>
-          <p:nvPr/>
-        </p:nvSpPr>
-        <p:spPr>
-          <a:xfrm>
-            <a:off x="618840" y="3990960"/>
-            <a:ext cx="57600" cy="57240"/>
-          </a:xfrm>
-          <a:custGeom>
-            <a:avLst/>
-            <a:gdLst/>
-            <a:ahLst/>
-            <a:rect l="0" t="0" r="r" b="b"/>
-            <a:pathLst>
-              <a:path w="160" h="159">
-                <a:moveTo>
-                  <a:pt x="160" y="80"/>
-                </a:moveTo>
-                <a:cubicBezTo>
-                  <a:pt x="160" y="90"/>
-                  <a:pt x="158" y="101"/>
-                  <a:pt x="154" y="110"/>
-                </a:cubicBezTo>
-                <a:cubicBezTo>
-                  <a:pt x="150" y="120"/>
-                  <a:pt x="144" y="129"/>
-                  <a:pt x="137" y="136"/>
-                </a:cubicBezTo>
-                <a:cubicBezTo>
-                  <a:pt x="129" y="143"/>
-                  <a:pt x="121" y="149"/>
-                  <a:pt x="111" y="153"/>
-                </a:cubicBezTo>
-                <a:cubicBezTo>
-                  <a:pt x="101" y="157"/>
-                  <a:pt x="90" y="159"/>
-                  <a:pt x="80" y="159"/>
-                </a:cubicBezTo>
-                <a:cubicBezTo>
-                  <a:pt x="69" y="159"/>
-                  <a:pt x="59" y="157"/>
-                  <a:pt x="49" y="153"/>
-                </a:cubicBezTo>
-                <a:cubicBezTo>
-                  <a:pt x="40" y="149"/>
-                  <a:pt x="31" y="143"/>
-                  <a:pt x="24" y="136"/>
-                </a:cubicBezTo>
-                <a:cubicBezTo>
-                  <a:pt x="16" y="129"/>
-                  <a:pt x="10" y="120"/>
-                  <a:pt x="6" y="110"/>
-                </a:cubicBezTo>
-                <a:cubicBezTo>
-                  <a:pt x="2" y="101"/>
-                  <a:pt x="0" y="90"/>
-                  <a:pt x="0" y="80"/>
-                </a:cubicBezTo>
-                <a:cubicBezTo>
-                  <a:pt x="0" y="69"/>
-                  <a:pt x="2" y="59"/>
-                  <a:pt x="6" y="49"/>
-                </a:cubicBezTo>
-                <a:cubicBezTo>
-                  <a:pt x="10" y="39"/>
-                  <a:pt x="16" y="30"/>
-                  <a:pt x="24" y="23"/>
-                </a:cubicBezTo>
-                <a:cubicBezTo>
-                  <a:pt x="31" y="15"/>
-                  <a:pt x="40" y="10"/>
-                  <a:pt x="49" y="6"/>
-                </a:cubicBezTo>
-                <a:cubicBezTo>
-                  <a:pt x="59" y="2"/>
-                  <a:pt x="69" y="0"/>
-                  <a:pt x="80" y="0"/>
-                </a:cubicBezTo>
-                <a:cubicBezTo>
-                  <a:pt x="90" y="0"/>
-                  <a:pt x="101" y="2"/>
-                  <a:pt x="111" y="6"/>
-                </a:cubicBezTo>
-                <a:cubicBezTo>
-                  <a:pt x="121" y="10"/>
-                  <a:pt x="129" y="15"/>
-                  <a:pt x="137" y="23"/>
-                </a:cubicBezTo>
-                <a:cubicBezTo>
-                  <a:pt x="144" y="30"/>
-                  <a:pt x="150" y="39"/>
-                  <a:pt x="154" y="49"/>
-                </a:cubicBezTo>
-                <a:cubicBezTo>
-                  <a:pt x="158" y="59"/>
-                  <a:pt x="160" y="69"/>
-                  <a:pt x="160" y="80"/>
-                </a:cubicBezTo>
-                <a:close/>
-              </a:path>
-            </a:pathLst>
-          </a:custGeom>
-          <a:solidFill>
-            <a:srgbClr val="1A1A2E"/>
-          </a:solidFill>
-          <a:ln w="0">
-            <a:noFill/>
-          </a:ln>
-        </p:spPr>
-        <p:txBody>
-          <a:bodyPr lIns="0" tIns="0" rIns="0" bIns="0" anchor="t">
-            <a:noAutofit/>
-          </a:bodyPr>
-          <a:p>
-            <a:endParaRPr lang="en-US" sz="2400" b="0" u="none" strike="noStrike">
-              <a:solidFill>
-                <a:srgbClr val="FFFFFF"/>
-              </a:solidFill>
-              <a:effectLst/>
-              <a:uFillTx/>
-              <a:latin typeface="游明朝体"/>
-            </a:endParaRPr>
-          </a:p>
-        </p:txBody>
-      </p:sp>
-      <p:sp>
-        <p:nvSpPr>
           <p:cNvPr id="261" name=""/>
           <p:cNvSpPr txBox="1"/>
           <p:nvPr/>
         </p:nvSpPr>
         <p:spPr>
           <a:xfrm>
-            <a:off x="3841200" y="3513600"/>
-            <a:ext cx="3048840" cy="191160"/>
+            <a:off x="3841200" y="2237400"/>
+            <a:ext cx="2096280" cy="191160"/>
           </a:xfrm>
           <a:prstGeom prst="rect">
             <a:avLst/>
@@ -27249,7 +27169,7 @@
                 <a:latin typeface="HiraginoSans-W4"/>
                 <a:ea typeface="HiraginoSans-W4"/>
               </a:rPr>
-              <a:t>アプリを実装（現時点では⾮公開）</a:t>
+              <a:t>アプリを実装（現時点で</a:t>
             </a:r>
             <a:endParaRPr lang="en-US" sz="1500" b="0" u="none" strike="noStrike">
               <a:solidFill>
@@ -27265,12 +27185,188 @@
       <p:sp>
         <p:nvSpPr>
           <p:cNvPr id="262" name=""/>
+          <p:cNvSpPr/>
+          <p:nvPr/>
+        </p:nvSpPr>
+        <p:spPr>
+          <a:xfrm>
+            <a:off x="618840" y="3057480"/>
+            <a:ext cx="57600" cy="57240"/>
+          </a:xfrm>
+          <a:custGeom>
+            <a:avLst/>
+            <a:gdLst/>
+            <a:ahLst/>
+            <a:rect l="0" t="0" r="r" b="b"/>
+            <a:pathLst>
+              <a:path w="160" h="159">
+                <a:moveTo>
+                  <a:pt x="160" y="79"/>
+                </a:moveTo>
+                <a:cubicBezTo>
+                  <a:pt x="160" y="90"/>
+                  <a:pt x="158" y="100"/>
+                  <a:pt x="154" y="109"/>
+                </a:cubicBezTo>
+                <a:cubicBezTo>
+                  <a:pt x="150" y="120"/>
+                  <a:pt x="144" y="129"/>
+                  <a:pt x="137" y="136"/>
+                </a:cubicBezTo>
+                <a:cubicBezTo>
+                  <a:pt x="129" y="144"/>
+                  <a:pt x="121" y="149"/>
+                  <a:pt x="111" y="153"/>
+                </a:cubicBezTo>
+                <a:cubicBezTo>
+                  <a:pt x="101" y="157"/>
+                  <a:pt x="90" y="159"/>
+                  <a:pt x="80" y="159"/>
+                </a:cubicBezTo>
+                <a:cubicBezTo>
+                  <a:pt x="69" y="159"/>
+                  <a:pt x="59" y="157"/>
+                  <a:pt x="49" y="153"/>
+                </a:cubicBezTo>
+                <a:cubicBezTo>
+                  <a:pt x="40" y="149"/>
+                  <a:pt x="31" y="144"/>
+                  <a:pt x="24" y="136"/>
+                </a:cubicBezTo>
+                <a:cubicBezTo>
+                  <a:pt x="16" y="129"/>
+                  <a:pt x="10" y="120"/>
+                  <a:pt x="6" y="109"/>
+                </a:cubicBezTo>
+                <a:cubicBezTo>
+                  <a:pt x="2" y="100"/>
+                  <a:pt x="0" y="90"/>
+                  <a:pt x="0" y="79"/>
+                </a:cubicBezTo>
+                <a:cubicBezTo>
+                  <a:pt x="0" y="68"/>
+                  <a:pt x="2" y="58"/>
+                  <a:pt x="6" y="49"/>
+                </a:cubicBezTo>
+                <a:cubicBezTo>
+                  <a:pt x="10" y="39"/>
+                  <a:pt x="16" y="30"/>
+                  <a:pt x="24" y="23"/>
+                </a:cubicBezTo>
+                <a:cubicBezTo>
+                  <a:pt x="31" y="15"/>
+                  <a:pt x="40" y="10"/>
+                  <a:pt x="49" y="6"/>
+                </a:cubicBezTo>
+                <a:cubicBezTo>
+                  <a:pt x="59" y="2"/>
+                  <a:pt x="69" y="0"/>
+                  <a:pt x="80" y="0"/>
+                </a:cubicBezTo>
+                <a:cubicBezTo>
+                  <a:pt x="90" y="0"/>
+                  <a:pt x="101" y="2"/>
+                  <a:pt x="111" y="6"/>
+                </a:cubicBezTo>
+                <a:cubicBezTo>
+                  <a:pt x="121" y="10"/>
+                  <a:pt x="129" y="15"/>
+                  <a:pt x="137" y="23"/>
+                </a:cubicBezTo>
+                <a:cubicBezTo>
+                  <a:pt x="144" y="30"/>
+                  <a:pt x="150" y="39"/>
+                  <a:pt x="154" y="49"/>
+                </a:cubicBezTo>
+                <a:cubicBezTo>
+                  <a:pt x="158" y="58"/>
+                  <a:pt x="160" y="68"/>
+                  <a:pt x="160" y="79"/>
+                </a:cubicBezTo>
+                <a:close/>
+              </a:path>
+            </a:pathLst>
+          </a:custGeom>
+          <a:solidFill>
+            <a:srgbClr val="1A1A2E"/>
+          </a:solidFill>
+          <a:ln w="0">
+            <a:noFill/>
+          </a:ln>
+        </p:spPr>
+        <p:txBody>
+          <a:bodyPr lIns="0" tIns="0" rIns="0" bIns="0" anchor="t">
+            <a:noAutofit/>
+          </a:bodyPr>
+          <a:p>
+            <a:endParaRPr lang="en-US" sz="2400" b="0" u="none" strike="noStrike">
+              <a:solidFill>
+                <a:srgbClr val="FFFFFF"/>
+              </a:solidFill>
+              <a:effectLst/>
+              <a:uFillTx/>
+              <a:latin typeface="游明朝体"/>
+            </a:endParaRPr>
+          </a:p>
+        </p:txBody>
+      </p:sp>
+      <p:sp>
+        <p:nvSpPr>
+          <p:cNvPr id="263" name=""/>
           <p:cNvSpPr txBox="1"/>
           <p:nvPr/>
         </p:nvSpPr>
         <p:spPr>
           <a:xfrm>
-            <a:off x="799920" y="3904200"/>
+            <a:off x="799920" y="2580480"/>
+            <a:ext cx="953280" cy="191160"/>
+          </a:xfrm>
+          <a:prstGeom prst="rect">
+            <a:avLst/>
+          </a:prstGeom>
+          <a:noFill/>
+          <a:ln w="0">
+            <a:noFill/>
+          </a:ln>
+        </p:spPr>
+        <p:txBody>
+          <a:bodyPr wrap="none" lIns="0" tIns="0" rIns="0" bIns="0" anchor="t">
+            <a:spAutoFit/>
+          </a:bodyPr>
+          <a:p>
+            <a:pPr/>
+            <a:r>
+              <a:rPr lang="ja-JP" sz="1500" b="0" u="none" strike="noStrike">
+                <a:solidFill>
+                  <a:srgbClr val="1A1A2E"/>
+                </a:solidFill>
+                <a:effectLst/>
+                <a:uFillTx/>
+                <a:latin typeface="HiraginoSans-W4"/>
+                <a:ea typeface="HiraginoSans-W4"/>
+              </a:rPr>
+              <a:t>は⾮公開）</a:t>
+            </a:r>
+            <a:endParaRPr lang="en-US" sz="1500" b="0" u="none" strike="noStrike">
+              <a:solidFill>
+                <a:srgbClr val="000000"/>
+              </a:solidFill>
+              <a:effectLst/>
+              <a:uFillTx/>
+              <a:latin typeface="游明朝体"/>
+            </a:endParaRPr>
+          </a:p>
+        </p:txBody>
+      </p:sp>
+      <p:sp>
+        <p:nvSpPr>
+          <p:cNvPr id="264" name=""/>
+          <p:cNvSpPr txBox="1"/>
+          <p:nvPr/>
+        </p:nvSpPr>
+        <p:spPr>
+          <a:xfrm>
+            <a:off x="799920" y="2970720"/>
             <a:ext cx="1715400" cy="191160"/>
           </a:xfrm>
           <a:prstGeom prst="rect">
@@ -27312,13 +27408,13 @@
       </p:sp>
       <p:sp>
         <p:nvSpPr>
-          <p:cNvPr id="263" name=""/>
+          <p:cNvPr id="265" name=""/>
           <p:cNvSpPr txBox="1"/>
           <p:nvPr/>
         </p:nvSpPr>
         <p:spPr>
           <a:xfrm>
-            <a:off x="2514600" y="3895200"/>
+            <a:off x="2514600" y="2961720"/>
             <a:ext cx="279360" cy="222840"/>
           </a:xfrm>
           <a:prstGeom prst="rect">
@@ -27360,14 +27456,14 @@
       </p:sp>
       <p:sp>
         <p:nvSpPr>
-          <p:cNvPr id="264" name=""/>
+          <p:cNvPr id="266" name=""/>
           <p:cNvSpPr txBox="1"/>
           <p:nvPr/>
         </p:nvSpPr>
         <p:spPr>
           <a:xfrm>
-            <a:off x="2793240" y="3904200"/>
-            <a:ext cx="3429720" cy="191160"/>
+            <a:off x="2793240" y="2970720"/>
+            <a:ext cx="3048840" cy="191160"/>
           </a:xfrm>
           <a:prstGeom prst="rect">
             <a:avLst/>
@@ -27393,7 +27489,7 @@
                 <a:latin typeface="HiraginoSans-W4"/>
                 <a:ea typeface="HiraginoSans-W4"/>
               </a:rPr>
-              <a:t>で機能を移植・改修する開発⼿法を採⽤</a:t>
+              <a:t>で機能を移植・改修する開発⼿法を</a:t>
             </a:r>
             <a:endParaRPr lang="en-US" sz="1500" b="0" u="none" strike="noStrike">
               <a:solidFill>
@@ -27408,13 +27504,61 @@
       </p:sp>
       <p:sp>
         <p:nvSpPr>
-          <p:cNvPr id="265" name=""/>
+          <p:cNvPr id="267" name=""/>
           <p:cNvSpPr txBox="1"/>
           <p:nvPr/>
         </p:nvSpPr>
         <p:spPr>
           <a:xfrm>
-            <a:off x="533520" y="4371120"/>
+            <a:off x="799920" y="3313800"/>
+            <a:ext cx="381600" cy="191160"/>
+          </a:xfrm>
+          <a:prstGeom prst="rect">
+            <a:avLst/>
+          </a:prstGeom>
+          <a:noFill/>
+          <a:ln w="0">
+            <a:noFill/>
+          </a:ln>
+        </p:spPr>
+        <p:txBody>
+          <a:bodyPr wrap="none" lIns="0" tIns="0" rIns="0" bIns="0" anchor="t">
+            <a:spAutoFit/>
+          </a:bodyPr>
+          <a:p>
+            <a:pPr/>
+            <a:r>
+              <a:rPr lang="ja-JP" sz="1500" b="0" u="none" strike="noStrike">
+                <a:solidFill>
+                  <a:srgbClr val="1A1A2E"/>
+                </a:solidFill>
+                <a:effectLst/>
+                <a:uFillTx/>
+                <a:latin typeface="HiraginoSans-W4"/>
+                <a:ea typeface="HiraginoSans-W4"/>
+              </a:rPr>
+              <a:t>採⽤</a:t>
+            </a:r>
+            <a:endParaRPr lang="en-US" sz="1500" b="0" u="none" strike="noStrike">
+              <a:solidFill>
+                <a:srgbClr val="000000"/>
+              </a:solidFill>
+              <a:effectLst/>
+              <a:uFillTx/>
+              <a:latin typeface="游明朝体"/>
+            </a:endParaRPr>
+          </a:p>
+        </p:txBody>
+      </p:sp>
+      <p:sp>
+        <p:nvSpPr>
+          <p:cNvPr id="268" name=""/>
+          <p:cNvSpPr txBox="1"/>
+          <p:nvPr/>
+        </p:nvSpPr>
+        <p:spPr>
+          <a:xfrm>
+            <a:off x="533520" y="3780360"/>
             <a:ext cx="381600" cy="191160"/>
           </a:xfrm>
           <a:prstGeom prst="rect">
@@ -27454,15 +27598,39 @@
           </a:p>
         </p:txBody>
       </p:sp>
-      <p:sp>
-        <p:nvSpPr>
-          <p:cNvPr id="266" name=""/>
+      <p:pic>
+        <p:nvPicPr>
+          <p:cNvPr id="269" name=""/>
+          <p:cNvPicPr/>
+          <p:nvPr/>
+        </p:nvPicPr>
+        <p:blipFill>
+          <a:blip r:embed="rId1"/>
+          <a:stretch/>
+        </p:blipFill>
+        <p:spPr>
+          <a:xfrm>
+            <a:off x="7534440" y="1438200"/>
+            <a:ext cx="2800080" cy="4571640"/>
+          </a:xfrm>
+          <a:prstGeom prst="rect">
+            <a:avLst/>
+          </a:prstGeom>
+          <a:noFill/>
+          <a:ln w="0">
+            <a:noFill/>
+          </a:ln>
+        </p:spPr>
+      </p:pic>
+      <p:sp>
+        <p:nvSpPr>
+          <p:cNvPr id="270" name=""/>
           <p:cNvSpPr txBox="1"/>
           <p:nvPr/>
         </p:nvSpPr>
         <p:spPr>
           <a:xfrm>
-            <a:off x="914400" y="4362120"/>
+            <a:off x="914400" y="3771360"/>
             <a:ext cx="5035680" cy="222840"/>
           </a:xfrm>
           <a:prstGeom prst="rect">
@@ -27516,7 +27684,7 @@
       </p:sp>
       <p:sp>
         <p:nvSpPr>
-          <p:cNvPr id="267" name=""/>
+          <p:cNvPr id="271" name=""/>
           <p:cNvSpPr txBox="1"/>
           <p:nvPr/>
         </p:nvSpPr>
@@ -27594,7 +27762,7 @@
       </p:grpSpPr>
       <p:sp>
         <p:nvSpPr>
-          <p:cNvPr id="268" name=""/>
+          <p:cNvPr id="272" name=""/>
           <p:cNvSpPr/>
           <p:nvPr/>
         </p:nvSpPr>
@@ -27654,7 +27822,7 @@
       </p:sp>
       <p:sp>
         <p:nvSpPr>
-          <p:cNvPr id="269" name=""/>
+          <p:cNvPr id="273" name=""/>
           <p:cNvSpPr/>
           <p:nvPr/>
         </p:nvSpPr>
@@ -27714,7 +27882,7 @@
       </p:sp>
       <p:sp>
         <p:nvSpPr>
-          <p:cNvPr id="270" name=""/>
+          <p:cNvPr id="274" name=""/>
           <p:cNvSpPr/>
           <p:nvPr/>
         </p:nvSpPr>
@@ -27774,7 +27942,7 @@
       </p:sp>
       <p:sp>
         <p:nvSpPr>
-          <p:cNvPr id="271" name=""/>
+          <p:cNvPr id="275" name=""/>
           <p:cNvSpPr/>
           <p:nvPr/>
         </p:nvSpPr>
@@ -27834,7 +28002,7 @@
       </p:sp>
       <p:sp>
         <p:nvSpPr>
-          <p:cNvPr id="272" name=""/>
+          <p:cNvPr id="276" name=""/>
           <p:cNvSpPr txBox="1"/>
           <p:nvPr/>
         </p:nvSpPr>
@@ -27882,7 +28050,7 @@
       </p:sp>
       <p:sp>
         <p:nvSpPr>
-          <p:cNvPr id="273" name=""/>
+          <p:cNvPr id="277" name=""/>
           <p:cNvSpPr txBox="1"/>
           <p:nvPr/>
         </p:nvSpPr>
@@ -27930,7 +28098,7 @@
       </p:sp>
       <p:sp>
         <p:nvSpPr>
-          <p:cNvPr id="274" name=""/>
+          <p:cNvPr id="278" name=""/>
           <p:cNvSpPr txBox="1"/>
           <p:nvPr/>
         </p:nvSpPr>

--- a/slides/2026-07-01-ai-projects-intro.pptx
+++ b/slides/2026-07-01-ai-projects-intro.pptx
@@ -1558,7 +1558,7 @@
       </p:grpSpPr>
       <p:sp>
         <p:nvSpPr>
-          <p:cNvPr id="279" name=""/>
+          <p:cNvPr id="292" name=""/>
           <p:cNvSpPr/>
           <p:nvPr/>
         </p:nvSpPr>
@@ -1618,7 +1618,7 @@
       </p:sp>
       <p:sp>
         <p:nvSpPr>
-          <p:cNvPr id="280" name=""/>
+          <p:cNvPr id="293" name=""/>
           <p:cNvSpPr/>
           <p:nvPr/>
         </p:nvSpPr>
@@ -1678,7 +1678,7 @@
       </p:sp>
       <p:sp>
         <p:nvSpPr>
-          <p:cNvPr id="281" name=""/>
+          <p:cNvPr id="294" name=""/>
           <p:cNvSpPr/>
           <p:nvPr/>
         </p:nvSpPr>
@@ -1738,7 +1738,7 @@
       </p:sp>
       <p:sp>
         <p:nvSpPr>
-          <p:cNvPr id="282" name=""/>
+          <p:cNvPr id="295" name=""/>
           <p:cNvSpPr/>
           <p:nvPr/>
         </p:nvSpPr>
@@ -1798,7 +1798,7 @@
       </p:sp>
       <p:sp>
         <p:nvSpPr>
-          <p:cNvPr id="283" name=""/>
+          <p:cNvPr id="296" name=""/>
           <p:cNvSpPr/>
           <p:nvPr/>
         </p:nvSpPr>
@@ -1926,7 +1926,7 @@
       </p:sp>
       <p:sp>
         <p:nvSpPr>
-          <p:cNvPr id="284" name=""/>
+          <p:cNvPr id="297" name=""/>
           <p:cNvSpPr txBox="1"/>
           <p:nvPr/>
         </p:nvSpPr>
@@ -1974,7 +1974,7 @@
       </p:sp>
       <p:sp>
         <p:nvSpPr>
-          <p:cNvPr id="285" name=""/>
+          <p:cNvPr id="298" name=""/>
           <p:cNvSpPr txBox="1"/>
           <p:nvPr/>
         </p:nvSpPr>
@@ -2022,7 +2022,7 @@
       </p:sp>
       <p:sp>
         <p:nvSpPr>
-          <p:cNvPr id="286" name=""/>
+          <p:cNvPr id="299" name=""/>
           <p:cNvSpPr txBox="1"/>
           <p:nvPr/>
         </p:nvSpPr>
@@ -2070,7 +2070,7 @@
       </p:sp>
       <p:sp>
         <p:nvSpPr>
-          <p:cNvPr id="287" name=""/>
+          <p:cNvPr id="300" name=""/>
           <p:cNvSpPr txBox="1"/>
           <p:nvPr/>
         </p:nvSpPr>
@@ -2118,7 +2118,7 @@
       </p:sp>
       <p:sp>
         <p:nvSpPr>
-          <p:cNvPr id="288" name=""/>
+          <p:cNvPr id="301" name=""/>
           <p:cNvSpPr txBox="1"/>
           <p:nvPr/>
         </p:nvSpPr>
@@ -2166,7 +2166,7 @@
       </p:sp>
       <p:sp>
         <p:nvSpPr>
-          <p:cNvPr id="289" name=""/>
+          <p:cNvPr id="302" name=""/>
           <p:cNvSpPr/>
           <p:nvPr/>
         </p:nvSpPr>
@@ -2294,7 +2294,7 @@
       </p:sp>
       <p:sp>
         <p:nvSpPr>
-          <p:cNvPr id="290" name=""/>
+          <p:cNvPr id="303" name=""/>
           <p:cNvSpPr txBox="1"/>
           <p:nvPr/>
         </p:nvSpPr>
@@ -2342,7 +2342,7 @@
       </p:sp>
       <p:sp>
         <p:nvSpPr>
-          <p:cNvPr id="291" name=""/>
+          <p:cNvPr id="304" name=""/>
           <p:cNvSpPr txBox="1"/>
           <p:nvPr/>
         </p:nvSpPr>
@@ -2390,7 +2390,7 @@
       </p:sp>
       <p:sp>
         <p:nvSpPr>
-          <p:cNvPr id="292" name=""/>
+          <p:cNvPr id="305" name=""/>
           <p:cNvSpPr/>
           <p:nvPr/>
         </p:nvSpPr>
@@ -2518,7 +2518,7 @@
       </p:sp>
       <p:sp>
         <p:nvSpPr>
-          <p:cNvPr id="293" name=""/>
+          <p:cNvPr id="306" name=""/>
           <p:cNvSpPr txBox="1"/>
           <p:nvPr/>
         </p:nvSpPr>
@@ -2566,7 +2566,7 @@
       </p:sp>
       <p:sp>
         <p:nvSpPr>
-          <p:cNvPr id="294" name=""/>
+          <p:cNvPr id="307" name=""/>
           <p:cNvSpPr txBox="1"/>
           <p:nvPr/>
         </p:nvSpPr>
@@ -2614,7 +2614,7 @@
       </p:sp>
       <p:sp>
         <p:nvSpPr>
-          <p:cNvPr id="295" name=""/>
+          <p:cNvPr id="308" name=""/>
           <p:cNvSpPr txBox="1"/>
           <p:nvPr/>
         </p:nvSpPr>
@@ -2662,7 +2662,7 @@
       </p:sp>
       <p:sp>
         <p:nvSpPr>
-          <p:cNvPr id="296" name=""/>
+          <p:cNvPr id="309" name=""/>
           <p:cNvSpPr txBox="1"/>
           <p:nvPr/>
         </p:nvSpPr>
@@ -2710,7 +2710,7 @@
       </p:sp>
       <p:sp>
         <p:nvSpPr>
-          <p:cNvPr id="297" name=""/>
+          <p:cNvPr id="310" name=""/>
           <p:cNvSpPr txBox="1"/>
           <p:nvPr/>
         </p:nvSpPr>
@@ -2758,7 +2758,7 @@
       </p:sp>
       <p:sp>
         <p:nvSpPr>
-          <p:cNvPr id="298" name=""/>
+          <p:cNvPr id="311" name=""/>
           <p:cNvSpPr/>
           <p:nvPr/>
         </p:nvSpPr>
@@ -2886,7 +2886,7 @@
       </p:sp>
       <p:sp>
         <p:nvSpPr>
-          <p:cNvPr id="299" name=""/>
+          <p:cNvPr id="312" name=""/>
           <p:cNvSpPr txBox="1"/>
           <p:nvPr/>
         </p:nvSpPr>
@@ -2934,7 +2934,7 @@
       </p:sp>
       <p:sp>
         <p:nvSpPr>
-          <p:cNvPr id="300" name=""/>
+          <p:cNvPr id="313" name=""/>
           <p:cNvSpPr txBox="1"/>
           <p:nvPr/>
         </p:nvSpPr>
@@ -2982,7 +2982,7 @@
       </p:sp>
       <p:sp>
         <p:nvSpPr>
-          <p:cNvPr id="301" name=""/>
+          <p:cNvPr id="314" name=""/>
           <p:cNvSpPr txBox="1"/>
           <p:nvPr/>
         </p:nvSpPr>
@@ -3042,7 +3042,7 @@
       </p:sp>
       <p:sp>
         <p:nvSpPr>
-          <p:cNvPr id="302" name=""/>
+          <p:cNvPr id="315" name=""/>
           <p:cNvSpPr txBox="1"/>
           <p:nvPr/>
         </p:nvSpPr>
@@ -3090,7 +3090,7 @@
       </p:sp>
       <p:sp>
         <p:nvSpPr>
-          <p:cNvPr id="303" name=""/>
+          <p:cNvPr id="316" name=""/>
           <p:cNvSpPr txBox="1"/>
           <p:nvPr/>
         </p:nvSpPr>
@@ -3138,7 +3138,7 @@
       </p:sp>
       <p:sp>
         <p:nvSpPr>
-          <p:cNvPr id="304" name=""/>
+          <p:cNvPr id="317" name=""/>
           <p:cNvSpPr txBox="1"/>
           <p:nvPr/>
         </p:nvSpPr>
@@ -3186,7 +3186,7 @@
       </p:sp>
       <p:sp>
         <p:nvSpPr>
-          <p:cNvPr id="305" name=""/>
+          <p:cNvPr id="318" name=""/>
           <p:cNvSpPr txBox="1"/>
           <p:nvPr/>
         </p:nvSpPr>
@@ -3234,7 +3234,7 @@
       </p:sp>
       <p:sp>
         <p:nvSpPr>
-          <p:cNvPr id="306" name=""/>
+          <p:cNvPr id="319" name=""/>
           <p:cNvSpPr txBox="1"/>
           <p:nvPr/>
         </p:nvSpPr>
@@ -3282,7 +3282,7 @@
       </p:sp>
       <p:sp>
         <p:nvSpPr>
-          <p:cNvPr id="307" name=""/>
+          <p:cNvPr id="320" name=""/>
           <p:cNvSpPr txBox="1"/>
           <p:nvPr/>
         </p:nvSpPr>
@@ -3360,7 +3360,7 @@
       </p:grpSpPr>
       <p:sp>
         <p:nvSpPr>
-          <p:cNvPr id="308" name=""/>
+          <p:cNvPr id="321" name=""/>
           <p:cNvSpPr/>
           <p:nvPr/>
         </p:nvSpPr>
@@ -3420,7 +3420,7 @@
       </p:sp>
       <p:sp>
         <p:nvSpPr>
-          <p:cNvPr id="309" name=""/>
+          <p:cNvPr id="322" name=""/>
           <p:cNvSpPr/>
           <p:nvPr/>
         </p:nvSpPr>
@@ -3480,7 +3480,7 @@
       </p:sp>
       <p:sp>
         <p:nvSpPr>
-          <p:cNvPr id="310" name=""/>
+          <p:cNvPr id="323" name=""/>
           <p:cNvSpPr/>
           <p:nvPr/>
         </p:nvSpPr>
@@ -3540,7 +3540,7 @@
       </p:sp>
       <p:sp>
         <p:nvSpPr>
-          <p:cNvPr id="311" name=""/>
+          <p:cNvPr id="324" name=""/>
           <p:cNvSpPr/>
           <p:nvPr/>
         </p:nvSpPr>
@@ -3600,7 +3600,7 @@
       </p:sp>
       <p:sp>
         <p:nvSpPr>
-          <p:cNvPr id="312" name=""/>
+          <p:cNvPr id="325" name=""/>
           <p:cNvSpPr/>
           <p:nvPr/>
         </p:nvSpPr>
@@ -3700,7 +3700,7 @@
       </p:sp>
       <p:sp>
         <p:nvSpPr>
-          <p:cNvPr id="313" name=""/>
+          <p:cNvPr id="326" name=""/>
           <p:cNvSpPr/>
           <p:nvPr/>
         </p:nvSpPr>
@@ -3760,7 +3760,7 @@
       </p:sp>
       <p:pic>
         <p:nvPicPr>
-          <p:cNvPr id="314" name=""/>
+          <p:cNvPr id="327" name=""/>
           <p:cNvPicPr/>
           <p:nvPr/>
         </p:nvPicPr>
@@ -3784,7 +3784,7 @@
       </p:pic>
       <p:pic>
         <p:nvPicPr>
-          <p:cNvPr id="315" name=""/>
+          <p:cNvPr id="328" name=""/>
           <p:cNvPicPr/>
           <p:nvPr/>
         </p:nvPicPr>
@@ -3808,7 +3808,7 @@
       </p:pic>
       <p:sp>
         <p:nvSpPr>
-          <p:cNvPr id="316" name=""/>
+          <p:cNvPr id="329" name=""/>
           <p:cNvSpPr txBox="1"/>
           <p:nvPr/>
         </p:nvSpPr>
@@ -3856,7 +3856,7 @@
       </p:sp>
       <p:sp>
         <p:nvSpPr>
-          <p:cNvPr id="317" name=""/>
+          <p:cNvPr id="330" name=""/>
           <p:cNvSpPr txBox="1"/>
           <p:nvPr/>
         </p:nvSpPr>
@@ -3904,7 +3904,7 @@
       </p:sp>
       <p:sp>
         <p:nvSpPr>
-          <p:cNvPr id="318" name=""/>
+          <p:cNvPr id="331" name=""/>
           <p:cNvSpPr txBox="1"/>
           <p:nvPr/>
         </p:nvSpPr>
@@ -3982,7 +3982,7 @@
       </p:grpSpPr>
       <p:sp>
         <p:nvSpPr>
-          <p:cNvPr id="319" name=""/>
+          <p:cNvPr id="332" name=""/>
           <p:cNvSpPr/>
           <p:nvPr/>
         </p:nvSpPr>
@@ -4042,7 +4042,7 @@
       </p:sp>
       <p:sp>
         <p:nvSpPr>
-          <p:cNvPr id="320" name=""/>
+          <p:cNvPr id="333" name=""/>
           <p:cNvSpPr/>
           <p:nvPr/>
         </p:nvSpPr>
@@ -4102,7 +4102,7 @@
       </p:sp>
       <p:sp>
         <p:nvSpPr>
-          <p:cNvPr id="321" name=""/>
+          <p:cNvPr id="334" name=""/>
           <p:cNvSpPr/>
           <p:nvPr/>
         </p:nvSpPr>
@@ -4162,7 +4162,7 @@
       </p:sp>
       <p:sp>
         <p:nvSpPr>
-          <p:cNvPr id="322" name=""/>
+          <p:cNvPr id="335" name=""/>
           <p:cNvSpPr/>
           <p:nvPr/>
         </p:nvSpPr>
@@ -4222,7 +4222,7 @@
       </p:sp>
       <p:sp>
         <p:nvSpPr>
-          <p:cNvPr id="323" name=""/>
+          <p:cNvPr id="336" name=""/>
           <p:cNvSpPr/>
           <p:nvPr/>
         </p:nvSpPr>
@@ -4322,7 +4322,7 @@
       </p:sp>
       <p:sp>
         <p:nvSpPr>
-          <p:cNvPr id="324" name=""/>
+          <p:cNvPr id="337" name=""/>
           <p:cNvSpPr/>
           <p:nvPr/>
         </p:nvSpPr>
@@ -4382,7 +4382,7 @@
       </p:sp>
       <p:sp>
         <p:nvSpPr>
-          <p:cNvPr id="325" name=""/>
+          <p:cNvPr id="338" name=""/>
           <p:cNvSpPr/>
           <p:nvPr/>
         </p:nvSpPr>
@@ -4510,7 +4510,7 @@
       </p:sp>
       <p:sp>
         <p:nvSpPr>
-          <p:cNvPr id="326" name=""/>
+          <p:cNvPr id="339" name=""/>
           <p:cNvSpPr txBox="1"/>
           <p:nvPr/>
         </p:nvSpPr>
@@ -4558,7 +4558,7 @@
       </p:sp>
       <p:sp>
         <p:nvSpPr>
-          <p:cNvPr id="327" name=""/>
+          <p:cNvPr id="340" name=""/>
           <p:cNvSpPr txBox="1"/>
           <p:nvPr/>
         </p:nvSpPr>
@@ -4606,7 +4606,7 @@
       </p:sp>
       <p:sp>
         <p:nvSpPr>
-          <p:cNvPr id="328" name=""/>
+          <p:cNvPr id="341" name=""/>
           <p:cNvSpPr txBox="1"/>
           <p:nvPr/>
         </p:nvSpPr>
@@ -4654,7 +4654,7 @@
       </p:sp>
       <p:sp>
         <p:nvSpPr>
-          <p:cNvPr id="329" name=""/>
+          <p:cNvPr id="342" name=""/>
           <p:cNvSpPr/>
           <p:nvPr/>
         </p:nvSpPr>
@@ -4782,7 +4782,7 @@
       </p:sp>
       <p:sp>
         <p:nvSpPr>
-          <p:cNvPr id="330" name=""/>
+          <p:cNvPr id="343" name=""/>
           <p:cNvSpPr txBox="1"/>
           <p:nvPr/>
         </p:nvSpPr>
@@ -4830,7 +4830,7 @@
       </p:sp>
       <p:sp>
         <p:nvSpPr>
-          <p:cNvPr id="331" name=""/>
+          <p:cNvPr id="344" name=""/>
           <p:cNvSpPr txBox="1"/>
           <p:nvPr/>
         </p:nvSpPr>
@@ -4878,7 +4878,7 @@
       </p:sp>
       <p:sp>
         <p:nvSpPr>
-          <p:cNvPr id="332" name=""/>
+          <p:cNvPr id="345" name=""/>
           <p:cNvSpPr txBox="1"/>
           <p:nvPr/>
         </p:nvSpPr>
@@ -4926,7 +4926,7 @@
       </p:sp>
       <p:sp>
         <p:nvSpPr>
-          <p:cNvPr id="333" name=""/>
+          <p:cNvPr id="346" name=""/>
           <p:cNvSpPr/>
           <p:nvPr/>
         </p:nvSpPr>
@@ -5054,7 +5054,7 @@
       </p:sp>
       <p:sp>
         <p:nvSpPr>
-          <p:cNvPr id="334" name=""/>
+          <p:cNvPr id="347" name=""/>
           <p:cNvSpPr txBox="1"/>
           <p:nvPr/>
         </p:nvSpPr>
@@ -5102,7 +5102,7 @@
       </p:sp>
       <p:sp>
         <p:nvSpPr>
-          <p:cNvPr id="335" name=""/>
+          <p:cNvPr id="348" name=""/>
           <p:cNvSpPr txBox="1"/>
           <p:nvPr/>
         </p:nvSpPr>
@@ -5150,7 +5150,7 @@
       </p:sp>
       <p:sp>
         <p:nvSpPr>
-          <p:cNvPr id="336" name=""/>
+          <p:cNvPr id="349" name=""/>
           <p:cNvSpPr/>
           <p:nvPr/>
         </p:nvSpPr>
@@ -5278,7 +5278,7 @@
       </p:sp>
       <p:sp>
         <p:nvSpPr>
-          <p:cNvPr id="337" name=""/>
+          <p:cNvPr id="350" name=""/>
           <p:cNvSpPr txBox="1"/>
           <p:nvPr/>
         </p:nvSpPr>
@@ -5326,7 +5326,7 @@
       </p:sp>
       <p:sp>
         <p:nvSpPr>
-          <p:cNvPr id="338" name=""/>
+          <p:cNvPr id="351" name=""/>
           <p:cNvSpPr txBox="1"/>
           <p:nvPr/>
         </p:nvSpPr>
@@ -5374,7 +5374,7 @@
       </p:sp>
       <p:sp>
         <p:nvSpPr>
-          <p:cNvPr id="339" name=""/>
+          <p:cNvPr id="352" name=""/>
           <p:cNvSpPr txBox="1"/>
           <p:nvPr/>
         </p:nvSpPr>
@@ -5422,7 +5422,7 @@
       </p:sp>
       <p:sp>
         <p:nvSpPr>
-          <p:cNvPr id="340" name=""/>
+          <p:cNvPr id="353" name=""/>
           <p:cNvSpPr txBox="1"/>
           <p:nvPr/>
         </p:nvSpPr>
@@ -5500,7 +5500,7 @@
       </p:grpSpPr>
       <p:sp>
         <p:nvSpPr>
-          <p:cNvPr id="341" name=""/>
+          <p:cNvPr id="354" name=""/>
           <p:cNvSpPr/>
           <p:nvPr/>
         </p:nvSpPr>
@@ -5560,7 +5560,7 @@
       </p:sp>
       <p:sp>
         <p:nvSpPr>
-          <p:cNvPr id="342" name=""/>
+          <p:cNvPr id="355" name=""/>
           <p:cNvSpPr/>
           <p:nvPr/>
         </p:nvSpPr>
@@ -5620,7 +5620,7 @@
       </p:sp>
       <p:sp>
         <p:nvSpPr>
-          <p:cNvPr id="343" name=""/>
+          <p:cNvPr id="356" name=""/>
           <p:cNvSpPr/>
           <p:nvPr/>
         </p:nvSpPr>
@@ -5680,7 +5680,7 @@
       </p:sp>
       <p:sp>
         <p:nvSpPr>
-          <p:cNvPr id="344" name=""/>
+          <p:cNvPr id="357" name=""/>
           <p:cNvSpPr/>
           <p:nvPr/>
         </p:nvSpPr>
@@ -5740,7 +5740,7 @@
       </p:sp>
       <p:sp>
         <p:nvSpPr>
-          <p:cNvPr id="345" name=""/>
+          <p:cNvPr id="358" name=""/>
           <p:cNvSpPr/>
           <p:nvPr/>
         </p:nvSpPr>
@@ -5868,7 +5868,7 @@
       </p:sp>
       <p:sp>
         <p:nvSpPr>
-          <p:cNvPr id="346" name=""/>
+          <p:cNvPr id="359" name=""/>
           <p:cNvSpPr txBox="1"/>
           <p:nvPr/>
         </p:nvSpPr>
@@ -5916,7 +5916,7 @@
       </p:sp>
       <p:sp>
         <p:nvSpPr>
-          <p:cNvPr id="347" name=""/>
+          <p:cNvPr id="360" name=""/>
           <p:cNvSpPr/>
           <p:nvPr/>
         </p:nvSpPr>
@@ -6044,7 +6044,7 @@
       </p:sp>
       <p:sp>
         <p:nvSpPr>
-          <p:cNvPr id="348" name=""/>
+          <p:cNvPr id="361" name=""/>
           <p:cNvSpPr txBox="1"/>
           <p:nvPr/>
         </p:nvSpPr>
@@ -6092,7 +6092,7 @@
       </p:sp>
       <p:sp>
         <p:nvSpPr>
-          <p:cNvPr id="349" name=""/>
+          <p:cNvPr id="362" name=""/>
           <p:cNvSpPr txBox="1"/>
           <p:nvPr/>
         </p:nvSpPr>
@@ -6140,7 +6140,7 @@
       </p:sp>
       <p:sp>
         <p:nvSpPr>
-          <p:cNvPr id="350" name=""/>
+          <p:cNvPr id="363" name=""/>
           <p:cNvSpPr txBox="1"/>
           <p:nvPr/>
         </p:nvSpPr>
@@ -6188,7 +6188,7 @@
       </p:sp>
       <p:sp>
         <p:nvSpPr>
-          <p:cNvPr id="351" name=""/>
+          <p:cNvPr id="364" name=""/>
           <p:cNvSpPr/>
           <p:nvPr/>
         </p:nvSpPr>
@@ -6316,7 +6316,7 @@
       </p:sp>
       <p:sp>
         <p:nvSpPr>
-          <p:cNvPr id="352" name=""/>
+          <p:cNvPr id="365" name=""/>
           <p:cNvSpPr txBox="1"/>
           <p:nvPr/>
         </p:nvSpPr>
@@ -6364,7 +6364,7 @@
       </p:sp>
       <p:sp>
         <p:nvSpPr>
-          <p:cNvPr id="353" name=""/>
+          <p:cNvPr id="366" name=""/>
           <p:cNvSpPr txBox="1"/>
           <p:nvPr/>
         </p:nvSpPr>
@@ -6412,7 +6412,7 @@
       </p:sp>
       <p:sp>
         <p:nvSpPr>
-          <p:cNvPr id="354" name=""/>
+          <p:cNvPr id="367" name=""/>
           <p:cNvSpPr txBox="1"/>
           <p:nvPr/>
         </p:nvSpPr>
@@ -6460,7 +6460,7 @@
       </p:sp>
       <p:sp>
         <p:nvSpPr>
-          <p:cNvPr id="355" name=""/>
+          <p:cNvPr id="368" name=""/>
           <p:cNvSpPr txBox="1"/>
           <p:nvPr/>
         </p:nvSpPr>
@@ -6508,7 +6508,7 @@
       </p:sp>
       <p:sp>
         <p:nvSpPr>
-          <p:cNvPr id="356" name=""/>
+          <p:cNvPr id="369" name=""/>
           <p:cNvSpPr txBox="1"/>
           <p:nvPr/>
         </p:nvSpPr>
@@ -25068,7 +25068,7 @@
         </p:nvSpPr>
         <p:spPr>
           <a:xfrm>
-            <a:off x="533160" y="1009440"/>
+            <a:off x="533160" y="1152360"/>
             <a:ext cx="11125440" cy="28800"/>
           </a:xfrm>
           <a:custGeom>
@@ -25123,12 +25123,172 @@
       <p:sp>
         <p:nvSpPr>
           <p:cNvPr id="223" name=""/>
+          <p:cNvSpPr/>
+          <p:nvPr/>
+        </p:nvSpPr>
+        <p:spPr>
+          <a:xfrm>
+            <a:off x="552240" y="5800680"/>
+            <a:ext cx="11106360" cy="457560"/>
+          </a:xfrm>
+          <a:custGeom>
+            <a:avLst/>
+            <a:gdLst/>
+            <a:ahLst/>
+            <a:rect l="0" t="0" r="r" b="b"/>
+            <a:pathLst>
+              <a:path w="30851" h="1271">
+                <a:moveTo>
+                  <a:pt x="0" y="1271"/>
+                </a:moveTo>
+                <a:lnTo>
+                  <a:pt x="0" y="0"/>
+                </a:lnTo>
+                <a:lnTo>
+                  <a:pt x="30746" y="0"/>
+                </a:lnTo>
+                <a:cubicBezTo>
+                  <a:pt x="30760" y="0"/>
+                  <a:pt x="30773" y="2"/>
+                  <a:pt x="30786" y="8"/>
+                </a:cubicBezTo>
+                <a:cubicBezTo>
+                  <a:pt x="30799" y="13"/>
+                  <a:pt x="30811" y="21"/>
+                  <a:pt x="30820" y="31"/>
+                </a:cubicBezTo>
+                <a:cubicBezTo>
+                  <a:pt x="30830" y="41"/>
+                  <a:pt x="30838" y="52"/>
+                  <a:pt x="30843" y="65"/>
+                </a:cubicBezTo>
+                <a:cubicBezTo>
+                  <a:pt x="30849" y="78"/>
+                  <a:pt x="30851" y="91"/>
+                  <a:pt x="30851" y="105"/>
+                </a:cubicBezTo>
+                <a:lnTo>
+                  <a:pt x="30851" y="1165"/>
+                </a:lnTo>
+                <a:cubicBezTo>
+                  <a:pt x="30851" y="1179"/>
+                  <a:pt x="30849" y="1192"/>
+                  <a:pt x="30843" y="1205"/>
+                </a:cubicBezTo>
+                <a:cubicBezTo>
+                  <a:pt x="30838" y="1218"/>
+                  <a:pt x="30830" y="1230"/>
+                  <a:pt x="30820" y="1240"/>
+                </a:cubicBezTo>
+                <a:cubicBezTo>
+                  <a:pt x="30811" y="1250"/>
+                  <a:pt x="30799" y="1257"/>
+                  <a:pt x="30786" y="1263"/>
+                </a:cubicBezTo>
+                <a:cubicBezTo>
+                  <a:pt x="30773" y="1268"/>
+                  <a:pt x="30760" y="1271"/>
+                  <a:pt x="30746" y="1271"/>
+                </a:cubicBezTo>
+                <a:lnTo>
+                  <a:pt x="0" y="1271"/>
+                </a:lnTo>
+                <a:close/>
+              </a:path>
+            </a:pathLst>
+          </a:custGeom>
+          <a:solidFill>
+            <a:srgbClr val="EFF6FF"/>
+          </a:solidFill>
+          <a:ln w="0">
+            <a:noFill/>
+          </a:ln>
+        </p:spPr>
+        <p:txBody>
+          <a:bodyPr lIns="0" tIns="0" rIns="0" bIns="0" anchor="t">
+            <a:noAutofit/>
+          </a:bodyPr>
+          <a:p>
+            <a:endParaRPr lang="en-US" sz="2400" b="0" u="none" strike="noStrike">
+              <a:solidFill>
+                <a:srgbClr val="000000"/>
+              </a:solidFill>
+              <a:effectLst/>
+              <a:uFillTx/>
+              <a:latin typeface="游明朝体"/>
+            </a:endParaRPr>
+          </a:p>
+        </p:txBody>
+      </p:sp>
+      <p:sp>
+        <p:nvSpPr>
+          <p:cNvPr id="224" name=""/>
+          <p:cNvSpPr/>
+          <p:nvPr/>
+        </p:nvSpPr>
+        <p:spPr>
+          <a:xfrm>
+            <a:off x="533160" y="5800680"/>
+            <a:ext cx="38520" cy="457560"/>
+          </a:xfrm>
+          <a:custGeom>
+            <a:avLst/>
+            <a:gdLst/>
+            <a:ahLst/>
+            <a:rect l="0" t="0" r="r" b="b"/>
+            <a:pathLst>
+              <a:path w="107" h="1271">
+                <a:moveTo>
+                  <a:pt x="0" y="0"/>
+                </a:moveTo>
+                <a:lnTo>
+                  <a:pt x="107" y="0"/>
+                </a:lnTo>
+                <a:lnTo>
+                  <a:pt x="107" y="1271"/>
+                </a:lnTo>
+                <a:lnTo>
+                  <a:pt x="0" y="1271"/>
+                </a:lnTo>
+                <a:lnTo>
+                  <a:pt x="0" y="0"/>
+                </a:lnTo>
+                <a:close/>
+              </a:path>
+            </a:pathLst>
+          </a:custGeom>
+          <a:solidFill>
+            <a:srgbClr val="2563EB"/>
+          </a:solidFill>
+          <a:ln w="0">
+            <a:noFill/>
+          </a:ln>
+        </p:spPr>
+        <p:txBody>
+          <a:bodyPr lIns="0" tIns="0" rIns="0" bIns="0" anchor="t">
+            <a:noAutofit/>
+          </a:bodyPr>
+          <a:p>
+            <a:endParaRPr lang="en-US" sz="2400" b="0" u="none" strike="noStrike">
+              <a:solidFill>
+                <a:srgbClr val="FFFFFF"/>
+              </a:solidFill>
+              <a:effectLst/>
+              <a:uFillTx/>
+              <a:latin typeface="游明朝体"/>
+            </a:endParaRPr>
+          </a:p>
+        </p:txBody>
+      </p:sp>
+      <p:sp>
+        <p:nvSpPr>
+          <p:cNvPr id="225" name=""/>
           <p:cNvSpPr txBox="1"/>
           <p:nvPr/>
         </p:nvSpPr>
         <p:spPr>
           <a:xfrm>
-            <a:off x="533520" y="475560"/>
+            <a:off x="533520" y="618480"/>
             <a:ext cx="380520" cy="454680"/>
           </a:xfrm>
           <a:prstGeom prst="rect">
@@ -25155,7 +25315,7 @@
                 <a:latin typeface="HelveticaNeue"/>
                 <a:ea typeface="HelveticaNeue"/>
               </a:rPr>
-              <a:t>3</a:t>
+              <a:t>4</a:t>
             </a:r>
             <a:endParaRPr lang="en-US" sz="3000" b="0" u="none" strike="noStrike">
               <a:solidFill>
@@ -25170,13 +25330,13 @@
       </p:sp>
       <p:sp>
         <p:nvSpPr>
-          <p:cNvPr id="224" name=""/>
+          <p:cNvPr id="226" name=""/>
           <p:cNvSpPr txBox="1"/>
           <p:nvPr/>
         </p:nvSpPr>
         <p:spPr>
           <a:xfrm>
-            <a:off x="745200" y="493560"/>
+            <a:off x="745200" y="636120"/>
             <a:ext cx="5715720" cy="381240"/>
           </a:xfrm>
           <a:prstGeom prst="rect">
@@ -25218,13 +25378,13 @@
       </p:sp>
       <p:sp>
         <p:nvSpPr>
-          <p:cNvPr id="225" name=""/>
+          <p:cNvPr id="227" name=""/>
           <p:cNvSpPr txBox="1"/>
           <p:nvPr/>
         </p:nvSpPr>
         <p:spPr>
           <a:xfrm>
-            <a:off x="533520" y="1294920"/>
+            <a:off x="533520" y="1437840"/>
             <a:ext cx="434520" cy="222840"/>
           </a:xfrm>
           <a:prstGeom prst="rect">
@@ -25266,13 +25426,13 @@
       </p:sp>
       <p:sp>
         <p:nvSpPr>
-          <p:cNvPr id="226" name=""/>
+          <p:cNvPr id="228" name=""/>
           <p:cNvSpPr txBox="1"/>
           <p:nvPr/>
         </p:nvSpPr>
         <p:spPr>
           <a:xfrm>
-            <a:off x="967320" y="1303920"/>
+            <a:off x="967320" y="1446840"/>
             <a:ext cx="1143720" cy="191160"/>
           </a:xfrm>
           <a:prstGeom prst="rect">
@@ -25314,13 +25474,13 @@
       </p:sp>
       <p:sp>
         <p:nvSpPr>
-          <p:cNvPr id="227" name=""/>
+          <p:cNvPr id="229" name=""/>
           <p:cNvSpPr txBox="1"/>
           <p:nvPr/>
         </p:nvSpPr>
         <p:spPr>
           <a:xfrm>
-            <a:off x="2015280" y="1294920"/>
+            <a:off x="2015280" y="1437840"/>
             <a:ext cx="706320" cy="222840"/>
           </a:xfrm>
           <a:prstGeom prst="rect">
@@ -25362,13 +25522,13 @@
       </p:sp>
       <p:sp>
         <p:nvSpPr>
-          <p:cNvPr id="228" name=""/>
+          <p:cNvPr id="230" name=""/>
           <p:cNvSpPr txBox="1"/>
           <p:nvPr/>
         </p:nvSpPr>
         <p:spPr>
           <a:xfrm>
-            <a:off x="2720880" y="1303920"/>
+            <a:off x="2720880" y="1446840"/>
             <a:ext cx="2477160" cy="191160"/>
           </a:xfrm>
           <a:prstGeom prst="rect">
@@ -25410,13 +25570,13 @@
       </p:sp>
       <p:sp>
         <p:nvSpPr>
-          <p:cNvPr id="229" name=""/>
+          <p:cNvPr id="231" name=""/>
           <p:cNvSpPr txBox="1"/>
           <p:nvPr/>
         </p:nvSpPr>
         <p:spPr>
           <a:xfrm>
-            <a:off x="5101920" y="1294920"/>
+            <a:off x="5101920" y="1437840"/>
             <a:ext cx="378000" cy="222840"/>
           </a:xfrm>
           <a:prstGeom prst="rect">
@@ -25458,14 +25618,14 @@
       </p:sp>
       <p:sp>
         <p:nvSpPr>
-          <p:cNvPr id="230" name=""/>
+          <p:cNvPr id="232" name=""/>
           <p:cNvSpPr txBox="1"/>
           <p:nvPr/>
         </p:nvSpPr>
         <p:spPr>
           <a:xfrm>
-            <a:off x="5479200" y="1303920"/>
-            <a:ext cx="3620160" cy="191160"/>
+            <a:off x="5479200" y="1446840"/>
+            <a:ext cx="953280" cy="191160"/>
           </a:xfrm>
           <a:prstGeom prst="rect">
             <a:avLst/>
@@ -25491,7 +25651,7 @@
                 <a:latin typeface="HiraginoSans-W4"/>
                 <a:ea typeface="HiraginoSans-W4"/>
               </a:rPr>
-              <a:t>（⽶国）による地上気圧予報を並列表⽰。</a:t>
+              <a:t>（⽶国）・</a:t>
             </a:r>
             <a:endParaRPr lang="en-US" sz="1500" b="0" u="none" strike="noStrike">
               <a:solidFill>
@@ -25506,13 +25666,205 @@
       </p:sp>
       <p:sp>
         <p:nvSpPr>
-          <p:cNvPr id="231" name=""/>
+          <p:cNvPr id="233" name=""/>
           <p:cNvSpPr txBox="1"/>
           <p:nvPr/>
         </p:nvSpPr>
         <p:spPr>
           <a:xfrm>
-            <a:off x="533520" y="1589760"/>
+            <a:off x="6336720" y="1437840"/>
+            <a:ext cx="406440" cy="222840"/>
+          </a:xfrm>
+          <a:prstGeom prst="rect">
+            <a:avLst/>
+          </a:prstGeom>
+          <a:noFill/>
+          <a:ln w="0">
+            <a:noFill/>
+          </a:ln>
+        </p:spPr>
+        <p:txBody>
+          <a:bodyPr wrap="none" lIns="0" tIns="0" rIns="0" bIns="0" anchor="t">
+            <a:spAutoFit/>
+          </a:bodyPr>
+          <a:p>
+            <a:pPr/>
+            <a:r>
+              <a:rPr lang="en-US" sz="1500" b="0" u="none" strike="noStrike">
+                <a:solidFill>
+                  <a:srgbClr val="1A1A2E"/>
+                </a:solidFill>
+                <a:effectLst/>
+                <a:uFillTx/>
+                <a:latin typeface="HelveticaNeue"/>
+                <a:ea typeface="HelveticaNeue"/>
+              </a:rPr>
+              <a:t>AIFS</a:t>
+            </a:r>
+            <a:endParaRPr lang="en-US" sz="1500" b="0" u="none" strike="noStrike">
+              <a:solidFill>
+                <a:srgbClr val="000000"/>
+              </a:solidFill>
+              <a:effectLst/>
+              <a:uFillTx/>
+              <a:latin typeface="游明朝体"/>
+            </a:endParaRPr>
+          </a:p>
+        </p:txBody>
+      </p:sp>
+      <p:sp>
+        <p:nvSpPr>
+          <p:cNvPr id="234" name=""/>
+          <p:cNvSpPr txBox="1"/>
+          <p:nvPr/>
+        </p:nvSpPr>
+        <p:spPr>
+          <a:xfrm>
+            <a:off x="6742080" y="1446840"/>
+            <a:ext cx="191160" cy="191160"/>
+          </a:xfrm>
+          <a:prstGeom prst="rect">
+            <a:avLst/>
+          </a:prstGeom>
+          <a:noFill/>
+          <a:ln w="0">
+            <a:noFill/>
+          </a:ln>
+        </p:spPr>
+        <p:txBody>
+          <a:bodyPr wrap="none" lIns="0" tIns="0" rIns="0" bIns="0" anchor="t">
+            <a:spAutoFit/>
+          </a:bodyPr>
+          <a:p>
+            <a:pPr/>
+            <a:r>
+              <a:rPr lang="ja-JP" sz="1500" b="0" u="none" strike="noStrike">
+                <a:solidFill>
+                  <a:srgbClr val="1A1A2E"/>
+                </a:solidFill>
+                <a:effectLst/>
+                <a:uFillTx/>
+                <a:latin typeface="HiraginoSans-W4"/>
+                <a:ea typeface="HiraginoSans-W4"/>
+              </a:rPr>
+              <a:t>（</a:t>
+            </a:r>
+            <a:endParaRPr lang="en-US" sz="1500" b="0" u="none" strike="noStrike">
+              <a:solidFill>
+                <a:srgbClr val="000000"/>
+              </a:solidFill>
+              <a:effectLst/>
+              <a:uFillTx/>
+              <a:latin typeface="游明朝体"/>
+            </a:endParaRPr>
+          </a:p>
+        </p:txBody>
+      </p:sp>
+      <p:sp>
+        <p:nvSpPr>
+          <p:cNvPr id="235" name=""/>
+          <p:cNvSpPr txBox="1"/>
+          <p:nvPr/>
+        </p:nvSpPr>
+        <p:spPr>
+          <a:xfrm>
+            <a:off x="6932520" y="1437840"/>
+            <a:ext cx="932040" cy="222840"/>
+          </a:xfrm>
+          <a:prstGeom prst="rect">
+            <a:avLst/>
+          </a:prstGeom>
+          <a:noFill/>
+          <a:ln w="0">
+            <a:noFill/>
+          </a:ln>
+        </p:spPr>
+        <p:txBody>
+          <a:bodyPr wrap="none" lIns="0" tIns="0" rIns="0" bIns="0" anchor="t">
+            <a:spAutoFit/>
+          </a:bodyPr>
+          <a:p>
+            <a:pPr/>
+            <a:r>
+              <a:rPr lang="en-US" sz="1500" b="0" u="none" strike="noStrike">
+                <a:solidFill>
+                  <a:srgbClr val="1A1A2E"/>
+                </a:solidFill>
+                <a:effectLst/>
+                <a:uFillTx/>
+                <a:latin typeface="HelveticaNeue"/>
+                <a:ea typeface="HelveticaNeue"/>
+              </a:rPr>
+              <a:t>ECMWF AI</a:t>
+            </a:r>
+            <a:endParaRPr lang="en-US" sz="1500" b="0" u="none" strike="noStrike">
+              <a:solidFill>
+                <a:srgbClr val="000000"/>
+              </a:solidFill>
+              <a:effectLst/>
+              <a:uFillTx/>
+              <a:latin typeface="游明朝体"/>
+            </a:endParaRPr>
+          </a:p>
+        </p:txBody>
+      </p:sp>
+      <p:sp>
+        <p:nvSpPr>
+          <p:cNvPr id="236" name=""/>
+          <p:cNvSpPr txBox="1"/>
+          <p:nvPr/>
+        </p:nvSpPr>
+        <p:spPr>
+          <a:xfrm>
+            <a:off x="7864200" y="1446840"/>
+            <a:ext cx="3429720" cy="191160"/>
+          </a:xfrm>
+          <a:prstGeom prst="rect">
+            <a:avLst/>
+          </a:prstGeom>
+          <a:noFill/>
+          <a:ln w="0">
+            <a:noFill/>
+          </a:ln>
+        </p:spPr>
+        <p:txBody>
+          <a:bodyPr wrap="none" lIns="0" tIns="0" rIns="0" bIns="0" anchor="t">
+            <a:spAutoFit/>
+          </a:bodyPr>
+          <a:p>
+            <a:pPr/>
+            <a:r>
+              <a:rPr lang="ja-JP" sz="1500" b="0" u="none" strike="noStrike">
+                <a:solidFill>
+                  <a:srgbClr val="1A1A2E"/>
+                </a:solidFill>
+                <a:effectLst/>
+                <a:uFillTx/>
+                <a:latin typeface="HiraginoSans-W4"/>
+                <a:ea typeface="HiraginoSans-W4"/>
+              </a:rPr>
+              <a:t>予測）による地上気圧予報を並列表⽰。</a:t>
+            </a:r>
+            <a:endParaRPr lang="en-US" sz="1500" b="0" u="none" strike="noStrike">
+              <a:solidFill>
+                <a:srgbClr val="000000"/>
+              </a:solidFill>
+              <a:effectLst/>
+              <a:uFillTx/>
+              <a:latin typeface="游明朝体"/>
+            </a:endParaRPr>
+          </a:p>
+        </p:txBody>
+      </p:sp>
+      <p:sp>
+        <p:nvSpPr>
+          <p:cNvPr id="237" name=""/>
+          <p:cNvSpPr txBox="1"/>
+          <p:nvPr/>
+        </p:nvSpPr>
+        <p:spPr>
+          <a:xfrm>
+            <a:off x="533520" y="1732680"/>
             <a:ext cx="191160" cy="191160"/>
           </a:xfrm>
           <a:prstGeom prst="rect">
@@ -25554,13 +25906,13 @@
       </p:sp>
       <p:sp>
         <p:nvSpPr>
-          <p:cNvPr id="232" name=""/>
+          <p:cNvPr id="238" name=""/>
           <p:cNvSpPr txBox="1"/>
           <p:nvPr/>
         </p:nvSpPr>
         <p:spPr>
           <a:xfrm>
-            <a:off x="723960" y="1580760"/>
+            <a:off x="723960" y="1723680"/>
             <a:ext cx="530280" cy="222840"/>
           </a:xfrm>
           <a:prstGeom prst="rect">
@@ -25602,13 +25954,13 @@
       </p:sp>
       <p:sp>
         <p:nvSpPr>
-          <p:cNvPr id="233" name=""/>
+          <p:cNvPr id="239" name=""/>
           <p:cNvSpPr txBox="1"/>
           <p:nvPr/>
         </p:nvSpPr>
         <p:spPr>
           <a:xfrm>
-            <a:off x="1253520" y="1589760"/>
+            <a:off x="1253520" y="1732680"/>
             <a:ext cx="191160" cy="191160"/>
           </a:xfrm>
           <a:prstGeom prst="rect">
@@ -25650,13 +26002,13 @@
       </p:sp>
       <p:sp>
         <p:nvSpPr>
-          <p:cNvPr id="234" name=""/>
+          <p:cNvPr id="240" name=""/>
           <p:cNvSpPr txBox="1"/>
           <p:nvPr/>
         </p:nvSpPr>
         <p:spPr>
           <a:xfrm>
-            <a:off x="1443960" y="1580760"/>
+            <a:off x="1443960" y="1723680"/>
             <a:ext cx="190080" cy="222840"/>
           </a:xfrm>
           <a:prstGeom prst="rect">
@@ -25683,7 +26035,7 @@
                 <a:latin typeface="HelveticaNeue"/>
                 <a:ea typeface="HelveticaNeue"/>
               </a:rPr>
-              <a:t>5</a:t>
+              <a:t>6</a:t>
             </a:r>
             <a:endParaRPr lang="en-US" sz="1500" b="0" u="none" strike="noStrike">
               <a:solidFill>
@@ -25698,13 +26050,13 @@
       </p:sp>
       <p:sp>
         <p:nvSpPr>
-          <p:cNvPr id="235" name=""/>
+          <p:cNvPr id="241" name=""/>
           <p:cNvSpPr txBox="1"/>
           <p:nvPr/>
         </p:nvSpPr>
         <p:spPr>
           <a:xfrm>
-            <a:off x="1549800" y="1589760"/>
+            <a:off x="1549800" y="1732680"/>
             <a:ext cx="191160" cy="191160"/>
           </a:xfrm>
           <a:prstGeom prst="rect">
@@ -25746,13 +26098,13 @@
       </p:sp>
       <p:sp>
         <p:nvSpPr>
-          <p:cNvPr id="236" name=""/>
+          <p:cNvPr id="242" name=""/>
           <p:cNvSpPr txBox="1"/>
           <p:nvPr/>
         </p:nvSpPr>
         <p:spPr>
           <a:xfrm>
-            <a:off x="1740240" y="1580760"/>
+            <a:off x="1740240" y="1723680"/>
             <a:ext cx="212400" cy="222840"/>
           </a:xfrm>
           <a:prstGeom prst="rect">
@@ -25779,7 +26131,7 @@
                 <a:latin typeface="HelveticaNeue"/>
                 <a:ea typeface="HelveticaNeue"/>
               </a:rPr>
-              <a:t>29</a:t>
+              <a:t>19</a:t>
             </a:r>
             <a:endParaRPr lang="en-US" sz="1500" b="0" u="none" strike="noStrike">
               <a:solidFill>
@@ -25794,13 +26146,13 @@
       </p:sp>
       <p:sp>
         <p:nvSpPr>
-          <p:cNvPr id="237" name=""/>
+          <p:cNvPr id="243" name=""/>
           <p:cNvSpPr txBox="1"/>
           <p:nvPr/>
         </p:nvSpPr>
         <p:spPr>
           <a:xfrm>
-            <a:off x="1952280" y="1589760"/>
+            <a:off x="1952280" y="1732680"/>
             <a:ext cx="191160" cy="191160"/>
           </a:xfrm>
           <a:prstGeom prst="rect">
@@ -25842,13 +26194,13 @@
       </p:sp>
       <p:sp>
         <p:nvSpPr>
-          <p:cNvPr id="238" name=""/>
+          <p:cNvPr id="244" name=""/>
           <p:cNvSpPr txBox="1"/>
           <p:nvPr/>
         </p:nvSpPr>
         <p:spPr>
           <a:xfrm>
-            <a:off x="2142720" y="1580760"/>
+            <a:off x="2142720" y="1723680"/>
             <a:ext cx="596880" cy="222840"/>
           </a:xfrm>
           <a:prstGeom prst="rect">
@@ -25875,7 +26227,7 @@
                 <a:latin typeface="HelveticaNeue"/>
                 <a:ea typeface="HelveticaNeue"/>
               </a:rPr>
-              <a:t>12UTC</a:t>
+              <a:t>00UTC</a:t>
             </a:r>
             <a:endParaRPr lang="en-US" sz="1500" b="0" u="none" strike="noStrike">
               <a:solidFill>
@@ -25890,13 +26242,13 @@
       </p:sp>
       <p:sp>
         <p:nvSpPr>
-          <p:cNvPr id="239" name=""/>
+          <p:cNvPr id="245" name=""/>
           <p:cNvSpPr txBox="1"/>
           <p:nvPr/>
         </p:nvSpPr>
         <p:spPr>
           <a:xfrm>
-            <a:off x="2738880" y="1589760"/>
+            <a:off x="2738880" y="1732680"/>
             <a:ext cx="762840" cy="191160"/>
           </a:xfrm>
           <a:prstGeom prst="rect">
@@ -25938,14 +26290,14 @@
       </p:sp>
       <p:sp>
         <p:nvSpPr>
-          <p:cNvPr id="240" name=""/>
+          <p:cNvPr id="246" name=""/>
           <p:cNvSpPr txBox="1"/>
           <p:nvPr/>
         </p:nvSpPr>
         <p:spPr>
           <a:xfrm>
-            <a:off x="3501000" y="1580760"/>
-            <a:ext cx="212400" cy="222840"/>
+            <a:off x="3501000" y="1723680"/>
+            <a:ext cx="318600" cy="222840"/>
           </a:xfrm>
           <a:prstGeom prst="rect">
             <a:avLst/>
@@ -25971,7 +26323,7 @@
                 <a:latin typeface="HelveticaNeue"/>
                 <a:ea typeface="HelveticaNeue"/>
               </a:rPr>
-              <a:t>84</a:t>
+              <a:t>156</a:t>
             </a:r>
             <a:endParaRPr lang="en-US" sz="1500" b="0" u="none" strike="noStrike">
               <a:solidFill>
@@ -25984,63 +26336,15 @@
           </a:p>
         </p:txBody>
       </p:sp>
-      <p:pic>
-        <p:nvPicPr>
-          <p:cNvPr id="241" name=""/>
-          <p:cNvPicPr/>
-          <p:nvPr/>
-        </p:nvPicPr>
-        <p:blipFill>
-          <a:blip r:embed="rId1"/>
-          <a:stretch/>
-        </p:blipFill>
-        <p:spPr>
-          <a:xfrm>
-            <a:off x="533520" y="1990800"/>
-            <a:ext cx="2857320" cy="3228480"/>
-          </a:xfrm>
-          <a:prstGeom prst="rect">
-            <a:avLst/>
-          </a:prstGeom>
-          <a:noFill/>
-          <a:ln w="0">
-            <a:noFill/>
-          </a:ln>
-        </p:spPr>
-      </p:pic>
-      <p:pic>
-        <p:nvPicPr>
-          <p:cNvPr id="242" name=""/>
-          <p:cNvPicPr/>
-          <p:nvPr/>
-        </p:nvPicPr>
-        <p:blipFill>
-          <a:blip r:embed="rId2"/>
-          <a:stretch/>
-        </p:blipFill>
-        <p:spPr>
-          <a:xfrm>
-            <a:off x="533520" y="5295960"/>
-            <a:ext cx="2857320" cy="3228480"/>
-          </a:xfrm>
-          <a:prstGeom prst="rect">
-            <a:avLst/>
-          </a:prstGeom>
-          <a:noFill/>
-          <a:ln w="0">
-            <a:noFill/>
-          </a:ln>
-        </p:spPr>
-      </p:pic>
-      <p:sp>
-        <p:nvSpPr>
-          <p:cNvPr id="243" name=""/>
+      <p:sp>
+        <p:nvSpPr>
+          <p:cNvPr id="247" name=""/>
           <p:cNvSpPr txBox="1"/>
           <p:nvPr/>
         </p:nvSpPr>
         <p:spPr>
           <a:xfrm>
-            <a:off x="3712680" y="1589760"/>
+            <a:off x="3818880" y="1732680"/>
             <a:ext cx="953280" cy="191160"/>
           </a:xfrm>
           <a:prstGeom prst="rect">
@@ -26067,7 +26371,7 @@
                 <a:latin typeface="HiraginoSans-W4"/>
                 <a:ea typeface="HiraginoSans-W4"/>
               </a:rPr>
-              <a:t>時間予報。</a:t>
+              <a:t>時間予報（</a:t>
             </a:r>
             <a:endParaRPr lang="en-US" sz="1500" b="0" u="none" strike="noStrike">
               <a:solidFill>
@@ -26082,7 +26386,415 @@
       </p:sp>
       <p:sp>
         <p:nvSpPr>
-          <p:cNvPr id="244" name=""/>
+          <p:cNvPr id="248" name=""/>
+          <p:cNvSpPr txBox="1"/>
+          <p:nvPr/>
+        </p:nvSpPr>
+        <p:spPr>
+          <a:xfrm>
+            <a:off x="4771440" y="1723680"/>
+            <a:ext cx="646560" cy="222840"/>
+          </a:xfrm>
+          <a:prstGeom prst="rect">
+            <a:avLst/>
+          </a:prstGeom>
+          <a:noFill/>
+          <a:ln w="0">
+            <a:noFill/>
+          </a:ln>
+        </p:spPr>
+        <p:txBody>
+          <a:bodyPr wrap="none" lIns="0" tIns="0" rIns="0" bIns="0" anchor="t">
+            <a:spAutoFit/>
+          </a:bodyPr>
+          <a:p>
+            <a:pPr/>
+            <a:r>
+              <a:rPr lang="en-US" sz="1500" b="0" u="none" strike="noStrike">
+                <a:solidFill>
+                  <a:srgbClr val="1A1A2E"/>
+                </a:solidFill>
+                <a:effectLst/>
+                <a:uFillTx/>
+                <a:latin typeface="HelveticaNeue"/>
+                <a:ea typeface="HelveticaNeue"/>
+              </a:rPr>
+              <a:t>6/25 21</a:t>
+            </a:r>
+            <a:endParaRPr lang="en-US" sz="1500" b="0" u="none" strike="noStrike">
+              <a:solidFill>
+                <a:srgbClr val="000000"/>
+              </a:solidFill>
+              <a:effectLst/>
+              <a:uFillTx/>
+              <a:latin typeface="游明朝体"/>
+            </a:endParaRPr>
+          </a:p>
+        </p:txBody>
+      </p:sp>
+      <p:sp>
+        <p:nvSpPr>
+          <p:cNvPr id="249" name=""/>
+          <p:cNvSpPr txBox="1"/>
+          <p:nvPr/>
+        </p:nvSpPr>
+        <p:spPr>
+          <a:xfrm>
+            <a:off x="5417280" y="1732680"/>
+            <a:ext cx="191160" cy="191160"/>
+          </a:xfrm>
+          <a:prstGeom prst="rect">
+            <a:avLst/>
+          </a:prstGeom>
+          <a:noFill/>
+          <a:ln w="0">
+            <a:noFill/>
+          </a:ln>
+        </p:spPr>
+        <p:txBody>
+          <a:bodyPr wrap="none" lIns="0" tIns="0" rIns="0" bIns="0" anchor="t">
+            <a:spAutoFit/>
+          </a:bodyPr>
+          <a:p>
+            <a:pPr/>
+            <a:r>
+              <a:rPr lang="ja-JP" sz="1500" b="0" u="none" strike="noStrike">
+                <a:solidFill>
+                  <a:srgbClr val="1A1A2E"/>
+                </a:solidFill>
+                <a:effectLst/>
+                <a:uFillTx/>
+                <a:latin typeface="HiraginoSans-W4"/>
+                <a:ea typeface="HiraginoSans-W4"/>
+              </a:rPr>
+              <a:t>時</a:t>
+            </a:r>
+            <a:endParaRPr lang="en-US" sz="1500" b="0" u="none" strike="noStrike">
+              <a:solidFill>
+                <a:srgbClr val="000000"/>
+              </a:solidFill>
+              <a:effectLst/>
+              <a:uFillTx/>
+              <a:latin typeface="游明朝体"/>
+            </a:endParaRPr>
+          </a:p>
+        </p:txBody>
+      </p:sp>
+      <p:sp>
+        <p:nvSpPr>
+          <p:cNvPr id="250" name=""/>
+          <p:cNvSpPr txBox="1"/>
+          <p:nvPr/>
+        </p:nvSpPr>
+        <p:spPr>
+          <a:xfrm>
+            <a:off x="5607720" y="1723680"/>
+            <a:ext cx="332280" cy="222840"/>
+          </a:xfrm>
+          <a:prstGeom prst="rect">
+            <a:avLst/>
+          </a:prstGeom>
+          <a:noFill/>
+          <a:ln w="0">
+            <a:noFill/>
+          </a:ln>
+        </p:spPr>
+        <p:txBody>
+          <a:bodyPr wrap="none" lIns="0" tIns="0" rIns="0" bIns="0" anchor="t">
+            <a:spAutoFit/>
+          </a:bodyPr>
+          <a:p>
+            <a:pPr/>
+            <a:r>
+              <a:rPr lang="en-US" sz="1500" b="0" u="none" strike="noStrike">
+                <a:solidFill>
+                  <a:srgbClr val="1A1A2E"/>
+                </a:solidFill>
+                <a:effectLst/>
+                <a:uFillTx/>
+                <a:latin typeface="HelveticaNeue"/>
+                <a:ea typeface="HelveticaNeue"/>
+              </a:rPr>
+              <a:t>JST</a:t>
+            </a:r>
+            <a:endParaRPr lang="en-US" sz="1500" b="0" u="none" strike="noStrike">
+              <a:solidFill>
+                <a:srgbClr val="000000"/>
+              </a:solidFill>
+              <a:effectLst/>
+              <a:uFillTx/>
+              <a:latin typeface="游明朝体"/>
+            </a:endParaRPr>
+          </a:p>
+        </p:txBody>
+      </p:sp>
+      <p:pic>
+        <p:nvPicPr>
+          <p:cNvPr id="251" name=""/>
+          <p:cNvPicPr/>
+          <p:nvPr/>
+        </p:nvPicPr>
+        <p:blipFill>
+          <a:blip r:embed="rId1"/>
+          <a:stretch/>
+        </p:blipFill>
+        <p:spPr>
+          <a:xfrm>
+            <a:off x="1333440" y="2133720"/>
+            <a:ext cx="9524520" cy="3438000"/>
+          </a:xfrm>
+          <a:prstGeom prst="rect">
+            <a:avLst/>
+          </a:prstGeom>
+          <a:noFill/>
+          <a:ln w="0">
+            <a:noFill/>
+          </a:ln>
+        </p:spPr>
+      </p:pic>
+      <p:sp>
+        <p:nvSpPr>
+          <p:cNvPr id="252" name=""/>
+          <p:cNvSpPr txBox="1"/>
+          <p:nvPr/>
+        </p:nvSpPr>
+        <p:spPr>
+          <a:xfrm>
+            <a:off x="5939280" y="1732680"/>
+            <a:ext cx="762840" cy="191160"/>
+          </a:xfrm>
+          <a:prstGeom prst="rect">
+            <a:avLst/>
+          </a:prstGeom>
+          <a:noFill/>
+          <a:ln w="0">
+            <a:noFill/>
+          </a:ln>
+        </p:spPr>
+        <p:txBody>
+          <a:bodyPr wrap="none" lIns="0" tIns="0" rIns="0" bIns="0" anchor="t">
+            <a:spAutoFit/>
+          </a:bodyPr>
+          <a:p>
+            <a:pPr/>
+            <a:r>
+              <a:rPr lang="ja-JP" sz="1500" b="0" u="none" strike="noStrike">
+                <a:solidFill>
+                  <a:srgbClr val="1A1A2E"/>
+                </a:solidFill>
+                <a:effectLst/>
+                <a:uFillTx/>
+                <a:latin typeface="HiraginoSans-W4"/>
+                <a:ea typeface="HiraginoSans-W4"/>
+              </a:rPr>
+              <a:t>時点）。</a:t>
+            </a:r>
+            <a:endParaRPr lang="en-US" sz="1500" b="0" u="none" strike="noStrike">
+              <a:solidFill>
+                <a:srgbClr val="000000"/>
+              </a:solidFill>
+              <a:effectLst/>
+              <a:uFillTx/>
+              <a:latin typeface="游明朝体"/>
+            </a:endParaRPr>
+          </a:p>
+        </p:txBody>
+      </p:sp>
+      <p:sp>
+        <p:nvSpPr>
+          <p:cNvPr id="253" name=""/>
+          <p:cNvSpPr txBox="1"/>
+          <p:nvPr/>
+        </p:nvSpPr>
+        <p:spPr>
+          <a:xfrm>
+            <a:off x="723960" y="5923800"/>
+            <a:ext cx="464400" cy="210600"/>
+          </a:xfrm>
+          <a:prstGeom prst="rect">
+            <a:avLst/>
+          </a:prstGeom>
+          <a:noFill/>
+          <a:ln w="0">
+            <a:noFill/>
+          </a:ln>
+        </p:spPr>
+        <p:txBody>
+          <a:bodyPr wrap="none" lIns="0" tIns="0" rIns="0" bIns="0" anchor="t">
+            <a:spAutoFit/>
+          </a:bodyPr>
+          <a:p>
+            <a:pPr/>
+            <a:r>
+              <a:rPr lang="en-US" sz="1430" b="0" u="none" strike="noStrike">
+                <a:solidFill>
+                  <a:srgbClr val="1A1A2E"/>
+                </a:solidFill>
+                <a:effectLst/>
+                <a:uFillTx/>
+                <a:latin typeface="HelveticaNeue"/>
+                <a:ea typeface="HelveticaNeue"/>
+              </a:rPr>
+              <a:t>GSM </a:t>
+            </a:r>
+            <a:endParaRPr lang="en-US" sz="1430" b="0" u="none" strike="noStrike">
+              <a:solidFill>
+                <a:srgbClr val="000000"/>
+              </a:solidFill>
+              <a:effectLst/>
+              <a:uFillTx/>
+              <a:latin typeface="游明朝体"/>
+            </a:endParaRPr>
+          </a:p>
+        </p:txBody>
+      </p:sp>
+      <p:sp>
+        <p:nvSpPr>
+          <p:cNvPr id="254" name=""/>
+          <p:cNvSpPr txBox="1"/>
+          <p:nvPr/>
+        </p:nvSpPr>
+        <p:spPr>
+          <a:xfrm>
+            <a:off x="1186560" y="5932080"/>
+            <a:ext cx="544680" cy="181800"/>
+          </a:xfrm>
+          <a:prstGeom prst="rect">
+            <a:avLst/>
+          </a:prstGeom>
+          <a:noFill/>
+          <a:ln w="0">
+            <a:noFill/>
+          </a:ln>
+        </p:spPr>
+        <p:txBody>
+          <a:bodyPr wrap="none" lIns="0" tIns="0" rIns="0" bIns="0" anchor="t">
+            <a:spAutoFit/>
+          </a:bodyPr>
+          <a:p>
+            <a:pPr/>
+            <a:r>
+              <a:rPr lang="ja-JP" sz="1430" b="0" u="none" strike="noStrike">
+                <a:solidFill>
+                  <a:srgbClr val="1A1A2E"/>
+                </a:solidFill>
+                <a:effectLst/>
+                <a:uFillTx/>
+                <a:latin typeface="HiraginoSans-W4"/>
+                <a:ea typeface="HiraginoSans-W4"/>
+              </a:rPr>
+              <a:t>を含む</a:t>
+            </a:r>
+            <a:endParaRPr lang="en-US" sz="1430" b="0" u="none" strike="noStrike">
+              <a:solidFill>
+                <a:srgbClr val="000000"/>
+              </a:solidFill>
+              <a:effectLst/>
+              <a:uFillTx/>
+              <a:latin typeface="游明朝体"/>
+            </a:endParaRPr>
+          </a:p>
+        </p:txBody>
+      </p:sp>
+      <p:sp>
+        <p:nvSpPr>
+          <p:cNvPr id="255" name=""/>
+          <p:cNvSpPr txBox="1"/>
+          <p:nvPr/>
+        </p:nvSpPr>
+        <p:spPr>
+          <a:xfrm>
+            <a:off x="1729440" y="5923800"/>
+            <a:ext cx="180720" cy="210600"/>
+          </a:xfrm>
+          <a:prstGeom prst="rect">
+            <a:avLst/>
+          </a:prstGeom>
+          <a:noFill/>
+          <a:ln w="0">
+            <a:noFill/>
+          </a:ln>
+        </p:spPr>
+        <p:txBody>
+          <a:bodyPr wrap="none" lIns="0" tIns="0" rIns="0" bIns="0" anchor="t">
+            <a:spAutoFit/>
+          </a:bodyPr>
+          <a:p>
+            <a:pPr/>
+            <a:r>
+              <a:rPr lang="en-US" sz="1430" b="0" u="none" strike="noStrike">
+                <a:solidFill>
+                  <a:srgbClr val="1A1A2E"/>
+                </a:solidFill>
+                <a:effectLst/>
+                <a:uFillTx/>
+                <a:latin typeface="HelveticaNeue"/>
+                <a:ea typeface="HelveticaNeue"/>
+              </a:rPr>
+              <a:t>4</a:t>
+            </a:r>
+            <a:endParaRPr lang="en-US" sz="1430" b="0" u="none" strike="noStrike">
+              <a:solidFill>
+                <a:srgbClr val="000000"/>
+              </a:solidFill>
+              <a:effectLst/>
+              <a:uFillTx/>
+              <a:latin typeface="游明朝体"/>
+            </a:endParaRPr>
+          </a:p>
+        </p:txBody>
+      </p:sp>
+      <p:sp>
+        <p:nvSpPr>
+          <p:cNvPr id="256" name=""/>
+          <p:cNvSpPr txBox="1"/>
+          <p:nvPr/>
+        </p:nvSpPr>
+        <p:spPr>
+          <a:xfrm>
+            <a:off x="1829880" y="5932080"/>
+            <a:ext cx="5441400" cy="181800"/>
+          </a:xfrm>
+          <a:prstGeom prst="rect">
+            <a:avLst/>
+          </a:prstGeom>
+          <a:noFill/>
+          <a:ln w="0">
+            <a:noFill/>
+          </a:ln>
+        </p:spPr>
+        <p:txBody>
+          <a:bodyPr wrap="none" lIns="0" tIns="0" rIns="0" bIns="0" anchor="t">
+            <a:spAutoFit/>
+          </a:bodyPr>
+          <a:p>
+            <a:pPr/>
+            <a:r>
+              <a:rPr lang="ja-JP" sz="1430" b="0" u="none" strike="noStrike">
+                <a:solidFill>
+                  <a:srgbClr val="1A1A2E"/>
+                </a:solidFill>
+                <a:effectLst/>
+                <a:uFillTx/>
+                <a:latin typeface="HiraginoSans-W4"/>
+                <a:ea typeface="HiraginoSans-W4"/>
+              </a:rPr>
+              <a:t>モデル⽐較表⽰は独⾃開発。台⾵接近時の進路確認に活⽤している</a:t>
+            </a:r>
+            <a:endParaRPr lang="en-US" sz="1430" b="0" u="none" strike="noStrike">
+              <a:solidFill>
+                <a:srgbClr val="000000"/>
+              </a:solidFill>
+              <a:effectLst/>
+              <a:uFillTx/>
+              <a:latin typeface="游明朝体"/>
+            </a:endParaRPr>
+          </a:p>
+        </p:txBody>
+      </p:sp>
+      <p:sp>
+        <p:nvSpPr>
+          <p:cNvPr id="257" name=""/>
           <p:cNvSpPr txBox="1"/>
           <p:nvPr/>
         </p:nvSpPr>
@@ -26160,7 +26872,7 @@
       </p:grpSpPr>
       <p:sp>
         <p:nvSpPr>
-          <p:cNvPr id="245" name=""/>
+          <p:cNvPr id="258" name=""/>
           <p:cNvSpPr/>
           <p:nvPr/>
         </p:nvSpPr>
@@ -26220,7 +26932,7 @@
       </p:sp>
       <p:sp>
         <p:nvSpPr>
-          <p:cNvPr id="246" name=""/>
+          <p:cNvPr id="259" name=""/>
           <p:cNvSpPr/>
           <p:nvPr/>
         </p:nvSpPr>
@@ -26280,7 +26992,7 @@
       </p:sp>
       <p:sp>
         <p:nvSpPr>
-          <p:cNvPr id="247" name=""/>
+          <p:cNvPr id="260" name=""/>
           <p:cNvSpPr/>
           <p:nvPr/>
         </p:nvSpPr>
@@ -26340,7 +27052,7 @@
       </p:sp>
       <p:sp>
         <p:nvSpPr>
-          <p:cNvPr id="248" name=""/>
+          <p:cNvPr id="261" name=""/>
           <p:cNvSpPr/>
           <p:nvPr/>
         </p:nvSpPr>
@@ -26400,7 +27112,7 @@
       </p:sp>
       <p:sp>
         <p:nvSpPr>
-          <p:cNvPr id="249" name=""/>
+          <p:cNvPr id="262" name=""/>
           <p:cNvSpPr/>
           <p:nvPr/>
         </p:nvSpPr>
@@ -26528,7 +27240,7 @@
       </p:sp>
       <p:sp>
         <p:nvSpPr>
-          <p:cNvPr id="250" name=""/>
+          <p:cNvPr id="263" name=""/>
           <p:cNvSpPr txBox="1"/>
           <p:nvPr/>
         </p:nvSpPr>
@@ -26576,7 +27288,7 @@
       </p:sp>
       <p:sp>
         <p:nvSpPr>
-          <p:cNvPr id="251" name=""/>
+          <p:cNvPr id="264" name=""/>
           <p:cNvSpPr txBox="1"/>
           <p:nvPr/>
         </p:nvSpPr>
@@ -26624,7 +27336,7 @@
       </p:sp>
       <p:sp>
         <p:nvSpPr>
-          <p:cNvPr id="252" name=""/>
+          <p:cNvPr id="265" name=""/>
           <p:cNvSpPr txBox="1"/>
           <p:nvPr/>
         </p:nvSpPr>
@@ -26672,7 +27384,7 @@
       </p:sp>
       <p:sp>
         <p:nvSpPr>
-          <p:cNvPr id="253" name=""/>
+          <p:cNvPr id="266" name=""/>
           <p:cNvSpPr txBox="1"/>
           <p:nvPr/>
         </p:nvSpPr>
@@ -26720,7 +27432,7 @@
       </p:sp>
       <p:sp>
         <p:nvSpPr>
-          <p:cNvPr id="254" name=""/>
+          <p:cNvPr id="267" name=""/>
           <p:cNvSpPr/>
           <p:nvPr/>
         </p:nvSpPr>
@@ -26848,7 +27560,7 @@
       </p:sp>
       <p:sp>
         <p:nvSpPr>
-          <p:cNvPr id="255" name=""/>
+          <p:cNvPr id="268" name=""/>
           <p:cNvSpPr txBox="1"/>
           <p:nvPr/>
         </p:nvSpPr>
@@ -26896,7 +27608,7 @@
       </p:sp>
       <p:sp>
         <p:nvSpPr>
-          <p:cNvPr id="256" name=""/>
+          <p:cNvPr id="269" name=""/>
           <p:cNvSpPr txBox="1"/>
           <p:nvPr/>
         </p:nvSpPr>
@@ -26944,7 +27656,7 @@
       </p:sp>
       <p:sp>
         <p:nvSpPr>
-          <p:cNvPr id="257" name=""/>
+          <p:cNvPr id="270" name=""/>
           <p:cNvSpPr txBox="1"/>
           <p:nvPr/>
         </p:nvSpPr>
@@ -26992,7 +27704,7 @@
       </p:sp>
       <p:sp>
         <p:nvSpPr>
-          <p:cNvPr id="258" name=""/>
+          <p:cNvPr id="271" name=""/>
           <p:cNvSpPr txBox="1"/>
           <p:nvPr/>
         </p:nvSpPr>
@@ -27040,7 +27752,7 @@
       </p:sp>
       <p:sp>
         <p:nvSpPr>
-          <p:cNvPr id="259" name=""/>
+          <p:cNvPr id="272" name=""/>
           <p:cNvSpPr txBox="1"/>
           <p:nvPr/>
         </p:nvSpPr>
@@ -27088,7 +27800,7 @@
       </p:sp>
       <p:sp>
         <p:nvSpPr>
-          <p:cNvPr id="260" name=""/>
+          <p:cNvPr id="273" name=""/>
           <p:cNvSpPr txBox="1"/>
           <p:nvPr/>
         </p:nvSpPr>
@@ -27136,7 +27848,7 @@
       </p:sp>
       <p:sp>
         <p:nvSpPr>
-          <p:cNvPr id="261" name=""/>
+          <p:cNvPr id="274" name=""/>
           <p:cNvSpPr txBox="1"/>
           <p:nvPr/>
         </p:nvSpPr>
@@ -27184,7 +27896,7 @@
       </p:sp>
       <p:sp>
         <p:nvSpPr>
-          <p:cNvPr id="262" name=""/>
+          <p:cNvPr id="275" name=""/>
           <p:cNvSpPr/>
           <p:nvPr/>
         </p:nvSpPr>
@@ -27312,7 +28024,7 @@
       </p:sp>
       <p:sp>
         <p:nvSpPr>
-          <p:cNvPr id="263" name=""/>
+          <p:cNvPr id="276" name=""/>
           <p:cNvSpPr txBox="1"/>
           <p:nvPr/>
         </p:nvSpPr>
@@ -27360,7 +28072,7 @@
       </p:sp>
       <p:sp>
         <p:nvSpPr>
-          <p:cNvPr id="264" name=""/>
+          <p:cNvPr id="277" name=""/>
           <p:cNvSpPr txBox="1"/>
           <p:nvPr/>
         </p:nvSpPr>
@@ -27408,7 +28120,7 @@
       </p:sp>
       <p:sp>
         <p:nvSpPr>
-          <p:cNvPr id="265" name=""/>
+          <p:cNvPr id="278" name=""/>
           <p:cNvSpPr txBox="1"/>
           <p:nvPr/>
         </p:nvSpPr>
@@ -27456,7 +28168,7 @@
       </p:sp>
       <p:sp>
         <p:nvSpPr>
-          <p:cNvPr id="266" name=""/>
+          <p:cNvPr id="279" name=""/>
           <p:cNvSpPr txBox="1"/>
           <p:nvPr/>
         </p:nvSpPr>
@@ -27504,7 +28216,7 @@
       </p:sp>
       <p:sp>
         <p:nvSpPr>
-          <p:cNvPr id="267" name=""/>
+          <p:cNvPr id="280" name=""/>
           <p:cNvSpPr txBox="1"/>
           <p:nvPr/>
         </p:nvSpPr>
@@ -27552,7 +28264,7 @@
       </p:sp>
       <p:sp>
         <p:nvSpPr>
-          <p:cNvPr id="268" name=""/>
+          <p:cNvPr id="281" name=""/>
           <p:cNvSpPr txBox="1"/>
           <p:nvPr/>
         </p:nvSpPr>
@@ -27600,7 +28312,7 @@
       </p:sp>
       <p:pic>
         <p:nvPicPr>
-          <p:cNvPr id="269" name=""/>
+          <p:cNvPr id="282" name=""/>
           <p:cNvPicPr/>
           <p:nvPr/>
         </p:nvPicPr>
@@ -27624,7 +28336,7 @@
       </p:pic>
       <p:sp>
         <p:nvSpPr>
-          <p:cNvPr id="270" name=""/>
+          <p:cNvPr id="283" name=""/>
           <p:cNvSpPr txBox="1"/>
           <p:nvPr/>
         </p:nvSpPr>
@@ -27684,7 +28396,7 @@
       </p:sp>
       <p:sp>
         <p:nvSpPr>
-          <p:cNvPr id="271" name=""/>
+          <p:cNvPr id="284" name=""/>
           <p:cNvSpPr txBox="1"/>
           <p:nvPr/>
         </p:nvSpPr>
@@ -27762,7 +28474,7 @@
       </p:grpSpPr>
       <p:sp>
         <p:nvSpPr>
-          <p:cNvPr id="272" name=""/>
+          <p:cNvPr id="285" name=""/>
           <p:cNvSpPr/>
           <p:nvPr/>
         </p:nvSpPr>
@@ -27822,7 +28534,7 @@
       </p:sp>
       <p:sp>
         <p:nvSpPr>
-          <p:cNvPr id="273" name=""/>
+          <p:cNvPr id="286" name=""/>
           <p:cNvSpPr/>
           <p:nvPr/>
         </p:nvSpPr>
@@ -27882,7 +28594,7 @@
       </p:sp>
       <p:sp>
         <p:nvSpPr>
-          <p:cNvPr id="274" name=""/>
+          <p:cNvPr id="287" name=""/>
           <p:cNvSpPr/>
           <p:nvPr/>
         </p:nvSpPr>
@@ -27942,7 +28654,7 @@
       </p:sp>
       <p:sp>
         <p:nvSpPr>
-          <p:cNvPr id="275" name=""/>
+          <p:cNvPr id="288" name=""/>
           <p:cNvSpPr/>
           <p:nvPr/>
         </p:nvSpPr>
@@ -28002,7 +28714,7 @@
       </p:sp>
       <p:sp>
         <p:nvSpPr>
-          <p:cNvPr id="276" name=""/>
+          <p:cNvPr id="289" name=""/>
           <p:cNvSpPr txBox="1"/>
           <p:nvPr/>
         </p:nvSpPr>
@@ -28050,7 +28762,7 @@
       </p:sp>
       <p:sp>
         <p:nvSpPr>
-          <p:cNvPr id="277" name=""/>
+          <p:cNvPr id="290" name=""/>
           <p:cNvSpPr txBox="1"/>
           <p:nvPr/>
         </p:nvSpPr>
@@ -28098,7 +28810,7 @@
       </p:sp>
       <p:sp>
         <p:nvSpPr>
-          <p:cNvPr id="278" name=""/>
+          <p:cNvPr id="291" name=""/>
           <p:cNvSpPr txBox="1"/>
           <p:nvPr/>
         </p:nvSpPr>

--- a/slides/2026-07-01-ai-projects-intro.pptx
+++ b/slides/2026-07-01-ai-projects-intro.pptx
@@ -3606,8 +3606,8 @@
         </p:nvSpPr>
         <p:spPr>
           <a:xfrm>
-            <a:off x="552240" y="6486480"/>
-            <a:ext cx="11106360" cy="371520"/>
+            <a:off x="552240" y="6048360"/>
+            <a:ext cx="11106360" cy="466920"/>
           </a:xfrm>
           <a:custGeom>
             <a:avLst/>
@@ -3615,9 +3615,9 @@
             <a:ahLst/>
             <a:rect l="0" t="0" r="r" b="b"/>
             <a:pathLst>
-              <a:path w="30851" h="1032">
-                <a:moveTo>
-                  <a:pt x="0" y="1032"/>
+              <a:path w="30851" h="1297">
+                <a:moveTo>
+                  <a:pt x="0" y="1297"/>
                 </a:moveTo>
                 <a:lnTo>
                   <a:pt x="0" y="0"/>
@@ -3633,23 +3633,43 @@
                 <a:cubicBezTo>
                   <a:pt x="30799" y="13"/>
                   <a:pt x="30811" y="21"/>
-                  <a:pt x="30820" y="32"/>
-                </a:cubicBezTo>
-                <a:cubicBezTo>
-                  <a:pt x="30830" y="42"/>
-                  <a:pt x="30838" y="53"/>
-                  <a:pt x="30843" y="66"/>
-                </a:cubicBezTo>
-                <a:cubicBezTo>
-                  <a:pt x="30849" y="79"/>
-                  <a:pt x="30851" y="92"/>
-                  <a:pt x="30851" y="106"/>
-                </a:cubicBezTo>
-                <a:lnTo>
-                  <a:pt x="30851" y="1032"/>
-                </a:lnTo>
-                <a:lnTo>
-                  <a:pt x="0" y="1032"/>
+                  <a:pt x="30820" y="31"/>
+                </a:cubicBezTo>
+                <a:cubicBezTo>
+                  <a:pt x="30830" y="40"/>
+                  <a:pt x="30838" y="52"/>
+                  <a:pt x="30843" y="65"/>
+                </a:cubicBezTo>
+                <a:cubicBezTo>
+                  <a:pt x="30849" y="78"/>
+                  <a:pt x="30851" y="91"/>
+                  <a:pt x="30851" y="105"/>
+                </a:cubicBezTo>
+                <a:lnTo>
+                  <a:pt x="30851" y="1191"/>
+                </a:lnTo>
+                <a:cubicBezTo>
+                  <a:pt x="30851" y="1205"/>
+                  <a:pt x="30849" y="1219"/>
+                  <a:pt x="30843" y="1232"/>
+                </a:cubicBezTo>
+                <a:cubicBezTo>
+                  <a:pt x="30838" y="1245"/>
+                  <a:pt x="30830" y="1256"/>
+                  <a:pt x="30820" y="1266"/>
+                </a:cubicBezTo>
+                <a:cubicBezTo>
+                  <a:pt x="30811" y="1276"/>
+                  <a:pt x="30799" y="1284"/>
+                  <a:pt x="30786" y="1289"/>
+                </a:cubicBezTo>
+                <a:cubicBezTo>
+                  <a:pt x="30773" y="1294"/>
+                  <a:pt x="30760" y="1297"/>
+                  <a:pt x="30746" y="1297"/>
+                </a:cubicBezTo>
+                <a:lnTo>
+                  <a:pt x="0" y="1297"/>
                 </a:lnTo>
                 <a:close/>
               </a:path>
@@ -3686,8 +3706,8 @@
         </p:nvSpPr>
         <p:spPr>
           <a:xfrm>
-            <a:off x="533160" y="6486480"/>
-            <a:ext cx="38520" cy="371520"/>
+            <a:off x="533160" y="6048360"/>
+            <a:ext cx="38520" cy="466920"/>
           </a:xfrm>
           <a:custGeom>
             <a:avLst/>
@@ -3695,7 +3715,7 @@
             <a:ahLst/>
             <a:rect l="0" t="0" r="r" b="b"/>
             <a:pathLst>
-              <a:path w="107" h="1032">
+              <a:path w="107" h="1297">
                 <a:moveTo>
                   <a:pt x="0" y="0"/>
                 </a:moveTo>
@@ -3703,10 +3723,10 @@
                   <a:pt x="107" y="0"/>
                 </a:lnTo>
                 <a:lnTo>
-                  <a:pt x="107" y="1032"/>
-                </a:lnTo>
-                <a:lnTo>
-                  <a:pt x="0" y="1032"/>
+                  <a:pt x="107" y="1297"/>
+                </a:lnTo>
+                <a:lnTo>
+                  <a:pt x="0" y="1297"/>
                 </a:lnTo>
                 <a:lnTo>
                   <a:pt x="0" y="0"/>
@@ -3890,7 +3910,7 @@
         </p:nvSpPr>
         <p:spPr>
           <a:xfrm>
-            <a:off x="542880" y="3190680"/>
+            <a:off x="542880" y="2752560"/>
             <a:ext cx="952560" cy="381240"/>
           </a:xfrm>
           <a:custGeom>
@@ -3950,7 +3970,7 @@
         </p:nvSpPr>
         <p:spPr>
           <a:xfrm>
-            <a:off x="1495080" y="3190680"/>
+            <a:off x="1495080" y="2752560"/>
             <a:ext cx="619560" cy="381240"/>
           </a:xfrm>
           <a:custGeom>
@@ -4010,7 +4030,7 @@
         </p:nvSpPr>
         <p:spPr>
           <a:xfrm>
-            <a:off x="2114280" y="3190680"/>
+            <a:off x="2114280" y="2752560"/>
             <a:ext cx="771840" cy="381240"/>
           </a:xfrm>
           <a:custGeom>
@@ -4070,7 +4090,7 @@
         </p:nvSpPr>
         <p:spPr>
           <a:xfrm>
-            <a:off x="2885760" y="3190680"/>
+            <a:off x="2885760" y="2752560"/>
             <a:ext cx="610200" cy="381240"/>
           </a:xfrm>
           <a:custGeom>
@@ -4130,7 +4150,7 @@
         </p:nvSpPr>
         <p:spPr>
           <a:xfrm>
-            <a:off x="3495600" y="3190680"/>
+            <a:off x="3495600" y="2752560"/>
             <a:ext cx="600480" cy="381240"/>
           </a:xfrm>
           <a:custGeom>
@@ -4190,7 +4210,7 @@
         </p:nvSpPr>
         <p:spPr>
           <a:xfrm>
-            <a:off x="4095720" y="3190680"/>
+            <a:off x="4095720" y="2752560"/>
             <a:ext cx="590760" cy="381240"/>
           </a:xfrm>
           <a:custGeom>
@@ -4250,7 +4270,7 @@
         </p:nvSpPr>
         <p:spPr>
           <a:xfrm>
-            <a:off x="4686120" y="3190680"/>
+            <a:off x="4686120" y="2752560"/>
             <a:ext cx="590760" cy="381240"/>
           </a:xfrm>
           <a:custGeom>
@@ -4310,7 +4330,7 @@
         </p:nvSpPr>
         <p:spPr>
           <a:xfrm>
-            <a:off x="542880" y="3190680"/>
+            <a:off x="542880" y="2752560"/>
             <a:ext cx="952560" cy="381240"/>
           </a:xfrm>
           <a:custGeom>
@@ -4370,7 +4390,7 @@
         </p:nvSpPr>
         <p:spPr>
           <a:xfrm>
-            <a:off x="1495080" y="3190680"/>
+            <a:off x="1495080" y="2752560"/>
             <a:ext cx="619560" cy="381240"/>
           </a:xfrm>
           <a:custGeom>
@@ -4430,7 +4450,7 @@
         </p:nvSpPr>
         <p:spPr>
           <a:xfrm>
-            <a:off x="2114280" y="3190680"/>
+            <a:off x="2114280" y="2752560"/>
             <a:ext cx="771840" cy="381240"/>
           </a:xfrm>
           <a:custGeom>
@@ -4490,7 +4510,7 @@
         </p:nvSpPr>
         <p:spPr>
           <a:xfrm>
-            <a:off x="2885760" y="3190680"/>
+            <a:off x="2885760" y="2752560"/>
             <a:ext cx="610200" cy="381240"/>
           </a:xfrm>
           <a:custGeom>
@@ -4550,7 +4570,7 @@
         </p:nvSpPr>
         <p:spPr>
           <a:xfrm>
-            <a:off x="3495600" y="3190680"/>
+            <a:off x="3495600" y="2752560"/>
             <a:ext cx="600480" cy="381240"/>
           </a:xfrm>
           <a:custGeom>
@@ -4610,7 +4630,7 @@
         </p:nvSpPr>
         <p:spPr>
           <a:xfrm>
-            <a:off x="4095720" y="3190680"/>
+            <a:off x="4095720" y="2752560"/>
             <a:ext cx="590760" cy="381240"/>
           </a:xfrm>
           <a:custGeom>
@@ -4670,7 +4690,7 @@
         </p:nvSpPr>
         <p:spPr>
           <a:xfrm>
-            <a:off x="4686120" y="3190680"/>
+            <a:off x="4686120" y="2752560"/>
             <a:ext cx="590760" cy="381240"/>
           </a:xfrm>
           <a:custGeom>
@@ -4730,7 +4750,7 @@
         </p:nvSpPr>
         <p:spPr>
           <a:xfrm>
-            <a:off x="542880" y="3571560"/>
+            <a:off x="542880" y="3133440"/>
             <a:ext cx="952560" cy="381600"/>
           </a:xfrm>
           <a:custGeom>
@@ -4790,7 +4810,7 @@
         </p:nvSpPr>
         <p:spPr>
           <a:xfrm>
-            <a:off x="1495080" y="3571560"/>
+            <a:off x="1495080" y="3133440"/>
             <a:ext cx="619560" cy="381600"/>
           </a:xfrm>
           <a:custGeom>
@@ -4850,7 +4870,7 @@
         </p:nvSpPr>
         <p:spPr>
           <a:xfrm>
-            <a:off x="2114280" y="3571560"/>
+            <a:off x="2114280" y="3133440"/>
             <a:ext cx="771840" cy="381600"/>
           </a:xfrm>
           <a:custGeom>
@@ -4910,7 +4930,7 @@
         </p:nvSpPr>
         <p:spPr>
           <a:xfrm>
-            <a:off x="2885760" y="3571560"/>
+            <a:off x="2885760" y="3133440"/>
             <a:ext cx="610200" cy="381600"/>
           </a:xfrm>
           <a:custGeom>
@@ -4970,7 +4990,7 @@
         </p:nvSpPr>
         <p:spPr>
           <a:xfrm>
-            <a:off x="3495600" y="3571560"/>
+            <a:off x="3495600" y="3133440"/>
             <a:ext cx="600480" cy="381600"/>
           </a:xfrm>
           <a:custGeom>
@@ -5030,7 +5050,7 @@
         </p:nvSpPr>
         <p:spPr>
           <a:xfrm>
-            <a:off x="4095720" y="3571560"/>
+            <a:off x="4095720" y="3133440"/>
             <a:ext cx="590760" cy="381600"/>
           </a:xfrm>
           <a:custGeom>
@@ -5090,7 +5110,7 @@
         </p:nvSpPr>
         <p:spPr>
           <a:xfrm>
-            <a:off x="4686120" y="3571560"/>
+            <a:off x="4686120" y="3133440"/>
             <a:ext cx="590760" cy="381600"/>
           </a:xfrm>
           <a:custGeom>
@@ -5150,7 +5170,7 @@
         </p:nvSpPr>
         <p:spPr>
           <a:xfrm>
-            <a:off x="542880" y="3952800"/>
+            <a:off x="542880" y="3514680"/>
             <a:ext cx="952560" cy="381240"/>
           </a:xfrm>
           <a:custGeom>
@@ -5210,7 +5230,7 @@
         </p:nvSpPr>
         <p:spPr>
           <a:xfrm>
-            <a:off x="1495080" y="3952800"/>
+            <a:off x="1495080" y="3514680"/>
             <a:ext cx="619560" cy="381240"/>
           </a:xfrm>
           <a:custGeom>
@@ -5270,7 +5290,7 @@
         </p:nvSpPr>
         <p:spPr>
           <a:xfrm>
-            <a:off x="2114280" y="3952800"/>
+            <a:off x="2114280" y="3514680"/>
             <a:ext cx="771840" cy="381240"/>
           </a:xfrm>
           <a:custGeom>
@@ -5330,7 +5350,7 @@
         </p:nvSpPr>
         <p:spPr>
           <a:xfrm>
-            <a:off x="2885760" y="3952800"/>
+            <a:off x="2885760" y="3514680"/>
             <a:ext cx="610200" cy="381240"/>
           </a:xfrm>
           <a:custGeom>
@@ -5390,7 +5410,7 @@
         </p:nvSpPr>
         <p:spPr>
           <a:xfrm>
-            <a:off x="3495600" y="3952800"/>
+            <a:off x="3495600" y="3514680"/>
             <a:ext cx="600480" cy="381240"/>
           </a:xfrm>
           <a:custGeom>
@@ -5450,7 +5470,7 @@
         </p:nvSpPr>
         <p:spPr>
           <a:xfrm>
-            <a:off x="4095720" y="3952800"/>
+            <a:off x="4095720" y="3514680"/>
             <a:ext cx="590760" cy="381240"/>
           </a:xfrm>
           <a:custGeom>
@@ -5510,7 +5530,7 @@
         </p:nvSpPr>
         <p:spPr>
           <a:xfrm>
-            <a:off x="4686120" y="3952800"/>
+            <a:off x="4686120" y="3514680"/>
             <a:ext cx="590760" cy="381240"/>
           </a:xfrm>
           <a:custGeom>
@@ -5570,7 +5590,7 @@
         </p:nvSpPr>
         <p:spPr>
           <a:xfrm>
-            <a:off x="542880" y="3952800"/>
+            <a:off x="542880" y="3514680"/>
             <a:ext cx="952560" cy="381240"/>
           </a:xfrm>
           <a:custGeom>
@@ -5630,7 +5650,7 @@
         </p:nvSpPr>
         <p:spPr>
           <a:xfrm>
-            <a:off x="1495080" y="3952800"/>
+            <a:off x="1495080" y="3514680"/>
             <a:ext cx="619560" cy="381240"/>
           </a:xfrm>
           <a:custGeom>
@@ -5690,7 +5710,7 @@
         </p:nvSpPr>
         <p:spPr>
           <a:xfrm>
-            <a:off x="2114280" y="3952800"/>
+            <a:off x="2114280" y="3514680"/>
             <a:ext cx="771840" cy="381240"/>
           </a:xfrm>
           <a:custGeom>
@@ -5750,7 +5770,7 @@
         </p:nvSpPr>
         <p:spPr>
           <a:xfrm>
-            <a:off x="2885760" y="3952800"/>
+            <a:off x="2885760" y="3514680"/>
             <a:ext cx="610200" cy="381240"/>
           </a:xfrm>
           <a:custGeom>
@@ -5810,7 +5830,7 @@
         </p:nvSpPr>
         <p:spPr>
           <a:xfrm>
-            <a:off x="3495600" y="3952800"/>
+            <a:off x="3495600" y="3514680"/>
             <a:ext cx="600480" cy="381240"/>
           </a:xfrm>
           <a:custGeom>
@@ -5870,7 +5890,7 @@
         </p:nvSpPr>
         <p:spPr>
           <a:xfrm>
-            <a:off x="4095720" y="3952800"/>
+            <a:off x="4095720" y="3514680"/>
             <a:ext cx="590760" cy="381240"/>
           </a:xfrm>
           <a:custGeom>
@@ -5930,7 +5950,7 @@
         </p:nvSpPr>
         <p:spPr>
           <a:xfrm>
-            <a:off x="4686120" y="3952800"/>
+            <a:off x="4686120" y="3514680"/>
             <a:ext cx="590760" cy="381240"/>
           </a:xfrm>
           <a:custGeom>
@@ -5990,7 +6010,7 @@
         </p:nvSpPr>
         <p:spPr>
           <a:xfrm>
-            <a:off x="542880" y="4333680"/>
+            <a:off x="542880" y="3895560"/>
             <a:ext cx="952560" cy="381240"/>
           </a:xfrm>
           <a:custGeom>
@@ -6050,7 +6070,7 @@
         </p:nvSpPr>
         <p:spPr>
           <a:xfrm>
-            <a:off x="1495080" y="4333680"/>
+            <a:off x="1495080" y="3895560"/>
             <a:ext cx="619560" cy="381240"/>
           </a:xfrm>
           <a:custGeom>
@@ -6110,7 +6130,7 @@
         </p:nvSpPr>
         <p:spPr>
           <a:xfrm>
-            <a:off x="2114280" y="4333680"/>
+            <a:off x="2114280" y="3895560"/>
             <a:ext cx="771840" cy="381240"/>
           </a:xfrm>
           <a:custGeom>
@@ -6170,7 +6190,7 @@
         </p:nvSpPr>
         <p:spPr>
           <a:xfrm>
-            <a:off x="2885760" y="4333680"/>
+            <a:off x="2885760" y="3895560"/>
             <a:ext cx="610200" cy="381240"/>
           </a:xfrm>
           <a:custGeom>
@@ -6230,7 +6250,7 @@
         </p:nvSpPr>
         <p:spPr>
           <a:xfrm>
-            <a:off x="3495600" y="4333680"/>
+            <a:off x="3495600" y="3895560"/>
             <a:ext cx="600480" cy="381240"/>
           </a:xfrm>
           <a:custGeom>
@@ -6290,7 +6310,7 @@
         </p:nvSpPr>
         <p:spPr>
           <a:xfrm>
-            <a:off x="4095720" y="4333680"/>
+            <a:off x="4095720" y="3895560"/>
             <a:ext cx="590760" cy="381240"/>
           </a:xfrm>
           <a:custGeom>
@@ -6350,7 +6370,7 @@
         </p:nvSpPr>
         <p:spPr>
           <a:xfrm>
-            <a:off x="4686120" y="4333680"/>
+            <a:off x="4686120" y="3895560"/>
             <a:ext cx="590760" cy="381240"/>
           </a:xfrm>
           <a:custGeom>
@@ -6410,7 +6430,7 @@
         </p:nvSpPr>
         <p:spPr>
           <a:xfrm>
-            <a:off x="542880" y="4714560"/>
+            <a:off x="542880" y="4276440"/>
             <a:ext cx="952560" cy="381600"/>
           </a:xfrm>
           <a:custGeom>
@@ -6470,7 +6490,7 @@
         </p:nvSpPr>
         <p:spPr>
           <a:xfrm>
-            <a:off x="1495080" y="4714560"/>
+            <a:off x="1495080" y="4276440"/>
             <a:ext cx="619560" cy="381600"/>
           </a:xfrm>
           <a:custGeom>
@@ -6530,7 +6550,7 @@
         </p:nvSpPr>
         <p:spPr>
           <a:xfrm>
-            <a:off x="2114280" y="4714560"/>
+            <a:off x="2114280" y="4276440"/>
             <a:ext cx="771840" cy="381600"/>
           </a:xfrm>
           <a:custGeom>
@@ -6590,7 +6610,7 @@
         </p:nvSpPr>
         <p:spPr>
           <a:xfrm>
-            <a:off x="2885760" y="4714560"/>
+            <a:off x="2885760" y="4276440"/>
             <a:ext cx="610200" cy="381600"/>
           </a:xfrm>
           <a:custGeom>
@@ -6650,7 +6670,7 @@
         </p:nvSpPr>
         <p:spPr>
           <a:xfrm>
-            <a:off x="3495600" y="4714560"/>
+            <a:off x="3495600" y="4276440"/>
             <a:ext cx="600480" cy="381600"/>
           </a:xfrm>
           <a:custGeom>
@@ -6710,7 +6730,7 @@
         </p:nvSpPr>
         <p:spPr>
           <a:xfrm>
-            <a:off x="4095720" y="4714560"/>
+            <a:off x="4095720" y="4276440"/>
             <a:ext cx="590760" cy="381600"/>
           </a:xfrm>
           <a:custGeom>
@@ -6770,7 +6790,7 @@
         </p:nvSpPr>
         <p:spPr>
           <a:xfrm>
-            <a:off x="4686120" y="4714560"/>
+            <a:off x="4686120" y="4276440"/>
             <a:ext cx="590760" cy="381600"/>
           </a:xfrm>
           <a:custGeom>
@@ -6830,7 +6850,7 @@
         </p:nvSpPr>
         <p:spPr>
           <a:xfrm>
-            <a:off x="542880" y="4714560"/>
+            <a:off x="542880" y="4276440"/>
             <a:ext cx="952560" cy="381600"/>
           </a:xfrm>
           <a:custGeom>
@@ -6890,7 +6910,7 @@
         </p:nvSpPr>
         <p:spPr>
           <a:xfrm>
-            <a:off x="1495080" y="4714560"/>
+            <a:off x="1495080" y="4276440"/>
             <a:ext cx="619560" cy="381600"/>
           </a:xfrm>
           <a:custGeom>
@@ -6950,7 +6970,7 @@
         </p:nvSpPr>
         <p:spPr>
           <a:xfrm>
-            <a:off x="2114280" y="4714560"/>
+            <a:off x="2114280" y="4276440"/>
             <a:ext cx="771840" cy="381600"/>
           </a:xfrm>
           <a:custGeom>
@@ -7010,7 +7030,7 @@
         </p:nvSpPr>
         <p:spPr>
           <a:xfrm>
-            <a:off x="2885760" y="4714560"/>
+            <a:off x="2885760" y="4276440"/>
             <a:ext cx="610200" cy="381600"/>
           </a:xfrm>
           <a:custGeom>
@@ -7070,7 +7090,7 @@
         </p:nvSpPr>
         <p:spPr>
           <a:xfrm>
-            <a:off x="3495600" y="4714560"/>
+            <a:off x="3495600" y="4276440"/>
             <a:ext cx="600480" cy="381600"/>
           </a:xfrm>
           <a:custGeom>
@@ -7130,7 +7150,7 @@
         </p:nvSpPr>
         <p:spPr>
           <a:xfrm>
-            <a:off x="4095720" y="4714560"/>
+            <a:off x="4095720" y="4276440"/>
             <a:ext cx="590760" cy="381600"/>
           </a:xfrm>
           <a:custGeom>
@@ -7190,7 +7210,7 @@
         </p:nvSpPr>
         <p:spPr>
           <a:xfrm>
-            <a:off x="4686120" y="4714560"/>
+            <a:off x="4686120" y="4276440"/>
             <a:ext cx="590760" cy="381600"/>
           </a:xfrm>
           <a:custGeom>
@@ -7250,7 +7270,7 @@
         </p:nvSpPr>
         <p:spPr>
           <a:xfrm>
-            <a:off x="542880" y="5095800"/>
+            <a:off x="542880" y="4657680"/>
             <a:ext cx="952560" cy="381240"/>
           </a:xfrm>
           <a:custGeom>
@@ -7310,7 +7330,7 @@
         </p:nvSpPr>
         <p:spPr>
           <a:xfrm>
-            <a:off x="1495080" y="5095800"/>
+            <a:off x="1495080" y="4657680"/>
             <a:ext cx="619560" cy="381240"/>
           </a:xfrm>
           <a:custGeom>
@@ -7370,7 +7390,7 @@
         </p:nvSpPr>
         <p:spPr>
           <a:xfrm>
-            <a:off x="2114280" y="5095800"/>
+            <a:off x="2114280" y="4657680"/>
             <a:ext cx="771840" cy="381240"/>
           </a:xfrm>
           <a:custGeom>
@@ -7430,7 +7450,7 @@
         </p:nvSpPr>
         <p:spPr>
           <a:xfrm>
-            <a:off x="2885760" y="5095800"/>
+            <a:off x="2885760" y="4657680"/>
             <a:ext cx="610200" cy="381240"/>
           </a:xfrm>
           <a:custGeom>
@@ -7490,7 +7510,7 @@
         </p:nvSpPr>
         <p:spPr>
           <a:xfrm>
-            <a:off x="3495600" y="5095800"/>
+            <a:off x="3495600" y="4657680"/>
             <a:ext cx="600480" cy="381240"/>
           </a:xfrm>
           <a:custGeom>
@@ -7550,7 +7570,7 @@
         </p:nvSpPr>
         <p:spPr>
           <a:xfrm>
-            <a:off x="4095720" y="5095800"/>
+            <a:off x="4095720" y="4657680"/>
             <a:ext cx="590760" cy="381240"/>
           </a:xfrm>
           <a:custGeom>
@@ -7610,7 +7630,7 @@
         </p:nvSpPr>
         <p:spPr>
           <a:xfrm>
-            <a:off x="4686120" y="5095800"/>
+            <a:off x="4686120" y="4657680"/>
             <a:ext cx="590760" cy="381240"/>
           </a:xfrm>
           <a:custGeom>
@@ -7670,7 +7690,7 @@
         </p:nvSpPr>
         <p:spPr>
           <a:xfrm>
-            <a:off x="533160" y="3190680"/>
+            <a:off x="533160" y="2752560"/>
             <a:ext cx="10080" cy="390960"/>
           </a:xfrm>
           <a:custGeom>
@@ -7730,7 +7750,7 @@
         </p:nvSpPr>
         <p:spPr>
           <a:xfrm>
-            <a:off x="533160" y="3190680"/>
+            <a:off x="533160" y="2752560"/>
             <a:ext cx="962280" cy="9720"/>
           </a:xfrm>
           <a:custGeom>
@@ -7790,7 +7810,7 @@
         </p:nvSpPr>
         <p:spPr>
           <a:xfrm>
-            <a:off x="1485720" y="3190680"/>
+            <a:off x="1485720" y="2752560"/>
             <a:ext cx="9720" cy="390960"/>
           </a:xfrm>
           <a:custGeom>
@@ -7850,7 +7870,7 @@
         </p:nvSpPr>
         <p:spPr>
           <a:xfrm>
-            <a:off x="1495080" y="3190680"/>
+            <a:off x="1495080" y="2752560"/>
             <a:ext cx="629280" cy="9720"/>
           </a:xfrm>
           <a:custGeom>
@@ -7910,7 +7930,7 @@
         </p:nvSpPr>
         <p:spPr>
           <a:xfrm>
-            <a:off x="2114280" y="3190680"/>
+            <a:off x="2114280" y="2752560"/>
             <a:ext cx="10080" cy="390960"/>
           </a:xfrm>
           <a:custGeom>
@@ -7970,7 +7990,7 @@
         </p:nvSpPr>
         <p:spPr>
           <a:xfrm>
-            <a:off x="2124000" y="3190680"/>
+            <a:off x="2124000" y="2752560"/>
             <a:ext cx="771840" cy="9720"/>
           </a:xfrm>
           <a:custGeom>
@@ -8030,7 +8050,7 @@
         </p:nvSpPr>
         <p:spPr>
           <a:xfrm>
-            <a:off x="2885760" y="3190680"/>
+            <a:off x="2885760" y="2752560"/>
             <a:ext cx="10080" cy="390960"/>
           </a:xfrm>
           <a:custGeom>
@@ -8090,7 +8110,7 @@
         </p:nvSpPr>
         <p:spPr>
           <a:xfrm>
-            <a:off x="2895480" y="3190680"/>
+            <a:off x="2895480" y="2752560"/>
             <a:ext cx="600480" cy="9720"/>
           </a:xfrm>
           <a:custGeom>
@@ -8150,7 +8170,7 @@
         </p:nvSpPr>
         <p:spPr>
           <a:xfrm>
-            <a:off x="3485880" y="3190680"/>
+            <a:off x="3485880" y="2752560"/>
             <a:ext cx="10080" cy="390960"/>
           </a:xfrm>
           <a:custGeom>
@@ -8210,7 +8230,7 @@
         </p:nvSpPr>
         <p:spPr>
           <a:xfrm>
-            <a:off x="3495600" y="3190680"/>
+            <a:off x="3495600" y="2752560"/>
             <a:ext cx="600480" cy="9720"/>
           </a:xfrm>
           <a:custGeom>
@@ -8270,7 +8290,7 @@
         </p:nvSpPr>
         <p:spPr>
           <a:xfrm>
-            <a:off x="4086000" y="3190680"/>
+            <a:off x="4086000" y="2752560"/>
             <a:ext cx="10080" cy="390960"/>
           </a:xfrm>
           <a:custGeom>
@@ -8330,7 +8350,7 @@
         </p:nvSpPr>
         <p:spPr>
           <a:xfrm>
-            <a:off x="4095720" y="3190680"/>
+            <a:off x="4095720" y="2752560"/>
             <a:ext cx="590760" cy="9720"/>
           </a:xfrm>
           <a:custGeom>
@@ -8390,7 +8410,7 @@
         </p:nvSpPr>
         <p:spPr>
           <a:xfrm>
-            <a:off x="4676760" y="3190680"/>
+            <a:off x="4676760" y="2752560"/>
             <a:ext cx="9720" cy="390960"/>
           </a:xfrm>
           <a:custGeom>
@@ -8450,7 +8470,7 @@
         </p:nvSpPr>
         <p:spPr>
           <a:xfrm>
-            <a:off x="4686120" y="3190680"/>
+            <a:off x="4686120" y="2752560"/>
             <a:ext cx="590760" cy="9720"/>
           </a:xfrm>
           <a:custGeom>
@@ -8510,7 +8530,7 @@
         </p:nvSpPr>
         <p:spPr>
           <a:xfrm>
-            <a:off x="5267160" y="3190680"/>
+            <a:off x="5267160" y="2752560"/>
             <a:ext cx="9720" cy="390960"/>
           </a:xfrm>
           <a:custGeom>
@@ -8570,7 +8590,7 @@
         </p:nvSpPr>
         <p:spPr>
           <a:xfrm>
-            <a:off x="533160" y="3571560"/>
+            <a:off x="533160" y="3133440"/>
             <a:ext cx="962280" cy="10080"/>
           </a:xfrm>
           <a:custGeom>
@@ -8630,7 +8650,7 @@
         </p:nvSpPr>
         <p:spPr>
           <a:xfrm>
-            <a:off x="1495080" y="3571560"/>
+            <a:off x="1495080" y="3133440"/>
             <a:ext cx="629280" cy="10080"/>
           </a:xfrm>
           <a:custGeom>
@@ -8690,7 +8710,7 @@
         </p:nvSpPr>
         <p:spPr>
           <a:xfrm>
-            <a:off x="2124000" y="3571560"/>
+            <a:off x="2124000" y="3133440"/>
             <a:ext cx="771840" cy="10080"/>
           </a:xfrm>
           <a:custGeom>
@@ -8750,7 +8770,7 @@
         </p:nvSpPr>
         <p:spPr>
           <a:xfrm>
-            <a:off x="2895480" y="3571560"/>
+            <a:off x="2895480" y="3133440"/>
             <a:ext cx="600480" cy="10080"/>
           </a:xfrm>
           <a:custGeom>
@@ -8810,7 +8830,7 @@
         </p:nvSpPr>
         <p:spPr>
           <a:xfrm>
-            <a:off x="3495600" y="3571560"/>
+            <a:off x="3495600" y="3133440"/>
             <a:ext cx="600480" cy="10080"/>
           </a:xfrm>
           <a:custGeom>
@@ -8870,7 +8890,7 @@
         </p:nvSpPr>
         <p:spPr>
           <a:xfrm>
-            <a:off x="4095720" y="3571560"/>
+            <a:off x="4095720" y="3133440"/>
             <a:ext cx="590760" cy="10080"/>
           </a:xfrm>
           <a:custGeom>
@@ -8930,7 +8950,7 @@
         </p:nvSpPr>
         <p:spPr>
           <a:xfrm>
-            <a:off x="4686120" y="3571560"/>
+            <a:off x="4686120" y="3133440"/>
             <a:ext cx="590760" cy="10080"/>
           </a:xfrm>
           <a:custGeom>
@@ -8990,7 +9010,7 @@
         </p:nvSpPr>
         <p:spPr>
           <a:xfrm>
-            <a:off x="533160" y="3581280"/>
+            <a:off x="533160" y="3143160"/>
             <a:ext cx="10080" cy="381240"/>
           </a:xfrm>
           <a:custGeom>
@@ -9050,7 +9070,7 @@
         </p:nvSpPr>
         <p:spPr>
           <a:xfrm>
-            <a:off x="1485720" y="3581280"/>
+            <a:off x="1485720" y="3143160"/>
             <a:ext cx="9720" cy="381240"/>
           </a:xfrm>
           <a:custGeom>
@@ -9110,7 +9130,7 @@
         </p:nvSpPr>
         <p:spPr>
           <a:xfrm>
-            <a:off x="2114280" y="3581280"/>
+            <a:off x="2114280" y="3143160"/>
             <a:ext cx="10080" cy="381240"/>
           </a:xfrm>
           <a:custGeom>
@@ -9170,7 +9190,7 @@
         </p:nvSpPr>
         <p:spPr>
           <a:xfrm>
-            <a:off x="2885760" y="3581280"/>
+            <a:off x="2885760" y="3143160"/>
             <a:ext cx="10080" cy="381240"/>
           </a:xfrm>
           <a:custGeom>
@@ -9230,7 +9250,7 @@
         </p:nvSpPr>
         <p:spPr>
           <a:xfrm>
-            <a:off x="3485880" y="3581280"/>
+            <a:off x="3485880" y="3143160"/>
             <a:ext cx="10080" cy="381240"/>
           </a:xfrm>
           <a:custGeom>
@@ -9290,7 +9310,7 @@
         </p:nvSpPr>
         <p:spPr>
           <a:xfrm>
-            <a:off x="4086000" y="3581280"/>
+            <a:off x="4086000" y="3143160"/>
             <a:ext cx="10080" cy="381240"/>
           </a:xfrm>
           <a:custGeom>
@@ -9350,7 +9370,7 @@
         </p:nvSpPr>
         <p:spPr>
           <a:xfrm>
-            <a:off x="4676760" y="3581280"/>
+            <a:off x="4676760" y="3143160"/>
             <a:ext cx="9720" cy="381240"/>
           </a:xfrm>
           <a:custGeom>
@@ -9410,7 +9430,7 @@
         </p:nvSpPr>
         <p:spPr>
           <a:xfrm>
-            <a:off x="5267160" y="3581280"/>
+            <a:off x="5267160" y="3143160"/>
             <a:ext cx="9720" cy="381240"/>
           </a:xfrm>
           <a:custGeom>
@@ -9470,7 +9490,7 @@
         </p:nvSpPr>
         <p:spPr>
           <a:xfrm>
-            <a:off x="533160" y="3962160"/>
+            <a:off x="533160" y="3524040"/>
             <a:ext cx="10080" cy="381240"/>
           </a:xfrm>
           <a:custGeom>
@@ -9530,7 +9550,7 @@
         </p:nvSpPr>
         <p:spPr>
           <a:xfrm>
-            <a:off x="533160" y="3952800"/>
+            <a:off x="533160" y="3514680"/>
             <a:ext cx="962280" cy="9720"/>
           </a:xfrm>
           <a:custGeom>
@@ -9590,7 +9610,7 @@
         </p:nvSpPr>
         <p:spPr>
           <a:xfrm>
-            <a:off x="1485720" y="3962160"/>
+            <a:off x="1485720" y="3524040"/>
             <a:ext cx="9720" cy="381240"/>
           </a:xfrm>
           <a:custGeom>
@@ -9650,7 +9670,7 @@
         </p:nvSpPr>
         <p:spPr>
           <a:xfrm>
-            <a:off x="1495080" y="3952800"/>
+            <a:off x="1495080" y="3514680"/>
             <a:ext cx="629280" cy="9720"/>
           </a:xfrm>
           <a:custGeom>
@@ -9710,7 +9730,7 @@
         </p:nvSpPr>
         <p:spPr>
           <a:xfrm>
-            <a:off x="2114280" y="3962160"/>
+            <a:off x="2114280" y="3524040"/>
             <a:ext cx="10080" cy="381240"/>
           </a:xfrm>
           <a:custGeom>
@@ -9770,7 +9790,7 @@
         </p:nvSpPr>
         <p:spPr>
           <a:xfrm>
-            <a:off x="2124000" y="3952800"/>
+            <a:off x="2124000" y="3514680"/>
             <a:ext cx="771840" cy="9720"/>
           </a:xfrm>
           <a:custGeom>
@@ -9830,7 +9850,7 @@
         </p:nvSpPr>
         <p:spPr>
           <a:xfrm>
-            <a:off x="2885760" y="3962160"/>
+            <a:off x="2885760" y="3524040"/>
             <a:ext cx="10080" cy="381240"/>
           </a:xfrm>
           <a:custGeom>
@@ -9890,7 +9910,7 @@
         </p:nvSpPr>
         <p:spPr>
           <a:xfrm>
-            <a:off x="2895480" y="3952800"/>
+            <a:off x="2895480" y="3514680"/>
             <a:ext cx="600480" cy="9720"/>
           </a:xfrm>
           <a:custGeom>
@@ -9950,7 +9970,7 @@
         </p:nvSpPr>
         <p:spPr>
           <a:xfrm>
-            <a:off x="3485880" y="3962160"/>
+            <a:off x="3485880" y="3524040"/>
             <a:ext cx="10080" cy="381240"/>
           </a:xfrm>
           <a:custGeom>
@@ -10010,7 +10030,7 @@
         </p:nvSpPr>
         <p:spPr>
           <a:xfrm>
-            <a:off x="3495600" y="3952800"/>
+            <a:off x="3495600" y="3514680"/>
             <a:ext cx="600480" cy="9720"/>
           </a:xfrm>
           <a:custGeom>
@@ -10070,7 +10090,7 @@
         </p:nvSpPr>
         <p:spPr>
           <a:xfrm>
-            <a:off x="4086000" y="3962160"/>
+            <a:off x="4086000" y="3524040"/>
             <a:ext cx="10080" cy="381240"/>
           </a:xfrm>
           <a:custGeom>
@@ -10130,7 +10150,7 @@
         </p:nvSpPr>
         <p:spPr>
           <a:xfrm>
-            <a:off x="4095720" y="3952800"/>
+            <a:off x="4095720" y="3514680"/>
             <a:ext cx="590760" cy="9720"/>
           </a:xfrm>
           <a:custGeom>
@@ -10190,7 +10210,7 @@
         </p:nvSpPr>
         <p:spPr>
           <a:xfrm>
-            <a:off x="4676760" y="3962160"/>
+            <a:off x="4676760" y="3524040"/>
             <a:ext cx="9720" cy="381240"/>
           </a:xfrm>
           <a:custGeom>
@@ -10250,7 +10270,7 @@
         </p:nvSpPr>
         <p:spPr>
           <a:xfrm>
-            <a:off x="4686120" y="3952800"/>
+            <a:off x="4686120" y="3514680"/>
             <a:ext cx="590760" cy="9720"/>
           </a:xfrm>
           <a:custGeom>
@@ -10310,7 +10330,7 @@
         </p:nvSpPr>
         <p:spPr>
           <a:xfrm>
-            <a:off x="5267160" y="3962160"/>
+            <a:off x="5267160" y="3524040"/>
             <a:ext cx="9720" cy="381240"/>
           </a:xfrm>
           <a:custGeom>
@@ -10370,7 +10390,7 @@
         </p:nvSpPr>
         <p:spPr>
           <a:xfrm>
-            <a:off x="533160" y="4343040"/>
+            <a:off x="533160" y="3904920"/>
             <a:ext cx="10080" cy="381600"/>
           </a:xfrm>
           <a:custGeom>
@@ -10430,7 +10450,7 @@
         </p:nvSpPr>
         <p:spPr>
           <a:xfrm>
-            <a:off x="533160" y="4333680"/>
+            <a:off x="533160" y="3895560"/>
             <a:ext cx="962280" cy="9720"/>
           </a:xfrm>
           <a:custGeom>
@@ -10490,7 +10510,7 @@
         </p:nvSpPr>
         <p:spPr>
           <a:xfrm>
-            <a:off x="1485720" y="4343040"/>
+            <a:off x="1485720" y="3904920"/>
             <a:ext cx="9720" cy="381600"/>
           </a:xfrm>
           <a:custGeom>
@@ -10550,7 +10570,7 @@
         </p:nvSpPr>
         <p:spPr>
           <a:xfrm>
-            <a:off x="1495080" y="4333680"/>
+            <a:off x="1495080" y="3895560"/>
             <a:ext cx="629280" cy="9720"/>
           </a:xfrm>
           <a:custGeom>
@@ -10610,7 +10630,7 @@
         </p:nvSpPr>
         <p:spPr>
           <a:xfrm>
-            <a:off x="2114280" y="4343040"/>
+            <a:off x="2114280" y="3904920"/>
             <a:ext cx="10080" cy="381600"/>
           </a:xfrm>
           <a:custGeom>
@@ -10670,7 +10690,7 @@
         </p:nvSpPr>
         <p:spPr>
           <a:xfrm>
-            <a:off x="2124000" y="4333680"/>
+            <a:off x="2124000" y="3895560"/>
             <a:ext cx="771840" cy="9720"/>
           </a:xfrm>
           <a:custGeom>
@@ -10730,7 +10750,7 @@
         </p:nvSpPr>
         <p:spPr>
           <a:xfrm>
-            <a:off x="2885760" y="4343040"/>
+            <a:off x="2885760" y="3904920"/>
             <a:ext cx="10080" cy="381600"/>
           </a:xfrm>
           <a:custGeom>
@@ -10790,7 +10810,7 @@
         </p:nvSpPr>
         <p:spPr>
           <a:xfrm>
-            <a:off x="2895480" y="4333680"/>
+            <a:off x="2895480" y="3895560"/>
             <a:ext cx="600480" cy="9720"/>
           </a:xfrm>
           <a:custGeom>
@@ -10850,7 +10870,7 @@
         </p:nvSpPr>
         <p:spPr>
           <a:xfrm>
-            <a:off x="3485880" y="4343040"/>
+            <a:off x="3485880" y="3904920"/>
             <a:ext cx="10080" cy="381600"/>
           </a:xfrm>
           <a:custGeom>
@@ -10910,7 +10930,7 @@
         </p:nvSpPr>
         <p:spPr>
           <a:xfrm>
-            <a:off x="3495600" y="4333680"/>
+            <a:off x="3495600" y="3895560"/>
             <a:ext cx="600480" cy="9720"/>
           </a:xfrm>
           <a:custGeom>
@@ -10970,7 +10990,7 @@
         </p:nvSpPr>
         <p:spPr>
           <a:xfrm>
-            <a:off x="4086000" y="4343040"/>
+            <a:off x="4086000" y="3904920"/>
             <a:ext cx="10080" cy="381600"/>
           </a:xfrm>
           <a:custGeom>
@@ -11030,7 +11050,7 @@
         </p:nvSpPr>
         <p:spPr>
           <a:xfrm>
-            <a:off x="4095720" y="4333680"/>
+            <a:off x="4095720" y="3895560"/>
             <a:ext cx="590760" cy="9720"/>
           </a:xfrm>
           <a:custGeom>
@@ -11090,7 +11110,7 @@
         </p:nvSpPr>
         <p:spPr>
           <a:xfrm>
-            <a:off x="4676760" y="4343040"/>
+            <a:off x="4676760" y="3904920"/>
             <a:ext cx="9720" cy="381600"/>
           </a:xfrm>
           <a:custGeom>
@@ -11150,7 +11170,7 @@
         </p:nvSpPr>
         <p:spPr>
           <a:xfrm>
-            <a:off x="4686120" y="4333680"/>
+            <a:off x="4686120" y="3895560"/>
             <a:ext cx="590760" cy="9720"/>
           </a:xfrm>
           <a:custGeom>
@@ -11210,7 +11230,7 @@
         </p:nvSpPr>
         <p:spPr>
           <a:xfrm>
-            <a:off x="5267160" y="4343040"/>
+            <a:off x="5267160" y="3904920"/>
             <a:ext cx="9720" cy="381600"/>
           </a:xfrm>
           <a:custGeom>
@@ -11270,7 +11290,7 @@
         </p:nvSpPr>
         <p:spPr>
           <a:xfrm>
-            <a:off x="533160" y="4724280"/>
+            <a:off x="533160" y="4286160"/>
             <a:ext cx="10080" cy="381240"/>
           </a:xfrm>
           <a:custGeom>
@@ -11330,7 +11350,7 @@
         </p:nvSpPr>
         <p:spPr>
           <a:xfrm>
-            <a:off x="533160" y="4714560"/>
+            <a:off x="533160" y="4276440"/>
             <a:ext cx="962280" cy="10080"/>
           </a:xfrm>
           <a:custGeom>
@@ -11390,7 +11410,7 @@
         </p:nvSpPr>
         <p:spPr>
           <a:xfrm>
-            <a:off x="1485720" y="4724280"/>
+            <a:off x="1485720" y="4286160"/>
             <a:ext cx="9720" cy="381240"/>
           </a:xfrm>
           <a:custGeom>
@@ -11450,7 +11470,7 @@
         </p:nvSpPr>
         <p:spPr>
           <a:xfrm>
-            <a:off x="1495080" y="4714560"/>
+            <a:off x="1495080" y="4276440"/>
             <a:ext cx="629280" cy="10080"/>
           </a:xfrm>
           <a:custGeom>
@@ -11510,7 +11530,7 @@
         </p:nvSpPr>
         <p:spPr>
           <a:xfrm>
-            <a:off x="2114280" y="4724280"/>
+            <a:off x="2114280" y="4286160"/>
             <a:ext cx="10080" cy="381240"/>
           </a:xfrm>
           <a:custGeom>
@@ -11570,7 +11590,7 @@
         </p:nvSpPr>
         <p:spPr>
           <a:xfrm>
-            <a:off x="2124000" y="4714560"/>
+            <a:off x="2124000" y="4276440"/>
             <a:ext cx="771840" cy="10080"/>
           </a:xfrm>
           <a:custGeom>
@@ -11630,7 +11650,7 @@
         </p:nvSpPr>
         <p:spPr>
           <a:xfrm>
-            <a:off x="2885760" y="4724280"/>
+            <a:off x="2885760" y="4286160"/>
             <a:ext cx="10080" cy="381240"/>
           </a:xfrm>
           <a:custGeom>
@@ -11690,7 +11710,7 @@
         </p:nvSpPr>
         <p:spPr>
           <a:xfrm>
-            <a:off x="2895480" y="4714560"/>
+            <a:off x="2895480" y="4276440"/>
             <a:ext cx="600480" cy="10080"/>
           </a:xfrm>
           <a:custGeom>
@@ -11750,7 +11770,7 @@
         </p:nvSpPr>
         <p:spPr>
           <a:xfrm>
-            <a:off x="3485880" y="4724280"/>
+            <a:off x="3485880" y="4286160"/>
             <a:ext cx="10080" cy="381240"/>
           </a:xfrm>
           <a:custGeom>
@@ -11810,7 +11830,7 @@
         </p:nvSpPr>
         <p:spPr>
           <a:xfrm>
-            <a:off x="3495600" y="4714560"/>
+            <a:off x="3495600" y="4276440"/>
             <a:ext cx="600480" cy="10080"/>
           </a:xfrm>
           <a:custGeom>
@@ -11870,7 +11890,7 @@
         </p:nvSpPr>
         <p:spPr>
           <a:xfrm>
-            <a:off x="4086000" y="4724280"/>
+            <a:off x="4086000" y="4286160"/>
             <a:ext cx="10080" cy="381240"/>
           </a:xfrm>
           <a:custGeom>
@@ -11930,7 +11950,7 @@
         </p:nvSpPr>
         <p:spPr>
           <a:xfrm>
-            <a:off x="4095720" y="4714560"/>
+            <a:off x="4095720" y="4276440"/>
             <a:ext cx="590760" cy="10080"/>
           </a:xfrm>
           <a:custGeom>
@@ -11990,7 +12010,7 @@
         </p:nvSpPr>
         <p:spPr>
           <a:xfrm>
-            <a:off x="4676760" y="4724280"/>
+            <a:off x="4676760" y="4286160"/>
             <a:ext cx="9720" cy="381240"/>
           </a:xfrm>
           <a:custGeom>
@@ -12050,7 +12070,7 @@
         </p:nvSpPr>
         <p:spPr>
           <a:xfrm>
-            <a:off x="4686120" y="4714560"/>
+            <a:off x="4686120" y="4276440"/>
             <a:ext cx="590760" cy="10080"/>
           </a:xfrm>
           <a:custGeom>
@@ -12110,7 +12130,7 @@
         </p:nvSpPr>
         <p:spPr>
           <a:xfrm>
-            <a:off x="5267160" y="4724280"/>
+            <a:off x="5267160" y="4286160"/>
             <a:ext cx="9720" cy="381240"/>
           </a:xfrm>
           <a:custGeom>
@@ -12170,7 +12190,7 @@
         </p:nvSpPr>
         <p:spPr>
           <a:xfrm>
-            <a:off x="533160" y="5105160"/>
+            <a:off x="533160" y="4667040"/>
             <a:ext cx="10080" cy="381240"/>
           </a:xfrm>
           <a:custGeom>
@@ -12230,7 +12250,7 @@
         </p:nvSpPr>
         <p:spPr>
           <a:xfrm>
-            <a:off x="533160" y="5095800"/>
+            <a:off x="533160" y="4657680"/>
             <a:ext cx="962280" cy="9720"/>
           </a:xfrm>
           <a:custGeom>
@@ -12290,7 +12310,7 @@
         </p:nvSpPr>
         <p:spPr>
           <a:xfrm>
-            <a:off x="1485720" y="5105160"/>
+            <a:off x="1485720" y="4667040"/>
             <a:ext cx="9720" cy="381240"/>
           </a:xfrm>
           <a:custGeom>
@@ -12350,7 +12370,7 @@
         </p:nvSpPr>
         <p:spPr>
           <a:xfrm>
-            <a:off x="1495080" y="5095800"/>
+            <a:off x="1495080" y="4657680"/>
             <a:ext cx="629280" cy="9720"/>
           </a:xfrm>
           <a:custGeom>
@@ -12410,7 +12430,7 @@
         </p:nvSpPr>
         <p:spPr>
           <a:xfrm>
-            <a:off x="2114280" y="5105160"/>
+            <a:off x="2114280" y="4667040"/>
             <a:ext cx="10080" cy="381240"/>
           </a:xfrm>
           <a:custGeom>
@@ -12470,7 +12490,7 @@
         </p:nvSpPr>
         <p:spPr>
           <a:xfrm>
-            <a:off x="2124000" y="5095800"/>
+            <a:off x="2124000" y="4657680"/>
             <a:ext cx="771840" cy="9720"/>
           </a:xfrm>
           <a:custGeom>
@@ -12530,7 +12550,7 @@
         </p:nvSpPr>
         <p:spPr>
           <a:xfrm>
-            <a:off x="2885760" y="5105160"/>
+            <a:off x="2885760" y="4667040"/>
             <a:ext cx="10080" cy="381240"/>
           </a:xfrm>
           <a:custGeom>
@@ -12590,7 +12610,7 @@
         </p:nvSpPr>
         <p:spPr>
           <a:xfrm>
-            <a:off x="2895480" y="5095800"/>
+            <a:off x="2895480" y="4657680"/>
             <a:ext cx="600480" cy="9720"/>
           </a:xfrm>
           <a:custGeom>
@@ -12650,7 +12670,7 @@
         </p:nvSpPr>
         <p:spPr>
           <a:xfrm>
-            <a:off x="3485880" y="5105160"/>
+            <a:off x="3485880" y="4667040"/>
             <a:ext cx="10080" cy="381240"/>
           </a:xfrm>
           <a:custGeom>
@@ -12710,7 +12730,7 @@
         </p:nvSpPr>
         <p:spPr>
           <a:xfrm>
-            <a:off x="3495600" y="5095800"/>
+            <a:off x="3495600" y="4657680"/>
             <a:ext cx="600480" cy="9720"/>
           </a:xfrm>
           <a:custGeom>
@@ -12770,7 +12790,7 @@
         </p:nvSpPr>
         <p:spPr>
           <a:xfrm>
-            <a:off x="4086000" y="5105160"/>
+            <a:off x="4086000" y="4667040"/>
             <a:ext cx="10080" cy="381240"/>
           </a:xfrm>
           <a:custGeom>
@@ -12830,7 +12850,7 @@
         </p:nvSpPr>
         <p:spPr>
           <a:xfrm>
-            <a:off x="4095720" y="5095800"/>
+            <a:off x="4095720" y="4657680"/>
             <a:ext cx="590760" cy="9720"/>
           </a:xfrm>
           <a:custGeom>
@@ -12890,7 +12910,7 @@
         </p:nvSpPr>
         <p:spPr>
           <a:xfrm>
-            <a:off x="4676760" y="5105160"/>
+            <a:off x="4676760" y="4667040"/>
             <a:ext cx="9720" cy="381240"/>
           </a:xfrm>
           <a:custGeom>
@@ -12950,7 +12970,7 @@
         </p:nvSpPr>
         <p:spPr>
           <a:xfrm>
-            <a:off x="4686120" y="5095800"/>
+            <a:off x="4686120" y="4657680"/>
             <a:ext cx="590760" cy="9720"/>
           </a:xfrm>
           <a:custGeom>
@@ -13010,7 +13030,7 @@
         </p:nvSpPr>
         <p:spPr>
           <a:xfrm>
-            <a:off x="5267160" y="5105160"/>
+            <a:off x="5267160" y="4667040"/>
             <a:ext cx="9720" cy="381240"/>
           </a:xfrm>
           <a:custGeom>
@@ -13070,7 +13090,7 @@
         </p:nvSpPr>
         <p:spPr>
           <a:xfrm>
-            <a:off x="533160" y="5476680"/>
+            <a:off x="533160" y="5038560"/>
             <a:ext cx="962280" cy="9720"/>
           </a:xfrm>
           <a:custGeom>
@@ -13130,7 +13150,7 @@
         </p:nvSpPr>
         <p:spPr>
           <a:xfrm>
-            <a:off x="1495080" y="5476680"/>
+            <a:off x="1495080" y="5038560"/>
             <a:ext cx="629280" cy="9720"/>
           </a:xfrm>
           <a:custGeom>
@@ -13190,7 +13210,7 @@
         </p:nvSpPr>
         <p:spPr>
           <a:xfrm>
-            <a:off x="2124000" y="5476680"/>
+            <a:off x="2124000" y="5038560"/>
             <a:ext cx="771840" cy="9720"/>
           </a:xfrm>
           <a:custGeom>
@@ -13250,7 +13270,7 @@
         </p:nvSpPr>
         <p:spPr>
           <a:xfrm>
-            <a:off x="2895480" y="5476680"/>
+            <a:off x="2895480" y="5038560"/>
             <a:ext cx="600480" cy="9720"/>
           </a:xfrm>
           <a:custGeom>
@@ -13310,7 +13330,7 @@
         </p:nvSpPr>
         <p:spPr>
           <a:xfrm>
-            <a:off x="3495600" y="5476680"/>
+            <a:off x="3495600" y="5038560"/>
             <a:ext cx="600480" cy="9720"/>
           </a:xfrm>
           <a:custGeom>
@@ -13370,7 +13390,7 @@
         </p:nvSpPr>
         <p:spPr>
           <a:xfrm>
-            <a:off x="4095720" y="5476680"/>
+            <a:off x="4095720" y="5038560"/>
             <a:ext cx="590760" cy="9720"/>
           </a:xfrm>
           <a:custGeom>
@@ -13430,7 +13450,7 @@
         </p:nvSpPr>
         <p:spPr>
           <a:xfrm>
-            <a:off x="4686120" y="5476680"/>
+            <a:off x="4686120" y="5038560"/>
             <a:ext cx="590760" cy="9720"/>
           </a:xfrm>
           <a:custGeom>
@@ -14157,338 +14177,6 @@
       <p:sp>
         <p:nvSpPr>
           <p:cNvPr id="504" name=""/>
-          <p:cNvSpPr/>
-          <p:nvPr/>
-        </p:nvSpPr>
-        <p:spPr>
-          <a:xfrm>
-            <a:off x="552240" y="2314440"/>
-            <a:ext cx="190800" cy="190800"/>
-          </a:xfrm>
-          <a:custGeom>
-            <a:avLst/>
-            <a:gdLst/>
-            <a:ahLst/>
-            <a:rect l="0" t="0" r="r" b="b"/>
-            <a:pathLst>
-              <a:path w="530" h="530">
-                <a:moveTo>
-                  <a:pt x="265" y="0"/>
-                </a:moveTo>
-                <a:cubicBezTo>
-                  <a:pt x="119" y="0"/>
-                  <a:pt x="0" y="118"/>
-                  <a:pt x="0" y="265"/>
-                </a:cubicBezTo>
-                <a:cubicBezTo>
-                  <a:pt x="0" y="412"/>
-                  <a:pt x="119" y="530"/>
-                  <a:pt x="265" y="530"/>
-                </a:cubicBezTo>
-                <a:cubicBezTo>
-                  <a:pt x="412" y="530"/>
-                  <a:pt x="530" y="412"/>
-                  <a:pt x="530" y="265"/>
-                </a:cubicBezTo>
-                <a:cubicBezTo>
-                  <a:pt x="530" y="118"/>
-                  <a:pt x="412" y="0"/>
-                  <a:pt x="265" y="0"/>
-                </a:cubicBezTo>
-                <a:moveTo>
-                  <a:pt x="30" y="280"/>
-                </a:moveTo>
-                <a:lnTo>
-                  <a:pt x="89" y="280"/>
-                </a:lnTo>
-                <a:cubicBezTo>
-                  <a:pt x="90" y="317"/>
-                  <a:pt x="96" y="352"/>
-                  <a:pt x="107" y="383"/>
-                </a:cubicBezTo>
-                <a:lnTo>
-                  <a:pt x="61" y="383"/>
-                </a:lnTo>
-                <a:cubicBezTo>
-                  <a:pt x="43" y="352"/>
-                  <a:pt x="33" y="318"/>
-                  <a:pt x="30" y="280"/>
-                </a:cubicBezTo>
-                <a:moveTo>
-                  <a:pt x="279" y="117"/>
-                </a:moveTo>
-                <a:lnTo>
-                  <a:pt x="279" y="30"/>
-                </a:lnTo>
-                <a:cubicBezTo>
-                  <a:pt x="321" y="37"/>
-                  <a:pt x="356" y="69"/>
-                  <a:pt x="380" y="117"/>
-                </a:cubicBezTo>
-                <a:lnTo>
-                  <a:pt x="279" y="117"/>
-                </a:lnTo>
-                <a:moveTo>
-                  <a:pt x="393" y="147"/>
-                </a:moveTo>
-                <a:cubicBezTo>
-                  <a:pt x="404" y="177"/>
-                  <a:pt x="411" y="213"/>
-                  <a:pt x="412" y="251"/>
-                </a:cubicBezTo>
-                <a:lnTo>
-                  <a:pt x="279" y="251"/>
-                </a:lnTo>
-                <a:lnTo>
-                  <a:pt x="279" y="147"/>
-                </a:lnTo>
-                <a:lnTo>
-                  <a:pt x="393" y="147"/>
-                </a:lnTo>
-                <a:moveTo>
-                  <a:pt x="250" y="30"/>
-                </a:moveTo>
-                <a:lnTo>
-                  <a:pt x="250" y="117"/>
-                </a:lnTo>
-                <a:lnTo>
-                  <a:pt x="150" y="117"/>
-                </a:lnTo>
-                <a:cubicBezTo>
-                  <a:pt x="174" y="69"/>
-                  <a:pt x="210" y="37"/>
-                  <a:pt x="250" y="30"/>
-                </a:cubicBezTo>
-                <a:moveTo>
-                  <a:pt x="250" y="147"/>
-                </a:moveTo>
-                <a:lnTo>
-                  <a:pt x="250" y="251"/>
-                </a:lnTo>
-                <a:lnTo>
-                  <a:pt x="118" y="251"/>
-                </a:lnTo>
-                <a:cubicBezTo>
-                  <a:pt x="120" y="213"/>
-                  <a:pt x="126" y="177"/>
-                  <a:pt x="138" y="147"/>
-                </a:cubicBezTo>
-                <a:lnTo>
-                  <a:pt x="250" y="147"/>
-                </a:lnTo>
-                <a:moveTo>
-                  <a:pt x="89" y="251"/>
-                </a:moveTo>
-                <a:lnTo>
-                  <a:pt x="30" y="251"/>
-                </a:lnTo>
-                <a:cubicBezTo>
-                  <a:pt x="33" y="213"/>
-                  <a:pt x="43" y="177"/>
-                  <a:pt x="61" y="147"/>
-                </a:cubicBezTo>
-                <a:lnTo>
-                  <a:pt x="107" y="147"/>
-                </a:lnTo>
-                <a:cubicBezTo>
-                  <a:pt x="96" y="178"/>
-                  <a:pt x="90" y="214"/>
-                  <a:pt x="89" y="251"/>
-                </a:cubicBezTo>
-                <a:moveTo>
-                  <a:pt x="118" y="280"/>
-                </a:moveTo>
-                <a:lnTo>
-                  <a:pt x="250" y="280"/>
-                </a:lnTo>
-                <a:lnTo>
-                  <a:pt x="250" y="383"/>
-                </a:lnTo>
-                <a:lnTo>
-                  <a:pt x="138" y="383"/>
-                </a:lnTo>
-                <a:cubicBezTo>
-                  <a:pt x="126" y="352"/>
-                  <a:pt x="120" y="318"/>
-                  <a:pt x="118" y="280"/>
-                </a:cubicBezTo>
-                <a:moveTo>
-                  <a:pt x="250" y="412"/>
-                </a:moveTo>
-                <a:lnTo>
-                  <a:pt x="250" y="499"/>
-                </a:lnTo>
-                <a:cubicBezTo>
-                  <a:pt x="210" y="493"/>
-                  <a:pt x="174" y="460"/>
-                  <a:pt x="150" y="412"/>
-                </a:cubicBezTo>
-                <a:lnTo>
-                  <a:pt x="250" y="412"/>
-                </a:lnTo>
-                <a:moveTo>
-                  <a:pt x="279" y="499"/>
-                </a:moveTo>
-                <a:lnTo>
-                  <a:pt x="279" y="412"/>
-                </a:lnTo>
-                <a:lnTo>
-                  <a:pt x="380" y="412"/>
-                </a:lnTo>
-                <a:cubicBezTo>
-                  <a:pt x="356" y="460"/>
-                  <a:pt x="321" y="493"/>
-                  <a:pt x="279" y="499"/>
-                </a:cubicBezTo>
-                <a:moveTo>
-                  <a:pt x="279" y="383"/>
-                </a:moveTo>
-                <a:lnTo>
-                  <a:pt x="279" y="280"/>
-                </a:lnTo>
-                <a:lnTo>
-                  <a:pt x="412" y="280"/>
-                </a:lnTo>
-                <a:cubicBezTo>
-                  <a:pt x="411" y="318"/>
-                  <a:pt x="404" y="352"/>
-                  <a:pt x="393" y="383"/>
-                </a:cubicBezTo>
-                <a:lnTo>
-                  <a:pt x="279" y="383"/>
-                </a:lnTo>
-                <a:moveTo>
-                  <a:pt x="442" y="280"/>
-                </a:moveTo>
-                <a:lnTo>
-                  <a:pt x="500" y="280"/>
-                </a:lnTo>
-                <a:cubicBezTo>
-                  <a:pt x="498" y="318"/>
-                  <a:pt x="487" y="352"/>
-                  <a:pt x="469" y="383"/>
-                </a:cubicBezTo>
-                <a:lnTo>
-                  <a:pt x="424" y="383"/>
-                </a:lnTo>
-                <a:cubicBezTo>
-                  <a:pt x="434" y="352"/>
-                  <a:pt x="440" y="317"/>
-                  <a:pt x="442" y="280"/>
-                </a:cubicBezTo>
-                <a:moveTo>
-                  <a:pt x="424" y="147"/>
-                </a:moveTo>
-                <a:lnTo>
-                  <a:pt x="469" y="147"/>
-                </a:lnTo>
-                <a:cubicBezTo>
-                  <a:pt x="487" y="177"/>
-                  <a:pt x="498" y="213"/>
-                  <a:pt x="500" y="251"/>
-                </a:cubicBezTo>
-                <a:lnTo>
-                  <a:pt x="442" y="251"/>
-                </a:lnTo>
-                <a:cubicBezTo>
-                  <a:pt x="440" y="214"/>
-                  <a:pt x="434" y="178"/>
-                  <a:pt x="424" y="147"/>
-                </a:cubicBezTo>
-                <a:moveTo>
-                  <a:pt x="449" y="117"/>
-                </a:moveTo>
-                <a:lnTo>
-                  <a:pt x="412" y="117"/>
-                </a:lnTo>
-                <a:cubicBezTo>
-                  <a:pt x="402" y="94"/>
-                  <a:pt x="389" y="73"/>
-                  <a:pt x="374" y="56"/>
-                </a:cubicBezTo>
-                <a:cubicBezTo>
-                  <a:pt x="403" y="71"/>
-                  <a:pt x="429" y="92"/>
-                  <a:pt x="449" y="117"/>
-                </a:cubicBezTo>
-                <a:moveTo>
-                  <a:pt x="157" y="56"/>
-                </a:moveTo>
-                <a:cubicBezTo>
-                  <a:pt x="142" y="73"/>
-                  <a:pt x="129" y="94"/>
-                  <a:pt x="118" y="117"/>
-                </a:cubicBezTo>
-                <a:lnTo>
-                  <a:pt x="81" y="117"/>
-                </a:lnTo>
-                <a:cubicBezTo>
-                  <a:pt x="102" y="92"/>
-                  <a:pt x="127" y="71"/>
-                  <a:pt x="157" y="56"/>
-                </a:cubicBezTo>
-                <a:moveTo>
-                  <a:pt x="81" y="412"/>
-                </a:moveTo>
-                <a:lnTo>
-                  <a:pt x="118" y="412"/>
-                </a:lnTo>
-                <a:cubicBezTo>
-                  <a:pt x="129" y="436"/>
-                  <a:pt x="142" y="457"/>
-                  <a:pt x="157" y="474"/>
-                </a:cubicBezTo>
-                <a:cubicBezTo>
-                  <a:pt x="127" y="459"/>
-                  <a:pt x="102" y="438"/>
-                  <a:pt x="81" y="412"/>
-                </a:cubicBezTo>
-                <a:moveTo>
-                  <a:pt x="374" y="474"/>
-                </a:moveTo>
-                <a:cubicBezTo>
-                  <a:pt x="389" y="457"/>
-                  <a:pt x="402" y="436"/>
-                  <a:pt x="412" y="412"/>
-                </a:cubicBezTo>
-                <a:lnTo>
-                  <a:pt x="449" y="412"/>
-                </a:lnTo>
-                <a:cubicBezTo>
-                  <a:pt x="429" y="438"/>
-                  <a:pt x="403" y="459"/>
-                  <a:pt x="374" y="474"/>
-                </a:cubicBezTo>
-                <a:close/>
-              </a:path>
-            </a:pathLst>
-          </a:custGeom>
-          <a:solidFill>
-            <a:srgbClr val="3B88C3"/>
-          </a:solidFill>
-          <a:ln w="0">
-            <a:noFill/>
-          </a:ln>
-        </p:spPr>
-        <p:txBody>
-          <a:bodyPr lIns="0" tIns="0" rIns="0" bIns="0" anchor="t">
-            <a:noAutofit/>
-          </a:bodyPr>
-          <a:p>
-            <a:endParaRPr lang="en-US" sz="2400" b="0" u="none" strike="noStrike">
-              <a:solidFill>
-                <a:srgbClr val="FFFFFF"/>
-              </a:solidFill>
-              <a:effectLst/>
-              <a:uFillTx/>
-              <a:latin typeface="游明朝体"/>
-            </a:endParaRPr>
-          </a:p>
-        </p:txBody>
-      </p:sp>
-      <p:sp>
-        <p:nvSpPr>
-          <p:cNvPr id="505" name=""/>
           <p:cNvSpPr txBox="1"/>
           <p:nvPr/>
         </p:nvSpPr>
@@ -14536,73 +14224,13 @@
       </p:sp>
       <p:sp>
         <p:nvSpPr>
-          <p:cNvPr id="506" name=""/>
+          <p:cNvPr id="505" name=""/>
           <p:cNvSpPr txBox="1"/>
           <p:nvPr/>
         </p:nvSpPr>
         <p:spPr>
           <a:xfrm>
-            <a:off x="752400" y="2304720"/>
-            <a:ext cx="2484720" cy="222840"/>
-          </a:xfrm>
-          <a:prstGeom prst="rect">
-            <a:avLst/>
-          </a:prstGeom>
-          <a:noFill/>
-          <a:ln w="0">
-            <a:noFill/>
-          </a:ln>
-        </p:spPr>
-        <p:txBody>
-          <a:bodyPr wrap="none" lIns="0" tIns="0" rIns="0" bIns="0" anchor="t">
-            <a:spAutoFit/>
-          </a:bodyPr>
-          <a:p>
-            <a:pPr/>
-            <a:r>
-              <a:rPr lang="en-US" sz="1500" b="0" u="none" strike="noStrike">
-                <a:solidFill>
-                  <a:srgbClr val="1A1A2E"/>
-                </a:solidFill>
-                <a:effectLst/>
-                <a:uFillTx/>
-                <a:latin typeface="HelveticaNeue"/>
-                <a:ea typeface="HelveticaNeue"/>
-              </a:rPr>
-              <a:t> </a:t>
-            </a:r>
-            <a:r>
-              <a:rPr lang="en-US" sz="1500" b="0" u="none" strike="noStrike">
-                <a:solidFill>
-                  <a:srgbClr val="0969DA"/>
-                </a:solidFill>
-                <a:effectLst/>
-                <a:uFillTx/>
-                <a:latin typeface="HelveticaNeue"/>
-                <a:ea typeface="HelveticaNeue"/>
-              </a:rPr>
-              <a:t>https://uehr.net/ml_forecast/</a:t>
-            </a:r>
-            <a:endParaRPr lang="en-US" sz="1500" b="0" u="none" strike="noStrike">
-              <a:solidFill>
-                <a:srgbClr val="000000"/>
-              </a:solidFill>
-              <a:effectLst/>
-              <a:uFillTx/>
-              <a:latin typeface="游明朝体"/>
-            </a:endParaRPr>
-          </a:p>
-        </p:txBody>
-      </p:sp>
-      <p:sp>
-        <p:nvSpPr>
-          <p:cNvPr id="507" name=""/>
-          <p:cNvSpPr txBox="1"/>
-          <p:nvPr/>
-        </p:nvSpPr>
-        <p:spPr>
-          <a:xfrm>
-            <a:off x="533520" y="2801160"/>
+            <a:off x="533520" y="2363040"/>
             <a:ext cx="418320" cy="209160"/>
           </a:xfrm>
           <a:prstGeom prst="rect">
@@ -14644,13 +14272,13 @@
       </p:sp>
       <p:sp>
         <p:nvSpPr>
-          <p:cNvPr id="508" name=""/>
+          <p:cNvPr id="506" name=""/>
           <p:cNvSpPr txBox="1"/>
           <p:nvPr/>
         </p:nvSpPr>
         <p:spPr>
           <a:xfrm>
-            <a:off x="952560" y="2791440"/>
+            <a:off x="952560" y="2353320"/>
             <a:ext cx="209160" cy="250200"/>
           </a:xfrm>
           <a:prstGeom prst="rect">
@@ -14692,13 +14320,13 @@
       </p:sp>
       <p:sp>
         <p:nvSpPr>
-          <p:cNvPr id="509" name=""/>
+          <p:cNvPr id="507" name=""/>
           <p:cNvSpPr txBox="1"/>
           <p:nvPr/>
         </p:nvSpPr>
         <p:spPr>
           <a:xfrm>
-            <a:off x="1068840" y="2801160"/>
+            <a:off x="1068840" y="2363040"/>
             <a:ext cx="2715120" cy="209160"/>
           </a:xfrm>
           <a:prstGeom prst="rect">
@@ -14740,13 +14368,13 @@
       </p:sp>
       <p:sp>
         <p:nvSpPr>
-          <p:cNvPr id="510" name=""/>
+          <p:cNvPr id="508" name=""/>
           <p:cNvSpPr txBox="1"/>
           <p:nvPr/>
         </p:nvSpPr>
         <p:spPr>
           <a:xfrm>
-            <a:off x="3793320" y="2791440"/>
+            <a:off x="3793320" y="2353320"/>
             <a:ext cx="1215360" cy="250200"/>
           </a:xfrm>
           <a:prstGeom prst="rect">
@@ -14788,13 +14416,13 @@
       </p:sp>
       <p:sp>
         <p:nvSpPr>
-          <p:cNvPr id="511" name=""/>
+          <p:cNvPr id="509" name=""/>
           <p:cNvSpPr txBox="1"/>
           <p:nvPr/>
         </p:nvSpPr>
         <p:spPr>
           <a:xfrm>
-            <a:off x="5012280" y="2801160"/>
+            <a:off x="5012280" y="2363040"/>
             <a:ext cx="209520" cy="209160"/>
           </a:xfrm>
           <a:prstGeom prst="rect">
@@ -14836,13 +14464,13 @@
       </p:sp>
       <p:sp>
         <p:nvSpPr>
-          <p:cNvPr id="512" name=""/>
+          <p:cNvPr id="510" name=""/>
           <p:cNvSpPr txBox="1"/>
           <p:nvPr/>
         </p:nvSpPr>
         <p:spPr>
           <a:xfrm>
-            <a:off x="666720" y="3292920"/>
+            <a:off x="666720" y="2854800"/>
             <a:ext cx="342000" cy="171000"/>
           </a:xfrm>
           <a:prstGeom prst="rect">
@@ -14884,13 +14512,13 @@
       </p:sp>
       <p:sp>
         <p:nvSpPr>
-          <p:cNvPr id="513" name=""/>
+          <p:cNvPr id="511" name=""/>
           <p:cNvSpPr txBox="1"/>
           <p:nvPr/>
         </p:nvSpPr>
         <p:spPr>
           <a:xfrm>
-            <a:off x="1622520" y="3285000"/>
+            <a:off x="1622520" y="2846520"/>
             <a:ext cx="364320" cy="203040"/>
           </a:xfrm>
           <a:prstGeom prst="rect">
@@ -14932,13 +14560,13 @@
       </p:sp>
       <p:sp>
         <p:nvSpPr>
-          <p:cNvPr id="514" name=""/>
+          <p:cNvPr id="512" name=""/>
           <p:cNvSpPr txBox="1"/>
           <p:nvPr/>
         </p:nvSpPr>
         <p:spPr>
           <a:xfrm>
-            <a:off x="2244960" y="3292920"/>
+            <a:off x="2244960" y="2854800"/>
             <a:ext cx="512640" cy="171000"/>
           </a:xfrm>
           <a:prstGeom prst="rect">
@@ -14980,13 +14608,13 @@
       </p:sp>
       <p:sp>
         <p:nvSpPr>
-          <p:cNvPr id="515" name=""/>
+          <p:cNvPr id="513" name=""/>
           <p:cNvSpPr txBox="1"/>
           <p:nvPr/>
         </p:nvSpPr>
         <p:spPr>
           <a:xfrm>
-            <a:off x="3016440" y="3285000"/>
+            <a:off x="3016440" y="2846520"/>
             <a:ext cx="348840" cy="203040"/>
           </a:xfrm>
           <a:prstGeom prst="rect">
@@ -15028,13 +14656,13 @@
       </p:sp>
       <p:sp>
         <p:nvSpPr>
-          <p:cNvPr id="516" name=""/>
+          <p:cNvPr id="514" name=""/>
           <p:cNvSpPr txBox="1"/>
           <p:nvPr/>
         </p:nvSpPr>
         <p:spPr>
           <a:xfrm>
-            <a:off x="3623400" y="3292920"/>
+            <a:off x="3623400" y="2854800"/>
             <a:ext cx="342000" cy="171000"/>
           </a:xfrm>
           <a:prstGeom prst="rect">
@@ -15076,13 +14704,13 @@
       </p:sp>
       <p:sp>
         <p:nvSpPr>
-          <p:cNvPr id="517" name=""/>
+          <p:cNvPr id="515" name=""/>
           <p:cNvSpPr txBox="1"/>
           <p:nvPr/>
         </p:nvSpPr>
         <p:spPr>
           <a:xfrm>
-            <a:off x="4223520" y="3285000"/>
+            <a:off x="4223520" y="2846520"/>
             <a:ext cx="184320" cy="203040"/>
           </a:xfrm>
           <a:prstGeom prst="rect">
@@ -15124,13 +14752,13 @@
       </p:sp>
       <p:sp>
         <p:nvSpPr>
-          <p:cNvPr id="518" name=""/>
+          <p:cNvPr id="516" name=""/>
           <p:cNvSpPr txBox="1"/>
           <p:nvPr/>
         </p:nvSpPr>
         <p:spPr>
           <a:xfrm>
-            <a:off x="4814280" y="3285000"/>
+            <a:off x="4814280" y="2846520"/>
             <a:ext cx="288720" cy="203040"/>
           </a:xfrm>
           <a:prstGeom prst="rect">
@@ -15172,13 +14800,13 @@
       </p:sp>
       <p:sp>
         <p:nvSpPr>
-          <p:cNvPr id="519" name=""/>
+          <p:cNvPr id="517" name=""/>
           <p:cNvSpPr txBox="1"/>
           <p:nvPr/>
         </p:nvSpPr>
         <p:spPr>
           <a:xfrm>
-            <a:off x="666720" y="3665880"/>
+            <a:off x="666720" y="3227760"/>
             <a:ext cx="481320" cy="200160"/>
           </a:xfrm>
           <a:prstGeom prst="rect">
@@ -15220,13 +14848,13 @@
       </p:sp>
       <p:sp>
         <p:nvSpPr>
-          <p:cNvPr id="520" name=""/>
+          <p:cNvPr id="518" name=""/>
           <p:cNvSpPr txBox="1"/>
           <p:nvPr/>
         </p:nvSpPr>
         <p:spPr>
           <a:xfrm>
-            <a:off x="1149480" y="3673800"/>
+            <a:off x="1149480" y="3235680"/>
             <a:ext cx="171360" cy="171000"/>
           </a:xfrm>
           <a:prstGeom prst="rect">
@@ -15268,13 +14896,13 @@
       </p:sp>
       <p:sp>
         <p:nvSpPr>
-          <p:cNvPr id="521" name=""/>
+          <p:cNvPr id="519" name=""/>
           <p:cNvSpPr txBox="1"/>
           <p:nvPr/>
         </p:nvSpPr>
         <p:spPr>
           <a:xfrm>
-            <a:off x="1320840" y="3665880"/>
+            <a:off x="1320840" y="3227760"/>
             <a:ext cx="171000" cy="200160"/>
           </a:xfrm>
           <a:prstGeom prst="rect">
@@ -15316,13 +14944,13 @@
       </p:sp>
       <p:sp>
         <p:nvSpPr>
-          <p:cNvPr id="522" name=""/>
+          <p:cNvPr id="520" name=""/>
           <p:cNvSpPr txBox="1"/>
           <p:nvPr/>
         </p:nvSpPr>
         <p:spPr>
           <a:xfrm>
-            <a:off x="1622520" y="3665880"/>
+            <a:off x="1622520" y="3227760"/>
             <a:ext cx="333000" cy="200160"/>
           </a:xfrm>
           <a:prstGeom prst="rect">
@@ -15364,13 +14992,13 @@
       </p:sp>
       <p:sp>
         <p:nvSpPr>
-          <p:cNvPr id="523" name=""/>
+          <p:cNvPr id="521" name=""/>
           <p:cNvSpPr txBox="1"/>
           <p:nvPr/>
         </p:nvSpPr>
         <p:spPr>
           <a:xfrm>
-            <a:off x="2244960" y="3665880"/>
+            <a:off x="2244960" y="3227760"/>
             <a:ext cx="333000" cy="200160"/>
           </a:xfrm>
           <a:prstGeom prst="rect">
@@ -15412,13 +15040,13 @@
       </p:sp>
       <p:sp>
         <p:nvSpPr>
-          <p:cNvPr id="524" name=""/>
+          <p:cNvPr id="522" name=""/>
           <p:cNvSpPr txBox="1"/>
           <p:nvPr/>
         </p:nvSpPr>
         <p:spPr>
           <a:xfrm>
-            <a:off x="3016440" y="3665880"/>
+            <a:off x="3016440" y="3227760"/>
             <a:ext cx="237960" cy="200160"/>
           </a:xfrm>
           <a:prstGeom prst="rect">
@@ -15460,13 +15088,13 @@
       </p:sp>
       <p:sp>
         <p:nvSpPr>
-          <p:cNvPr id="525" name=""/>
+          <p:cNvPr id="523" name=""/>
           <p:cNvSpPr txBox="1"/>
           <p:nvPr/>
         </p:nvSpPr>
         <p:spPr>
           <a:xfrm>
-            <a:off x="3623400" y="3673800"/>
+            <a:off x="3623400" y="3235680"/>
             <a:ext cx="342000" cy="171000"/>
           </a:xfrm>
           <a:prstGeom prst="rect">
@@ -15508,13 +15136,13 @@
       </p:sp>
       <p:sp>
         <p:nvSpPr>
-          <p:cNvPr id="526" name=""/>
+          <p:cNvPr id="524" name=""/>
           <p:cNvSpPr txBox="1"/>
           <p:nvPr/>
         </p:nvSpPr>
         <p:spPr>
           <a:xfrm>
-            <a:off x="4223520" y="3665880"/>
+            <a:off x="4223520" y="3227760"/>
             <a:ext cx="333000" cy="200160"/>
           </a:xfrm>
           <a:prstGeom prst="rect">
@@ -15556,13 +15184,13 @@
       </p:sp>
       <p:sp>
         <p:nvSpPr>
-          <p:cNvPr id="527" name=""/>
+          <p:cNvPr id="525" name=""/>
           <p:cNvSpPr txBox="1"/>
           <p:nvPr/>
         </p:nvSpPr>
         <p:spPr>
           <a:xfrm>
-            <a:off x="4814280" y="3665880"/>
+            <a:off x="4814280" y="3227760"/>
             <a:ext cx="333000" cy="200160"/>
           </a:xfrm>
           <a:prstGeom prst="rect">
@@ -15604,13 +15232,13 @@
       </p:sp>
       <p:sp>
         <p:nvSpPr>
-          <p:cNvPr id="528" name=""/>
+          <p:cNvPr id="526" name=""/>
           <p:cNvSpPr txBox="1"/>
           <p:nvPr/>
         </p:nvSpPr>
         <p:spPr>
           <a:xfrm>
-            <a:off x="666720" y="4046760"/>
+            <a:off x="666720" y="3608640"/>
             <a:ext cx="481320" cy="200160"/>
           </a:xfrm>
           <a:prstGeom prst="rect">
@@ -15652,13 +15280,13 @@
       </p:sp>
       <p:sp>
         <p:nvSpPr>
-          <p:cNvPr id="529" name=""/>
+          <p:cNvPr id="527" name=""/>
           <p:cNvSpPr txBox="1"/>
           <p:nvPr/>
         </p:nvSpPr>
         <p:spPr>
           <a:xfrm>
-            <a:off x="1149480" y="4055040"/>
+            <a:off x="1149480" y="3616560"/>
             <a:ext cx="171360" cy="171000"/>
           </a:xfrm>
           <a:prstGeom prst="rect">
@@ -15700,13 +15328,13 @@
       </p:sp>
       <p:sp>
         <p:nvSpPr>
-          <p:cNvPr id="530" name=""/>
+          <p:cNvPr id="528" name=""/>
           <p:cNvSpPr txBox="1"/>
           <p:nvPr/>
         </p:nvSpPr>
         <p:spPr>
           <a:xfrm>
-            <a:off x="1320840" y="4046760"/>
+            <a:off x="1320840" y="3608640"/>
             <a:ext cx="171000" cy="200160"/>
           </a:xfrm>
           <a:prstGeom prst="rect">
@@ -15748,13 +15376,13 @@
       </p:sp>
       <p:sp>
         <p:nvSpPr>
-          <p:cNvPr id="531" name=""/>
+          <p:cNvPr id="529" name=""/>
           <p:cNvSpPr txBox="1"/>
           <p:nvPr/>
         </p:nvSpPr>
         <p:spPr>
           <a:xfrm>
-            <a:off x="1622520" y="4046760"/>
+            <a:off x="1622520" y="3608640"/>
             <a:ext cx="333000" cy="200160"/>
           </a:xfrm>
           <a:prstGeom prst="rect">
@@ -15796,13 +15424,13 @@
       </p:sp>
       <p:sp>
         <p:nvSpPr>
-          <p:cNvPr id="532" name=""/>
+          <p:cNvPr id="530" name=""/>
           <p:cNvSpPr txBox="1"/>
           <p:nvPr/>
         </p:nvSpPr>
         <p:spPr>
           <a:xfrm>
-            <a:off x="2244960" y="4046760"/>
+            <a:off x="2244960" y="3608640"/>
             <a:ext cx="333000" cy="200160"/>
           </a:xfrm>
           <a:prstGeom prst="rect">
@@ -15844,13 +15472,13 @@
       </p:sp>
       <p:sp>
         <p:nvSpPr>
-          <p:cNvPr id="533" name=""/>
+          <p:cNvPr id="531" name=""/>
           <p:cNvSpPr txBox="1"/>
           <p:nvPr/>
         </p:nvSpPr>
         <p:spPr>
           <a:xfrm>
-            <a:off x="3016440" y="4046760"/>
+            <a:off x="3016440" y="3608640"/>
             <a:ext cx="237960" cy="200160"/>
           </a:xfrm>
           <a:prstGeom prst="rect">
@@ -15892,13 +15520,13 @@
       </p:sp>
       <p:sp>
         <p:nvSpPr>
-          <p:cNvPr id="534" name=""/>
+          <p:cNvPr id="532" name=""/>
           <p:cNvSpPr txBox="1"/>
           <p:nvPr/>
         </p:nvSpPr>
         <p:spPr>
           <a:xfrm>
-            <a:off x="3623400" y="4055040"/>
+            <a:off x="3623400" y="3616560"/>
             <a:ext cx="342000" cy="171000"/>
           </a:xfrm>
           <a:prstGeom prst="rect">
@@ -15940,13 +15568,13 @@
       </p:sp>
       <p:sp>
         <p:nvSpPr>
-          <p:cNvPr id="535" name=""/>
+          <p:cNvPr id="533" name=""/>
           <p:cNvSpPr txBox="1"/>
           <p:nvPr/>
         </p:nvSpPr>
         <p:spPr>
           <a:xfrm>
-            <a:off x="4223520" y="4046760"/>
+            <a:off x="4223520" y="3608640"/>
             <a:ext cx="333000" cy="200160"/>
           </a:xfrm>
           <a:prstGeom prst="rect">
@@ -15988,13 +15616,13 @@
       </p:sp>
       <p:sp>
         <p:nvSpPr>
-          <p:cNvPr id="536" name=""/>
+          <p:cNvPr id="534" name=""/>
           <p:cNvSpPr txBox="1"/>
           <p:nvPr/>
         </p:nvSpPr>
         <p:spPr>
           <a:xfrm>
-            <a:off x="4814280" y="4046760"/>
+            <a:off x="4814280" y="3608640"/>
             <a:ext cx="333000" cy="200160"/>
           </a:xfrm>
           <a:prstGeom prst="rect">
@@ -16036,13 +15664,13 @@
       </p:sp>
       <p:sp>
         <p:nvSpPr>
-          <p:cNvPr id="537" name=""/>
+          <p:cNvPr id="535" name=""/>
           <p:cNvSpPr txBox="1"/>
           <p:nvPr/>
         </p:nvSpPr>
         <p:spPr>
           <a:xfrm>
-            <a:off x="666720" y="4428000"/>
+            <a:off x="666720" y="3989520"/>
             <a:ext cx="481320" cy="200160"/>
           </a:xfrm>
           <a:prstGeom prst="rect">
@@ -16084,13 +15712,13 @@
       </p:sp>
       <p:sp>
         <p:nvSpPr>
-          <p:cNvPr id="538" name=""/>
+          <p:cNvPr id="536" name=""/>
           <p:cNvSpPr txBox="1"/>
           <p:nvPr/>
         </p:nvSpPr>
         <p:spPr>
           <a:xfrm>
-            <a:off x="1149480" y="4435920"/>
+            <a:off x="1149480" y="3997800"/>
             <a:ext cx="171360" cy="171000"/>
           </a:xfrm>
           <a:prstGeom prst="rect">
@@ -16132,13 +15760,13 @@
       </p:sp>
       <p:sp>
         <p:nvSpPr>
-          <p:cNvPr id="539" name=""/>
+          <p:cNvPr id="537" name=""/>
           <p:cNvSpPr txBox="1"/>
           <p:nvPr/>
         </p:nvSpPr>
         <p:spPr>
           <a:xfrm>
-            <a:off x="1320840" y="4428000"/>
+            <a:off x="1320840" y="3989520"/>
             <a:ext cx="171000" cy="200160"/>
           </a:xfrm>
           <a:prstGeom prst="rect">
@@ -16180,13 +15808,13 @@
       </p:sp>
       <p:sp>
         <p:nvSpPr>
-          <p:cNvPr id="540" name=""/>
+          <p:cNvPr id="538" name=""/>
           <p:cNvSpPr txBox="1"/>
           <p:nvPr/>
         </p:nvSpPr>
         <p:spPr>
           <a:xfrm>
-            <a:off x="1622520" y="4428000"/>
+            <a:off x="1622520" y="3989520"/>
             <a:ext cx="333000" cy="200160"/>
           </a:xfrm>
           <a:prstGeom prst="rect">
@@ -16228,13 +15856,13 @@
       </p:sp>
       <p:sp>
         <p:nvSpPr>
-          <p:cNvPr id="541" name=""/>
+          <p:cNvPr id="539" name=""/>
           <p:cNvSpPr txBox="1"/>
           <p:nvPr/>
         </p:nvSpPr>
         <p:spPr>
           <a:xfrm>
-            <a:off x="2244960" y="4428000"/>
+            <a:off x="2244960" y="3989520"/>
             <a:ext cx="333000" cy="200160"/>
           </a:xfrm>
           <a:prstGeom prst="rect">
@@ -16276,13 +15904,13 @@
       </p:sp>
       <p:sp>
         <p:nvSpPr>
-          <p:cNvPr id="542" name=""/>
+          <p:cNvPr id="540" name=""/>
           <p:cNvSpPr txBox="1"/>
           <p:nvPr/>
         </p:nvSpPr>
         <p:spPr>
           <a:xfrm>
-            <a:off x="3016440" y="4428000"/>
+            <a:off x="3016440" y="3989520"/>
             <a:ext cx="237960" cy="200160"/>
           </a:xfrm>
           <a:prstGeom prst="rect">
@@ -16324,13 +15952,13 @@
       </p:sp>
       <p:sp>
         <p:nvSpPr>
-          <p:cNvPr id="543" name=""/>
+          <p:cNvPr id="541" name=""/>
           <p:cNvSpPr txBox="1"/>
           <p:nvPr/>
         </p:nvSpPr>
         <p:spPr>
           <a:xfrm>
-            <a:off x="3623400" y="4435920"/>
+            <a:off x="3623400" y="3997800"/>
             <a:ext cx="342000" cy="171000"/>
           </a:xfrm>
           <a:prstGeom prst="rect">
@@ -16372,13 +16000,13 @@
       </p:sp>
       <p:sp>
         <p:nvSpPr>
-          <p:cNvPr id="544" name=""/>
+          <p:cNvPr id="542" name=""/>
           <p:cNvSpPr txBox="1"/>
           <p:nvPr/>
         </p:nvSpPr>
         <p:spPr>
           <a:xfrm>
-            <a:off x="4223520" y="4428000"/>
+            <a:off x="4223520" y="3989520"/>
             <a:ext cx="333000" cy="200160"/>
           </a:xfrm>
           <a:prstGeom prst="rect">
@@ -16420,13 +16048,13 @@
       </p:sp>
       <p:sp>
         <p:nvSpPr>
-          <p:cNvPr id="545" name=""/>
+          <p:cNvPr id="543" name=""/>
           <p:cNvSpPr txBox="1"/>
           <p:nvPr/>
         </p:nvSpPr>
         <p:spPr>
           <a:xfrm>
-            <a:off x="4814280" y="4428000"/>
+            <a:off x="4814280" y="3989520"/>
             <a:ext cx="333000" cy="200160"/>
           </a:xfrm>
           <a:prstGeom prst="rect">
@@ -16468,13 +16096,13 @@
       </p:sp>
       <p:sp>
         <p:nvSpPr>
-          <p:cNvPr id="546" name=""/>
+          <p:cNvPr id="544" name=""/>
           <p:cNvSpPr txBox="1"/>
           <p:nvPr/>
         </p:nvSpPr>
         <p:spPr>
           <a:xfrm>
-            <a:off x="666720" y="4808880"/>
+            <a:off x="666720" y="4370760"/>
             <a:ext cx="481320" cy="200160"/>
           </a:xfrm>
           <a:prstGeom prst="rect">
@@ -16516,13 +16144,13 @@
       </p:sp>
       <p:sp>
         <p:nvSpPr>
-          <p:cNvPr id="547" name=""/>
+          <p:cNvPr id="545" name=""/>
           <p:cNvSpPr txBox="1"/>
           <p:nvPr/>
         </p:nvSpPr>
         <p:spPr>
           <a:xfrm>
-            <a:off x="1149480" y="4816800"/>
+            <a:off x="1149480" y="4378680"/>
             <a:ext cx="171360" cy="171000"/>
           </a:xfrm>
           <a:prstGeom prst="rect">
@@ -16564,13 +16192,13 @@
       </p:sp>
       <p:sp>
         <p:nvSpPr>
-          <p:cNvPr id="548" name=""/>
+          <p:cNvPr id="546" name=""/>
           <p:cNvSpPr txBox="1"/>
           <p:nvPr/>
         </p:nvSpPr>
         <p:spPr>
           <a:xfrm>
-            <a:off x="1320840" y="4808880"/>
+            <a:off x="1320840" y="4370760"/>
             <a:ext cx="171000" cy="200160"/>
           </a:xfrm>
           <a:prstGeom prst="rect">
@@ -16612,13 +16240,13 @@
       </p:sp>
       <p:sp>
         <p:nvSpPr>
-          <p:cNvPr id="549" name=""/>
+          <p:cNvPr id="547" name=""/>
           <p:cNvSpPr txBox="1"/>
           <p:nvPr/>
         </p:nvSpPr>
         <p:spPr>
           <a:xfrm>
-            <a:off x="1622520" y="4808880"/>
+            <a:off x="1622520" y="4370760"/>
             <a:ext cx="333000" cy="200160"/>
           </a:xfrm>
           <a:prstGeom prst="rect">
@@ -16660,13 +16288,13 @@
       </p:sp>
       <p:sp>
         <p:nvSpPr>
-          <p:cNvPr id="550" name=""/>
+          <p:cNvPr id="548" name=""/>
           <p:cNvSpPr txBox="1"/>
           <p:nvPr/>
         </p:nvSpPr>
         <p:spPr>
           <a:xfrm>
-            <a:off x="2244960" y="4808880"/>
+            <a:off x="2244960" y="4370760"/>
             <a:ext cx="333000" cy="200160"/>
           </a:xfrm>
           <a:prstGeom prst="rect">
@@ -16708,13 +16336,13 @@
       </p:sp>
       <p:sp>
         <p:nvSpPr>
-          <p:cNvPr id="551" name=""/>
+          <p:cNvPr id="549" name=""/>
           <p:cNvSpPr txBox="1"/>
           <p:nvPr/>
         </p:nvSpPr>
         <p:spPr>
           <a:xfrm>
-            <a:off x="3016440" y="4808880"/>
+            <a:off x="3016440" y="4370760"/>
             <a:ext cx="237960" cy="200160"/>
           </a:xfrm>
           <a:prstGeom prst="rect">
@@ -16756,13 +16384,13 @@
       </p:sp>
       <p:sp>
         <p:nvSpPr>
-          <p:cNvPr id="552" name=""/>
+          <p:cNvPr id="550" name=""/>
           <p:cNvSpPr txBox="1"/>
           <p:nvPr/>
         </p:nvSpPr>
         <p:spPr>
           <a:xfrm>
-            <a:off x="3623400" y="4816800"/>
+            <a:off x="3623400" y="4378680"/>
             <a:ext cx="342000" cy="171000"/>
           </a:xfrm>
           <a:prstGeom prst="rect">
@@ -16804,13 +16432,13 @@
       </p:sp>
       <p:sp>
         <p:nvSpPr>
-          <p:cNvPr id="553" name=""/>
+          <p:cNvPr id="551" name=""/>
           <p:cNvSpPr txBox="1"/>
           <p:nvPr/>
         </p:nvSpPr>
         <p:spPr>
           <a:xfrm>
-            <a:off x="4223520" y="4808880"/>
+            <a:off x="4223520" y="4370760"/>
             <a:ext cx="333000" cy="200160"/>
           </a:xfrm>
           <a:prstGeom prst="rect">
@@ -16852,13 +16480,13 @@
       </p:sp>
       <p:sp>
         <p:nvSpPr>
-          <p:cNvPr id="554" name=""/>
+          <p:cNvPr id="552" name=""/>
           <p:cNvSpPr txBox="1"/>
           <p:nvPr/>
         </p:nvSpPr>
         <p:spPr>
           <a:xfrm>
-            <a:off x="4814280" y="4808880"/>
+            <a:off x="4814280" y="4370760"/>
             <a:ext cx="333000" cy="200160"/>
           </a:xfrm>
           <a:prstGeom prst="rect">
@@ -16900,13 +16528,13 @@
       </p:sp>
       <p:sp>
         <p:nvSpPr>
-          <p:cNvPr id="555" name=""/>
+          <p:cNvPr id="553" name=""/>
           <p:cNvSpPr txBox="1"/>
           <p:nvPr/>
         </p:nvSpPr>
         <p:spPr>
           <a:xfrm>
-            <a:off x="666720" y="5189760"/>
+            <a:off x="666720" y="4751640"/>
             <a:ext cx="481320" cy="200160"/>
           </a:xfrm>
           <a:prstGeom prst="rect">
@@ -16948,13 +16576,13 @@
       </p:sp>
       <p:sp>
         <p:nvSpPr>
-          <p:cNvPr id="556" name=""/>
+          <p:cNvPr id="554" name=""/>
           <p:cNvSpPr txBox="1"/>
           <p:nvPr/>
         </p:nvSpPr>
         <p:spPr>
           <a:xfrm>
-            <a:off x="1149480" y="5198040"/>
+            <a:off x="1149480" y="4759560"/>
             <a:ext cx="171360" cy="171000"/>
           </a:xfrm>
           <a:prstGeom prst="rect">
@@ -16996,13 +16624,13 @@
       </p:sp>
       <p:sp>
         <p:nvSpPr>
-          <p:cNvPr id="557" name=""/>
+          <p:cNvPr id="555" name=""/>
           <p:cNvSpPr txBox="1"/>
           <p:nvPr/>
         </p:nvSpPr>
         <p:spPr>
           <a:xfrm>
-            <a:off x="1320840" y="5189760"/>
+            <a:off x="1320840" y="4751640"/>
             <a:ext cx="171000" cy="200160"/>
           </a:xfrm>
           <a:prstGeom prst="rect">
@@ -17044,13 +16672,13 @@
       </p:sp>
       <p:sp>
         <p:nvSpPr>
-          <p:cNvPr id="558" name=""/>
+          <p:cNvPr id="556" name=""/>
           <p:cNvSpPr txBox="1"/>
           <p:nvPr/>
         </p:nvSpPr>
         <p:spPr>
           <a:xfrm>
-            <a:off x="1622520" y="5189760"/>
+            <a:off x="1622520" y="4751640"/>
             <a:ext cx="333000" cy="200160"/>
           </a:xfrm>
           <a:prstGeom prst="rect">
@@ -17092,13 +16720,13 @@
       </p:sp>
       <p:sp>
         <p:nvSpPr>
-          <p:cNvPr id="559" name=""/>
+          <p:cNvPr id="557" name=""/>
           <p:cNvSpPr txBox="1"/>
           <p:nvPr/>
         </p:nvSpPr>
         <p:spPr>
           <a:xfrm>
-            <a:off x="2244960" y="5189760"/>
+            <a:off x="2244960" y="4751640"/>
             <a:ext cx="333000" cy="200160"/>
           </a:xfrm>
           <a:prstGeom prst="rect">
@@ -17140,13 +16768,13 @@
       </p:sp>
       <p:sp>
         <p:nvSpPr>
-          <p:cNvPr id="560" name=""/>
+          <p:cNvPr id="558" name=""/>
           <p:cNvSpPr txBox="1"/>
           <p:nvPr/>
         </p:nvSpPr>
         <p:spPr>
           <a:xfrm>
-            <a:off x="3016440" y="5189760"/>
+            <a:off x="3016440" y="4751640"/>
             <a:ext cx="237960" cy="200160"/>
           </a:xfrm>
           <a:prstGeom prst="rect">
@@ -17188,13 +16816,13 @@
       </p:sp>
       <p:sp>
         <p:nvSpPr>
-          <p:cNvPr id="561" name=""/>
+          <p:cNvPr id="559" name=""/>
           <p:cNvSpPr txBox="1"/>
           <p:nvPr/>
         </p:nvSpPr>
         <p:spPr>
           <a:xfrm>
-            <a:off x="3623400" y="5198040"/>
+            <a:off x="3623400" y="4759560"/>
             <a:ext cx="342000" cy="171000"/>
           </a:xfrm>
           <a:prstGeom prst="rect">
@@ -17236,13 +16864,13 @@
       </p:sp>
       <p:sp>
         <p:nvSpPr>
-          <p:cNvPr id="562" name=""/>
+          <p:cNvPr id="560" name=""/>
           <p:cNvSpPr txBox="1"/>
           <p:nvPr/>
         </p:nvSpPr>
         <p:spPr>
           <a:xfrm>
-            <a:off x="4223520" y="5189760"/>
+            <a:off x="4223520" y="4751640"/>
             <a:ext cx="333000" cy="200160"/>
           </a:xfrm>
           <a:prstGeom prst="rect">
@@ -17284,13 +16912,13 @@
       </p:sp>
       <p:sp>
         <p:nvSpPr>
-          <p:cNvPr id="563" name=""/>
+          <p:cNvPr id="561" name=""/>
           <p:cNvSpPr txBox="1"/>
           <p:nvPr/>
         </p:nvSpPr>
         <p:spPr>
           <a:xfrm>
-            <a:off x="4814280" y="5189760"/>
+            <a:off x="4814280" y="4751640"/>
             <a:ext cx="333000" cy="200160"/>
           </a:xfrm>
           <a:prstGeom prst="rect">
@@ -17332,13 +16960,13 @@
       </p:sp>
       <p:sp>
         <p:nvSpPr>
-          <p:cNvPr id="564" name=""/>
+          <p:cNvPr id="562" name=""/>
           <p:cNvSpPr txBox="1"/>
           <p:nvPr/>
         </p:nvSpPr>
         <p:spPr>
           <a:xfrm>
-            <a:off x="533520" y="5657040"/>
+            <a:off x="533520" y="5218920"/>
             <a:ext cx="381600" cy="191160"/>
           </a:xfrm>
           <a:prstGeom prst="rect">
@@ -17380,13 +17008,13 @@
       </p:sp>
       <p:sp>
         <p:nvSpPr>
-          <p:cNvPr id="565" name=""/>
+          <p:cNvPr id="563" name=""/>
           <p:cNvSpPr txBox="1"/>
           <p:nvPr/>
         </p:nvSpPr>
         <p:spPr>
           <a:xfrm>
-            <a:off x="914400" y="5648040"/>
+            <a:off x="914400" y="5209920"/>
             <a:ext cx="1158120" cy="222840"/>
           </a:xfrm>
           <a:prstGeom prst="rect">
@@ -17428,13 +17056,13 @@
       </p:sp>
       <p:sp>
         <p:nvSpPr>
-          <p:cNvPr id="566" name=""/>
+          <p:cNvPr id="564" name=""/>
           <p:cNvSpPr txBox="1"/>
           <p:nvPr/>
         </p:nvSpPr>
         <p:spPr>
           <a:xfrm>
-            <a:off x="2071800" y="5657040"/>
+            <a:off x="2071800" y="5218920"/>
             <a:ext cx="191160" cy="191160"/>
           </a:xfrm>
           <a:prstGeom prst="rect">
@@ -17476,13 +17104,13 @@
       </p:sp>
       <p:sp>
         <p:nvSpPr>
-          <p:cNvPr id="567" name=""/>
+          <p:cNvPr id="565" name=""/>
           <p:cNvSpPr txBox="1"/>
           <p:nvPr/>
         </p:nvSpPr>
         <p:spPr>
           <a:xfrm>
-            <a:off x="2262240" y="5648040"/>
+            <a:off x="2262240" y="5209920"/>
             <a:ext cx="586440" cy="222840"/>
           </a:xfrm>
           <a:prstGeom prst="rect">
@@ -17524,13 +17152,13 @@
       </p:sp>
       <p:sp>
         <p:nvSpPr>
-          <p:cNvPr id="568" name=""/>
+          <p:cNvPr id="566" name=""/>
           <p:cNvSpPr txBox="1"/>
           <p:nvPr/>
         </p:nvSpPr>
         <p:spPr>
           <a:xfrm>
-            <a:off x="2847960" y="5657040"/>
+            <a:off x="2847960" y="5218920"/>
             <a:ext cx="191160" cy="191160"/>
           </a:xfrm>
           <a:prstGeom prst="rect">
@@ -17572,13 +17200,13 @@
       </p:sp>
       <p:sp>
         <p:nvSpPr>
-          <p:cNvPr id="569" name=""/>
+          <p:cNvPr id="567" name=""/>
           <p:cNvSpPr txBox="1"/>
           <p:nvPr/>
         </p:nvSpPr>
         <p:spPr>
           <a:xfrm>
-            <a:off x="3038400" y="5648040"/>
+            <a:off x="3038400" y="5209920"/>
             <a:ext cx="1059480" cy="222840"/>
           </a:xfrm>
           <a:prstGeom prst="rect">
@@ -17620,13 +17248,13 @@
       </p:sp>
       <p:sp>
         <p:nvSpPr>
-          <p:cNvPr id="570" name=""/>
+          <p:cNvPr id="568" name=""/>
           <p:cNvSpPr txBox="1"/>
           <p:nvPr/>
         </p:nvSpPr>
         <p:spPr>
           <a:xfrm>
-            <a:off x="4096800" y="5657040"/>
+            <a:off x="4096800" y="5218920"/>
             <a:ext cx="762840" cy="191160"/>
           </a:xfrm>
           <a:prstGeom prst="rect">
@@ -17668,13 +17296,13 @@
       </p:sp>
       <p:sp>
         <p:nvSpPr>
-          <p:cNvPr id="571" name=""/>
+          <p:cNvPr id="569" name=""/>
           <p:cNvSpPr txBox="1"/>
           <p:nvPr/>
         </p:nvSpPr>
         <p:spPr>
           <a:xfrm>
-            <a:off x="4849200" y="5648040"/>
+            <a:off x="4849200" y="5209920"/>
             <a:ext cx="830160" cy="222840"/>
           </a:xfrm>
           <a:prstGeom prst="rect">
@@ -17716,13 +17344,13 @@
       </p:sp>
       <p:sp>
         <p:nvSpPr>
-          <p:cNvPr id="572" name=""/>
+          <p:cNvPr id="570" name=""/>
           <p:cNvSpPr txBox="1"/>
           <p:nvPr/>
         </p:nvSpPr>
         <p:spPr>
           <a:xfrm>
-            <a:off x="533520" y="5933520"/>
+            <a:off x="533520" y="5495400"/>
             <a:ext cx="794520" cy="222840"/>
           </a:xfrm>
           <a:prstGeom prst="rect">
@@ -17764,13 +17392,13 @@
       </p:sp>
       <p:sp>
         <p:nvSpPr>
-          <p:cNvPr id="573" name=""/>
+          <p:cNvPr id="571" name=""/>
           <p:cNvSpPr txBox="1"/>
           <p:nvPr/>
         </p:nvSpPr>
         <p:spPr>
           <a:xfrm>
-            <a:off x="1323720" y="5942520"/>
+            <a:off x="1323720" y="5504400"/>
             <a:ext cx="191160" cy="191160"/>
           </a:xfrm>
           <a:prstGeom prst="rect">
@@ -17812,13 +17440,13 @@
       </p:sp>
       <p:sp>
         <p:nvSpPr>
-          <p:cNvPr id="574" name=""/>
+          <p:cNvPr id="572" name=""/>
           <p:cNvSpPr txBox="1"/>
           <p:nvPr/>
         </p:nvSpPr>
         <p:spPr>
           <a:xfrm>
-            <a:off x="1514160" y="5933520"/>
+            <a:off x="1514160" y="5495400"/>
             <a:ext cx="1695960" cy="222840"/>
           </a:xfrm>
           <a:prstGeom prst="rect">
@@ -17860,7 +17488,7 @@
       </p:sp>
       <p:pic>
         <p:nvPicPr>
-          <p:cNvPr id="575" name=""/>
+          <p:cNvPr id="573" name=""/>
           <p:cNvPicPr/>
           <p:nvPr/>
         </p:nvPicPr>
@@ -17871,7 +17499,7 @@
         <p:spPr>
           <a:xfrm>
             <a:off x="6210360" y="1266840"/>
-            <a:ext cx="5447880" cy="1676160"/>
+            <a:ext cx="5447880" cy="3428640"/>
           </a:xfrm>
           <a:prstGeom prst="rect">
             <a:avLst/>
@@ -17884,13 +17512,13 @@
       </p:pic>
       <p:sp>
         <p:nvSpPr>
-          <p:cNvPr id="576" name=""/>
+          <p:cNvPr id="574" name=""/>
           <p:cNvSpPr txBox="1"/>
           <p:nvPr/>
         </p:nvSpPr>
         <p:spPr>
           <a:xfrm>
-            <a:off x="3209400" y="5942520"/>
+            <a:off x="3209400" y="5504400"/>
             <a:ext cx="381600" cy="191160"/>
           </a:xfrm>
           <a:prstGeom prst="rect">
@@ -17932,13 +17560,13 @@
       </p:sp>
       <p:sp>
         <p:nvSpPr>
-          <p:cNvPr id="577" name=""/>
+          <p:cNvPr id="575" name=""/>
           <p:cNvSpPr txBox="1"/>
           <p:nvPr/>
         </p:nvSpPr>
         <p:spPr>
           <a:xfrm>
-            <a:off x="723960" y="6617880"/>
+            <a:off x="723960" y="6179760"/>
             <a:ext cx="5259960" cy="181800"/>
           </a:xfrm>
           <a:prstGeom prst="rect">
@@ -17980,7 +17608,7 @@
       </p:sp>
       <p:sp>
         <p:nvSpPr>
-          <p:cNvPr id="578" name=""/>
+          <p:cNvPr id="576" name=""/>
           <p:cNvSpPr txBox="1"/>
           <p:nvPr/>
         </p:nvSpPr>
@@ -18058,7 +17686,7 @@
       </p:grpSpPr>
       <p:sp>
         <p:nvSpPr>
-          <p:cNvPr id="579" name=""/>
+          <p:cNvPr id="577" name=""/>
           <p:cNvSpPr/>
           <p:nvPr/>
         </p:nvSpPr>
@@ -18118,7 +17746,7 @@
       </p:sp>
       <p:sp>
         <p:nvSpPr>
-          <p:cNvPr id="580" name=""/>
+          <p:cNvPr id="578" name=""/>
           <p:cNvSpPr/>
           <p:nvPr/>
         </p:nvSpPr>
@@ -18178,7 +17806,7 @@
       </p:sp>
       <p:sp>
         <p:nvSpPr>
-          <p:cNvPr id="581" name=""/>
+          <p:cNvPr id="579" name=""/>
           <p:cNvSpPr/>
           <p:nvPr/>
         </p:nvSpPr>
@@ -18238,7 +17866,7 @@
       </p:sp>
       <p:sp>
         <p:nvSpPr>
-          <p:cNvPr id="582" name=""/>
+          <p:cNvPr id="580" name=""/>
           <p:cNvSpPr/>
           <p:nvPr/>
         </p:nvSpPr>
@@ -18298,7 +17926,7 @@
       </p:sp>
       <p:sp>
         <p:nvSpPr>
-          <p:cNvPr id="583" name=""/>
+          <p:cNvPr id="581" name=""/>
           <p:cNvSpPr/>
           <p:nvPr/>
         </p:nvSpPr>
@@ -18398,7 +18026,7 @@
       </p:sp>
       <p:sp>
         <p:nvSpPr>
-          <p:cNvPr id="584" name=""/>
+          <p:cNvPr id="582" name=""/>
           <p:cNvSpPr/>
           <p:nvPr/>
         </p:nvSpPr>
@@ -18458,7 +18086,7 @@
       </p:sp>
       <p:sp>
         <p:nvSpPr>
-          <p:cNvPr id="585" name=""/>
+          <p:cNvPr id="583" name=""/>
           <p:cNvSpPr/>
           <p:nvPr/>
         </p:nvSpPr>
@@ -18586,7 +18214,7 @@
       </p:sp>
       <p:sp>
         <p:nvSpPr>
-          <p:cNvPr id="586" name=""/>
+          <p:cNvPr id="584" name=""/>
           <p:cNvSpPr txBox="1"/>
           <p:nvPr/>
         </p:nvSpPr>
@@ -18634,7 +18262,7 @@
       </p:sp>
       <p:sp>
         <p:nvSpPr>
-          <p:cNvPr id="587" name=""/>
+          <p:cNvPr id="585" name=""/>
           <p:cNvSpPr txBox="1"/>
           <p:nvPr/>
         </p:nvSpPr>
@@ -18682,7 +18310,7 @@
       </p:sp>
       <p:sp>
         <p:nvSpPr>
-          <p:cNvPr id="588" name=""/>
+          <p:cNvPr id="586" name=""/>
           <p:cNvSpPr txBox="1"/>
           <p:nvPr/>
         </p:nvSpPr>
@@ -18730,7 +18358,7 @@
       </p:sp>
       <p:sp>
         <p:nvSpPr>
-          <p:cNvPr id="589" name=""/>
+          <p:cNvPr id="587" name=""/>
           <p:cNvSpPr/>
           <p:nvPr/>
         </p:nvSpPr>
@@ -18858,7 +18486,7 @@
       </p:sp>
       <p:sp>
         <p:nvSpPr>
-          <p:cNvPr id="590" name=""/>
+          <p:cNvPr id="588" name=""/>
           <p:cNvSpPr txBox="1"/>
           <p:nvPr/>
         </p:nvSpPr>
@@ -18906,7 +18534,7 @@
       </p:sp>
       <p:sp>
         <p:nvSpPr>
-          <p:cNvPr id="591" name=""/>
+          <p:cNvPr id="589" name=""/>
           <p:cNvSpPr txBox="1"/>
           <p:nvPr/>
         </p:nvSpPr>
@@ -18954,7 +18582,7 @@
       </p:sp>
       <p:sp>
         <p:nvSpPr>
-          <p:cNvPr id="592" name=""/>
+          <p:cNvPr id="590" name=""/>
           <p:cNvSpPr txBox="1"/>
           <p:nvPr/>
         </p:nvSpPr>
@@ -19002,7 +18630,7 @@
       </p:sp>
       <p:sp>
         <p:nvSpPr>
-          <p:cNvPr id="593" name=""/>
+          <p:cNvPr id="591" name=""/>
           <p:cNvSpPr/>
           <p:nvPr/>
         </p:nvSpPr>
@@ -19130,7 +18758,7 @@
       </p:sp>
       <p:sp>
         <p:nvSpPr>
-          <p:cNvPr id="594" name=""/>
+          <p:cNvPr id="592" name=""/>
           <p:cNvSpPr txBox="1"/>
           <p:nvPr/>
         </p:nvSpPr>
@@ -19178,7 +18806,7 @@
       </p:sp>
       <p:sp>
         <p:nvSpPr>
-          <p:cNvPr id="595" name=""/>
+          <p:cNvPr id="593" name=""/>
           <p:cNvSpPr txBox="1"/>
           <p:nvPr/>
         </p:nvSpPr>
@@ -19226,7 +18854,7 @@
       </p:sp>
       <p:sp>
         <p:nvSpPr>
-          <p:cNvPr id="596" name=""/>
+          <p:cNvPr id="594" name=""/>
           <p:cNvSpPr/>
           <p:nvPr/>
         </p:nvSpPr>
@@ -19354,7 +18982,7 @@
       </p:sp>
       <p:sp>
         <p:nvSpPr>
-          <p:cNvPr id="597" name=""/>
+          <p:cNvPr id="595" name=""/>
           <p:cNvSpPr txBox="1"/>
           <p:nvPr/>
         </p:nvSpPr>
@@ -19402,7 +19030,7 @@
       </p:sp>
       <p:sp>
         <p:nvSpPr>
-          <p:cNvPr id="598" name=""/>
+          <p:cNvPr id="596" name=""/>
           <p:cNvSpPr txBox="1"/>
           <p:nvPr/>
         </p:nvSpPr>
@@ -19450,7 +19078,7 @@
       </p:sp>
       <p:sp>
         <p:nvSpPr>
-          <p:cNvPr id="599" name=""/>
+          <p:cNvPr id="597" name=""/>
           <p:cNvSpPr txBox="1"/>
           <p:nvPr/>
         </p:nvSpPr>
@@ -19498,7 +19126,7 @@
       </p:sp>
       <p:sp>
         <p:nvSpPr>
-          <p:cNvPr id="600" name=""/>
+          <p:cNvPr id="598" name=""/>
           <p:cNvSpPr txBox="1"/>
           <p:nvPr/>
         </p:nvSpPr>
@@ -19576,7 +19204,7 @@
       </p:grpSpPr>
       <p:sp>
         <p:nvSpPr>
-          <p:cNvPr id="601" name=""/>
+          <p:cNvPr id="599" name=""/>
           <p:cNvSpPr/>
           <p:nvPr/>
         </p:nvSpPr>
@@ -19636,7 +19264,7 @@
       </p:sp>
       <p:sp>
         <p:nvSpPr>
-          <p:cNvPr id="602" name=""/>
+          <p:cNvPr id="600" name=""/>
           <p:cNvSpPr/>
           <p:nvPr/>
         </p:nvSpPr>
@@ -19696,7 +19324,7 @@
       </p:sp>
       <p:sp>
         <p:nvSpPr>
-          <p:cNvPr id="603" name=""/>
+          <p:cNvPr id="601" name=""/>
           <p:cNvSpPr/>
           <p:nvPr/>
         </p:nvSpPr>
@@ -19756,7 +19384,7 @@
       </p:sp>
       <p:sp>
         <p:nvSpPr>
-          <p:cNvPr id="604" name=""/>
+          <p:cNvPr id="602" name=""/>
           <p:cNvSpPr/>
           <p:nvPr/>
         </p:nvSpPr>
@@ -19816,7 +19444,7 @@
       </p:sp>
       <p:sp>
         <p:nvSpPr>
-          <p:cNvPr id="605" name=""/>
+          <p:cNvPr id="603" name=""/>
           <p:cNvSpPr/>
           <p:nvPr/>
         </p:nvSpPr>
@@ -19944,7 +19572,7 @@
       </p:sp>
       <p:sp>
         <p:nvSpPr>
-          <p:cNvPr id="606" name=""/>
+          <p:cNvPr id="604" name=""/>
           <p:cNvSpPr txBox="1"/>
           <p:nvPr/>
         </p:nvSpPr>
@@ -19992,7 +19620,7 @@
       </p:sp>
       <p:sp>
         <p:nvSpPr>
-          <p:cNvPr id="607" name=""/>
+          <p:cNvPr id="605" name=""/>
           <p:cNvSpPr/>
           <p:nvPr/>
         </p:nvSpPr>
@@ -20120,7 +19748,7 @@
       </p:sp>
       <p:sp>
         <p:nvSpPr>
-          <p:cNvPr id="608" name=""/>
+          <p:cNvPr id="606" name=""/>
           <p:cNvSpPr txBox="1"/>
           <p:nvPr/>
         </p:nvSpPr>
@@ -20168,7 +19796,7 @@
       </p:sp>
       <p:sp>
         <p:nvSpPr>
-          <p:cNvPr id="609" name=""/>
+          <p:cNvPr id="607" name=""/>
           <p:cNvSpPr txBox="1"/>
           <p:nvPr/>
         </p:nvSpPr>
@@ -20216,7 +19844,7 @@
       </p:sp>
       <p:sp>
         <p:nvSpPr>
-          <p:cNvPr id="610" name=""/>
+          <p:cNvPr id="608" name=""/>
           <p:cNvSpPr txBox="1"/>
           <p:nvPr/>
         </p:nvSpPr>
@@ -20264,7 +19892,7 @@
       </p:sp>
       <p:sp>
         <p:nvSpPr>
-          <p:cNvPr id="611" name=""/>
+          <p:cNvPr id="609" name=""/>
           <p:cNvSpPr/>
           <p:nvPr/>
         </p:nvSpPr>
@@ -20392,7 +20020,7 @@
       </p:sp>
       <p:sp>
         <p:nvSpPr>
-          <p:cNvPr id="612" name=""/>
+          <p:cNvPr id="610" name=""/>
           <p:cNvSpPr txBox="1"/>
           <p:nvPr/>
         </p:nvSpPr>
@@ -20440,7 +20068,7 @@
       </p:sp>
       <p:sp>
         <p:nvSpPr>
-          <p:cNvPr id="613" name=""/>
+          <p:cNvPr id="611" name=""/>
           <p:cNvSpPr txBox="1"/>
           <p:nvPr/>
         </p:nvSpPr>
@@ -20488,7 +20116,7 @@
       </p:sp>
       <p:sp>
         <p:nvSpPr>
-          <p:cNvPr id="614" name=""/>
+          <p:cNvPr id="612" name=""/>
           <p:cNvSpPr txBox="1"/>
           <p:nvPr/>
         </p:nvSpPr>
@@ -20536,7 +20164,7 @@
       </p:sp>
       <p:sp>
         <p:nvSpPr>
-          <p:cNvPr id="615" name=""/>
+          <p:cNvPr id="613" name=""/>
           <p:cNvSpPr txBox="1"/>
           <p:nvPr/>
         </p:nvSpPr>
@@ -20584,7 +20212,7 @@
       </p:sp>
       <p:sp>
         <p:nvSpPr>
-          <p:cNvPr id="616" name=""/>
+          <p:cNvPr id="614" name=""/>
           <p:cNvSpPr txBox="1"/>
           <p:nvPr/>
         </p:nvSpPr>

--- a/slides/2026-07-01-ai-projects-intro.pptx
+++ b/slides/2026-07-01-ai-projects-intro.pptx
@@ -7265,9 +7265,57 @@
           </a:p>
         </p:txBody>
       </p:sp>
-      <p:sp>
-        <p:nvSpPr>
+      <p:pic>
+        <p:nvPicPr>
           <p:cNvPr id="391" name=""/>
+          <p:cNvPicPr/>
+          <p:nvPr/>
+        </p:nvPicPr>
+        <p:blipFill>
+          <a:blip r:embed="rId1"/>
+          <a:stretch/>
+        </p:blipFill>
+        <p:spPr>
+          <a:xfrm>
+            <a:off x="7829640" y="1276200"/>
+            <a:ext cx="2209320" cy="2190240"/>
+          </a:xfrm>
+          <a:prstGeom prst="rect">
+            <a:avLst/>
+          </a:prstGeom>
+          <a:noFill/>
+          <a:ln w="0">
+            <a:noFill/>
+          </a:ln>
+        </p:spPr>
+      </p:pic>
+      <p:pic>
+        <p:nvPicPr>
+          <p:cNvPr id="392" name=""/>
+          <p:cNvPicPr/>
+          <p:nvPr/>
+        </p:nvPicPr>
+        <p:blipFill>
+          <a:blip r:embed="rId2"/>
+          <a:stretch/>
+        </p:blipFill>
+        <p:spPr>
+          <a:xfrm>
+            <a:off x="7058160" y="3695760"/>
+            <a:ext cx="3752640" cy="2190240"/>
+          </a:xfrm>
+          <a:prstGeom prst="rect">
+            <a:avLst/>
+          </a:prstGeom>
+          <a:noFill/>
+          <a:ln w="0">
+            <a:noFill/>
+          </a:ln>
+        </p:spPr>
+      </p:pic>
+      <p:sp>
+        <p:nvSpPr>
+          <p:cNvPr id="393" name=""/>
           <p:cNvSpPr txBox="1"/>
           <p:nvPr/>
         </p:nvSpPr>
@@ -7315,7 +7363,7 @@
       </p:sp>
       <p:sp>
         <p:nvSpPr>
-          <p:cNvPr id="392" name=""/>
+          <p:cNvPr id="394" name=""/>
           <p:cNvSpPr txBox="1"/>
           <p:nvPr/>
         </p:nvSpPr>
@@ -7393,7 +7441,7 @@
       </p:grpSpPr>
       <p:sp>
         <p:nvSpPr>
-          <p:cNvPr id="393" name=""/>
+          <p:cNvPr id="395" name=""/>
           <p:cNvSpPr/>
           <p:nvPr/>
         </p:nvSpPr>
@@ -7453,7 +7501,7 @@
       </p:sp>
       <p:sp>
         <p:nvSpPr>
-          <p:cNvPr id="394" name=""/>
+          <p:cNvPr id="396" name=""/>
           <p:cNvSpPr/>
           <p:nvPr/>
         </p:nvSpPr>
@@ -7513,7 +7561,7 @@
       </p:sp>
       <p:sp>
         <p:nvSpPr>
-          <p:cNvPr id="395" name=""/>
+          <p:cNvPr id="397" name=""/>
           <p:cNvSpPr/>
           <p:nvPr/>
         </p:nvSpPr>
@@ -7573,7 +7621,7 @@
       </p:sp>
       <p:sp>
         <p:nvSpPr>
-          <p:cNvPr id="396" name=""/>
+          <p:cNvPr id="398" name=""/>
           <p:cNvSpPr/>
           <p:nvPr/>
         </p:nvSpPr>
@@ -7633,7 +7681,7 @@
       </p:sp>
       <p:sp>
         <p:nvSpPr>
-          <p:cNvPr id="397" name=""/>
+          <p:cNvPr id="399" name=""/>
           <p:cNvSpPr/>
           <p:nvPr/>
         </p:nvSpPr>
@@ -7733,7 +7781,7 @@
       </p:sp>
       <p:sp>
         <p:nvSpPr>
-          <p:cNvPr id="398" name=""/>
+          <p:cNvPr id="400" name=""/>
           <p:cNvSpPr/>
           <p:nvPr/>
         </p:nvSpPr>
@@ -7793,7 +7841,7 @@
       </p:sp>
       <p:sp>
         <p:nvSpPr>
-          <p:cNvPr id="399" name=""/>
+          <p:cNvPr id="401" name=""/>
           <p:cNvSpPr txBox="1"/>
           <p:nvPr/>
         </p:nvSpPr>
@@ -7841,7 +7889,7 @@
       </p:sp>
       <p:sp>
         <p:nvSpPr>
-          <p:cNvPr id="400" name=""/>
+          <p:cNvPr id="402" name=""/>
           <p:cNvSpPr txBox="1"/>
           <p:nvPr/>
         </p:nvSpPr>
@@ -7889,7 +7937,7 @@
       </p:sp>
       <p:sp>
         <p:nvSpPr>
-          <p:cNvPr id="401" name=""/>
+          <p:cNvPr id="403" name=""/>
           <p:cNvSpPr txBox="1"/>
           <p:nvPr/>
         </p:nvSpPr>
@@ -7937,7 +7985,7 @@
       </p:sp>
       <p:sp>
         <p:nvSpPr>
-          <p:cNvPr id="402" name=""/>
+          <p:cNvPr id="404" name=""/>
           <p:cNvSpPr/>
           <p:nvPr/>
         </p:nvSpPr>
@@ -7997,7 +8045,7 @@
       </p:sp>
       <p:sp>
         <p:nvSpPr>
-          <p:cNvPr id="403" name=""/>
+          <p:cNvPr id="405" name=""/>
           <p:cNvSpPr/>
           <p:nvPr/>
         </p:nvSpPr>
@@ -8057,7 +8105,7 @@
       </p:sp>
       <p:sp>
         <p:nvSpPr>
-          <p:cNvPr id="404" name=""/>
+          <p:cNvPr id="406" name=""/>
           <p:cNvSpPr/>
           <p:nvPr/>
         </p:nvSpPr>
@@ -8117,7 +8165,7 @@
       </p:sp>
       <p:sp>
         <p:nvSpPr>
-          <p:cNvPr id="405" name=""/>
+          <p:cNvPr id="407" name=""/>
           <p:cNvSpPr/>
           <p:nvPr/>
         </p:nvSpPr>
@@ -8177,7 +8225,7 @@
       </p:sp>
       <p:sp>
         <p:nvSpPr>
-          <p:cNvPr id="406" name=""/>
+          <p:cNvPr id="408" name=""/>
           <p:cNvSpPr/>
           <p:nvPr/>
         </p:nvSpPr>
@@ -8237,7 +8285,7 @@
       </p:sp>
       <p:sp>
         <p:nvSpPr>
-          <p:cNvPr id="407" name=""/>
+          <p:cNvPr id="409" name=""/>
           <p:cNvSpPr/>
           <p:nvPr/>
         </p:nvSpPr>
@@ -8297,7 +8345,7 @@
       </p:sp>
       <p:sp>
         <p:nvSpPr>
-          <p:cNvPr id="408" name=""/>
+          <p:cNvPr id="410" name=""/>
           <p:cNvSpPr/>
           <p:nvPr/>
         </p:nvSpPr>
@@ -8357,7 +8405,7 @@
       </p:sp>
       <p:sp>
         <p:nvSpPr>
-          <p:cNvPr id="409" name=""/>
+          <p:cNvPr id="411" name=""/>
           <p:cNvSpPr/>
           <p:nvPr/>
         </p:nvSpPr>
@@ -8417,7 +8465,7 @@
       </p:sp>
       <p:sp>
         <p:nvSpPr>
-          <p:cNvPr id="410" name=""/>
+          <p:cNvPr id="412" name=""/>
           <p:cNvSpPr/>
           <p:nvPr/>
         </p:nvSpPr>
@@ -8477,7 +8525,7 @@
       </p:sp>
       <p:sp>
         <p:nvSpPr>
-          <p:cNvPr id="411" name=""/>
+          <p:cNvPr id="413" name=""/>
           <p:cNvSpPr/>
           <p:nvPr/>
         </p:nvSpPr>
@@ -8537,7 +8585,7 @@
       </p:sp>
       <p:sp>
         <p:nvSpPr>
-          <p:cNvPr id="412" name=""/>
+          <p:cNvPr id="414" name=""/>
           <p:cNvSpPr/>
           <p:nvPr/>
         </p:nvSpPr>
@@ -8597,7 +8645,7 @@
       </p:sp>
       <p:sp>
         <p:nvSpPr>
-          <p:cNvPr id="413" name=""/>
+          <p:cNvPr id="415" name=""/>
           <p:cNvSpPr/>
           <p:nvPr/>
         </p:nvSpPr>
@@ -8657,7 +8705,7 @@
       </p:sp>
       <p:sp>
         <p:nvSpPr>
-          <p:cNvPr id="414" name=""/>
+          <p:cNvPr id="416" name=""/>
           <p:cNvSpPr/>
           <p:nvPr/>
         </p:nvSpPr>
@@ -8717,7 +8765,7 @@
       </p:sp>
       <p:sp>
         <p:nvSpPr>
-          <p:cNvPr id="415" name=""/>
+          <p:cNvPr id="417" name=""/>
           <p:cNvSpPr/>
           <p:nvPr/>
         </p:nvSpPr>
@@ -8777,7 +8825,7 @@
       </p:sp>
       <p:sp>
         <p:nvSpPr>
-          <p:cNvPr id="416" name=""/>
+          <p:cNvPr id="418" name=""/>
           <p:cNvSpPr/>
           <p:nvPr/>
         </p:nvSpPr>
@@ -8837,7 +8885,7 @@
       </p:sp>
       <p:sp>
         <p:nvSpPr>
-          <p:cNvPr id="417" name=""/>
+          <p:cNvPr id="419" name=""/>
           <p:cNvSpPr/>
           <p:nvPr/>
         </p:nvSpPr>
@@ -8897,7 +8945,7 @@
       </p:sp>
       <p:sp>
         <p:nvSpPr>
-          <p:cNvPr id="418" name=""/>
+          <p:cNvPr id="420" name=""/>
           <p:cNvSpPr/>
           <p:nvPr/>
         </p:nvSpPr>
@@ -8957,7 +9005,7 @@
       </p:sp>
       <p:sp>
         <p:nvSpPr>
-          <p:cNvPr id="419" name=""/>
+          <p:cNvPr id="421" name=""/>
           <p:cNvSpPr/>
           <p:nvPr/>
         </p:nvSpPr>
@@ -9017,7 +9065,7 @@
       </p:sp>
       <p:sp>
         <p:nvSpPr>
-          <p:cNvPr id="420" name=""/>
+          <p:cNvPr id="422" name=""/>
           <p:cNvSpPr/>
           <p:nvPr/>
         </p:nvSpPr>
@@ -9077,7 +9125,7 @@
       </p:sp>
       <p:sp>
         <p:nvSpPr>
-          <p:cNvPr id="421" name=""/>
+          <p:cNvPr id="423" name=""/>
           <p:cNvSpPr/>
           <p:nvPr/>
         </p:nvSpPr>
@@ -9137,7 +9185,7 @@
       </p:sp>
       <p:sp>
         <p:nvSpPr>
-          <p:cNvPr id="422" name=""/>
+          <p:cNvPr id="424" name=""/>
           <p:cNvSpPr/>
           <p:nvPr/>
         </p:nvSpPr>
@@ -9197,7 +9245,7 @@
       </p:sp>
       <p:sp>
         <p:nvSpPr>
-          <p:cNvPr id="423" name=""/>
+          <p:cNvPr id="425" name=""/>
           <p:cNvSpPr/>
           <p:nvPr/>
         </p:nvSpPr>
@@ -9257,7 +9305,7 @@
       </p:sp>
       <p:sp>
         <p:nvSpPr>
-          <p:cNvPr id="424" name=""/>
+          <p:cNvPr id="426" name=""/>
           <p:cNvSpPr/>
           <p:nvPr/>
         </p:nvSpPr>
@@ -9317,7 +9365,7 @@
       </p:sp>
       <p:sp>
         <p:nvSpPr>
-          <p:cNvPr id="425" name=""/>
+          <p:cNvPr id="427" name=""/>
           <p:cNvSpPr/>
           <p:nvPr/>
         </p:nvSpPr>
@@ -9377,7 +9425,7 @@
       </p:sp>
       <p:sp>
         <p:nvSpPr>
-          <p:cNvPr id="426" name=""/>
+          <p:cNvPr id="428" name=""/>
           <p:cNvSpPr/>
           <p:nvPr/>
         </p:nvSpPr>
@@ -9437,7 +9485,7 @@
       </p:sp>
       <p:sp>
         <p:nvSpPr>
-          <p:cNvPr id="427" name=""/>
+          <p:cNvPr id="429" name=""/>
           <p:cNvSpPr/>
           <p:nvPr/>
         </p:nvSpPr>
@@ -9497,7 +9545,7 @@
       </p:sp>
       <p:sp>
         <p:nvSpPr>
-          <p:cNvPr id="428" name=""/>
+          <p:cNvPr id="430" name=""/>
           <p:cNvSpPr/>
           <p:nvPr/>
         </p:nvSpPr>
@@ -9557,7 +9605,7 @@
       </p:sp>
       <p:sp>
         <p:nvSpPr>
-          <p:cNvPr id="429" name=""/>
+          <p:cNvPr id="431" name=""/>
           <p:cNvSpPr/>
           <p:nvPr/>
         </p:nvSpPr>
@@ -9617,7 +9665,7 @@
       </p:sp>
       <p:sp>
         <p:nvSpPr>
-          <p:cNvPr id="430" name=""/>
+          <p:cNvPr id="432" name=""/>
           <p:cNvSpPr/>
           <p:nvPr/>
         </p:nvSpPr>
@@ -9677,7 +9725,7 @@
       </p:sp>
       <p:sp>
         <p:nvSpPr>
-          <p:cNvPr id="431" name=""/>
+          <p:cNvPr id="433" name=""/>
           <p:cNvSpPr/>
           <p:nvPr/>
         </p:nvSpPr>
@@ -9737,7 +9785,7 @@
       </p:sp>
       <p:sp>
         <p:nvSpPr>
-          <p:cNvPr id="432" name=""/>
+          <p:cNvPr id="434" name=""/>
           <p:cNvSpPr/>
           <p:nvPr/>
         </p:nvSpPr>
@@ -9797,7 +9845,7 @@
       </p:sp>
       <p:sp>
         <p:nvSpPr>
-          <p:cNvPr id="433" name=""/>
+          <p:cNvPr id="435" name=""/>
           <p:cNvSpPr/>
           <p:nvPr/>
         </p:nvSpPr>
@@ -9857,7 +9905,7 @@
       </p:sp>
       <p:sp>
         <p:nvSpPr>
-          <p:cNvPr id="434" name=""/>
+          <p:cNvPr id="436" name=""/>
           <p:cNvSpPr/>
           <p:nvPr/>
         </p:nvSpPr>
@@ -9917,7 +9965,7 @@
       </p:sp>
       <p:sp>
         <p:nvSpPr>
-          <p:cNvPr id="435" name=""/>
+          <p:cNvPr id="437" name=""/>
           <p:cNvSpPr/>
           <p:nvPr/>
         </p:nvSpPr>
@@ -9977,7 +10025,7 @@
       </p:sp>
       <p:sp>
         <p:nvSpPr>
-          <p:cNvPr id="436" name=""/>
+          <p:cNvPr id="438" name=""/>
           <p:cNvSpPr/>
           <p:nvPr/>
         </p:nvSpPr>
@@ -10037,7 +10085,7 @@
       </p:sp>
       <p:sp>
         <p:nvSpPr>
-          <p:cNvPr id="437" name=""/>
+          <p:cNvPr id="439" name=""/>
           <p:cNvSpPr/>
           <p:nvPr/>
         </p:nvSpPr>
@@ -10097,7 +10145,7 @@
       </p:sp>
       <p:sp>
         <p:nvSpPr>
-          <p:cNvPr id="438" name=""/>
+          <p:cNvPr id="440" name=""/>
           <p:cNvSpPr/>
           <p:nvPr/>
         </p:nvSpPr>
@@ -10157,7 +10205,7 @@
       </p:sp>
       <p:sp>
         <p:nvSpPr>
-          <p:cNvPr id="439" name=""/>
+          <p:cNvPr id="441" name=""/>
           <p:cNvSpPr/>
           <p:nvPr/>
         </p:nvSpPr>
@@ -10217,7 +10265,7 @@
       </p:sp>
       <p:sp>
         <p:nvSpPr>
-          <p:cNvPr id="440" name=""/>
+          <p:cNvPr id="442" name=""/>
           <p:cNvSpPr/>
           <p:nvPr/>
         </p:nvSpPr>
@@ -10277,7 +10325,7 @@
       </p:sp>
       <p:sp>
         <p:nvSpPr>
-          <p:cNvPr id="441" name=""/>
+          <p:cNvPr id="443" name=""/>
           <p:cNvSpPr/>
           <p:nvPr/>
         </p:nvSpPr>
@@ -10337,7 +10385,7 @@
       </p:sp>
       <p:sp>
         <p:nvSpPr>
-          <p:cNvPr id="442" name=""/>
+          <p:cNvPr id="444" name=""/>
           <p:cNvSpPr/>
           <p:nvPr/>
         </p:nvSpPr>
@@ -10397,7 +10445,7 @@
       </p:sp>
       <p:sp>
         <p:nvSpPr>
-          <p:cNvPr id="443" name=""/>
+          <p:cNvPr id="445" name=""/>
           <p:cNvSpPr/>
           <p:nvPr/>
         </p:nvSpPr>
@@ -10457,7 +10505,7 @@
       </p:sp>
       <p:sp>
         <p:nvSpPr>
-          <p:cNvPr id="444" name=""/>
+          <p:cNvPr id="446" name=""/>
           <p:cNvSpPr/>
           <p:nvPr/>
         </p:nvSpPr>
@@ -10517,7 +10565,7 @@
       </p:sp>
       <p:sp>
         <p:nvSpPr>
-          <p:cNvPr id="445" name=""/>
+          <p:cNvPr id="447" name=""/>
           <p:cNvSpPr/>
           <p:nvPr/>
         </p:nvSpPr>
@@ -10577,7 +10625,7 @@
       </p:sp>
       <p:sp>
         <p:nvSpPr>
-          <p:cNvPr id="446" name=""/>
+          <p:cNvPr id="448" name=""/>
           <p:cNvSpPr/>
           <p:nvPr/>
         </p:nvSpPr>
@@ -10637,7 +10685,7 @@
       </p:sp>
       <p:sp>
         <p:nvSpPr>
-          <p:cNvPr id="447" name=""/>
+          <p:cNvPr id="449" name=""/>
           <p:cNvSpPr/>
           <p:nvPr/>
         </p:nvSpPr>
@@ -10697,7 +10745,7 @@
       </p:sp>
       <p:sp>
         <p:nvSpPr>
-          <p:cNvPr id="448" name=""/>
+          <p:cNvPr id="450" name=""/>
           <p:cNvSpPr/>
           <p:nvPr/>
         </p:nvSpPr>
@@ -10757,7 +10805,7 @@
       </p:sp>
       <p:sp>
         <p:nvSpPr>
-          <p:cNvPr id="449" name=""/>
+          <p:cNvPr id="451" name=""/>
           <p:cNvSpPr/>
           <p:nvPr/>
         </p:nvSpPr>
@@ -10817,7 +10865,7 @@
       </p:sp>
       <p:sp>
         <p:nvSpPr>
-          <p:cNvPr id="450" name=""/>
+          <p:cNvPr id="452" name=""/>
           <p:cNvSpPr/>
           <p:nvPr/>
         </p:nvSpPr>
@@ -10877,7 +10925,7 @@
       </p:sp>
       <p:sp>
         <p:nvSpPr>
-          <p:cNvPr id="451" name=""/>
+          <p:cNvPr id="453" name=""/>
           <p:cNvSpPr/>
           <p:nvPr/>
         </p:nvSpPr>
@@ -10937,7 +10985,7 @@
       </p:sp>
       <p:sp>
         <p:nvSpPr>
-          <p:cNvPr id="452" name=""/>
+          <p:cNvPr id="454" name=""/>
           <p:cNvSpPr/>
           <p:nvPr/>
         </p:nvSpPr>
@@ -10997,7 +11045,7 @@
       </p:sp>
       <p:sp>
         <p:nvSpPr>
-          <p:cNvPr id="453" name=""/>
+          <p:cNvPr id="455" name=""/>
           <p:cNvSpPr/>
           <p:nvPr/>
         </p:nvSpPr>
@@ -11057,7 +11105,7 @@
       </p:sp>
       <p:sp>
         <p:nvSpPr>
-          <p:cNvPr id="454" name=""/>
+          <p:cNvPr id="456" name=""/>
           <p:cNvSpPr/>
           <p:nvPr/>
         </p:nvSpPr>
@@ -11117,7 +11165,7 @@
       </p:sp>
       <p:sp>
         <p:nvSpPr>
-          <p:cNvPr id="455" name=""/>
+          <p:cNvPr id="457" name=""/>
           <p:cNvSpPr/>
           <p:nvPr/>
         </p:nvSpPr>
@@ -11177,7 +11225,7 @@
       </p:sp>
       <p:sp>
         <p:nvSpPr>
-          <p:cNvPr id="456" name=""/>
+          <p:cNvPr id="458" name=""/>
           <p:cNvSpPr/>
           <p:nvPr/>
         </p:nvSpPr>
@@ -11237,7 +11285,7 @@
       </p:sp>
       <p:sp>
         <p:nvSpPr>
-          <p:cNvPr id="457" name=""/>
+          <p:cNvPr id="459" name=""/>
           <p:cNvSpPr/>
           <p:nvPr/>
         </p:nvSpPr>
@@ -11297,7 +11345,7 @@
       </p:sp>
       <p:sp>
         <p:nvSpPr>
-          <p:cNvPr id="458" name=""/>
+          <p:cNvPr id="460" name=""/>
           <p:cNvSpPr/>
           <p:nvPr/>
         </p:nvSpPr>
@@ -11357,7 +11405,7 @@
       </p:sp>
       <p:sp>
         <p:nvSpPr>
-          <p:cNvPr id="459" name=""/>
+          <p:cNvPr id="461" name=""/>
           <p:cNvSpPr/>
           <p:nvPr/>
         </p:nvSpPr>
@@ -11417,7 +11465,7 @@
       </p:sp>
       <p:sp>
         <p:nvSpPr>
-          <p:cNvPr id="460" name=""/>
+          <p:cNvPr id="462" name=""/>
           <p:cNvSpPr/>
           <p:nvPr/>
         </p:nvSpPr>
@@ -11477,7 +11525,7 @@
       </p:sp>
       <p:sp>
         <p:nvSpPr>
-          <p:cNvPr id="461" name=""/>
+          <p:cNvPr id="463" name=""/>
           <p:cNvSpPr/>
           <p:nvPr/>
         </p:nvSpPr>
@@ -11537,7 +11585,7 @@
       </p:sp>
       <p:sp>
         <p:nvSpPr>
-          <p:cNvPr id="462" name=""/>
+          <p:cNvPr id="464" name=""/>
           <p:cNvSpPr/>
           <p:nvPr/>
         </p:nvSpPr>
@@ -11597,7 +11645,7 @@
       </p:sp>
       <p:sp>
         <p:nvSpPr>
-          <p:cNvPr id="463" name=""/>
+          <p:cNvPr id="465" name=""/>
           <p:cNvSpPr/>
           <p:nvPr/>
         </p:nvSpPr>
@@ -11657,7 +11705,7 @@
       </p:sp>
       <p:sp>
         <p:nvSpPr>
-          <p:cNvPr id="464" name=""/>
+          <p:cNvPr id="466" name=""/>
           <p:cNvSpPr/>
           <p:nvPr/>
         </p:nvSpPr>
@@ -11717,7 +11765,7 @@
       </p:sp>
       <p:sp>
         <p:nvSpPr>
-          <p:cNvPr id="465" name=""/>
+          <p:cNvPr id="467" name=""/>
           <p:cNvSpPr/>
           <p:nvPr/>
         </p:nvSpPr>
@@ -11777,7 +11825,7 @@
       </p:sp>
       <p:sp>
         <p:nvSpPr>
-          <p:cNvPr id="466" name=""/>
+          <p:cNvPr id="468" name=""/>
           <p:cNvSpPr/>
           <p:nvPr/>
         </p:nvSpPr>
@@ -11837,7 +11885,7 @@
       </p:sp>
       <p:sp>
         <p:nvSpPr>
-          <p:cNvPr id="467" name=""/>
+          <p:cNvPr id="469" name=""/>
           <p:cNvSpPr/>
           <p:nvPr/>
         </p:nvSpPr>
@@ -11897,7 +11945,7 @@
       </p:sp>
       <p:sp>
         <p:nvSpPr>
-          <p:cNvPr id="468" name=""/>
+          <p:cNvPr id="470" name=""/>
           <p:cNvSpPr/>
           <p:nvPr/>
         </p:nvSpPr>
@@ -11957,7 +12005,7 @@
       </p:sp>
       <p:sp>
         <p:nvSpPr>
-          <p:cNvPr id="469" name=""/>
+          <p:cNvPr id="471" name=""/>
           <p:cNvSpPr/>
           <p:nvPr/>
         </p:nvSpPr>
@@ -12017,7 +12065,7 @@
       </p:sp>
       <p:sp>
         <p:nvSpPr>
-          <p:cNvPr id="470" name=""/>
+          <p:cNvPr id="472" name=""/>
           <p:cNvSpPr/>
           <p:nvPr/>
         </p:nvSpPr>
@@ -12077,7 +12125,7 @@
       </p:sp>
       <p:sp>
         <p:nvSpPr>
-          <p:cNvPr id="471" name=""/>
+          <p:cNvPr id="473" name=""/>
           <p:cNvSpPr/>
           <p:nvPr/>
         </p:nvSpPr>
@@ -12137,7 +12185,7 @@
       </p:sp>
       <p:sp>
         <p:nvSpPr>
-          <p:cNvPr id="472" name=""/>
+          <p:cNvPr id="474" name=""/>
           <p:cNvSpPr/>
           <p:nvPr/>
         </p:nvSpPr>
@@ -12197,7 +12245,7 @@
       </p:sp>
       <p:sp>
         <p:nvSpPr>
-          <p:cNvPr id="473" name=""/>
+          <p:cNvPr id="475" name=""/>
           <p:cNvSpPr/>
           <p:nvPr/>
         </p:nvSpPr>
@@ -12257,7 +12305,7 @@
       </p:sp>
       <p:sp>
         <p:nvSpPr>
-          <p:cNvPr id="474" name=""/>
+          <p:cNvPr id="476" name=""/>
           <p:cNvSpPr/>
           <p:nvPr/>
         </p:nvSpPr>
@@ -12317,7 +12365,7 @@
       </p:sp>
       <p:sp>
         <p:nvSpPr>
-          <p:cNvPr id="475" name=""/>
+          <p:cNvPr id="477" name=""/>
           <p:cNvSpPr/>
           <p:nvPr/>
         </p:nvSpPr>
@@ -12377,7 +12425,7 @@
       </p:sp>
       <p:sp>
         <p:nvSpPr>
-          <p:cNvPr id="476" name=""/>
+          <p:cNvPr id="478" name=""/>
           <p:cNvSpPr/>
           <p:nvPr/>
         </p:nvSpPr>
@@ -12437,7 +12485,7 @@
       </p:sp>
       <p:sp>
         <p:nvSpPr>
-          <p:cNvPr id="477" name=""/>
+          <p:cNvPr id="479" name=""/>
           <p:cNvSpPr/>
           <p:nvPr/>
         </p:nvSpPr>
@@ -12497,7 +12545,7 @@
       </p:sp>
       <p:sp>
         <p:nvSpPr>
-          <p:cNvPr id="478" name=""/>
+          <p:cNvPr id="480" name=""/>
           <p:cNvSpPr/>
           <p:nvPr/>
         </p:nvSpPr>
@@ -12557,7 +12605,7 @@
       </p:sp>
       <p:sp>
         <p:nvSpPr>
-          <p:cNvPr id="479" name=""/>
+          <p:cNvPr id="481" name=""/>
           <p:cNvSpPr/>
           <p:nvPr/>
         </p:nvSpPr>
@@ -12617,7 +12665,7 @@
       </p:sp>
       <p:sp>
         <p:nvSpPr>
-          <p:cNvPr id="480" name=""/>
+          <p:cNvPr id="482" name=""/>
           <p:cNvSpPr/>
           <p:nvPr/>
         </p:nvSpPr>
@@ -12677,7 +12725,7 @@
       </p:sp>
       <p:sp>
         <p:nvSpPr>
-          <p:cNvPr id="481" name=""/>
+          <p:cNvPr id="483" name=""/>
           <p:cNvSpPr/>
           <p:nvPr/>
         </p:nvSpPr>
@@ -12737,7 +12785,7 @@
       </p:sp>
       <p:sp>
         <p:nvSpPr>
-          <p:cNvPr id="482" name=""/>
+          <p:cNvPr id="484" name=""/>
           <p:cNvSpPr/>
           <p:nvPr/>
         </p:nvSpPr>
@@ -12797,7 +12845,7 @@
       </p:sp>
       <p:sp>
         <p:nvSpPr>
-          <p:cNvPr id="483" name=""/>
+          <p:cNvPr id="485" name=""/>
           <p:cNvSpPr/>
           <p:nvPr/>
         </p:nvSpPr>
@@ -12857,7 +12905,7 @@
       </p:sp>
       <p:sp>
         <p:nvSpPr>
-          <p:cNvPr id="484" name=""/>
+          <p:cNvPr id="486" name=""/>
           <p:cNvSpPr/>
           <p:nvPr/>
         </p:nvSpPr>
@@ -12917,7 +12965,7 @@
       </p:sp>
       <p:sp>
         <p:nvSpPr>
-          <p:cNvPr id="485" name=""/>
+          <p:cNvPr id="487" name=""/>
           <p:cNvSpPr/>
           <p:nvPr/>
         </p:nvSpPr>
@@ -12977,7 +13025,7 @@
       </p:sp>
       <p:sp>
         <p:nvSpPr>
-          <p:cNvPr id="486" name=""/>
+          <p:cNvPr id="488" name=""/>
           <p:cNvSpPr/>
           <p:nvPr/>
         </p:nvSpPr>
@@ -13037,7 +13085,7 @@
       </p:sp>
       <p:sp>
         <p:nvSpPr>
-          <p:cNvPr id="487" name=""/>
+          <p:cNvPr id="489" name=""/>
           <p:cNvSpPr/>
           <p:nvPr/>
         </p:nvSpPr>
@@ -13097,7 +13145,7 @@
       </p:sp>
       <p:sp>
         <p:nvSpPr>
-          <p:cNvPr id="488" name=""/>
+          <p:cNvPr id="490" name=""/>
           <p:cNvSpPr/>
           <p:nvPr/>
         </p:nvSpPr>
@@ -13157,7 +13205,7 @@
       </p:sp>
       <p:sp>
         <p:nvSpPr>
-          <p:cNvPr id="489" name=""/>
+          <p:cNvPr id="491" name=""/>
           <p:cNvSpPr/>
           <p:nvPr/>
         </p:nvSpPr>
@@ -13217,7 +13265,7 @@
       </p:sp>
       <p:sp>
         <p:nvSpPr>
-          <p:cNvPr id="490" name=""/>
+          <p:cNvPr id="492" name=""/>
           <p:cNvSpPr/>
           <p:nvPr/>
         </p:nvSpPr>
@@ -13277,7 +13325,7 @@
       </p:sp>
       <p:sp>
         <p:nvSpPr>
-          <p:cNvPr id="491" name=""/>
+          <p:cNvPr id="493" name=""/>
           <p:cNvSpPr/>
           <p:nvPr/>
         </p:nvSpPr>
@@ -13337,7 +13385,7 @@
       </p:sp>
       <p:sp>
         <p:nvSpPr>
-          <p:cNvPr id="492" name=""/>
+          <p:cNvPr id="494" name=""/>
           <p:cNvSpPr/>
           <p:nvPr/>
         </p:nvSpPr>
@@ -13397,7 +13445,7 @@
       </p:sp>
       <p:sp>
         <p:nvSpPr>
-          <p:cNvPr id="493" name=""/>
+          <p:cNvPr id="495" name=""/>
           <p:cNvSpPr/>
           <p:nvPr/>
         </p:nvSpPr>
@@ -13457,7 +13505,7 @@
       </p:sp>
       <p:sp>
         <p:nvSpPr>
-          <p:cNvPr id="494" name=""/>
+          <p:cNvPr id="496" name=""/>
           <p:cNvSpPr/>
           <p:nvPr/>
         </p:nvSpPr>
@@ -13517,7 +13565,7 @@
       </p:sp>
       <p:sp>
         <p:nvSpPr>
-          <p:cNvPr id="495" name=""/>
+          <p:cNvPr id="497" name=""/>
           <p:cNvSpPr/>
           <p:nvPr/>
         </p:nvSpPr>
@@ -13577,7 +13625,7 @@
       </p:sp>
       <p:sp>
         <p:nvSpPr>
-          <p:cNvPr id="496" name=""/>
+          <p:cNvPr id="498" name=""/>
           <p:cNvSpPr/>
           <p:nvPr/>
         </p:nvSpPr>
@@ -13637,7 +13685,7 @@
       </p:sp>
       <p:sp>
         <p:nvSpPr>
-          <p:cNvPr id="497" name=""/>
+          <p:cNvPr id="499" name=""/>
           <p:cNvSpPr/>
           <p:nvPr/>
         </p:nvSpPr>
@@ -13697,7 +13745,7 @@
       </p:sp>
       <p:sp>
         <p:nvSpPr>
-          <p:cNvPr id="498" name=""/>
+          <p:cNvPr id="500" name=""/>
           <p:cNvSpPr/>
           <p:nvPr/>
         </p:nvSpPr>
@@ -13757,7 +13805,7 @@
       </p:sp>
       <p:sp>
         <p:nvSpPr>
-          <p:cNvPr id="499" name=""/>
+          <p:cNvPr id="501" name=""/>
           <p:cNvSpPr/>
           <p:nvPr/>
         </p:nvSpPr>
@@ -13817,7 +13865,7 @@
       </p:sp>
       <p:sp>
         <p:nvSpPr>
-          <p:cNvPr id="500" name=""/>
+          <p:cNvPr id="502" name=""/>
           <p:cNvSpPr/>
           <p:nvPr/>
         </p:nvSpPr>
@@ -13877,7 +13925,7 @@
       </p:sp>
       <p:sp>
         <p:nvSpPr>
-          <p:cNvPr id="501" name=""/>
+          <p:cNvPr id="503" name=""/>
           <p:cNvSpPr/>
           <p:nvPr/>
         </p:nvSpPr>
@@ -13937,7 +13985,7 @@
       </p:sp>
       <p:sp>
         <p:nvSpPr>
-          <p:cNvPr id="502" name=""/>
+          <p:cNvPr id="504" name=""/>
           <p:cNvSpPr/>
           <p:nvPr/>
         </p:nvSpPr>
@@ -13997,7 +14045,7 @@
       </p:sp>
       <p:sp>
         <p:nvSpPr>
-          <p:cNvPr id="503" name=""/>
+          <p:cNvPr id="505" name=""/>
           <p:cNvSpPr/>
           <p:nvPr/>
         </p:nvSpPr>
@@ -14057,7 +14105,7 @@
       </p:sp>
       <p:sp>
         <p:nvSpPr>
-          <p:cNvPr id="504" name=""/>
+          <p:cNvPr id="506" name=""/>
           <p:cNvSpPr/>
           <p:nvPr/>
         </p:nvSpPr>
@@ -14117,7 +14165,7 @@
       </p:sp>
       <p:sp>
         <p:nvSpPr>
-          <p:cNvPr id="505" name=""/>
+          <p:cNvPr id="507" name=""/>
           <p:cNvSpPr/>
           <p:nvPr/>
         </p:nvSpPr>
@@ -14177,7 +14225,7 @@
       </p:sp>
       <p:sp>
         <p:nvSpPr>
-          <p:cNvPr id="506" name=""/>
+          <p:cNvPr id="508" name=""/>
           <p:cNvSpPr/>
           <p:nvPr/>
         </p:nvSpPr>
@@ -14237,7 +14285,7 @@
       </p:sp>
       <p:sp>
         <p:nvSpPr>
-          <p:cNvPr id="507" name=""/>
+          <p:cNvPr id="509" name=""/>
           <p:cNvSpPr/>
           <p:nvPr/>
         </p:nvSpPr>
@@ -14297,7 +14345,7 @@
       </p:sp>
       <p:sp>
         <p:nvSpPr>
-          <p:cNvPr id="508" name=""/>
+          <p:cNvPr id="510" name=""/>
           <p:cNvSpPr/>
           <p:nvPr/>
         </p:nvSpPr>
@@ -14357,7 +14405,7 @@
       </p:sp>
       <p:sp>
         <p:nvSpPr>
-          <p:cNvPr id="509" name=""/>
+          <p:cNvPr id="511" name=""/>
           <p:cNvSpPr/>
           <p:nvPr/>
         </p:nvSpPr>
@@ -14417,7 +14465,7 @@
       </p:sp>
       <p:sp>
         <p:nvSpPr>
-          <p:cNvPr id="510" name=""/>
+          <p:cNvPr id="512" name=""/>
           <p:cNvSpPr/>
           <p:nvPr/>
         </p:nvSpPr>
@@ -14477,7 +14525,7 @@
       </p:sp>
       <p:sp>
         <p:nvSpPr>
-          <p:cNvPr id="511" name=""/>
+          <p:cNvPr id="513" name=""/>
           <p:cNvSpPr/>
           <p:nvPr/>
         </p:nvSpPr>
@@ -14537,7 +14585,7 @@
       </p:sp>
       <p:sp>
         <p:nvSpPr>
-          <p:cNvPr id="512" name=""/>
+          <p:cNvPr id="514" name=""/>
           <p:cNvSpPr/>
           <p:nvPr/>
         </p:nvSpPr>
@@ -14597,7 +14645,7 @@
       </p:sp>
       <p:sp>
         <p:nvSpPr>
-          <p:cNvPr id="513" name=""/>
+          <p:cNvPr id="515" name=""/>
           <p:cNvSpPr/>
           <p:nvPr/>
         </p:nvSpPr>
@@ -14657,7 +14705,7 @@
       </p:sp>
       <p:sp>
         <p:nvSpPr>
-          <p:cNvPr id="514" name=""/>
+          <p:cNvPr id="516" name=""/>
           <p:cNvSpPr/>
           <p:nvPr/>
         </p:nvSpPr>
@@ -14717,7 +14765,7 @@
       </p:sp>
       <p:sp>
         <p:nvSpPr>
-          <p:cNvPr id="515" name=""/>
+          <p:cNvPr id="517" name=""/>
           <p:cNvSpPr/>
           <p:nvPr/>
         </p:nvSpPr>
@@ -14777,7 +14825,7 @@
       </p:sp>
       <p:sp>
         <p:nvSpPr>
-          <p:cNvPr id="516" name=""/>
+          <p:cNvPr id="518" name=""/>
           <p:cNvSpPr/>
           <p:nvPr/>
         </p:nvSpPr>
@@ -14837,7 +14885,7 @@
       </p:sp>
       <p:sp>
         <p:nvSpPr>
-          <p:cNvPr id="517" name=""/>
+          <p:cNvPr id="519" name=""/>
           <p:cNvSpPr/>
           <p:nvPr/>
         </p:nvSpPr>
@@ -14897,7 +14945,7 @@
       </p:sp>
       <p:sp>
         <p:nvSpPr>
-          <p:cNvPr id="518" name=""/>
+          <p:cNvPr id="520" name=""/>
           <p:cNvSpPr/>
           <p:nvPr/>
         </p:nvSpPr>
@@ -14957,7 +15005,7 @@
       </p:sp>
       <p:sp>
         <p:nvSpPr>
-          <p:cNvPr id="519" name=""/>
+          <p:cNvPr id="521" name=""/>
           <p:cNvSpPr/>
           <p:nvPr/>
         </p:nvSpPr>
@@ -15017,7 +15065,7 @@
       </p:sp>
       <p:sp>
         <p:nvSpPr>
-          <p:cNvPr id="520" name=""/>
+          <p:cNvPr id="522" name=""/>
           <p:cNvSpPr/>
           <p:nvPr/>
         </p:nvSpPr>
@@ -15077,7 +15125,7 @@
       </p:sp>
       <p:sp>
         <p:nvSpPr>
-          <p:cNvPr id="521" name=""/>
+          <p:cNvPr id="523" name=""/>
           <p:cNvSpPr/>
           <p:nvPr/>
         </p:nvSpPr>
@@ -15137,7 +15185,7 @@
       </p:sp>
       <p:sp>
         <p:nvSpPr>
-          <p:cNvPr id="522" name=""/>
+          <p:cNvPr id="524" name=""/>
           <p:cNvSpPr/>
           <p:nvPr/>
         </p:nvSpPr>
@@ -15197,7 +15245,7 @@
       </p:sp>
       <p:sp>
         <p:nvSpPr>
-          <p:cNvPr id="523" name=""/>
+          <p:cNvPr id="525" name=""/>
           <p:cNvSpPr/>
           <p:nvPr/>
         </p:nvSpPr>
@@ -15257,7 +15305,7 @@
       </p:sp>
       <p:sp>
         <p:nvSpPr>
-          <p:cNvPr id="524" name=""/>
+          <p:cNvPr id="526" name=""/>
           <p:cNvSpPr/>
           <p:nvPr/>
         </p:nvSpPr>
@@ -15317,7 +15365,7 @@
       </p:sp>
       <p:sp>
         <p:nvSpPr>
-          <p:cNvPr id="525" name=""/>
+          <p:cNvPr id="527" name=""/>
           <p:cNvSpPr/>
           <p:nvPr/>
         </p:nvSpPr>
@@ -15377,7 +15425,7 @@
       </p:sp>
       <p:sp>
         <p:nvSpPr>
-          <p:cNvPr id="526" name=""/>
+          <p:cNvPr id="528" name=""/>
           <p:cNvSpPr/>
           <p:nvPr/>
         </p:nvSpPr>
@@ -15437,7 +15485,7 @@
       </p:sp>
       <p:sp>
         <p:nvSpPr>
-          <p:cNvPr id="527" name=""/>
+          <p:cNvPr id="529" name=""/>
           <p:cNvSpPr/>
           <p:nvPr/>
         </p:nvSpPr>
@@ -15497,7 +15545,7 @@
       </p:sp>
       <p:sp>
         <p:nvSpPr>
-          <p:cNvPr id="528" name=""/>
+          <p:cNvPr id="530" name=""/>
           <p:cNvSpPr/>
           <p:nvPr/>
         </p:nvSpPr>
@@ -15557,7 +15605,7 @@
       </p:sp>
       <p:sp>
         <p:nvSpPr>
-          <p:cNvPr id="529" name=""/>
+          <p:cNvPr id="531" name=""/>
           <p:cNvSpPr/>
           <p:nvPr/>
         </p:nvSpPr>
@@ -15617,7 +15665,7 @@
       </p:sp>
       <p:sp>
         <p:nvSpPr>
-          <p:cNvPr id="530" name=""/>
+          <p:cNvPr id="532" name=""/>
           <p:cNvSpPr/>
           <p:nvPr/>
         </p:nvSpPr>
@@ -15677,7 +15725,7 @@
       </p:sp>
       <p:sp>
         <p:nvSpPr>
-          <p:cNvPr id="531" name=""/>
+          <p:cNvPr id="533" name=""/>
           <p:cNvSpPr/>
           <p:nvPr/>
         </p:nvSpPr>
@@ -15737,7 +15785,7 @@
       </p:sp>
       <p:sp>
         <p:nvSpPr>
-          <p:cNvPr id="532" name=""/>
+          <p:cNvPr id="534" name=""/>
           <p:cNvSpPr/>
           <p:nvPr/>
         </p:nvSpPr>
@@ -15797,7 +15845,7 @@
       </p:sp>
       <p:sp>
         <p:nvSpPr>
-          <p:cNvPr id="533" name=""/>
+          <p:cNvPr id="535" name=""/>
           <p:cNvSpPr/>
           <p:nvPr/>
         </p:nvSpPr>
@@ -15857,7 +15905,7 @@
       </p:sp>
       <p:sp>
         <p:nvSpPr>
-          <p:cNvPr id="534" name=""/>
+          <p:cNvPr id="536" name=""/>
           <p:cNvSpPr/>
           <p:nvPr/>
         </p:nvSpPr>
@@ -15917,7 +15965,7 @@
       </p:sp>
       <p:sp>
         <p:nvSpPr>
-          <p:cNvPr id="535" name=""/>
+          <p:cNvPr id="537" name=""/>
           <p:cNvSpPr/>
           <p:nvPr/>
         </p:nvSpPr>
@@ -15977,7 +16025,7 @@
       </p:sp>
       <p:sp>
         <p:nvSpPr>
-          <p:cNvPr id="536" name=""/>
+          <p:cNvPr id="538" name=""/>
           <p:cNvSpPr/>
           <p:nvPr/>
         </p:nvSpPr>
@@ -16037,7 +16085,7 @@
       </p:sp>
       <p:sp>
         <p:nvSpPr>
-          <p:cNvPr id="537" name=""/>
+          <p:cNvPr id="539" name=""/>
           <p:cNvSpPr/>
           <p:nvPr/>
         </p:nvSpPr>
@@ -16097,7 +16145,7 @@
       </p:sp>
       <p:sp>
         <p:nvSpPr>
-          <p:cNvPr id="538" name=""/>
+          <p:cNvPr id="540" name=""/>
           <p:cNvSpPr/>
           <p:nvPr/>
         </p:nvSpPr>
@@ -16157,7 +16205,7 @@
       </p:sp>
       <p:sp>
         <p:nvSpPr>
-          <p:cNvPr id="539" name=""/>
+          <p:cNvPr id="541" name=""/>
           <p:cNvSpPr/>
           <p:nvPr/>
         </p:nvSpPr>
@@ -16217,7 +16265,7 @@
       </p:sp>
       <p:sp>
         <p:nvSpPr>
-          <p:cNvPr id="540" name=""/>
+          <p:cNvPr id="542" name=""/>
           <p:cNvSpPr/>
           <p:nvPr/>
         </p:nvSpPr>
@@ -16277,7 +16325,7 @@
       </p:sp>
       <p:sp>
         <p:nvSpPr>
-          <p:cNvPr id="541" name=""/>
+          <p:cNvPr id="543" name=""/>
           <p:cNvSpPr/>
           <p:nvPr/>
         </p:nvSpPr>
@@ -16337,7 +16385,7 @@
       </p:sp>
       <p:sp>
         <p:nvSpPr>
-          <p:cNvPr id="542" name=""/>
+          <p:cNvPr id="544" name=""/>
           <p:cNvSpPr/>
           <p:nvPr/>
         </p:nvSpPr>
@@ -16397,7 +16445,7 @@
       </p:sp>
       <p:sp>
         <p:nvSpPr>
-          <p:cNvPr id="543" name=""/>
+          <p:cNvPr id="545" name=""/>
           <p:cNvSpPr/>
           <p:nvPr/>
         </p:nvSpPr>
@@ -16457,7 +16505,7 @@
       </p:sp>
       <p:sp>
         <p:nvSpPr>
-          <p:cNvPr id="544" name=""/>
+          <p:cNvPr id="546" name=""/>
           <p:cNvSpPr/>
           <p:nvPr/>
         </p:nvSpPr>
@@ -16517,7 +16565,7 @@
       </p:sp>
       <p:sp>
         <p:nvSpPr>
-          <p:cNvPr id="545" name=""/>
+          <p:cNvPr id="547" name=""/>
           <p:cNvSpPr/>
           <p:nvPr/>
         </p:nvSpPr>
@@ -16577,7 +16625,7 @@
       </p:sp>
       <p:sp>
         <p:nvSpPr>
-          <p:cNvPr id="546" name=""/>
+          <p:cNvPr id="548" name=""/>
           <p:cNvSpPr/>
           <p:nvPr/>
         </p:nvSpPr>
@@ -16637,7 +16685,7 @@
       </p:sp>
       <p:sp>
         <p:nvSpPr>
-          <p:cNvPr id="547" name=""/>
+          <p:cNvPr id="549" name=""/>
           <p:cNvSpPr/>
           <p:nvPr/>
         </p:nvSpPr>
@@ -16697,7 +16745,7 @@
       </p:sp>
       <p:sp>
         <p:nvSpPr>
-          <p:cNvPr id="548" name=""/>
+          <p:cNvPr id="550" name=""/>
           <p:cNvSpPr/>
           <p:nvPr/>
         </p:nvSpPr>
@@ -16757,7 +16805,7 @@
       </p:sp>
       <p:sp>
         <p:nvSpPr>
-          <p:cNvPr id="549" name=""/>
+          <p:cNvPr id="551" name=""/>
           <p:cNvSpPr/>
           <p:nvPr/>
         </p:nvSpPr>
@@ -16817,7 +16865,7 @@
       </p:sp>
       <p:sp>
         <p:nvSpPr>
-          <p:cNvPr id="550" name=""/>
+          <p:cNvPr id="552" name=""/>
           <p:cNvSpPr/>
           <p:nvPr/>
         </p:nvSpPr>
@@ -16877,7 +16925,7 @@
       </p:sp>
       <p:sp>
         <p:nvSpPr>
-          <p:cNvPr id="551" name=""/>
+          <p:cNvPr id="553" name=""/>
           <p:cNvSpPr/>
           <p:nvPr/>
         </p:nvSpPr>
@@ -16937,7 +16985,7 @@
       </p:sp>
       <p:sp>
         <p:nvSpPr>
-          <p:cNvPr id="552" name=""/>
+          <p:cNvPr id="554" name=""/>
           <p:cNvSpPr/>
           <p:nvPr/>
         </p:nvSpPr>
@@ -16997,7 +17045,7 @@
       </p:sp>
       <p:sp>
         <p:nvSpPr>
-          <p:cNvPr id="553" name=""/>
+          <p:cNvPr id="555" name=""/>
           <p:cNvSpPr/>
           <p:nvPr/>
         </p:nvSpPr>
@@ -17057,7 +17105,7 @@
       </p:sp>
       <p:sp>
         <p:nvSpPr>
-          <p:cNvPr id="554" name=""/>
+          <p:cNvPr id="556" name=""/>
           <p:cNvSpPr/>
           <p:nvPr/>
         </p:nvSpPr>
@@ -17117,7 +17165,7 @@
       </p:sp>
       <p:sp>
         <p:nvSpPr>
-          <p:cNvPr id="555" name=""/>
+          <p:cNvPr id="557" name=""/>
           <p:cNvSpPr/>
           <p:nvPr/>
         </p:nvSpPr>
@@ -17177,7 +17225,7 @@
       </p:sp>
       <p:sp>
         <p:nvSpPr>
-          <p:cNvPr id="556" name=""/>
+          <p:cNvPr id="558" name=""/>
           <p:cNvSpPr/>
           <p:nvPr/>
         </p:nvSpPr>
@@ -17237,7 +17285,7 @@
       </p:sp>
       <p:sp>
         <p:nvSpPr>
-          <p:cNvPr id="557" name=""/>
+          <p:cNvPr id="559" name=""/>
           <p:cNvSpPr/>
           <p:nvPr/>
         </p:nvSpPr>
@@ -17297,7 +17345,7 @@
       </p:sp>
       <p:sp>
         <p:nvSpPr>
-          <p:cNvPr id="558" name=""/>
+          <p:cNvPr id="560" name=""/>
           <p:cNvSpPr/>
           <p:nvPr/>
         </p:nvSpPr>
@@ -17357,7 +17405,7 @@
       </p:sp>
       <p:sp>
         <p:nvSpPr>
-          <p:cNvPr id="559" name=""/>
+          <p:cNvPr id="561" name=""/>
           <p:cNvSpPr/>
           <p:nvPr/>
         </p:nvSpPr>
@@ -17417,7 +17465,7 @@
       </p:sp>
       <p:sp>
         <p:nvSpPr>
-          <p:cNvPr id="560" name=""/>
+          <p:cNvPr id="562" name=""/>
           <p:cNvSpPr/>
           <p:nvPr/>
         </p:nvSpPr>
@@ -17477,7 +17525,7 @@
       </p:sp>
       <p:sp>
         <p:nvSpPr>
-          <p:cNvPr id="561" name=""/>
+          <p:cNvPr id="563" name=""/>
           <p:cNvSpPr/>
           <p:nvPr/>
         </p:nvSpPr>
@@ -17537,7 +17585,7 @@
       </p:sp>
       <p:sp>
         <p:nvSpPr>
-          <p:cNvPr id="562" name=""/>
+          <p:cNvPr id="564" name=""/>
           <p:cNvSpPr txBox="1"/>
           <p:nvPr/>
         </p:nvSpPr>
@@ -17585,7 +17633,7 @@
       </p:sp>
       <p:sp>
         <p:nvSpPr>
-          <p:cNvPr id="563" name=""/>
+          <p:cNvPr id="565" name=""/>
           <p:cNvSpPr txBox="1"/>
           <p:nvPr/>
         </p:nvSpPr>
@@ -17633,7 +17681,7 @@
       </p:sp>
       <p:sp>
         <p:nvSpPr>
-          <p:cNvPr id="564" name=""/>
+          <p:cNvPr id="566" name=""/>
           <p:cNvSpPr txBox="1"/>
           <p:nvPr/>
         </p:nvSpPr>
@@ -17681,7 +17729,7 @@
       </p:sp>
       <p:sp>
         <p:nvSpPr>
-          <p:cNvPr id="565" name=""/>
+          <p:cNvPr id="567" name=""/>
           <p:cNvSpPr txBox="1"/>
           <p:nvPr/>
         </p:nvSpPr>
@@ -17729,7 +17777,7 @@
       </p:sp>
       <p:sp>
         <p:nvSpPr>
-          <p:cNvPr id="566" name=""/>
+          <p:cNvPr id="568" name=""/>
           <p:cNvSpPr txBox="1"/>
           <p:nvPr/>
         </p:nvSpPr>
@@ -17777,7 +17825,7 @@
       </p:sp>
       <p:sp>
         <p:nvSpPr>
-          <p:cNvPr id="567" name=""/>
+          <p:cNvPr id="569" name=""/>
           <p:cNvSpPr txBox="1"/>
           <p:nvPr/>
         </p:nvSpPr>
@@ -17825,7 +17873,7 @@
       </p:sp>
       <p:sp>
         <p:nvSpPr>
-          <p:cNvPr id="568" name=""/>
+          <p:cNvPr id="570" name=""/>
           <p:cNvSpPr txBox="1"/>
           <p:nvPr/>
         </p:nvSpPr>
@@ -17873,7 +17921,7 @@
       </p:sp>
       <p:sp>
         <p:nvSpPr>
-          <p:cNvPr id="569" name=""/>
+          <p:cNvPr id="571" name=""/>
           <p:cNvSpPr txBox="1"/>
           <p:nvPr/>
         </p:nvSpPr>
@@ -17921,7 +17969,7 @@
       </p:sp>
       <p:sp>
         <p:nvSpPr>
-          <p:cNvPr id="570" name=""/>
+          <p:cNvPr id="572" name=""/>
           <p:cNvSpPr txBox="1"/>
           <p:nvPr/>
         </p:nvSpPr>
@@ -17969,7 +18017,7 @@
       </p:sp>
       <p:sp>
         <p:nvSpPr>
-          <p:cNvPr id="571" name=""/>
+          <p:cNvPr id="573" name=""/>
           <p:cNvSpPr txBox="1"/>
           <p:nvPr/>
         </p:nvSpPr>
@@ -18017,7 +18065,7 @@
       </p:sp>
       <p:sp>
         <p:nvSpPr>
-          <p:cNvPr id="572" name=""/>
+          <p:cNvPr id="574" name=""/>
           <p:cNvSpPr txBox="1"/>
           <p:nvPr/>
         </p:nvSpPr>
@@ -18065,7 +18113,7 @@
       </p:sp>
       <p:sp>
         <p:nvSpPr>
-          <p:cNvPr id="573" name=""/>
+          <p:cNvPr id="575" name=""/>
           <p:cNvSpPr txBox="1"/>
           <p:nvPr/>
         </p:nvSpPr>
@@ -18113,7 +18161,7 @@
       </p:sp>
       <p:sp>
         <p:nvSpPr>
-          <p:cNvPr id="574" name=""/>
+          <p:cNvPr id="576" name=""/>
           <p:cNvSpPr txBox="1"/>
           <p:nvPr/>
         </p:nvSpPr>
@@ -18161,7 +18209,7 @@
       </p:sp>
       <p:sp>
         <p:nvSpPr>
-          <p:cNvPr id="575" name=""/>
+          <p:cNvPr id="577" name=""/>
           <p:cNvSpPr txBox="1"/>
           <p:nvPr/>
         </p:nvSpPr>
@@ -18209,7 +18257,7 @@
       </p:sp>
       <p:sp>
         <p:nvSpPr>
-          <p:cNvPr id="576" name=""/>
+          <p:cNvPr id="578" name=""/>
           <p:cNvSpPr txBox="1"/>
           <p:nvPr/>
         </p:nvSpPr>
@@ -18257,7 +18305,7 @@
       </p:sp>
       <p:sp>
         <p:nvSpPr>
-          <p:cNvPr id="577" name=""/>
+          <p:cNvPr id="579" name=""/>
           <p:cNvSpPr txBox="1"/>
           <p:nvPr/>
         </p:nvSpPr>
@@ -18305,7 +18353,7 @@
       </p:sp>
       <p:sp>
         <p:nvSpPr>
-          <p:cNvPr id="578" name=""/>
+          <p:cNvPr id="580" name=""/>
           <p:cNvSpPr txBox="1"/>
           <p:nvPr/>
         </p:nvSpPr>
@@ -18353,7 +18401,7 @@
       </p:sp>
       <p:sp>
         <p:nvSpPr>
-          <p:cNvPr id="579" name=""/>
+          <p:cNvPr id="581" name=""/>
           <p:cNvSpPr txBox="1"/>
           <p:nvPr/>
         </p:nvSpPr>
@@ -18401,7 +18449,7 @@
       </p:sp>
       <p:sp>
         <p:nvSpPr>
-          <p:cNvPr id="580" name=""/>
+          <p:cNvPr id="582" name=""/>
           <p:cNvSpPr txBox="1"/>
           <p:nvPr/>
         </p:nvSpPr>
@@ -18449,7 +18497,7 @@
       </p:sp>
       <p:sp>
         <p:nvSpPr>
-          <p:cNvPr id="581" name=""/>
+          <p:cNvPr id="583" name=""/>
           <p:cNvSpPr txBox="1"/>
           <p:nvPr/>
         </p:nvSpPr>
@@ -18497,7 +18545,7 @@
       </p:sp>
       <p:sp>
         <p:nvSpPr>
-          <p:cNvPr id="582" name=""/>
+          <p:cNvPr id="584" name=""/>
           <p:cNvSpPr txBox="1"/>
           <p:nvPr/>
         </p:nvSpPr>
@@ -18545,7 +18593,7 @@
       </p:sp>
       <p:sp>
         <p:nvSpPr>
-          <p:cNvPr id="583" name=""/>
+          <p:cNvPr id="585" name=""/>
           <p:cNvSpPr txBox="1"/>
           <p:nvPr/>
         </p:nvSpPr>
@@ -18593,7 +18641,7 @@
       </p:sp>
       <p:sp>
         <p:nvSpPr>
-          <p:cNvPr id="584" name=""/>
+          <p:cNvPr id="586" name=""/>
           <p:cNvSpPr txBox="1"/>
           <p:nvPr/>
         </p:nvSpPr>
@@ -18641,7 +18689,7 @@
       </p:sp>
       <p:sp>
         <p:nvSpPr>
-          <p:cNvPr id="585" name=""/>
+          <p:cNvPr id="587" name=""/>
           <p:cNvSpPr txBox="1"/>
           <p:nvPr/>
         </p:nvSpPr>
@@ -18689,7 +18737,7 @@
       </p:sp>
       <p:sp>
         <p:nvSpPr>
-          <p:cNvPr id="586" name=""/>
+          <p:cNvPr id="588" name=""/>
           <p:cNvSpPr txBox="1"/>
           <p:nvPr/>
         </p:nvSpPr>
@@ -18737,7 +18785,7 @@
       </p:sp>
       <p:sp>
         <p:nvSpPr>
-          <p:cNvPr id="587" name=""/>
+          <p:cNvPr id="589" name=""/>
           <p:cNvSpPr txBox="1"/>
           <p:nvPr/>
         </p:nvSpPr>
@@ -18785,7 +18833,7 @@
       </p:sp>
       <p:sp>
         <p:nvSpPr>
-          <p:cNvPr id="588" name=""/>
+          <p:cNvPr id="590" name=""/>
           <p:cNvSpPr txBox="1"/>
           <p:nvPr/>
         </p:nvSpPr>
@@ -18833,7 +18881,7 @@
       </p:sp>
       <p:sp>
         <p:nvSpPr>
-          <p:cNvPr id="589" name=""/>
+          <p:cNvPr id="591" name=""/>
           <p:cNvSpPr txBox="1"/>
           <p:nvPr/>
         </p:nvSpPr>
@@ -18881,7 +18929,7 @@
       </p:sp>
       <p:sp>
         <p:nvSpPr>
-          <p:cNvPr id="590" name=""/>
+          <p:cNvPr id="592" name=""/>
           <p:cNvSpPr txBox="1"/>
           <p:nvPr/>
         </p:nvSpPr>
@@ -18929,7 +18977,7 @@
       </p:sp>
       <p:sp>
         <p:nvSpPr>
-          <p:cNvPr id="591" name=""/>
+          <p:cNvPr id="593" name=""/>
           <p:cNvSpPr txBox="1"/>
           <p:nvPr/>
         </p:nvSpPr>
@@ -18977,7 +19025,7 @@
       </p:sp>
       <p:sp>
         <p:nvSpPr>
-          <p:cNvPr id="592" name=""/>
+          <p:cNvPr id="594" name=""/>
           <p:cNvSpPr txBox="1"/>
           <p:nvPr/>
         </p:nvSpPr>
@@ -19025,7 +19073,7 @@
       </p:sp>
       <p:sp>
         <p:nvSpPr>
-          <p:cNvPr id="593" name=""/>
+          <p:cNvPr id="595" name=""/>
           <p:cNvSpPr txBox="1"/>
           <p:nvPr/>
         </p:nvSpPr>
@@ -19073,7 +19121,7 @@
       </p:sp>
       <p:sp>
         <p:nvSpPr>
-          <p:cNvPr id="594" name=""/>
+          <p:cNvPr id="596" name=""/>
           <p:cNvSpPr txBox="1"/>
           <p:nvPr/>
         </p:nvSpPr>
@@ -19121,7 +19169,7 @@
       </p:sp>
       <p:sp>
         <p:nvSpPr>
-          <p:cNvPr id="595" name=""/>
+          <p:cNvPr id="597" name=""/>
           <p:cNvSpPr txBox="1"/>
           <p:nvPr/>
         </p:nvSpPr>
@@ -19169,7 +19217,7 @@
       </p:sp>
       <p:sp>
         <p:nvSpPr>
-          <p:cNvPr id="596" name=""/>
+          <p:cNvPr id="598" name=""/>
           <p:cNvSpPr txBox="1"/>
           <p:nvPr/>
         </p:nvSpPr>
@@ -19217,7 +19265,7 @@
       </p:sp>
       <p:sp>
         <p:nvSpPr>
-          <p:cNvPr id="597" name=""/>
+          <p:cNvPr id="599" name=""/>
           <p:cNvSpPr txBox="1"/>
           <p:nvPr/>
         </p:nvSpPr>
@@ -19265,7 +19313,7 @@
       </p:sp>
       <p:sp>
         <p:nvSpPr>
-          <p:cNvPr id="598" name=""/>
+          <p:cNvPr id="600" name=""/>
           <p:cNvSpPr txBox="1"/>
           <p:nvPr/>
         </p:nvSpPr>
@@ -19313,7 +19361,7 @@
       </p:sp>
       <p:sp>
         <p:nvSpPr>
-          <p:cNvPr id="599" name=""/>
+          <p:cNvPr id="601" name=""/>
           <p:cNvSpPr txBox="1"/>
           <p:nvPr/>
         </p:nvSpPr>
@@ -19361,7 +19409,7 @@
       </p:sp>
       <p:sp>
         <p:nvSpPr>
-          <p:cNvPr id="600" name=""/>
+          <p:cNvPr id="602" name=""/>
           <p:cNvSpPr txBox="1"/>
           <p:nvPr/>
         </p:nvSpPr>
@@ -19409,7 +19457,7 @@
       </p:sp>
       <p:sp>
         <p:nvSpPr>
-          <p:cNvPr id="601" name=""/>
+          <p:cNvPr id="603" name=""/>
           <p:cNvSpPr txBox="1"/>
           <p:nvPr/>
         </p:nvSpPr>
@@ -19457,7 +19505,7 @@
       </p:sp>
       <p:sp>
         <p:nvSpPr>
-          <p:cNvPr id="602" name=""/>
+          <p:cNvPr id="604" name=""/>
           <p:cNvSpPr txBox="1"/>
           <p:nvPr/>
         </p:nvSpPr>
@@ -19505,7 +19553,7 @@
       </p:sp>
       <p:sp>
         <p:nvSpPr>
-          <p:cNvPr id="603" name=""/>
+          <p:cNvPr id="605" name=""/>
           <p:cNvSpPr txBox="1"/>
           <p:nvPr/>
         </p:nvSpPr>
@@ -19553,7 +19601,7 @@
       </p:sp>
       <p:sp>
         <p:nvSpPr>
-          <p:cNvPr id="604" name=""/>
+          <p:cNvPr id="606" name=""/>
           <p:cNvSpPr txBox="1"/>
           <p:nvPr/>
         </p:nvSpPr>
@@ -19601,7 +19649,7 @@
       </p:sp>
       <p:sp>
         <p:nvSpPr>
-          <p:cNvPr id="605" name=""/>
+          <p:cNvPr id="607" name=""/>
           <p:cNvSpPr txBox="1"/>
           <p:nvPr/>
         </p:nvSpPr>
@@ -19649,7 +19697,7 @@
       </p:sp>
       <p:sp>
         <p:nvSpPr>
-          <p:cNvPr id="606" name=""/>
+          <p:cNvPr id="608" name=""/>
           <p:cNvSpPr txBox="1"/>
           <p:nvPr/>
         </p:nvSpPr>
@@ -19697,7 +19745,7 @@
       </p:sp>
       <p:sp>
         <p:nvSpPr>
-          <p:cNvPr id="607" name=""/>
+          <p:cNvPr id="609" name=""/>
           <p:cNvSpPr txBox="1"/>
           <p:nvPr/>
         </p:nvSpPr>
@@ -19745,7 +19793,7 @@
       </p:sp>
       <p:sp>
         <p:nvSpPr>
-          <p:cNvPr id="608" name=""/>
+          <p:cNvPr id="610" name=""/>
           <p:cNvSpPr txBox="1"/>
           <p:nvPr/>
         </p:nvSpPr>
@@ -19793,7 +19841,7 @@
       </p:sp>
       <p:sp>
         <p:nvSpPr>
-          <p:cNvPr id="609" name=""/>
+          <p:cNvPr id="611" name=""/>
           <p:cNvSpPr txBox="1"/>
           <p:nvPr/>
         </p:nvSpPr>
@@ -19841,7 +19889,7 @@
       </p:sp>
       <p:sp>
         <p:nvSpPr>
-          <p:cNvPr id="610" name=""/>
+          <p:cNvPr id="612" name=""/>
           <p:cNvSpPr txBox="1"/>
           <p:nvPr/>
         </p:nvSpPr>
@@ -19889,7 +19937,7 @@
       </p:sp>
       <p:sp>
         <p:nvSpPr>
-          <p:cNvPr id="611" name=""/>
+          <p:cNvPr id="613" name=""/>
           <p:cNvSpPr txBox="1"/>
           <p:nvPr/>
         </p:nvSpPr>
@@ -19937,7 +19985,7 @@
       </p:sp>
       <p:sp>
         <p:nvSpPr>
-          <p:cNvPr id="612" name=""/>
+          <p:cNvPr id="614" name=""/>
           <p:cNvSpPr txBox="1"/>
           <p:nvPr/>
         </p:nvSpPr>
@@ -19985,7 +20033,7 @@
       </p:sp>
       <p:sp>
         <p:nvSpPr>
-          <p:cNvPr id="613" name=""/>
+          <p:cNvPr id="615" name=""/>
           <p:cNvSpPr txBox="1"/>
           <p:nvPr/>
         </p:nvSpPr>
@@ -20033,7 +20081,7 @@
       </p:sp>
       <p:sp>
         <p:nvSpPr>
-          <p:cNvPr id="614" name=""/>
+          <p:cNvPr id="616" name=""/>
           <p:cNvSpPr txBox="1"/>
           <p:nvPr/>
         </p:nvSpPr>
@@ -20081,7 +20129,7 @@
       </p:sp>
       <p:sp>
         <p:nvSpPr>
-          <p:cNvPr id="615" name=""/>
+          <p:cNvPr id="617" name=""/>
           <p:cNvSpPr txBox="1"/>
           <p:nvPr/>
         </p:nvSpPr>
@@ -20129,7 +20177,7 @@
       </p:sp>
       <p:sp>
         <p:nvSpPr>
-          <p:cNvPr id="616" name=""/>
+          <p:cNvPr id="618" name=""/>
           <p:cNvSpPr txBox="1"/>
           <p:nvPr/>
         </p:nvSpPr>
@@ -20177,7 +20225,7 @@
       </p:sp>
       <p:sp>
         <p:nvSpPr>
-          <p:cNvPr id="617" name=""/>
+          <p:cNvPr id="619" name=""/>
           <p:cNvSpPr txBox="1"/>
           <p:nvPr/>
         </p:nvSpPr>
@@ -20225,7 +20273,7 @@
       </p:sp>
       <p:sp>
         <p:nvSpPr>
-          <p:cNvPr id="618" name=""/>
+          <p:cNvPr id="620" name=""/>
           <p:cNvSpPr txBox="1"/>
           <p:nvPr/>
         </p:nvSpPr>
@@ -20273,7 +20321,7 @@
       </p:sp>
       <p:sp>
         <p:nvSpPr>
-          <p:cNvPr id="619" name=""/>
+          <p:cNvPr id="621" name=""/>
           <p:cNvSpPr txBox="1"/>
           <p:nvPr/>
         </p:nvSpPr>
@@ -20321,7 +20369,7 @@
       </p:sp>
       <p:sp>
         <p:nvSpPr>
-          <p:cNvPr id="620" name=""/>
+          <p:cNvPr id="622" name=""/>
           <p:cNvSpPr txBox="1"/>
           <p:nvPr/>
         </p:nvSpPr>
@@ -20369,7 +20417,7 @@
       </p:sp>
       <p:sp>
         <p:nvSpPr>
-          <p:cNvPr id="621" name=""/>
+          <p:cNvPr id="623" name=""/>
           <p:cNvSpPr txBox="1"/>
           <p:nvPr/>
         </p:nvSpPr>
@@ -20417,7 +20465,7 @@
       </p:sp>
       <p:sp>
         <p:nvSpPr>
-          <p:cNvPr id="622" name=""/>
+          <p:cNvPr id="624" name=""/>
           <p:cNvSpPr txBox="1"/>
           <p:nvPr/>
         </p:nvSpPr>
@@ -20465,7 +20513,7 @@
       </p:sp>
       <p:sp>
         <p:nvSpPr>
-          <p:cNvPr id="623" name=""/>
+          <p:cNvPr id="625" name=""/>
           <p:cNvSpPr txBox="1"/>
           <p:nvPr/>
         </p:nvSpPr>
@@ -20513,7 +20561,7 @@
       </p:sp>
       <p:sp>
         <p:nvSpPr>
-          <p:cNvPr id="624" name=""/>
+          <p:cNvPr id="626" name=""/>
           <p:cNvSpPr txBox="1"/>
           <p:nvPr/>
         </p:nvSpPr>
@@ -20561,7 +20609,7 @@
       </p:sp>
       <p:sp>
         <p:nvSpPr>
-          <p:cNvPr id="625" name=""/>
+          <p:cNvPr id="627" name=""/>
           <p:cNvSpPr txBox="1"/>
           <p:nvPr/>
         </p:nvSpPr>
@@ -20609,7 +20657,7 @@
       </p:sp>
       <p:sp>
         <p:nvSpPr>
-          <p:cNvPr id="626" name=""/>
+          <p:cNvPr id="628" name=""/>
           <p:cNvSpPr txBox="1"/>
           <p:nvPr/>
         </p:nvSpPr>
@@ -20657,7 +20705,7 @@
       </p:sp>
       <p:sp>
         <p:nvSpPr>
-          <p:cNvPr id="627" name=""/>
+          <p:cNvPr id="629" name=""/>
           <p:cNvSpPr txBox="1"/>
           <p:nvPr/>
         </p:nvSpPr>
@@ -20705,7 +20753,7 @@
       </p:sp>
       <p:sp>
         <p:nvSpPr>
-          <p:cNvPr id="628" name=""/>
+          <p:cNvPr id="630" name=""/>
           <p:cNvSpPr txBox="1"/>
           <p:nvPr/>
         </p:nvSpPr>
@@ -20753,7 +20801,7 @@
       </p:sp>
       <p:sp>
         <p:nvSpPr>
-          <p:cNvPr id="629" name=""/>
+          <p:cNvPr id="631" name=""/>
           <p:cNvSpPr txBox="1"/>
           <p:nvPr/>
         </p:nvSpPr>
@@ -20801,7 +20849,7 @@
       </p:sp>
       <p:sp>
         <p:nvSpPr>
-          <p:cNvPr id="630" name=""/>
+          <p:cNvPr id="632" name=""/>
           <p:cNvSpPr txBox="1"/>
           <p:nvPr/>
         </p:nvSpPr>
@@ -20849,7 +20897,7 @@
       </p:sp>
       <p:sp>
         <p:nvSpPr>
-          <p:cNvPr id="631" name=""/>
+          <p:cNvPr id="633" name=""/>
           <p:cNvSpPr txBox="1"/>
           <p:nvPr/>
         </p:nvSpPr>
@@ -20897,7 +20945,7 @@
       </p:sp>
       <p:sp>
         <p:nvSpPr>
-          <p:cNvPr id="632" name=""/>
+          <p:cNvPr id="634" name=""/>
           <p:cNvSpPr txBox="1"/>
           <p:nvPr/>
         </p:nvSpPr>
@@ -20945,7 +20993,7 @@
       </p:sp>
       <p:sp>
         <p:nvSpPr>
-          <p:cNvPr id="633" name=""/>
+          <p:cNvPr id="635" name=""/>
           <p:cNvSpPr txBox="1"/>
           <p:nvPr/>
         </p:nvSpPr>
@@ -20993,7 +21041,7 @@
       </p:sp>
       <p:sp>
         <p:nvSpPr>
-          <p:cNvPr id="634" name=""/>
+          <p:cNvPr id="636" name=""/>
           <p:cNvSpPr txBox="1"/>
           <p:nvPr/>
         </p:nvSpPr>
@@ -21041,7 +21089,7 @@
       </p:sp>
       <p:sp>
         <p:nvSpPr>
-          <p:cNvPr id="635" name=""/>
+          <p:cNvPr id="637" name=""/>
           <p:cNvSpPr txBox="1"/>
           <p:nvPr/>
         </p:nvSpPr>
@@ -21089,7 +21137,7 @@
       </p:sp>
       <p:sp>
         <p:nvSpPr>
-          <p:cNvPr id="636" name=""/>
+          <p:cNvPr id="638" name=""/>
           <p:cNvSpPr txBox="1"/>
           <p:nvPr/>
         </p:nvSpPr>
@@ -21137,7 +21185,7 @@
       </p:sp>
       <p:sp>
         <p:nvSpPr>
-          <p:cNvPr id="637" name=""/>
+          <p:cNvPr id="639" name=""/>
           <p:cNvSpPr txBox="1"/>
           <p:nvPr/>
         </p:nvSpPr>
@@ -21185,7 +21233,7 @@
       </p:sp>
       <p:sp>
         <p:nvSpPr>
-          <p:cNvPr id="638" name=""/>
+          <p:cNvPr id="640" name=""/>
           <p:cNvSpPr txBox="1"/>
           <p:nvPr/>
         </p:nvSpPr>
@@ -21233,7 +21281,7 @@
       </p:sp>
       <p:sp>
         <p:nvSpPr>
-          <p:cNvPr id="639" name=""/>
+          <p:cNvPr id="641" name=""/>
           <p:cNvSpPr txBox="1"/>
           <p:nvPr/>
         </p:nvSpPr>
@@ -21281,7 +21329,7 @@
       </p:sp>
       <p:sp>
         <p:nvSpPr>
-          <p:cNvPr id="640" name=""/>
+          <p:cNvPr id="642" name=""/>
           <p:cNvSpPr txBox="1"/>
           <p:nvPr/>
         </p:nvSpPr>
@@ -21329,7 +21377,7 @@
       </p:sp>
       <p:sp>
         <p:nvSpPr>
-          <p:cNvPr id="641" name=""/>
+          <p:cNvPr id="643" name=""/>
           <p:cNvSpPr txBox="1"/>
           <p:nvPr/>
         </p:nvSpPr>
@@ -21377,7 +21425,7 @@
       </p:sp>
       <p:sp>
         <p:nvSpPr>
-          <p:cNvPr id="642" name=""/>
+          <p:cNvPr id="644" name=""/>
           <p:cNvSpPr txBox="1"/>
           <p:nvPr/>
         </p:nvSpPr>
@@ -21425,7 +21473,7 @@
       </p:sp>
       <p:sp>
         <p:nvSpPr>
-          <p:cNvPr id="643" name=""/>
+          <p:cNvPr id="645" name=""/>
           <p:cNvSpPr txBox="1"/>
           <p:nvPr/>
         </p:nvSpPr>
@@ -21473,7 +21521,7 @@
       </p:sp>
       <p:sp>
         <p:nvSpPr>
-          <p:cNvPr id="644" name=""/>
+          <p:cNvPr id="646" name=""/>
           <p:cNvSpPr txBox="1"/>
           <p:nvPr/>
         </p:nvSpPr>
@@ -21521,7 +21569,7 @@
       </p:sp>
       <p:pic>
         <p:nvPicPr>
-          <p:cNvPr id="645" name=""/>
+          <p:cNvPr id="647" name=""/>
           <p:cNvPicPr/>
           <p:nvPr/>
         </p:nvPicPr>
@@ -21545,7 +21593,7 @@
       </p:pic>
       <p:sp>
         <p:nvSpPr>
-          <p:cNvPr id="646" name=""/>
+          <p:cNvPr id="648" name=""/>
           <p:cNvSpPr txBox="1"/>
           <p:nvPr/>
         </p:nvSpPr>
@@ -21593,7 +21641,7 @@
       </p:sp>
       <p:sp>
         <p:nvSpPr>
-          <p:cNvPr id="647" name=""/>
+          <p:cNvPr id="649" name=""/>
           <p:cNvSpPr txBox="1"/>
           <p:nvPr/>
         </p:nvSpPr>
@@ -21641,7 +21689,7 @@
       </p:sp>
       <p:sp>
         <p:nvSpPr>
-          <p:cNvPr id="648" name=""/>
+          <p:cNvPr id="650" name=""/>
           <p:cNvSpPr txBox="1"/>
           <p:nvPr/>
         </p:nvSpPr>
@@ -21719,7 +21767,7 @@
       </p:grpSpPr>
       <p:sp>
         <p:nvSpPr>
-          <p:cNvPr id="649" name=""/>
+          <p:cNvPr id="651" name=""/>
           <p:cNvSpPr/>
           <p:nvPr/>
         </p:nvSpPr>
@@ -21779,7 +21827,7 @@
       </p:sp>
       <p:sp>
         <p:nvSpPr>
-          <p:cNvPr id="650" name=""/>
+          <p:cNvPr id="652" name=""/>
           <p:cNvSpPr/>
           <p:nvPr/>
         </p:nvSpPr>
@@ -21839,7 +21887,7 @@
       </p:sp>
       <p:sp>
         <p:nvSpPr>
-          <p:cNvPr id="651" name=""/>
+          <p:cNvPr id="653" name=""/>
           <p:cNvSpPr/>
           <p:nvPr/>
         </p:nvSpPr>
@@ -21899,7 +21947,7 @@
       </p:sp>
       <p:sp>
         <p:nvSpPr>
-          <p:cNvPr id="652" name=""/>
+          <p:cNvPr id="654" name=""/>
           <p:cNvSpPr/>
           <p:nvPr/>
         </p:nvSpPr>
@@ -21959,7 +22007,7 @@
       </p:sp>
       <p:sp>
         <p:nvSpPr>
-          <p:cNvPr id="653" name=""/>
+          <p:cNvPr id="655" name=""/>
           <p:cNvSpPr/>
           <p:nvPr/>
         </p:nvSpPr>
@@ -22059,7 +22107,7 @@
       </p:sp>
       <p:sp>
         <p:nvSpPr>
-          <p:cNvPr id="654" name=""/>
+          <p:cNvPr id="656" name=""/>
           <p:cNvSpPr/>
           <p:nvPr/>
         </p:nvSpPr>
@@ -22119,7 +22167,7 @@
       </p:sp>
       <p:sp>
         <p:nvSpPr>
-          <p:cNvPr id="655" name=""/>
+          <p:cNvPr id="657" name=""/>
           <p:cNvSpPr/>
           <p:nvPr/>
         </p:nvSpPr>
@@ -22179,7 +22227,7 @@
       </p:sp>
       <p:sp>
         <p:nvSpPr>
-          <p:cNvPr id="656" name=""/>
+          <p:cNvPr id="658" name=""/>
           <p:cNvSpPr/>
           <p:nvPr/>
         </p:nvSpPr>
@@ -22239,7 +22287,7 @@
       </p:sp>
       <p:sp>
         <p:nvSpPr>
-          <p:cNvPr id="657" name=""/>
+          <p:cNvPr id="659" name=""/>
           <p:cNvSpPr/>
           <p:nvPr/>
         </p:nvSpPr>
@@ -22299,7 +22347,7 @@
       </p:sp>
       <p:sp>
         <p:nvSpPr>
-          <p:cNvPr id="658" name=""/>
+          <p:cNvPr id="660" name=""/>
           <p:cNvSpPr/>
           <p:nvPr/>
         </p:nvSpPr>
@@ -22359,7 +22407,7 @@
       </p:sp>
       <p:sp>
         <p:nvSpPr>
-          <p:cNvPr id="659" name=""/>
+          <p:cNvPr id="661" name=""/>
           <p:cNvSpPr/>
           <p:nvPr/>
         </p:nvSpPr>
@@ -22419,7 +22467,7 @@
       </p:sp>
       <p:sp>
         <p:nvSpPr>
-          <p:cNvPr id="660" name=""/>
+          <p:cNvPr id="662" name=""/>
           <p:cNvSpPr/>
           <p:nvPr/>
         </p:nvSpPr>
@@ -22479,7 +22527,7 @@
       </p:sp>
       <p:sp>
         <p:nvSpPr>
-          <p:cNvPr id="661" name=""/>
+          <p:cNvPr id="663" name=""/>
           <p:cNvSpPr/>
           <p:nvPr/>
         </p:nvSpPr>
@@ -22539,7 +22587,7 @@
       </p:sp>
       <p:sp>
         <p:nvSpPr>
-          <p:cNvPr id="662" name=""/>
+          <p:cNvPr id="664" name=""/>
           <p:cNvSpPr/>
           <p:nvPr/>
         </p:nvSpPr>
@@ -22599,7 +22647,7 @@
       </p:sp>
       <p:sp>
         <p:nvSpPr>
-          <p:cNvPr id="663" name=""/>
+          <p:cNvPr id="665" name=""/>
           <p:cNvSpPr/>
           <p:nvPr/>
         </p:nvSpPr>
@@ -22659,7 +22707,7 @@
       </p:sp>
       <p:sp>
         <p:nvSpPr>
-          <p:cNvPr id="664" name=""/>
+          <p:cNvPr id="666" name=""/>
           <p:cNvSpPr/>
           <p:nvPr/>
         </p:nvSpPr>
@@ -22719,7 +22767,7 @@
       </p:sp>
       <p:sp>
         <p:nvSpPr>
-          <p:cNvPr id="665" name=""/>
+          <p:cNvPr id="667" name=""/>
           <p:cNvSpPr/>
           <p:nvPr/>
         </p:nvSpPr>
@@ -22779,7 +22827,7 @@
       </p:sp>
       <p:sp>
         <p:nvSpPr>
-          <p:cNvPr id="666" name=""/>
+          <p:cNvPr id="668" name=""/>
           <p:cNvSpPr/>
           <p:nvPr/>
         </p:nvSpPr>
@@ -22839,7 +22887,7 @@
       </p:sp>
       <p:sp>
         <p:nvSpPr>
-          <p:cNvPr id="667" name=""/>
+          <p:cNvPr id="669" name=""/>
           <p:cNvSpPr/>
           <p:nvPr/>
         </p:nvSpPr>
@@ -22899,7 +22947,7 @@
       </p:sp>
       <p:sp>
         <p:nvSpPr>
-          <p:cNvPr id="668" name=""/>
+          <p:cNvPr id="670" name=""/>
           <p:cNvSpPr/>
           <p:nvPr/>
         </p:nvSpPr>
@@ -22959,7 +23007,7 @@
       </p:sp>
       <p:sp>
         <p:nvSpPr>
-          <p:cNvPr id="669" name=""/>
+          <p:cNvPr id="671" name=""/>
           <p:cNvSpPr/>
           <p:nvPr/>
         </p:nvSpPr>
@@ -23019,7 +23067,7 @@
       </p:sp>
       <p:sp>
         <p:nvSpPr>
-          <p:cNvPr id="670" name=""/>
+          <p:cNvPr id="672" name=""/>
           <p:cNvSpPr/>
           <p:nvPr/>
         </p:nvSpPr>
@@ -23079,7 +23127,7 @@
       </p:sp>
       <p:sp>
         <p:nvSpPr>
-          <p:cNvPr id="671" name=""/>
+          <p:cNvPr id="673" name=""/>
           <p:cNvSpPr/>
           <p:nvPr/>
         </p:nvSpPr>
@@ -23139,7 +23187,7 @@
       </p:sp>
       <p:sp>
         <p:nvSpPr>
-          <p:cNvPr id="672" name=""/>
+          <p:cNvPr id="674" name=""/>
           <p:cNvSpPr/>
           <p:nvPr/>
         </p:nvSpPr>
@@ -23199,7 +23247,7 @@
       </p:sp>
       <p:sp>
         <p:nvSpPr>
-          <p:cNvPr id="673" name=""/>
+          <p:cNvPr id="675" name=""/>
           <p:cNvSpPr/>
           <p:nvPr/>
         </p:nvSpPr>
@@ -23259,7 +23307,7 @@
       </p:sp>
       <p:sp>
         <p:nvSpPr>
-          <p:cNvPr id="674" name=""/>
+          <p:cNvPr id="676" name=""/>
           <p:cNvSpPr/>
           <p:nvPr/>
         </p:nvSpPr>
@@ -23319,7 +23367,7 @@
       </p:sp>
       <p:sp>
         <p:nvSpPr>
-          <p:cNvPr id="675" name=""/>
+          <p:cNvPr id="677" name=""/>
           <p:cNvSpPr/>
           <p:nvPr/>
         </p:nvSpPr>
@@ -23379,7 +23427,7 @@
       </p:sp>
       <p:sp>
         <p:nvSpPr>
-          <p:cNvPr id="676" name=""/>
+          <p:cNvPr id="678" name=""/>
           <p:cNvSpPr/>
           <p:nvPr/>
         </p:nvSpPr>
@@ -23439,7 +23487,7 @@
       </p:sp>
       <p:sp>
         <p:nvSpPr>
-          <p:cNvPr id="677" name=""/>
+          <p:cNvPr id="679" name=""/>
           <p:cNvSpPr/>
           <p:nvPr/>
         </p:nvSpPr>
@@ -23499,7 +23547,7 @@
       </p:sp>
       <p:sp>
         <p:nvSpPr>
-          <p:cNvPr id="678" name=""/>
+          <p:cNvPr id="680" name=""/>
           <p:cNvSpPr/>
           <p:nvPr/>
         </p:nvSpPr>
@@ -23559,7 +23607,7 @@
       </p:sp>
       <p:sp>
         <p:nvSpPr>
-          <p:cNvPr id="679" name=""/>
+          <p:cNvPr id="681" name=""/>
           <p:cNvSpPr/>
           <p:nvPr/>
         </p:nvSpPr>
@@ -23619,7 +23667,7 @@
       </p:sp>
       <p:sp>
         <p:nvSpPr>
-          <p:cNvPr id="680" name=""/>
+          <p:cNvPr id="682" name=""/>
           <p:cNvSpPr/>
           <p:nvPr/>
         </p:nvSpPr>
@@ -23679,7 +23727,7 @@
       </p:sp>
       <p:sp>
         <p:nvSpPr>
-          <p:cNvPr id="681" name=""/>
+          <p:cNvPr id="683" name=""/>
           <p:cNvSpPr/>
           <p:nvPr/>
         </p:nvSpPr>
@@ -23739,7 +23787,7 @@
       </p:sp>
       <p:sp>
         <p:nvSpPr>
-          <p:cNvPr id="682" name=""/>
+          <p:cNvPr id="684" name=""/>
           <p:cNvSpPr/>
           <p:nvPr/>
         </p:nvSpPr>
@@ -23799,7 +23847,7 @@
       </p:sp>
       <p:sp>
         <p:nvSpPr>
-          <p:cNvPr id="683" name=""/>
+          <p:cNvPr id="685" name=""/>
           <p:cNvSpPr/>
           <p:nvPr/>
         </p:nvSpPr>
@@ -23859,7 +23907,7 @@
       </p:sp>
       <p:sp>
         <p:nvSpPr>
-          <p:cNvPr id="684" name=""/>
+          <p:cNvPr id="686" name=""/>
           <p:cNvSpPr/>
           <p:nvPr/>
         </p:nvSpPr>
@@ -23919,7 +23967,7 @@
       </p:sp>
       <p:sp>
         <p:nvSpPr>
-          <p:cNvPr id="685" name=""/>
+          <p:cNvPr id="687" name=""/>
           <p:cNvSpPr/>
           <p:nvPr/>
         </p:nvSpPr>
@@ -23979,7 +24027,7 @@
       </p:sp>
       <p:sp>
         <p:nvSpPr>
-          <p:cNvPr id="686" name=""/>
+          <p:cNvPr id="688" name=""/>
           <p:cNvSpPr/>
           <p:nvPr/>
         </p:nvSpPr>
@@ -24039,7 +24087,7 @@
       </p:sp>
       <p:sp>
         <p:nvSpPr>
-          <p:cNvPr id="687" name=""/>
+          <p:cNvPr id="689" name=""/>
           <p:cNvSpPr/>
           <p:nvPr/>
         </p:nvSpPr>
@@ -24099,7 +24147,7 @@
       </p:sp>
       <p:sp>
         <p:nvSpPr>
-          <p:cNvPr id="688" name=""/>
+          <p:cNvPr id="690" name=""/>
           <p:cNvSpPr/>
           <p:nvPr/>
         </p:nvSpPr>
@@ -24159,7 +24207,7 @@
       </p:sp>
       <p:sp>
         <p:nvSpPr>
-          <p:cNvPr id="689" name=""/>
+          <p:cNvPr id="691" name=""/>
           <p:cNvSpPr/>
           <p:nvPr/>
         </p:nvSpPr>
@@ -24219,7 +24267,7 @@
       </p:sp>
       <p:sp>
         <p:nvSpPr>
-          <p:cNvPr id="690" name=""/>
+          <p:cNvPr id="692" name=""/>
           <p:cNvSpPr/>
           <p:nvPr/>
         </p:nvSpPr>
@@ -24279,7 +24327,7 @@
       </p:sp>
       <p:sp>
         <p:nvSpPr>
-          <p:cNvPr id="691" name=""/>
+          <p:cNvPr id="693" name=""/>
           <p:cNvSpPr/>
           <p:nvPr/>
         </p:nvSpPr>
@@ -24339,7 +24387,7 @@
       </p:sp>
       <p:sp>
         <p:nvSpPr>
-          <p:cNvPr id="692" name=""/>
+          <p:cNvPr id="694" name=""/>
           <p:cNvSpPr/>
           <p:nvPr/>
         </p:nvSpPr>
@@ -24399,7 +24447,7 @@
       </p:sp>
       <p:sp>
         <p:nvSpPr>
-          <p:cNvPr id="693" name=""/>
+          <p:cNvPr id="695" name=""/>
           <p:cNvSpPr/>
           <p:nvPr/>
         </p:nvSpPr>
@@ -24459,7 +24507,7 @@
       </p:sp>
       <p:sp>
         <p:nvSpPr>
-          <p:cNvPr id="694" name=""/>
+          <p:cNvPr id="696" name=""/>
           <p:cNvSpPr/>
           <p:nvPr/>
         </p:nvSpPr>
@@ -24519,7 +24567,7 @@
       </p:sp>
       <p:sp>
         <p:nvSpPr>
-          <p:cNvPr id="695" name=""/>
+          <p:cNvPr id="697" name=""/>
           <p:cNvSpPr/>
           <p:nvPr/>
         </p:nvSpPr>
@@ -24579,7 +24627,7 @@
       </p:sp>
       <p:sp>
         <p:nvSpPr>
-          <p:cNvPr id="696" name=""/>
+          <p:cNvPr id="698" name=""/>
           <p:cNvSpPr/>
           <p:nvPr/>
         </p:nvSpPr>
@@ -24639,7 +24687,7 @@
       </p:sp>
       <p:sp>
         <p:nvSpPr>
-          <p:cNvPr id="697" name=""/>
+          <p:cNvPr id="699" name=""/>
           <p:cNvSpPr/>
           <p:nvPr/>
         </p:nvSpPr>
@@ -24699,7 +24747,7 @@
       </p:sp>
       <p:sp>
         <p:nvSpPr>
-          <p:cNvPr id="698" name=""/>
+          <p:cNvPr id="700" name=""/>
           <p:cNvSpPr/>
           <p:nvPr/>
         </p:nvSpPr>
@@ -24759,7 +24807,7 @@
       </p:sp>
       <p:sp>
         <p:nvSpPr>
-          <p:cNvPr id="699" name=""/>
+          <p:cNvPr id="701" name=""/>
           <p:cNvSpPr/>
           <p:nvPr/>
         </p:nvSpPr>
@@ -24819,7 +24867,7 @@
       </p:sp>
       <p:sp>
         <p:nvSpPr>
-          <p:cNvPr id="700" name=""/>
+          <p:cNvPr id="702" name=""/>
           <p:cNvSpPr/>
           <p:nvPr/>
         </p:nvSpPr>
@@ -24879,7 +24927,7 @@
       </p:sp>
       <p:sp>
         <p:nvSpPr>
-          <p:cNvPr id="701" name=""/>
+          <p:cNvPr id="703" name=""/>
           <p:cNvSpPr/>
           <p:nvPr/>
         </p:nvSpPr>
@@ -24939,7 +24987,7 @@
       </p:sp>
       <p:sp>
         <p:nvSpPr>
-          <p:cNvPr id="702" name=""/>
+          <p:cNvPr id="704" name=""/>
           <p:cNvSpPr/>
           <p:nvPr/>
         </p:nvSpPr>
@@ -24999,7 +25047,7 @@
       </p:sp>
       <p:sp>
         <p:nvSpPr>
-          <p:cNvPr id="703" name=""/>
+          <p:cNvPr id="705" name=""/>
           <p:cNvSpPr/>
           <p:nvPr/>
         </p:nvSpPr>
@@ -25059,7 +25107,7 @@
       </p:sp>
       <p:sp>
         <p:nvSpPr>
-          <p:cNvPr id="704" name=""/>
+          <p:cNvPr id="706" name=""/>
           <p:cNvSpPr/>
           <p:nvPr/>
         </p:nvSpPr>
@@ -25119,7 +25167,7 @@
       </p:sp>
       <p:sp>
         <p:nvSpPr>
-          <p:cNvPr id="705" name=""/>
+          <p:cNvPr id="707" name=""/>
           <p:cNvSpPr/>
           <p:nvPr/>
         </p:nvSpPr>
@@ -25179,7 +25227,7 @@
       </p:sp>
       <p:sp>
         <p:nvSpPr>
-          <p:cNvPr id="706" name=""/>
+          <p:cNvPr id="708" name=""/>
           <p:cNvSpPr/>
           <p:nvPr/>
         </p:nvSpPr>
@@ -25239,7 +25287,7 @@
       </p:sp>
       <p:sp>
         <p:nvSpPr>
-          <p:cNvPr id="707" name=""/>
+          <p:cNvPr id="709" name=""/>
           <p:cNvSpPr/>
           <p:nvPr/>
         </p:nvSpPr>
@@ -25299,7 +25347,7 @@
       </p:sp>
       <p:sp>
         <p:nvSpPr>
-          <p:cNvPr id="708" name=""/>
+          <p:cNvPr id="710" name=""/>
           <p:cNvSpPr/>
           <p:nvPr/>
         </p:nvSpPr>
@@ -25359,7 +25407,7 @@
       </p:sp>
       <p:sp>
         <p:nvSpPr>
-          <p:cNvPr id="709" name=""/>
+          <p:cNvPr id="711" name=""/>
           <p:cNvSpPr/>
           <p:nvPr/>
         </p:nvSpPr>
@@ -25419,7 +25467,7 @@
       </p:sp>
       <p:sp>
         <p:nvSpPr>
-          <p:cNvPr id="710" name=""/>
+          <p:cNvPr id="712" name=""/>
           <p:cNvSpPr/>
           <p:nvPr/>
         </p:nvSpPr>
@@ -25479,7 +25527,7 @@
       </p:sp>
       <p:sp>
         <p:nvSpPr>
-          <p:cNvPr id="711" name=""/>
+          <p:cNvPr id="713" name=""/>
           <p:cNvSpPr/>
           <p:nvPr/>
         </p:nvSpPr>
@@ -25539,7 +25587,7 @@
       </p:sp>
       <p:sp>
         <p:nvSpPr>
-          <p:cNvPr id="712" name=""/>
+          <p:cNvPr id="714" name=""/>
           <p:cNvSpPr/>
           <p:nvPr/>
         </p:nvSpPr>
@@ -25599,7 +25647,7 @@
       </p:sp>
       <p:sp>
         <p:nvSpPr>
-          <p:cNvPr id="713" name=""/>
+          <p:cNvPr id="715" name=""/>
           <p:cNvSpPr/>
           <p:nvPr/>
         </p:nvSpPr>
@@ -25659,7 +25707,7 @@
       </p:sp>
       <p:sp>
         <p:nvSpPr>
-          <p:cNvPr id="714" name=""/>
+          <p:cNvPr id="716" name=""/>
           <p:cNvSpPr/>
           <p:nvPr/>
         </p:nvSpPr>
@@ -25719,7 +25767,7 @@
       </p:sp>
       <p:sp>
         <p:nvSpPr>
-          <p:cNvPr id="715" name=""/>
+          <p:cNvPr id="717" name=""/>
           <p:cNvSpPr/>
           <p:nvPr/>
         </p:nvSpPr>
@@ -25779,7 +25827,7 @@
       </p:sp>
       <p:sp>
         <p:nvSpPr>
-          <p:cNvPr id="716" name=""/>
+          <p:cNvPr id="718" name=""/>
           <p:cNvSpPr/>
           <p:nvPr/>
         </p:nvSpPr>
@@ -25839,7 +25887,7 @@
       </p:sp>
       <p:sp>
         <p:nvSpPr>
-          <p:cNvPr id="717" name=""/>
+          <p:cNvPr id="719" name=""/>
           <p:cNvSpPr/>
           <p:nvPr/>
         </p:nvSpPr>
@@ -25899,7 +25947,7 @@
       </p:sp>
       <p:sp>
         <p:nvSpPr>
-          <p:cNvPr id="718" name=""/>
+          <p:cNvPr id="720" name=""/>
           <p:cNvSpPr/>
           <p:nvPr/>
         </p:nvSpPr>
@@ -25959,7 +26007,7 @@
       </p:sp>
       <p:sp>
         <p:nvSpPr>
-          <p:cNvPr id="719" name=""/>
+          <p:cNvPr id="721" name=""/>
           <p:cNvSpPr/>
           <p:nvPr/>
         </p:nvSpPr>
@@ -26019,7 +26067,7 @@
       </p:sp>
       <p:sp>
         <p:nvSpPr>
-          <p:cNvPr id="720" name=""/>
+          <p:cNvPr id="722" name=""/>
           <p:cNvSpPr/>
           <p:nvPr/>
         </p:nvSpPr>
@@ -26079,7 +26127,7 @@
       </p:sp>
       <p:sp>
         <p:nvSpPr>
-          <p:cNvPr id="721" name=""/>
+          <p:cNvPr id="723" name=""/>
           <p:cNvSpPr/>
           <p:nvPr/>
         </p:nvSpPr>
@@ -26139,7 +26187,7 @@
       </p:sp>
       <p:sp>
         <p:nvSpPr>
-          <p:cNvPr id="722" name=""/>
+          <p:cNvPr id="724" name=""/>
           <p:cNvSpPr/>
           <p:nvPr/>
         </p:nvSpPr>
@@ -26199,7 +26247,7 @@
       </p:sp>
       <p:sp>
         <p:nvSpPr>
-          <p:cNvPr id="723" name=""/>
+          <p:cNvPr id="725" name=""/>
           <p:cNvSpPr/>
           <p:nvPr/>
         </p:nvSpPr>
@@ -26259,7 +26307,7 @@
       </p:sp>
       <p:sp>
         <p:nvSpPr>
-          <p:cNvPr id="724" name=""/>
+          <p:cNvPr id="726" name=""/>
           <p:cNvSpPr/>
           <p:nvPr/>
         </p:nvSpPr>
@@ -26319,7 +26367,7 @@
       </p:sp>
       <p:sp>
         <p:nvSpPr>
-          <p:cNvPr id="725" name=""/>
+          <p:cNvPr id="727" name=""/>
           <p:cNvSpPr/>
           <p:nvPr/>
         </p:nvSpPr>
@@ -26379,7 +26427,7 @@
       </p:sp>
       <p:sp>
         <p:nvSpPr>
-          <p:cNvPr id="726" name=""/>
+          <p:cNvPr id="728" name=""/>
           <p:cNvSpPr/>
           <p:nvPr/>
         </p:nvSpPr>
@@ -26439,7 +26487,7 @@
       </p:sp>
       <p:sp>
         <p:nvSpPr>
-          <p:cNvPr id="727" name=""/>
+          <p:cNvPr id="729" name=""/>
           <p:cNvSpPr/>
           <p:nvPr/>
         </p:nvSpPr>
@@ -26499,7 +26547,7 @@
       </p:sp>
       <p:sp>
         <p:nvSpPr>
-          <p:cNvPr id="728" name=""/>
+          <p:cNvPr id="730" name=""/>
           <p:cNvSpPr/>
           <p:nvPr/>
         </p:nvSpPr>
@@ -26559,7 +26607,7 @@
       </p:sp>
       <p:sp>
         <p:nvSpPr>
-          <p:cNvPr id="729" name=""/>
+          <p:cNvPr id="731" name=""/>
           <p:cNvSpPr/>
           <p:nvPr/>
         </p:nvSpPr>
@@ -26619,7 +26667,7 @@
       </p:sp>
       <p:sp>
         <p:nvSpPr>
-          <p:cNvPr id="730" name=""/>
+          <p:cNvPr id="732" name=""/>
           <p:cNvSpPr/>
           <p:nvPr/>
         </p:nvSpPr>
@@ -26679,7 +26727,7 @@
       </p:sp>
       <p:sp>
         <p:nvSpPr>
-          <p:cNvPr id="731" name=""/>
+          <p:cNvPr id="733" name=""/>
           <p:cNvSpPr/>
           <p:nvPr/>
         </p:nvSpPr>
@@ -26739,7 +26787,7 @@
       </p:sp>
       <p:sp>
         <p:nvSpPr>
-          <p:cNvPr id="732" name=""/>
+          <p:cNvPr id="734" name=""/>
           <p:cNvSpPr/>
           <p:nvPr/>
         </p:nvSpPr>
@@ -26799,7 +26847,7 @@
       </p:sp>
       <p:sp>
         <p:nvSpPr>
-          <p:cNvPr id="733" name=""/>
+          <p:cNvPr id="735" name=""/>
           <p:cNvSpPr/>
           <p:nvPr/>
         </p:nvSpPr>
@@ -26859,7 +26907,7 @@
       </p:sp>
       <p:sp>
         <p:nvSpPr>
-          <p:cNvPr id="734" name=""/>
+          <p:cNvPr id="736" name=""/>
           <p:cNvSpPr/>
           <p:nvPr/>
         </p:nvSpPr>
@@ -26919,7 +26967,7 @@
       </p:sp>
       <p:sp>
         <p:nvSpPr>
-          <p:cNvPr id="735" name=""/>
+          <p:cNvPr id="737" name=""/>
           <p:cNvSpPr/>
           <p:nvPr/>
         </p:nvSpPr>
@@ -26979,7 +27027,7 @@
       </p:sp>
       <p:sp>
         <p:nvSpPr>
-          <p:cNvPr id="736" name=""/>
+          <p:cNvPr id="738" name=""/>
           <p:cNvSpPr/>
           <p:nvPr/>
         </p:nvSpPr>
@@ -27039,7 +27087,7 @@
       </p:sp>
       <p:sp>
         <p:nvSpPr>
-          <p:cNvPr id="737" name=""/>
+          <p:cNvPr id="739" name=""/>
           <p:cNvSpPr/>
           <p:nvPr/>
         </p:nvSpPr>
@@ -27099,7 +27147,7 @@
       </p:sp>
       <p:sp>
         <p:nvSpPr>
-          <p:cNvPr id="738" name=""/>
+          <p:cNvPr id="740" name=""/>
           <p:cNvSpPr/>
           <p:nvPr/>
         </p:nvSpPr>
@@ -27159,7 +27207,7 @@
       </p:sp>
       <p:sp>
         <p:nvSpPr>
-          <p:cNvPr id="739" name=""/>
+          <p:cNvPr id="741" name=""/>
           <p:cNvSpPr/>
           <p:nvPr/>
         </p:nvSpPr>
@@ -27219,7 +27267,7 @@
       </p:sp>
       <p:sp>
         <p:nvSpPr>
-          <p:cNvPr id="740" name=""/>
+          <p:cNvPr id="742" name=""/>
           <p:cNvSpPr/>
           <p:nvPr/>
         </p:nvSpPr>
@@ -27279,7 +27327,7 @@
       </p:sp>
       <p:sp>
         <p:nvSpPr>
-          <p:cNvPr id="741" name=""/>
+          <p:cNvPr id="743" name=""/>
           <p:cNvSpPr/>
           <p:nvPr/>
         </p:nvSpPr>
@@ -27339,7 +27387,7 @@
       </p:sp>
       <p:sp>
         <p:nvSpPr>
-          <p:cNvPr id="742" name=""/>
+          <p:cNvPr id="744" name=""/>
           <p:cNvSpPr/>
           <p:nvPr/>
         </p:nvSpPr>
@@ -27399,7 +27447,7 @@
       </p:sp>
       <p:sp>
         <p:nvSpPr>
-          <p:cNvPr id="743" name=""/>
+          <p:cNvPr id="745" name=""/>
           <p:cNvSpPr txBox="1"/>
           <p:nvPr/>
         </p:nvSpPr>
@@ -27447,7 +27495,7 @@
       </p:sp>
       <p:sp>
         <p:nvSpPr>
-          <p:cNvPr id="744" name=""/>
+          <p:cNvPr id="746" name=""/>
           <p:cNvSpPr txBox="1"/>
           <p:nvPr/>
         </p:nvSpPr>
@@ -27495,7 +27543,7 @@
       </p:sp>
       <p:sp>
         <p:nvSpPr>
-          <p:cNvPr id="745" name=""/>
+          <p:cNvPr id="747" name=""/>
           <p:cNvSpPr txBox="1"/>
           <p:nvPr/>
         </p:nvSpPr>
@@ -27543,7 +27591,7 @@
       </p:sp>
       <p:sp>
         <p:nvSpPr>
-          <p:cNvPr id="746" name=""/>
+          <p:cNvPr id="748" name=""/>
           <p:cNvSpPr txBox="1"/>
           <p:nvPr/>
         </p:nvSpPr>
@@ -27591,7 +27639,7 @@
       </p:sp>
       <p:sp>
         <p:nvSpPr>
-          <p:cNvPr id="747" name=""/>
+          <p:cNvPr id="749" name=""/>
           <p:cNvSpPr txBox="1"/>
           <p:nvPr/>
         </p:nvSpPr>
@@ -27639,7 +27687,7 @@
       </p:sp>
       <p:sp>
         <p:nvSpPr>
-          <p:cNvPr id="748" name=""/>
+          <p:cNvPr id="750" name=""/>
           <p:cNvSpPr txBox="1"/>
           <p:nvPr/>
         </p:nvSpPr>
@@ -27687,7 +27735,7 @@
       </p:sp>
       <p:sp>
         <p:nvSpPr>
-          <p:cNvPr id="749" name=""/>
+          <p:cNvPr id="751" name=""/>
           <p:cNvSpPr txBox="1"/>
           <p:nvPr/>
         </p:nvSpPr>
@@ -27735,7 +27783,7 @@
       </p:sp>
       <p:sp>
         <p:nvSpPr>
-          <p:cNvPr id="750" name=""/>
+          <p:cNvPr id="752" name=""/>
           <p:cNvSpPr txBox="1"/>
           <p:nvPr/>
         </p:nvSpPr>
@@ -27783,7 +27831,7 @@
       </p:sp>
       <p:sp>
         <p:nvSpPr>
-          <p:cNvPr id="751" name=""/>
+          <p:cNvPr id="753" name=""/>
           <p:cNvSpPr txBox="1"/>
           <p:nvPr/>
         </p:nvSpPr>
@@ -27831,7 +27879,7 @@
       </p:sp>
       <p:sp>
         <p:nvSpPr>
-          <p:cNvPr id="752" name=""/>
+          <p:cNvPr id="754" name=""/>
           <p:cNvSpPr txBox="1"/>
           <p:nvPr/>
         </p:nvSpPr>
@@ -27879,7 +27927,7 @@
       </p:sp>
       <p:sp>
         <p:nvSpPr>
-          <p:cNvPr id="753" name=""/>
+          <p:cNvPr id="755" name=""/>
           <p:cNvSpPr txBox="1"/>
           <p:nvPr/>
         </p:nvSpPr>
@@ -27927,7 +27975,7 @@
       </p:sp>
       <p:sp>
         <p:nvSpPr>
-          <p:cNvPr id="754" name=""/>
+          <p:cNvPr id="756" name=""/>
           <p:cNvSpPr txBox="1"/>
           <p:nvPr/>
         </p:nvSpPr>
@@ -27975,7 +28023,7 @@
       </p:sp>
       <p:sp>
         <p:nvSpPr>
-          <p:cNvPr id="755" name=""/>
+          <p:cNvPr id="757" name=""/>
           <p:cNvSpPr txBox="1"/>
           <p:nvPr/>
         </p:nvSpPr>
@@ -28023,7 +28071,7 @@
       </p:sp>
       <p:sp>
         <p:nvSpPr>
-          <p:cNvPr id="756" name=""/>
+          <p:cNvPr id="758" name=""/>
           <p:cNvSpPr txBox="1"/>
           <p:nvPr/>
         </p:nvSpPr>
@@ -28071,7 +28119,7 @@
       </p:sp>
       <p:sp>
         <p:nvSpPr>
-          <p:cNvPr id="757" name=""/>
+          <p:cNvPr id="759" name=""/>
           <p:cNvSpPr txBox="1"/>
           <p:nvPr/>
         </p:nvSpPr>
@@ -28119,7 +28167,7 @@
       </p:sp>
       <p:sp>
         <p:nvSpPr>
-          <p:cNvPr id="758" name=""/>
+          <p:cNvPr id="760" name=""/>
           <p:cNvSpPr txBox="1"/>
           <p:nvPr/>
         </p:nvSpPr>
@@ -28167,7 +28215,7 @@
       </p:sp>
       <p:sp>
         <p:nvSpPr>
-          <p:cNvPr id="759" name=""/>
+          <p:cNvPr id="761" name=""/>
           <p:cNvSpPr txBox="1"/>
           <p:nvPr/>
         </p:nvSpPr>
@@ -28215,7 +28263,7 @@
       </p:sp>
       <p:sp>
         <p:nvSpPr>
-          <p:cNvPr id="760" name=""/>
+          <p:cNvPr id="762" name=""/>
           <p:cNvSpPr txBox="1"/>
           <p:nvPr/>
         </p:nvSpPr>
@@ -28263,7 +28311,7 @@
       </p:sp>
       <p:sp>
         <p:nvSpPr>
-          <p:cNvPr id="761" name=""/>
+          <p:cNvPr id="763" name=""/>
           <p:cNvSpPr txBox="1"/>
           <p:nvPr/>
         </p:nvSpPr>
@@ -28311,7 +28359,7 @@
       </p:sp>
       <p:sp>
         <p:nvSpPr>
-          <p:cNvPr id="762" name=""/>
+          <p:cNvPr id="764" name=""/>
           <p:cNvSpPr txBox="1"/>
           <p:nvPr/>
         </p:nvSpPr>
@@ -28359,7 +28407,7 @@
       </p:sp>
       <p:sp>
         <p:nvSpPr>
-          <p:cNvPr id="763" name=""/>
+          <p:cNvPr id="765" name=""/>
           <p:cNvSpPr txBox="1"/>
           <p:nvPr/>
         </p:nvSpPr>
@@ -28407,7 +28455,7 @@
       </p:sp>
       <p:sp>
         <p:nvSpPr>
-          <p:cNvPr id="764" name=""/>
+          <p:cNvPr id="766" name=""/>
           <p:cNvSpPr txBox="1"/>
           <p:nvPr/>
         </p:nvSpPr>
@@ -28455,7 +28503,7 @@
       </p:sp>
       <p:sp>
         <p:nvSpPr>
-          <p:cNvPr id="765" name=""/>
+          <p:cNvPr id="767" name=""/>
           <p:cNvSpPr txBox="1"/>
           <p:nvPr/>
         </p:nvSpPr>
@@ -28503,7 +28551,7 @@
       </p:sp>
       <p:sp>
         <p:nvSpPr>
-          <p:cNvPr id="766" name=""/>
+          <p:cNvPr id="768" name=""/>
           <p:cNvSpPr txBox="1"/>
           <p:nvPr/>
         </p:nvSpPr>
@@ -28551,7 +28599,7 @@
       </p:sp>
       <p:sp>
         <p:nvSpPr>
-          <p:cNvPr id="767" name=""/>
+          <p:cNvPr id="769" name=""/>
           <p:cNvSpPr txBox="1"/>
           <p:nvPr/>
         </p:nvSpPr>
@@ -28599,7 +28647,7 @@
       </p:sp>
       <p:sp>
         <p:nvSpPr>
-          <p:cNvPr id="768" name=""/>
+          <p:cNvPr id="770" name=""/>
           <p:cNvSpPr txBox="1"/>
           <p:nvPr/>
         </p:nvSpPr>
@@ -28647,7 +28695,7 @@
       </p:sp>
       <p:sp>
         <p:nvSpPr>
-          <p:cNvPr id="769" name=""/>
+          <p:cNvPr id="771" name=""/>
           <p:cNvSpPr txBox="1"/>
           <p:nvPr/>
         </p:nvSpPr>
@@ -28695,7 +28743,7 @@
       </p:sp>
       <p:sp>
         <p:nvSpPr>
-          <p:cNvPr id="770" name=""/>
+          <p:cNvPr id="772" name=""/>
           <p:cNvSpPr txBox="1"/>
           <p:nvPr/>
         </p:nvSpPr>
@@ -28743,7 +28791,7 @@
       </p:sp>
       <p:sp>
         <p:nvSpPr>
-          <p:cNvPr id="771" name=""/>
+          <p:cNvPr id="773" name=""/>
           <p:cNvSpPr txBox="1"/>
           <p:nvPr/>
         </p:nvSpPr>
@@ -28791,7 +28839,7 @@
       </p:sp>
       <p:sp>
         <p:nvSpPr>
-          <p:cNvPr id="772" name=""/>
+          <p:cNvPr id="774" name=""/>
           <p:cNvSpPr txBox="1"/>
           <p:nvPr/>
         </p:nvSpPr>
@@ -28839,7 +28887,7 @@
       </p:sp>
       <p:sp>
         <p:nvSpPr>
-          <p:cNvPr id="773" name=""/>
+          <p:cNvPr id="775" name=""/>
           <p:cNvSpPr txBox="1"/>
           <p:nvPr/>
         </p:nvSpPr>
@@ -28887,7 +28935,7 @@
       </p:sp>
       <p:sp>
         <p:nvSpPr>
-          <p:cNvPr id="774" name=""/>
+          <p:cNvPr id="776" name=""/>
           <p:cNvSpPr txBox="1"/>
           <p:nvPr/>
         </p:nvSpPr>
@@ -28935,7 +28983,7 @@
       </p:sp>
       <p:sp>
         <p:nvSpPr>
-          <p:cNvPr id="775" name=""/>
+          <p:cNvPr id="777" name=""/>
           <p:cNvSpPr txBox="1"/>
           <p:nvPr/>
         </p:nvSpPr>
@@ -28983,7 +29031,7 @@
       </p:sp>
       <p:sp>
         <p:nvSpPr>
-          <p:cNvPr id="776" name=""/>
+          <p:cNvPr id="778" name=""/>
           <p:cNvSpPr txBox="1"/>
           <p:nvPr/>
         </p:nvSpPr>
@@ -29031,7 +29079,7 @@
       </p:sp>
       <p:sp>
         <p:nvSpPr>
-          <p:cNvPr id="777" name=""/>
+          <p:cNvPr id="779" name=""/>
           <p:cNvSpPr txBox="1"/>
           <p:nvPr/>
         </p:nvSpPr>
@@ -29079,7 +29127,7 @@
       </p:sp>
       <p:sp>
         <p:nvSpPr>
-          <p:cNvPr id="778" name=""/>
+          <p:cNvPr id="780" name=""/>
           <p:cNvSpPr txBox="1"/>
           <p:nvPr/>
         </p:nvSpPr>
@@ -29127,7 +29175,7 @@
       </p:sp>
       <p:sp>
         <p:nvSpPr>
-          <p:cNvPr id="779" name=""/>
+          <p:cNvPr id="781" name=""/>
           <p:cNvSpPr txBox="1"/>
           <p:nvPr/>
         </p:nvSpPr>
@@ -29175,7 +29223,7 @@
       </p:sp>
       <p:sp>
         <p:nvSpPr>
-          <p:cNvPr id="780" name=""/>
+          <p:cNvPr id="782" name=""/>
           <p:cNvSpPr txBox="1"/>
           <p:nvPr/>
         </p:nvSpPr>
@@ -29223,7 +29271,7 @@
       </p:sp>
       <p:sp>
         <p:nvSpPr>
-          <p:cNvPr id="781" name=""/>
+          <p:cNvPr id="783" name=""/>
           <p:cNvSpPr txBox="1"/>
           <p:nvPr/>
         </p:nvSpPr>
@@ -29271,7 +29319,7 @@
       </p:sp>
       <p:sp>
         <p:nvSpPr>
-          <p:cNvPr id="782" name=""/>
+          <p:cNvPr id="784" name=""/>
           <p:cNvSpPr txBox="1"/>
           <p:nvPr/>
         </p:nvSpPr>
@@ -29319,7 +29367,7 @@
       </p:sp>
       <p:sp>
         <p:nvSpPr>
-          <p:cNvPr id="783" name=""/>
+          <p:cNvPr id="785" name=""/>
           <p:cNvSpPr/>
           <p:nvPr/>
         </p:nvSpPr>
@@ -29459,7 +29507,7 @@
       </p:sp>
       <p:sp>
         <p:nvSpPr>
-          <p:cNvPr id="784" name=""/>
+          <p:cNvPr id="786" name=""/>
           <p:cNvSpPr txBox="1"/>
           <p:nvPr/>
         </p:nvSpPr>
@@ -29507,7 +29555,7 @@
       </p:sp>
       <p:sp>
         <p:nvSpPr>
-          <p:cNvPr id="785" name=""/>
+          <p:cNvPr id="787" name=""/>
           <p:cNvSpPr/>
           <p:nvPr/>
         </p:nvSpPr>
@@ -29647,7 +29695,7 @@
       </p:sp>
       <p:sp>
         <p:nvSpPr>
-          <p:cNvPr id="786" name=""/>
+          <p:cNvPr id="788" name=""/>
           <p:cNvSpPr txBox="1"/>
           <p:nvPr/>
         </p:nvSpPr>
@@ -29695,7 +29743,7 @@
       </p:sp>
       <p:sp>
         <p:nvSpPr>
-          <p:cNvPr id="787" name=""/>
+          <p:cNvPr id="789" name=""/>
           <p:cNvSpPr txBox="1"/>
           <p:nvPr/>
         </p:nvSpPr>
@@ -29743,7 +29791,7 @@
       </p:sp>
       <p:sp>
         <p:nvSpPr>
-          <p:cNvPr id="788" name=""/>
+          <p:cNvPr id="790" name=""/>
           <p:cNvSpPr txBox="1"/>
           <p:nvPr/>
         </p:nvSpPr>
@@ -29791,7 +29839,7 @@
       </p:sp>
       <p:sp>
         <p:nvSpPr>
-          <p:cNvPr id="789" name=""/>
+          <p:cNvPr id="791" name=""/>
           <p:cNvSpPr txBox="1"/>
           <p:nvPr/>
         </p:nvSpPr>
@@ -29839,7 +29887,7 @@
       </p:sp>
       <p:sp>
         <p:nvSpPr>
-          <p:cNvPr id="790" name=""/>
+          <p:cNvPr id="792" name=""/>
           <p:cNvSpPr txBox="1"/>
           <p:nvPr/>
         </p:nvSpPr>
@@ -29887,7 +29935,7 @@
       </p:sp>
       <p:sp>
         <p:nvSpPr>
-          <p:cNvPr id="791" name=""/>
+          <p:cNvPr id="793" name=""/>
           <p:cNvSpPr txBox="1"/>
           <p:nvPr/>
         </p:nvSpPr>
@@ -29935,7 +29983,7 @@
       </p:sp>
       <p:sp>
         <p:nvSpPr>
-          <p:cNvPr id="792" name=""/>
+          <p:cNvPr id="794" name=""/>
           <p:cNvSpPr txBox="1"/>
           <p:nvPr/>
         </p:nvSpPr>
@@ -29983,7 +30031,7 @@
       </p:sp>
       <p:sp>
         <p:nvSpPr>
-          <p:cNvPr id="793" name=""/>
+          <p:cNvPr id="795" name=""/>
           <p:cNvSpPr txBox="1"/>
           <p:nvPr/>
         </p:nvSpPr>
@@ -30031,7 +30079,7 @@
       </p:sp>
       <p:sp>
         <p:nvSpPr>
-          <p:cNvPr id="794" name=""/>
+          <p:cNvPr id="796" name=""/>
           <p:cNvSpPr txBox="1"/>
           <p:nvPr/>
         </p:nvSpPr>
@@ -30079,7 +30127,7 @@
       </p:sp>
       <p:sp>
         <p:nvSpPr>
-          <p:cNvPr id="795" name=""/>
+          <p:cNvPr id="797" name=""/>
           <p:cNvSpPr txBox="1"/>
           <p:nvPr/>
         </p:nvSpPr>
@@ -30127,7 +30175,7 @@
       </p:sp>
       <p:sp>
         <p:nvSpPr>
-          <p:cNvPr id="796" name=""/>
+          <p:cNvPr id="798" name=""/>
           <p:cNvSpPr txBox="1"/>
           <p:nvPr/>
         </p:nvSpPr>
@@ -30175,7 +30223,7 @@
       </p:sp>
       <p:sp>
         <p:nvSpPr>
-          <p:cNvPr id="797" name=""/>
+          <p:cNvPr id="799" name=""/>
           <p:cNvSpPr txBox="1"/>
           <p:nvPr/>
         </p:nvSpPr>
@@ -30223,7 +30271,7 @@
       </p:sp>
       <p:sp>
         <p:nvSpPr>
-          <p:cNvPr id="798" name=""/>
+          <p:cNvPr id="800" name=""/>
           <p:cNvSpPr txBox="1"/>
           <p:nvPr/>
         </p:nvSpPr>
@@ -30271,7 +30319,7 @@
       </p:sp>
       <p:sp>
         <p:nvSpPr>
-          <p:cNvPr id="799" name=""/>
+          <p:cNvPr id="801" name=""/>
           <p:cNvSpPr txBox="1"/>
           <p:nvPr/>
         </p:nvSpPr>
@@ -30319,7 +30367,7 @@
       </p:sp>
       <p:sp>
         <p:nvSpPr>
-          <p:cNvPr id="800" name=""/>
+          <p:cNvPr id="802" name=""/>
           <p:cNvSpPr txBox="1"/>
           <p:nvPr/>
         </p:nvSpPr>
@@ -30367,7 +30415,7 @@
       </p:sp>
       <p:sp>
         <p:nvSpPr>
-          <p:cNvPr id="801" name=""/>
+          <p:cNvPr id="803" name=""/>
           <p:cNvSpPr txBox="1"/>
           <p:nvPr/>
         </p:nvSpPr>
@@ -30415,7 +30463,7 @@
       </p:sp>
       <p:sp>
         <p:nvSpPr>
-          <p:cNvPr id="802" name=""/>
+          <p:cNvPr id="804" name=""/>
           <p:cNvSpPr txBox="1"/>
           <p:nvPr/>
         </p:nvSpPr>
@@ -30463,7 +30511,7 @@
       </p:sp>
       <p:sp>
         <p:nvSpPr>
-          <p:cNvPr id="803" name=""/>
+          <p:cNvPr id="805" name=""/>
           <p:cNvSpPr txBox="1"/>
           <p:nvPr/>
         </p:nvSpPr>
@@ -30511,7 +30559,7 @@
       </p:sp>
       <p:sp>
         <p:nvSpPr>
-          <p:cNvPr id="804" name=""/>
+          <p:cNvPr id="806" name=""/>
           <p:cNvSpPr txBox="1"/>
           <p:nvPr/>
         </p:nvSpPr>
@@ -30559,7 +30607,7 @@
       </p:sp>
       <p:sp>
         <p:nvSpPr>
-          <p:cNvPr id="805" name=""/>
+          <p:cNvPr id="807" name=""/>
           <p:cNvSpPr txBox="1"/>
           <p:nvPr/>
         </p:nvSpPr>
@@ -30607,7 +30655,7 @@
       </p:sp>
       <p:sp>
         <p:nvSpPr>
-          <p:cNvPr id="806" name=""/>
+          <p:cNvPr id="808" name=""/>
           <p:cNvSpPr txBox="1"/>
           <p:nvPr/>
         </p:nvSpPr>
@@ -30655,7 +30703,7 @@
       </p:sp>
       <p:sp>
         <p:nvSpPr>
-          <p:cNvPr id="807" name=""/>
+          <p:cNvPr id="809" name=""/>
           <p:cNvSpPr txBox="1"/>
           <p:nvPr/>
         </p:nvSpPr>
@@ -30703,7 +30751,7 @@
       </p:sp>
       <p:sp>
         <p:nvSpPr>
-          <p:cNvPr id="808" name=""/>
+          <p:cNvPr id="810" name=""/>
           <p:cNvSpPr txBox="1"/>
           <p:nvPr/>
         </p:nvSpPr>
@@ -30751,7 +30799,7 @@
       </p:sp>
       <p:sp>
         <p:nvSpPr>
-          <p:cNvPr id="809" name=""/>
+          <p:cNvPr id="811" name=""/>
           <p:cNvSpPr txBox="1"/>
           <p:nvPr/>
         </p:nvSpPr>
@@ -30799,7 +30847,7 @@
       </p:sp>
       <p:sp>
         <p:nvSpPr>
-          <p:cNvPr id="810" name=""/>
+          <p:cNvPr id="812" name=""/>
           <p:cNvSpPr txBox="1"/>
           <p:nvPr/>
         </p:nvSpPr>
@@ -30847,7 +30895,7 @@
       </p:sp>
       <p:sp>
         <p:nvSpPr>
-          <p:cNvPr id="811" name=""/>
+          <p:cNvPr id="813" name=""/>
           <p:cNvSpPr txBox="1"/>
           <p:nvPr/>
         </p:nvSpPr>
@@ -30895,7 +30943,7 @@
       </p:sp>
       <p:sp>
         <p:nvSpPr>
-          <p:cNvPr id="812" name=""/>
+          <p:cNvPr id="814" name=""/>
           <p:cNvSpPr txBox="1"/>
           <p:nvPr/>
         </p:nvSpPr>
@@ -30943,7 +30991,7 @@
       </p:sp>
       <p:sp>
         <p:nvSpPr>
-          <p:cNvPr id="813" name=""/>
+          <p:cNvPr id="815" name=""/>
           <p:cNvSpPr txBox="1"/>
           <p:nvPr/>
         </p:nvSpPr>
@@ -30991,7 +31039,7 @@
       </p:sp>
       <p:sp>
         <p:nvSpPr>
-          <p:cNvPr id="814" name=""/>
+          <p:cNvPr id="816" name=""/>
           <p:cNvSpPr txBox="1"/>
           <p:nvPr/>
         </p:nvSpPr>
@@ -31039,7 +31087,7 @@
       </p:sp>
       <p:sp>
         <p:nvSpPr>
-          <p:cNvPr id="815" name=""/>
+          <p:cNvPr id="817" name=""/>
           <p:cNvSpPr txBox="1"/>
           <p:nvPr/>
         </p:nvSpPr>
@@ -31117,7 +31165,7 @@
       </p:grpSpPr>
       <p:sp>
         <p:nvSpPr>
-          <p:cNvPr id="816" name=""/>
+          <p:cNvPr id="818" name=""/>
           <p:cNvSpPr/>
           <p:nvPr/>
         </p:nvSpPr>
@@ -31177,7 +31225,7 @@
       </p:sp>
       <p:sp>
         <p:nvSpPr>
-          <p:cNvPr id="817" name=""/>
+          <p:cNvPr id="819" name=""/>
           <p:cNvSpPr/>
           <p:nvPr/>
         </p:nvSpPr>
@@ -31237,7 +31285,7 @@
       </p:sp>
       <p:sp>
         <p:nvSpPr>
-          <p:cNvPr id="818" name=""/>
+          <p:cNvPr id="820" name=""/>
           <p:cNvSpPr/>
           <p:nvPr/>
         </p:nvSpPr>
@@ -31297,7 +31345,7 @@
       </p:sp>
       <p:sp>
         <p:nvSpPr>
-          <p:cNvPr id="819" name=""/>
+          <p:cNvPr id="821" name=""/>
           <p:cNvSpPr/>
           <p:nvPr/>
         </p:nvSpPr>
@@ -31357,7 +31405,7 @@
       </p:sp>
       <p:sp>
         <p:nvSpPr>
-          <p:cNvPr id="820" name=""/>
+          <p:cNvPr id="822" name=""/>
           <p:cNvSpPr/>
           <p:nvPr/>
         </p:nvSpPr>
@@ -31457,7 +31505,7 @@
       </p:sp>
       <p:sp>
         <p:nvSpPr>
-          <p:cNvPr id="821" name=""/>
+          <p:cNvPr id="823" name=""/>
           <p:cNvSpPr/>
           <p:nvPr/>
         </p:nvSpPr>
@@ -31517,7 +31565,7 @@
       </p:sp>
       <p:sp>
         <p:nvSpPr>
-          <p:cNvPr id="822" name=""/>
+          <p:cNvPr id="824" name=""/>
           <p:cNvSpPr/>
           <p:nvPr/>
         </p:nvSpPr>
@@ -31645,7 +31693,7 @@
       </p:sp>
       <p:sp>
         <p:nvSpPr>
-          <p:cNvPr id="823" name=""/>
+          <p:cNvPr id="825" name=""/>
           <p:cNvSpPr txBox="1"/>
           <p:nvPr/>
         </p:nvSpPr>
@@ -31693,7 +31741,7 @@
       </p:sp>
       <p:sp>
         <p:nvSpPr>
-          <p:cNvPr id="824" name=""/>
+          <p:cNvPr id="826" name=""/>
           <p:cNvSpPr txBox="1"/>
           <p:nvPr/>
         </p:nvSpPr>
@@ -31741,7 +31789,7 @@
       </p:sp>
       <p:sp>
         <p:nvSpPr>
-          <p:cNvPr id="825" name=""/>
+          <p:cNvPr id="827" name=""/>
           <p:cNvSpPr txBox="1"/>
           <p:nvPr/>
         </p:nvSpPr>
@@ -31789,7 +31837,7 @@
       </p:sp>
       <p:sp>
         <p:nvSpPr>
-          <p:cNvPr id="826" name=""/>
+          <p:cNvPr id="828" name=""/>
           <p:cNvSpPr txBox="1"/>
           <p:nvPr/>
         </p:nvSpPr>
@@ -31837,7 +31885,7 @@
       </p:sp>
       <p:sp>
         <p:nvSpPr>
-          <p:cNvPr id="827" name=""/>
+          <p:cNvPr id="829" name=""/>
           <p:cNvSpPr/>
           <p:nvPr/>
         </p:nvSpPr>
@@ -31965,7 +32013,7 @@
       </p:sp>
       <p:sp>
         <p:nvSpPr>
-          <p:cNvPr id="828" name=""/>
+          <p:cNvPr id="830" name=""/>
           <p:cNvSpPr txBox="1"/>
           <p:nvPr/>
         </p:nvSpPr>
@@ -32013,7 +32061,7 @@
       </p:sp>
       <p:sp>
         <p:nvSpPr>
-          <p:cNvPr id="829" name=""/>
+          <p:cNvPr id="831" name=""/>
           <p:cNvSpPr txBox="1"/>
           <p:nvPr/>
         </p:nvSpPr>
@@ -32061,7 +32109,7 @@
       </p:sp>
       <p:sp>
         <p:nvSpPr>
-          <p:cNvPr id="830" name=""/>
+          <p:cNvPr id="832" name=""/>
           <p:cNvSpPr txBox="1"/>
           <p:nvPr/>
         </p:nvSpPr>
@@ -32109,7 +32157,7 @@
       </p:sp>
       <p:sp>
         <p:nvSpPr>
-          <p:cNvPr id="831" name=""/>
+          <p:cNvPr id="833" name=""/>
           <p:cNvSpPr txBox="1"/>
           <p:nvPr/>
         </p:nvSpPr>
@@ -32157,7 +32205,7 @@
       </p:sp>
       <p:sp>
         <p:nvSpPr>
-          <p:cNvPr id="832" name=""/>
+          <p:cNvPr id="834" name=""/>
           <p:cNvSpPr/>
           <p:nvPr/>
         </p:nvSpPr>
@@ -32285,7 +32333,7 @@
       </p:sp>
       <p:sp>
         <p:nvSpPr>
-          <p:cNvPr id="833" name=""/>
+          <p:cNvPr id="835" name=""/>
           <p:cNvSpPr txBox="1"/>
           <p:nvPr/>
         </p:nvSpPr>
@@ -32333,7 +32381,7 @@
       </p:sp>
       <p:sp>
         <p:nvSpPr>
-          <p:cNvPr id="834" name=""/>
+          <p:cNvPr id="836" name=""/>
           <p:cNvSpPr txBox="1"/>
           <p:nvPr/>
         </p:nvSpPr>
@@ -32381,7 +32429,7 @@
       </p:sp>
       <p:sp>
         <p:nvSpPr>
-          <p:cNvPr id="835" name=""/>
+          <p:cNvPr id="837" name=""/>
           <p:cNvSpPr txBox="1"/>
           <p:nvPr/>
         </p:nvSpPr>
@@ -32429,7 +32477,7 @@
       </p:sp>
       <p:sp>
         <p:nvSpPr>
-          <p:cNvPr id="836" name=""/>
+          <p:cNvPr id="838" name=""/>
           <p:cNvSpPr/>
           <p:nvPr/>
         </p:nvSpPr>
@@ -32557,7 +32605,7 @@
       </p:sp>
       <p:sp>
         <p:nvSpPr>
-          <p:cNvPr id="837" name=""/>
+          <p:cNvPr id="839" name=""/>
           <p:cNvSpPr txBox="1"/>
           <p:nvPr/>
         </p:nvSpPr>
@@ -32605,7 +32653,7 @@
       </p:sp>
       <p:sp>
         <p:nvSpPr>
-          <p:cNvPr id="838" name=""/>
+          <p:cNvPr id="840" name=""/>
           <p:cNvSpPr/>
           <p:nvPr/>
         </p:nvSpPr>
@@ -32665,7 +32713,7 @@
       </p:sp>
       <p:sp>
         <p:nvSpPr>
-          <p:cNvPr id="839" name=""/>
+          <p:cNvPr id="841" name=""/>
           <p:cNvSpPr/>
           <p:nvPr/>
         </p:nvSpPr>
@@ -32725,7 +32773,7 @@
       </p:sp>
       <p:sp>
         <p:nvSpPr>
-          <p:cNvPr id="840" name=""/>
+          <p:cNvPr id="842" name=""/>
           <p:cNvSpPr/>
           <p:nvPr/>
         </p:nvSpPr>
@@ -32785,7 +32833,7 @@
       </p:sp>
       <p:sp>
         <p:nvSpPr>
-          <p:cNvPr id="841" name=""/>
+          <p:cNvPr id="843" name=""/>
           <p:cNvSpPr/>
           <p:nvPr/>
         </p:nvSpPr>
@@ -32845,7 +32893,7 @@
       </p:sp>
       <p:sp>
         <p:nvSpPr>
-          <p:cNvPr id="842" name=""/>
+          <p:cNvPr id="844" name=""/>
           <p:cNvSpPr/>
           <p:nvPr/>
         </p:nvSpPr>
@@ -32905,7 +32953,7 @@
       </p:sp>
       <p:sp>
         <p:nvSpPr>
-          <p:cNvPr id="843" name=""/>
+          <p:cNvPr id="845" name=""/>
           <p:cNvSpPr/>
           <p:nvPr/>
         </p:nvSpPr>
@@ -32965,7 +33013,7 @@
       </p:sp>
       <p:sp>
         <p:nvSpPr>
-          <p:cNvPr id="844" name=""/>
+          <p:cNvPr id="846" name=""/>
           <p:cNvSpPr/>
           <p:nvPr/>
         </p:nvSpPr>
@@ -33025,7 +33073,7 @@
       </p:sp>
       <p:sp>
         <p:nvSpPr>
-          <p:cNvPr id="845" name=""/>
+          <p:cNvPr id="847" name=""/>
           <p:cNvSpPr/>
           <p:nvPr/>
         </p:nvSpPr>
@@ -33085,7 +33133,7 @@
       </p:sp>
       <p:sp>
         <p:nvSpPr>
-          <p:cNvPr id="846" name=""/>
+          <p:cNvPr id="848" name=""/>
           <p:cNvSpPr/>
           <p:nvPr/>
         </p:nvSpPr>
@@ -33145,7 +33193,7 @@
       </p:sp>
       <p:sp>
         <p:nvSpPr>
-          <p:cNvPr id="847" name=""/>
+          <p:cNvPr id="849" name=""/>
           <p:cNvSpPr/>
           <p:nvPr/>
         </p:nvSpPr>
@@ -33205,7 +33253,7 @@
       </p:sp>
       <p:sp>
         <p:nvSpPr>
-          <p:cNvPr id="848" name=""/>
+          <p:cNvPr id="850" name=""/>
           <p:cNvSpPr/>
           <p:nvPr/>
         </p:nvSpPr>
@@ -33265,7 +33313,7 @@
       </p:sp>
       <p:sp>
         <p:nvSpPr>
-          <p:cNvPr id="849" name=""/>
+          <p:cNvPr id="851" name=""/>
           <p:cNvSpPr/>
           <p:nvPr/>
         </p:nvSpPr>
@@ -33325,7 +33373,7 @@
       </p:sp>
       <p:sp>
         <p:nvSpPr>
-          <p:cNvPr id="850" name=""/>
+          <p:cNvPr id="852" name=""/>
           <p:cNvSpPr/>
           <p:nvPr/>
         </p:nvSpPr>
@@ -33385,7 +33433,7 @@
       </p:sp>
       <p:sp>
         <p:nvSpPr>
-          <p:cNvPr id="851" name=""/>
+          <p:cNvPr id="853" name=""/>
           <p:cNvSpPr/>
           <p:nvPr/>
         </p:nvSpPr>
@@ -33445,7 +33493,7 @@
       </p:sp>
       <p:sp>
         <p:nvSpPr>
-          <p:cNvPr id="852" name=""/>
+          <p:cNvPr id="854" name=""/>
           <p:cNvSpPr/>
           <p:nvPr/>
         </p:nvSpPr>
@@ -33505,7 +33553,7 @@
       </p:sp>
       <p:sp>
         <p:nvSpPr>
-          <p:cNvPr id="853" name=""/>
+          <p:cNvPr id="855" name=""/>
           <p:cNvSpPr/>
           <p:nvPr/>
         </p:nvSpPr>
@@ -33565,7 +33613,7 @@
       </p:sp>
       <p:sp>
         <p:nvSpPr>
-          <p:cNvPr id="854" name=""/>
+          <p:cNvPr id="856" name=""/>
           <p:cNvSpPr/>
           <p:nvPr/>
         </p:nvSpPr>
@@ -33625,7 +33673,7 @@
       </p:sp>
       <p:sp>
         <p:nvSpPr>
-          <p:cNvPr id="855" name=""/>
+          <p:cNvPr id="857" name=""/>
           <p:cNvSpPr/>
           <p:nvPr/>
         </p:nvSpPr>
@@ -33685,7 +33733,7 @@
       </p:sp>
       <p:sp>
         <p:nvSpPr>
-          <p:cNvPr id="856" name=""/>
+          <p:cNvPr id="858" name=""/>
           <p:cNvSpPr/>
           <p:nvPr/>
         </p:nvSpPr>
@@ -33745,7 +33793,7 @@
       </p:sp>
       <p:sp>
         <p:nvSpPr>
-          <p:cNvPr id="857" name=""/>
+          <p:cNvPr id="859" name=""/>
           <p:cNvSpPr/>
           <p:nvPr/>
         </p:nvSpPr>
@@ -33805,7 +33853,7 @@
       </p:sp>
       <p:sp>
         <p:nvSpPr>
-          <p:cNvPr id="858" name=""/>
+          <p:cNvPr id="860" name=""/>
           <p:cNvSpPr/>
           <p:nvPr/>
         </p:nvSpPr>
@@ -33865,7 +33913,7 @@
       </p:sp>
       <p:sp>
         <p:nvSpPr>
-          <p:cNvPr id="859" name=""/>
+          <p:cNvPr id="861" name=""/>
           <p:cNvSpPr/>
           <p:nvPr/>
         </p:nvSpPr>
@@ -33925,7 +33973,7 @@
       </p:sp>
       <p:sp>
         <p:nvSpPr>
-          <p:cNvPr id="860" name=""/>
+          <p:cNvPr id="862" name=""/>
           <p:cNvSpPr/>
           <p:nvPr/>
         </p:nvSpPr>
@@ -33985,7 +34033,7 @@
       </p:sp>
       <p:sp>
         <p:nvSpPr>
-          <p:cNvPr id="861" name=""/>
+          <p:cNvPr id="863" name=""/>
           <p:cNvSpPr/>
           <p:nvPr/>
         </p:nvSpPr>
@@ -34045,7 +34093,7 @@
       </p:sp>
       <p:sp>
         <p:nvSpPr>
-          <p:cNvPr id="862" name=""/>
+          <p:cNvPr id="864" name=""/>
           <p:cNvSpPr/>
           <p:nvPr/>
         </p:nvSpPr>
@@ -34105,7 +34153,7 @@
       </p:sp>
       <p:sp>
         <p:nvSpPr>
-          <p:cNvPr id="863" name=""/>
+          <p:cNvPr id="865" name=""/>
           <p:cNvSpPr/>
           <p:nvPr/>
         </p:nvSpPr>
@@ -34165,7 +34213,7 @@
       </p:sp>
       <p:sp>
         <p:nvSpPr>
-          <p:cNvPr id="864" name=""/>
+          <p:cNvPr id="866" name=""/>
           <p:cNvSpPr/>
           <p:nvPr/>
         </p:nvSpPr>
@@ -34225,7 +34273,7 @@
       </p:sp>
       <p:sp>
         <p:nvSpPr>
-          <p:cNvPr id="865" name=""/>
+          <p:cNvPr id="867" name=""/>
           <p:cNvSpPr/>
           <p:nvPr/>
         </p:nvSpPr>
@@ -34285,7 +34333,7 @@
       </p:sp>
       <p:sp>
         <p:nvSpPr>
-          <p:cNvPr id="866" name=""/>
+          <p:cNvPr id="868" name=""/>
           <p:cNvSpPr/>
           <p:nvPr/>
         </p:nvSpPr>
@@ -34345,7 +34393,7 @@
       </p:sp>
       <p:sp>
         <p:nvSpPr>
-          <p:cNvPr id="867" name=""/>
+          <p:cNvPr id="869" name=""/>
           <p:cNvSpPr/>
           <p:nvPr/>
         </p:nvSpPr>
@@ -34405,7 +34453,7 @@
       </p:sp>
       <p:sp>
         <p:nvSpPr>
-          <p:cNvPr id="868" name=""/>
+          <p:cNvPr id="870" name=""/>
           <p:cNvSpPr/>
           <p:nvPr/>
         </p:nvSpPr>
@@ -34465,7 +34513,7 @@
       </p:sp>
       <p:sp>
         <p:nvSpPr>
-          <p:cNvPr id="869" name=""/>
+          <p:cNvPr id="871" name=""/>
           <p:cNvSpPr/>
           <p:nvPr/>
         </p:nvSpPr>
@@ -34525,7 +34573,7 @@
       </p:sp>
       <p:sp>
         <p:nvSpPr>
-          <p:cNvPr id="870" name=""/>
+          <p:cNvPr id="872" name=""/>
           <p:cNvSpPr/>
           <p:nvPr/>
         </p:nvSpPr>
@@ -34585,7 +34633,7 @@
       </p:sp>
       <p:sp>
         <p:nvSpPr>
-          <p:cNvPr id="871" name=""/>
+          <p:cNvPr id="873" name=""/>
           <p:cNvSpPr/>
           <p:nvPr/>
         </p:nvSpPr>
@@ -34645,7 +34693,7 @@
       </p:sp>
       <p:sp>
         <p:nvSpPr>
-          <p:cNvPr id="872" name=""/>
+          <p:cNvPr id="874" name=""/>
           <p:cNvSpPr/>
           <p:nvPr/>
         </p:nvSpPr>
@@ -34705,7 +34753,7 @@
       </p:sp>
       <p:sp>
         <p:nvSpPr>
-          <p:cNvPr id="873" name=""/>
+          <p:cNvPr id="875" name=""/>
           <p:cNvSpPr/>
           <p:nvPr/>
         </p:nvSpPr>
@@ -34765,7 +34813,7 @@
       </p:sp>
       <p:sp>
         <p:nvSpPr>
-          <p:cNvPr id="874" name=""/>
+          <p:cNvPr id="876" name=""/>
           <p:cNvSpPr/>
           <p:nvPr/>
         </p:nvSpPr>
@@ -34825,7 +34873,7 @@
       </p:sp>
       <p:sp>
         <p:nvSpPr>
-          <p:cNvPr id="875" name=""/>
+          <p:cNvPr id="877" name=""/>
           <p:cNvSpPr/>
           <p:nvPr/>
         </p:nvSpPr>
@@ -34885,7 +34933,7 @@
       </p:sp>
       <p:sp>
         <p:nvSpPr>
-          <p:cNvPr id="876" name=""/>
+          <p:cNvPr id="878" name=""/>
           <p:cNvSpPr/>
           <p:nvPr/>
         </p:nvSpPr>
@@ -34945,7 +34993,7 @@
       </p:sp>
       <p:sp>
         <p:nvSpPr>
-          <p:cNvPr id="877" name=""/>
+          <p:cNvPr id="879" name=""/>
           <p:cNvSpPr/>
           <p:nvPr/>
         </p:nvSpPr>
@@ -35005,7 +35053,7 @@
       </p:sp>
       <p:sp>
         <p:nvSpPr>
-          <p:cNvPr id="878" name=""/>
+          <p:cNvPr id="880" name=""/>
           <p:cNvSpPr/>
           <p:nvPr/>
         </p:nvSpPr>
@@ -35065,7 +35113,7 @@
       </p:sp>
       <p:sp>
         <p:nvSpPr>
-          <p:cNvPr id="879" name=""/>
+          <p:cNvPr id="881" name=""/>
           <p:cNvSpPr/>
           <p:nvPr/>
         </p:nvSpPr>
@@ -35125,7 +35173,7 @@
       </p:sp>
       <p:sp>
         <p:nvSpPr>
-          <p:cNvPr id="880" name=""/>
+          <p:cNvPr id="882" name=""/>
           <p:cNvSpPr/>
           <p:nvPr/>
         </p:nvSpPr>
@@ -35185,7 +35233,7 @@
       </p:sp>
       <p:sp>
         <p:nvSpPr>
-          <p:cNvPr id="881" name=""/>
+          <p:cNvPr id="883" name=""/>
           <p:cNvSpPr/>
           <p:nvPr/>
         </p:nvSpPr>
@@ -35245,7 +35293,7 @@
       </p:sp>
       <p:sp>
         <p:nvSpPr>
-          <p:cNvPr id="882" name=""/>
+          <p:cNvPr id="884" name=""/>
           <p:cNvSpPr/>
           <p:nvPr/>
         </p:nvSpPr>
@@ -35305,7 +35353,7 @@
       </p:sp>
       <p:sp>
         <p:nvSpPr>
-          <p:cNvPr id="883" name=""/>
+          <p:cNvPr id="885" name=""/>
           <p:cNvSpPr/>
           <p:nvPr/>
         </p:nvSpPr>
@@ -35365,7 +35413,7 @@
       </p:sp>
       <p:sp>
         <p:nvSpPr>
-          <p:cNvPr id="884" name=""/>
+          <p:cNvPr id="886" name=""/>
           <p:cNvSpPr/>
           <p:nvPr/>
         </p:nvSpPr>
@@ -35425,7 +35473,7 @@
       </p:sp>
       <p:sp>
         <p:nvSpPr>
-          <p:cNvPr id="885" name=""/>
+          <p:cNvPr id="887" name=""/>
           <p:cNvSpPr/>
           <p:nvPr/>
         </p:nvSpPr>
@@ -35485,7 +35533,7 @@
       </p:sp>
       <p:sp>
         <p:nvSpPr>
-          <p:cNvPr id="886" name=""/>
+          <p:cNvPr id="888" name=""/>
           <p:cNvSpPr/>
           <p:nvPr/>
         </p:nvSpPr>
@@ -35545,7 +35593,7 @@
       </p:sp>
       <p:sp>
         <p:nvSpPr>
-          <p:cNvPr id="887" name=""/>
+          <p:cNvPr id="889" name=""/>
           <p:cNvSpPr/>
           <p:nvPr/>
         </p:nvSpPr>
@@ -35605,7 +35653,7 @@
       </p:sp>
       <p:sp>
         <p:nvSpPr>
-          <p:cNvPr id="888" name=""/>
+          <p:cNvPr id="890" name=""/>
           <p:cNvSpPr/>
           <p:nvPr/>
         </p:nvSpPr>
@@ -35665,7 +35713,7 @@
       </p:sp>
       <p:sp>
         <p:nvSpPr>
-          <p:cNvPr id="889" name=""/>
+          <p:cNvPr id="891" name=""/>
           <p:cNvSpPr/>
           <p:nvPr/>
         </p:nvSpPr>
@@ -35725,7 +35773,7 @@
       </p:sp>
       <p:sp>
         <p:nvSpPr>
-          <p:cNvPr id="890" name=""/>
+          <p:cNvPr id="892" name=""/>
           <p:cNvSpPr/>
           <p:nvPr/>
         </p:nvSpPr>
@@ -35785,7 +35833,7 @@
       </p:sp>
       <p:sp>
         <p:nvSpPr>
-          <p:cNvPr id="891" name=""/>
+          <p:cNvPr id="893" name=""/>
           <p:cNvSpPr/>
           <p:nvPr/>
         </p:nvSpPr>
@@ -35845,7 +35893,7 @@
       </p:sp>
       <p:sp>
         <p:nvSpPr>
-          <p:cNvPr id="892" name=""/>
+          <p:cNvPr id="894" name=""/>
           <p:cNvSpPr/>
           <p:nvPr/>
         </p:nvSpPr>
@@ -35905,7 +35953,7 @@
       </p:sp>
       <p:sp>
         <p:nvSpPr>
-          <p:cNvPr id="893" name=""/>
+          <p:cNvPr id="895" name=""/>
           <p:cNvSpPr/>
           <p:nvPr/>
         </p:nvSpPr>
@@ -35965,7 +36013,7 @@
       </p:sp>
       <p:sp>
         <p:nvSpPr>
-          <p:cNvPr id="894" name=""/>
+          <p:cNvPr id="896" name=""/>
           <p:cNvSpPr/>
           <p:nvPr/>
         </p:nvSpPr>
@@ -36025,7 +36073,7 @@
       </p:sp>
       <p:sp>
         <p:nvSpPr>
-          <p:cNvPr id="895" name=""/>
+          <p:cNvPr id="897" name=""/>
           <p:cNvSpPr/>
           <p:nvPr/>
         </p:nvSpPr>
@@ -36085,7 +36133,7 @@
       </p:sp>
       <p:sp>
         <p:nvSpPr>
-          <p:cNvPr id="896" name=""/>
+          <p:cNvPr id="898" name=""/>
           <p:cNvSpPr/>
           <p:nvPr/>
         </p:nvSpPr>
@@ -36145,7 +36193,7 @@
       </p:sp>
       <p:sp>
         <p:nvSpPr>
-          <p:cNvPr id="897" name=""/>
+          <p:cNvPr id="899" name=""/>
           <p:cNvSpPr/>
           <p:nvPr/>
         </p:nvSpPr>
@@ -36205,7 +36253,7 @@
       </p:sp>
       <p:sp>
         <p:nvSpPr>
-          <p:cNvPr id="898" name=""/>
+          <p:cNvPr id="900" name=""/>
           <p:cNvSpPr/>
           <p:nvPr/>
         </p:nvSpPr>
@@ -36265,7 +36313,7 @@
       </p:sp>
       <p:sp>
         <p:nvSpPr>
-          <p:cNvPr id="899" name=""/>
+          <p:cNvPr id="901" name=""/>
           <p:cNvSpPr/>
           <p:nvPr/>
         </p:nvSpPr>
@@ -36325,7 +36373,7 @@
       </p:sp>
       <p:sp>
         <p:nvSpPr>
-          <p:cNvPr id="900" name=""/>
+          <p:cNvPr id="902" name=""/>
           <p:cNvSpPr/>
           <p:nvPr/>
         </p:nvSpPr>
@@ -36385,7 +36433,7 @@
       </p:sp>
       <p:sp>
         <p:nvSpPr>
-          <p:cNvPr id="901" name=""/>
+          <p:cNvPr id="903" name=""/>
           <p:cNvSpPr/>
           <p:nvPr/>
         </p:nvSpPr>
@@ -36445,7 +36493,7 @@
       </p:sp>
       <p:sp>
         <p:nvSpPr>
-          <p:cNvPr id="902" name=""/>
+          <p:cNvPr id="904" name=""/>
           <p:cNvSpPr/>
           <p:nvPr/>
         </p:nvSpPr>
@@ -36505,7 +36553,7 @@
       </p:sp>
       <p:sp>
         <p:nvSpPr>
-          <p:cNvPr id="903" name=""/>
+          <p:cNvPr id="905" name=""/>
           <p:cNvSpPr/>
           <p:nvPr/>
         </p:nvSpPr>
@@ -36565,7 +36613,7 @@
       </p:sp>
       <p:sp>
         <p:nvSpPr>
-          <p:cNvPr id="904" name=""/>
+          <p:cNvPr id="906" name=""/>
           <p:cNvSpPr/>
           <p:nvPr/>
         </p:nvSpPr>
@@ -36625,7 +36673,7 @@
       </p:sp>
       <p:sp>
         <p:nvSpPr>
-          <p:cNvPr id="905" name=""/>
+          <p:cNvPr id="907" name=""/>
           <p:cNvSpPr/>
           <p:nvPr/>
         </p:nvSpPr>
@@ -36685,7 +36733,7 @@
       </p:sp>
       <p:sp>
         <p:nvSpPr>
-          <p:cNvPr id="906" name=""/>
+          <p:cNvPr id="908" name=""/>
           <p:cNvSpPr/>
           <p:nvPr/>
         </p:nvSpPr>
@@ -36745,7 +36793,7 @@
       </p:sp>
       <p:sp>
         <p:nvSpPr>
-          <p:cNvPr id="907" name=""/>
+          <p:cNvPr id="909" name=""/>
           <p:cNvSpPr/>
           <p:nvPr/>
         </p:nvSpPr>
@@ -36805,7 +36853,7 @@
       </p:sp>
       <p:sp>
         <p:nvSpPr>
-          <p:cNvPr id="908" name=""/>
+          <p:cNvPr id="910" name=""/>
           <p:cNvSpPr/>
           <p:nvPr/>
         </p:nvSpPr>
@@ -36865,7 +36913,7 @@
       </p:sp>
       <p:sp>
         <p:nvSpPr>
-          <p:cNvPr id="909" name=""/>
+          <p:cNvPr id="911" name=""/>
           <p:cNvSpPr/>
           <p:nvPr/>
         </p:nvSpPr>
@@ -36925,7 +36973,7 @@
       </p:sp>
       <p:sp>
         <p:nvSpPr>
-          <p:cNvPr id="910" name=""/>
+          <p:cNvPr id="912" name=""/>
           <p:cNvSpPr/>
           <p:nvPr/>
         </p:nvSpPr>
@@ -36985,7 +37033,7 @@
       </p:sp>
       <p:sp>
         <p:nvSpPr>
-          <p:cNvPr id="911" name=""/>
+          <p:cNvPr id="913" name=""/>
           <p:cNvSpPr/>
           <p:nvPr/>
         </p:nvSpPr>
@@ -37045,7 +37093,7 @@
       </p:sp>
       <p:sp>
         <p:nvSpPr>
-          <p:cNvPr id="912" name=""/>
+          <p:cNvPr id="914" name=""/>
           <p:cNvSpPr/>
           <p:nvPr/>
         </p:nvSpPr>
@@ -37105,7 +37153,7 @@
       </p:sp>
       <p:sp>
         <p:nvSpPr>
-          <p:cNvPr id="913" name=""/>
+          <p:cNvPr id="915" name=""/>
           <p:cNvSpPr/>
           <p:nvPr/>
         </p:nvSpPr>
@@ -37165,7 +37213,7 @@
       </p:sp>
       <p:sp>
         <p:nvSpPr>
-          <p:cNvPr id="914" name=""/>
+          <p:cNvPr id="916" name=""/>
           <p:cNvSpPr/>
           <p:nvPr/>
         </p:nvSpPr>
@@ -37225,7 +37273,7 @@
       </p:sp>
       <p:sp>
         <p:nvSpPr>
-          <p:cNvPr id="915" name=""/>
+          <p:cNvPr id="917" name=""/>
           <p:cNvSpPr/>
           <p:nvPr/>
         </p:nvSpPr>
@@ -37285,7 +37333,7 @@
       </p:sp>
       <p:sp>
         <p:nvSpPr>
-          <p:cNvPr id="916" name=""/>
+          <p:cNvPr id="918" name=""/>
           <p:cNvSpPr/>
           <p:nvPr/>
         </p:nvSpPr>
@@ -37345,7 +37393,7 @@
       </p:sp>
       <p:sp>
         <p:nvSpPr>
-          <p:cNvPr id="917" name=""/>
+          <p:cNvPr id="919" name=""/>
           <p:cNvSpPr/>
           <p:nvPr/>
         </p:nvSpPr>
@@ -37405,7 +37453,7 @@
       </p:sp>
       <p:sp>
         <p:nvSpPr>
-          <p:cNvPr id="918" name=""/>
+          <p:cNvPr id="920" name=""/>
           <p:cNvSpPr/>
           <p:nvPr/>
         </p:nvSpPr>
@@ -37465,7 +37513,7 @@
       </p:sp>
       <p:sp>
         <p:nvSpPr>
-          <p:cNvPr id="919" name=""/>
+          <p:cNvPr id="921" name=""/>
           <p:cNvSpPr txBox="1"/>
           <p:nvPr/>
         </p:nvSpPr>
@@ -37513,7 +37561,7 @@
       </p:sp>
       <p:sp>
         <p:nvSpPr>
-          <p:cNvPr id="920" name=""/>
+          <p:cNvPr id="922" name=""/>
           <p:cNvSpPr txBox="1"/>
           <p:nvPr/>
         </p:nvSpPr>
@@ -37561,7 +37609,7 @@
       </p:sp>
       <p:sp>
         <p:nvSpPr>
-          <p:cNvPr id="921" name=""/>
+          <p:cNvPr id="923" name=""/>
           <p:cNvSpPr txBox="1"/>
           <p:nvPr/>
         </p:nvSpPr>
@@ -37609,7 +37657,7 @@
       </p:sp>
       <p:sp>
         <p:nvSpPr>
-          <p:cNvPr id="922" name=""/>
+          <p:cNvPr id="924" name=""/>
           <p:cNvSpPr txBox="1"/>
           <p:nvPr/>
         </p:nvSpPr>
@@ -37657,7 +37705,7 @@
       </p:sp>
       <p:sp>
         <p:nvSpPr>
-          <p:cNvPr id="923" name=""/>
+          <p:cNvPr id="925" name=""/>
           <p:cNvSpPr txBox="1"/>
           <p:nvPr/>
         </p:nvSpPr>
@@ -37705,7 +37753,7 @@
       </p:sp>
       <p:sp>
         <p:nvSpPr>
-          <p:cNvPr id="924" name=""/>
+          <p:cNvPr id="926" name=""/>
           <p:cNvSpPr txBox="1"/>
           <p:nvPr/>
         </p:nvSpPr>
@@ -37753,7 +37801,7 @@
       </p:sp>
       <p:sp>
         <p:nvSpPr>
-          <p:cNvPr id="925" name=""/>
+          <p:cNvPr id="927" name=""/>
           <p:cNvSpPr txBox="1"/>
           <p:nvPr/>
         </p:nvSpPr>
@@ -37801,7 +37849,7 @@
       </p:sp>
       <p:sp>
         <p:nvSpPr>
-          <p:cNvPr id="926" name=""/>
+          <p:cNvPr id="928" name=""/>
           <p:cNvSpPr txBox="1"/>
           <p:nvPr/>
         </p:nvSpPr>
@@ -37849,7 +37897,7 @@
       </p:sp>
       <p:sp>
         <p:nvSpPr>
-          <p:cNvPr id="927" name=""/>
+          <p:cNvPr id="929" name=""/>
           <p:cNvSpPr txBox="1"/>
           <p:nvPr/>
         </p:nvSpPr>
@@ -37897,7 +37945,7 @@
       </p:sp>
       <p:sp>
         <p:nvSpPr>
-          <p:cNvPr id="928" name=""/>
+          <p:cNvPr id="930" name=""/>
           <p:cNvSpPr txBox="1"/>
           <p:nvPr/>
         </p:nvSpPr>
@@ -37945,7 +37993,7 @@
       </p:sp>
       <p:sp>
         <p:nvSpPr>
-          <p:cNvPr id="929" name=""/>
+          <p:cNvPr id="931" name=""/>
           <p:cNvSpPr txBox="1"/>
           <p:nvPr/>
         </p:nvSpPr>
@@ -37993,7 +38041,7 @@
       </p:sp>
       <p:sp>
         <p:nvSpPr>
-          <p:cNvPr id="930" name=""/>
+          <p:cNvPr id="932" name=""/>
           <p:cNvSpPr txBox="1"/>
           <p:nvPr/>
         </p:nvSpPr>
@@ -38041,7 +38089,7 @@
       </p:sp>
       <p:sp>
         <p:nvSpPr>
-          <p:cNvPr id="931" name=""/>
+          <p:cNvPr id="933" name=""/>
           <p:cNvSpPr txBox="1"/>
           <p:nvPr/>
         </p:nvSpPr>
@@ -38089,7 +38137,7 @@
       </p:sp>
       <p:sp>
         <p:nvSpPr>
-          <p:cNvPr id="932" name=""/>
+          <p:cNvPr id="934" name=""/>
           <p:cNvSpPr txBox="1"/>
           <p:nvPr/>
         </p:nvSpPr>
@@ -38137,7 +38185,7 @@
       </p:sp>
       <p:sp>
         <p:nvSpPr>
-          <p:cNvPr id="933" name=""/>
+          <p:cNvPr id="935" name=""/>
           <p:cNvSpPr txBox="1"/>
           <p:nvPr/>
         </p:nvSpPr>
@@ -38185,7 +38233,7 @@
       </p:sp>
       <p:sp>
         <p:nvSpPr>
-          <p:cNvPr id="934" name=""/>
+          <p:cNvPr id="936" name=""/>
           <p:cNvSpPr txBox="1"/>
           <p:nvPr/>
         </p:nvSpPr>
@@ -38233,7 +38281,7 @@
       </p:sp>
       <p:sp>
         <p:nvSpPr>
-          <p:cNvPr id="935" name=""/>
+          <p:cNvPr id="937" name=""/>
           <p:cNvSpPr txBox="1"/>
           <p:nvPr/>
         </p:nvSpPr>
@@ -38281,7 +38329,7 @@
       </p:sp>
       <p:sp>
         <p:nvSpPr>
-          <p:cNvPr id="936" name=""/>
+          <p:cNvPr id="938" name=""/>
           <p:cNvSpPr txBox="1"/>
           <p:nvPr/>
         </p:nvSpPr>
@@ -38329,7 +38377,7 @@
       </p:sp>
       <p:sp>
         <p:nvSpPr>
-          <p:cNvPr id="937" name=""/>
+          <p:cNvPr id="939" name=""/>
           <p:cNvSpPr txBox="1"/>
           <p:nvPr/>
         </p:nvSpPr>
@@ -38377,7 +38425,7 @@
       </p:sp>
       <p:sp>
         <p:nvSpPr>
-          <p:cNvPr id="938" name=""/>
+          <p:cNvPr id="940" name=""/>
           <p:cNvSpPr txBox="1"/>
           <p:nvPr/>
         </p:nvSpPr>
@@ -38425,7 +38473,7 @@
       </p:sp>
       <p:sp>
         <p:nvSpPr>
-          <p:cNvPr id="939" name=""/>
+          <p:cNvPr id="941" name=""/>
           <p:cNvSpPr txBox="1"/>
           <p:nvPr/>
         </p:nvSpPr>
@@ -38473,7 +38521,7 @@
       </p:sp>
       <p:sp>
         <p:nvSpPr>
-          <p:cNvPr id="940" name=""/>
+          <p:cNvPr id="942" name=""/>
           <p:cNvSpPr txBox="1"/>
           <p:nvPr/>
         </p:nvSpPr>
@@ -38521,7 +38569,7 @@
       </p:sp>
       <p:sp>
         <p:nvSpPr>
-          <p:cNvPr id="941" name=""/>
+          <p:cNvPr id="943" name=""/>
           <p:cNvSpPr txBox="1"/>
           <p:nvPr/>
         </p:nvSpPr>
@@ -38569,7 +38617,7 @@
       </p:sp>
       <p:sp>
         <p:nvSpPr>
-          <p:cNvPr id="942" name=""/>
+          <p:cNvPr id="944" name=""/>
           <p:cNvSpPr txBox="1"/>
           <p:nvPr/>
         </p:nvSpPr>
@@ -38617,7 +38665,7 @@
       </p:sp>
       <p:sp>
         <p:nvSpPr>
-          <p:cNvPr id="943" name=""/>
+          <p:cNvPr id="945" name=""/>
           <p:cNvSpPr txBox="1"/>
           <p:nvPr/>
         </p:nvSpPr>
@@ -38665,7 +38713,7 @@
       </p:sp>
       <p:sp>
         <p:nvSpPr>
-          <p:cNvPr id="944" name=""/>
+          <p:cNvPr id="946" name=""/>
           <p:cNvSpPr txBox="1"/>
           <p:nvPr/>
         </p:nvSpPr>
@@ -38713,7 +38761,7 @@
       </p:sp>
       <p:sp>
         <p:nvSpPr>
-          <p:cNvPr id="945" name=""/>
+          <p:cNvPr id="947" name=""/>
           <p:cNvSpPr txBox="1"/>
           <p:nvPr/>
         </p:nvSpPr>
@@ -38761,7 +38809,7 @@
       </p:sp>
       <p:sp>
         <p:nvSpPr>
-          <p:cNvPr id="946" name=""/>
+          <p:cNvPr id="948" name=""/>
           <p:cNvSpPr txBox="1"/>
           <p:nvPr/>
         </p:nvSpPr>
@@ -38809,7 +38857,7 @@
       </p:sp>
       <p:sp>
         <p:nvSpPr>
-          <p:cNvPr id="947" name=""/>
+          <p:cNvPr id="949" name=""/>
           <p:cNvSpPr txBox="1"/>
           <p:nvPr/>
         </p:nvSpPr>
@@ -38857,7 +38905,7 @@
       </p:sp>
       <p:sp>
         <p:nvSpPr>
-          <p:cNvPr id="948" name=""/>
+          <p:cNvPr id="950" name=""/>
           <p:cNvSpPr txBox="1"/>
           <p:nvPr/>
         </p:nvSpPr>
@@ -38905,7 +38953,7 @@
       </p:sp>
       <p:sp>
         <p:nvSpPr>
-          <p:cNvPr id="949" name=""/>
+          <p:cNvPr id="951" name=""/>
           <p:cNvSpPr txBox="1"/>
           <p:nvPr/>
         </p:nvSpPr>
@@ -38953,7 +39001,7 @@
       </p:sp>
       <p:sp>
         <p:nvSpPr>
-          <p:cNvPr id="950" name=""/>
+          <p:cNvPr id="952" name=""/>
           <p:cNvSpPr txBox="1"/>
           <p:nvPr/>
         </p:nvSpPr>
@@ -39001,7 +39049,7 @@
       </p:sp>
       <p:sp>
         <p:nvSpPr>
-          <p:cNvPr id="951" name=""/>
+          <p:cNvPr id="953" name=""/>
           <p:cNvSpPr txBox="1"/>
           <p:nvPr/>
         </p:nvSpPr>
@@ -39049,7 +39097,7 @@
       </p:sp>
       <p:sp>
         <p:nvSpPr>
-          <p:cNvPr id="952" name=""/>
+          <p:cNvPr id="954" name=""/>
           <p:cNvSpPr txBox="1"/>
           <p:nvPr/>
         </p:nvSpPr>
@@ -39097,7 +39145,7 @@
       </p:sp>
       <p:sp>
         <p:nvSpPr>
-          <p:cNvPr id="953" name=""/>
+          <p:cNvPr id="955" name=""/>
           <p:cNvSpPr txBox="1"/>
           <p:nvPr/>
         </p:nvSpPr>
@@ -39145,7 +39193,7 @@
       </p:sp>
       <p:sp>
         <p:nvSpPr>
-          <p:cNvPr id="954" name=""/>
+          <p:cNvPr id="956" name=""/>
           <p:cNvSpPr txBox="1"/>
           <p:nvPr/>
         </p:nvSpPr>
@@ -39193,7 +39241,7 @@
       </p:sp>
       <p:sp>
         <p:nvSpPr>
-          <p:cNvPr id="955" name=""/>
+          <p:cNvPr id="957" name=""/>
           <p:cNvSpPr txBox="1"/>
           <p:nvPr/>
         </p:nvSpPr>
@@ -39241,7 +39289,7 @@
       </p:sp>
       <p:sp>
         <p:nvSpPr>
-          <p:cNvPr id="956" name=""/>
+          <p:cNvPr id="958" name=""/>
           <p:cNvSpPr txBox="1"/>
           <p:nvPr/>
         </p:nvSpPr>
@@ -39289,7 +39337,7 @@
       </p:sp>
       <p:sp>
         <p:nvSpPr>
-          <p:cNvPr id="957" name=""/>
+          <p:cNvPr id="959" name=""/>
           <p:cNvSpPr txBox="1"/>
           <p:nvPr/>
         </p:nvSpPr>
@@ -39337,7 +39385,7 @@
       </p:sp>
       <p:sp>
         <p:nvSpPr>
-          <p:cNvPr id="958" name=""/>
+          <p:cNvPr id="960" name=""/>
           <p:cNvSpPr txBox="1"/>
           <p:nvPr/>
         </p:nvSpPr>
@@ -39385,7 +39433,7 @@
       </p:sp>
       <p:sp>
         <p:nvSpPr>
-          <p:cNvPr id="959" name=""/>
+          <p:cNvPr id="961" name=""/>
           <p:cNvSpPr txBox="1"/>
           <p:nvPr/>
         </p:nvSpPr>
@@ -39433,7 +39481,7 @@
       </p:sp>
       <p:sp>
         <p:nvSpPr>
-          <p:cNvPr id="960" name=""/>
+          <p:cNvPr id="962" name=""/>
           <p:cNvSpPr txBox="1"/>
           <p:nvPr/>
         </p:nvSpPr>
@@ -39481,7 +39529,7 @@
       </p:sp>
       <p:sp>
         <p:nvSpPr>
-          <p:cNvPr id="961" name=""/>
+          <p:cNvPr id="963" name=""/>
           <p:cNvSpPr txBox="1"/>
           <p:nvPr/>
         </p:nvSpPr>
@@ -39529,7 +39577,7 @@
       </p:sp>
       <p:sp>
         <p:nvSpPr>
-          <p:cNvPr id="962" name=""/>
+          <p:cNvPr id="964" name=""/>
           <p:cNvSpPr txBox="1"/>
           <p:nvPr/>
         </p:nvSpPr>
@@ -39577,7 +39625,7 @@
       </p:sp>
       <p:sp>
         <p:nvSpPr>
-          <p:cNvPr id="963" name=""/>
+          <p:cNvPr id="965" name=""/>
           <p:cNvSpPr txBox="1"/>
           <p:nvPr/>
         </p:nvSpPr>
@@ -39625,7 +39673,7 @@
       </p:sp>
       <p:sp>
         <p:nvSpPr>
-          <p:cNvPr id="964" name=""/>
+          <p:cNvPr id="966" name=""/>
           <p:cNvSpPr txBox="1"/>
           <p:nvPr/>
         </p:nvSpPr>
@@ -39673,7 +39721,7 @@
       </p:sp>
       <p:sp>
         <p:nvSpPr>
-          <p:cNvPr id="965" name=""/>
+          <p:cNvPr id="967" name=""/>
           <p:cNvSpPr txBox="1"/>
           <p:nvPr/>
         </p:nvSpPr>
@@ -39721,7 +39769,7 @@
       </p:sp>
       <p:sp>
         <p:nvSpPr>
-          <p:cNvPr id="966" name=""/>
+          <p:cNvPr id="968" name=""/>
           <p:cNvSpPr txBox="1"/>
           <p:nvPr/>
         </p:nvSpPr>
@@ -39769,7 +39817,7 @@
       </p:sp>
       <p:sp>
         <p:nvSpPr>
-          <p:cNvPr id="967" name=""/>
+          <p:cNvPr id="969" name=""/>
           <p:cNvSpPr txBox="1"/>
           <p:nvPr/>
         </p:nvSpPr>
@@ -39817,7 +39865,7 @@
       </p:sp>
       <p:sp>
         <p:nvSpPr>
-          <p:cNvPr id="968" name=""/>
+          <p:cNvPr id="970" name=""/>
           <p:cNvSpPr txBox="1"/>
           <p:nvPr/>
         </p:nvSpPr>
@@ -39865,7 +39913,7 @@
       </p:sp>
       <p:sp>
         <p:nvSpPr>
-          <p:cNvPr id="969" name=""/>
+          <p:cNvPr id="971" name=""/>
           <p:cNvSpPr txBox="1"/>
           <p:nvPr/>
         </p:nvSpPr>
@@ -39913,7 +39961,7 @@
       </p:sp>
       <p:sp>
         <p:nvSpPr>
-          <p:cNvPr id="970" name=""/>
+          <p:cNvPr id="972" name=""/>
           <p:cNvSpPr txBox="1"/>
           <p:nvPr/>
         </p:nvSpPr>
@@ -39961,7 +40009,7 @@
       </p:sp>
       <p:sp>
         <p:nvSpPr>
-          <p:cNvPr id="971" name=""/>
+          <p:cNvPr id="973" name=""/>
           <p:cNvSpPr txBox="1"/>
           <p:nvPr/>
         </p:nvSpPr>
@@ -40009,7 +40057,7 @@
       </p:sp>
       <p:sp>
         <p:nvSpPr>
-          <p:cNvPr id="972" name=""/>
+          <p:cNvPr id="974" name=""/>
           <p:cNvSpPr txBox="1"/>
           <p:nvPr/>
         </p:nvSpPr>
@@ -40057,7 +40105,7 @@
       </p:sp>
       <p:sp>
         <p:nvSpPr>
-          <p:cNvPr id="973" name=""/>
+          <p:cNvPr id="975" name=""/>
           <p:cNvSpPr txBox="1"/>
           <p:nvPr/>
         </p:nvSpPr>
@@ -40105,7 +40153,7 @@
       </p:sp>
       <p:sp>
         <p:nvSpPr>
-          <p:cNvPr id="974" name=""/>
+          <p:cNvPr id="976" name=""/>
           <p:cNvSpPr txBox="1"/>
           <p:nvPr/>
         </p:nvSpPr>
@@ -40153,7 +40201,7 @@
       </p:sp>
       <p:sp>
         <p:nvSpPr>
-          <p:cNvPr id="975" name=""/>
+          <p:cNvPr id="977" name=""/>
           <p:cNvSpPr txBox="1"/>
           <p:nvPr/>
         </p:nvSpPr>
@@ -40201,7 +40249,7 @@
       </p:sp>
       <p:sp>
         <p:nvSpPr>
-          <p:cNvPr id="976" name=""/>
+          <p:cNvPr id="978" name=""/>
           <p:cNvSpPr txBox="1"/>
           <p:nvPr/>
         </p:nvSpPr>
@@ -40249,7 +40297,7 @@
       </p:sp>
       <p:sp>
         <p:nvSpPr>
-          <p:cNvPr id="977" name=""/>
+          <p:cNvPr id="979" name=""/>
           <p:cNvSpPr txBox="1"/>
           <p:nvPr/>
         </p:nvSpPr>
@@ -40297,7 +40345,7 @@
       </p:sp>
       <p:sp>
         <p:nvSpPr>
-          <p:cNvPr id="978" name=""/>
+          <p:cNvPr id="980" name=""/>
           <p:cNvSpPr txBox="1"/>
           <p:nvPr/>
         </p:nvSpPr>
@@ -40345,7 +40393,7 @@
       </p:sp>
       <p:sp>
         <p:nvSpPr>
-          <p:cNvPr id="979" name=""/>
+          <p:cNvPr id="981" name=""/>
           <p:cNvSpPr txBox="1"/>
           <p:nvPr/>
         </p:nvSpPr>
@@ -40393,7 +40441,7 @@
       </p:sp>
       <p:sp>
         <p:nvSpPr>
-          <p:cNvPr id="980" name=""/>
+          <p:cNvPr id="982" name=""/>
           <p:cNvSpPr txBox="1"/>
           <p:nvPr/>
         </p:nvSpPr>
@@ -40441,7 +40489,7 @@
       </p:sp>
       <p:sp>
         <p:nvSpPr>
-          <p:cNvPr id="981" name=""/>
+          <p:cNvPr id="983" name=""/>
           <p:cNvSpPr txBox="1"/>
           <p:nvPr/>
         </p:nvSpPr>
@@ -40489,7 +40537,7 @@
       </p:sp>
       <p:sp>
         <p:nvSpPr>
-          <p:cNvPr id="982" name=""/>
+          <p:cNvPr id="984" name=""/>
           <p:cNvSpPr txBox="1"/>
           <p:nvPr/>
         </p:nvSpPr>
@@ -40537,7 +40585,7 @@
       </p:sp>
       <p:sp>
         <p:nvSpPr>
-          <p:cNvPr id="983" name=""/>
+          <p:cNvPr id="985" name=""/>
           <p:cNvSpPr txBox="1"/>
           <p:nvPr/>
         </p:nvSpPr>
@@ -40585,7 +40633,7 @@
       </p:sp>
       <p:sp>
         <p:nvSpPr>
-          <p:cNvPr id="984" name=""/>
+          <p:cNvPr id="986" name=""/>
           <p:cNvSpPr txBox="1"/>
           <p:nvPr/>
         </p:nvSpPr>
@@ -40633,7 +40681,7 @@
       </p:sp>
       <p:sp>
         <p:nvSpPr>
-          <p:cNvPr id="985" name=""/>
+          <p:cNvPr id="987" name=""/>
           <p:cNvSpPr txBox="1"/>
           <p:nvPr/>
         </p:nvSpPr>
@@ -40681,7 +40729,7 @@
       </p:sp>
       <p:sp>
         <p:nvSpPr>
-          <p:cNvPr id="986" name=""/>
+          <p:cNvPr id="988" name=""/>
           <p:cNvSpPr txBox="1"/>
           <p:nvPr/>
         </p:nvSpPr>
@@ -40729,7 +40777,7 @@
       </p:sp>
       <p:sp>
         <p:nvSpPr>
-          <p:cNvPr id="987" name=""/>
+          <p:cNvPr id="989" name=""/>
           <p:cNvSpPr txBox="1"/>
           <p:nvPr/>
         </p:nvSpPr>
@@ -40777,7 +40825,7 @@
       </p:sp>
       <p:sp>
         <p:nvSpPr>
-          <p:cNvPr id="988" name=""/>
+          <p:cNvPr id="990" name=""/>
           <p:cNvSpPr txBox="1"/>
           <p:nvPr/>
         </p:nvSpPr>
@@ -40825,7 +40873,7 @@
       </p:sp>
       <p:sp>
         <p:nvSpPr>
-          <p:cNvPr id="989" name=""/>
+          <p:cNvPr id="991" name=""/>
           <p:cNvSpPr txBox="1"/>
           <p:nvPr/>
         </p:nvSpPr>
@@ -40873,7 +40921,7 @@
       </p:sp>
       <p:sp>
         <p:nvSpPr>
-          <p:cNvPr id="990" name=""/>
+          <p:cNvPr id="992" name=""/>
           <p:cNvSpPr txBox="1"/>
           <p:nvPr/>
         </p:nvSpPr>
@@ -40951,7 +40999,7 @@
       </p:grpSpPr>
       <p:sp>
         <p:nvSpPr>
-          <p:cNvPr id="991" name=""/>
+          <p:cNvPr id="993" name=""/>
           <p:cNvSpPr/>
           <p:nvPr/>
         </p:nvSpPr>
@@ -41011,7 +41059,7 @@
       </p:sp>
       <p:sp>
         <p:nvSpPr>
-          <p:cNvPr id="992" name=""/>
+          <p:cNvPr id="994" name=""/>
           <p:cNvSpPr/>
           <p:nvPr/>
         </p:nvSpPr>
@@ -41071,7 +41119,7 @@
       </p:sp>
       <p:sp>
         <p:nvSpPr>
-          <p:cNvPr id="993" name=""/>
+          <p:cNvPr id="995" name=""/>
           <p:cNvSpPr/>
           <p:nvPr/>
         </p:nvSpPr>
@@ -41131,7 +41179,7 @@
       </p:sp>
       <p:sp>
         <p:nvSpPr>
-          <p:cNvPr id="994" name=""/>
+          <p:cNvPr id="996" name=""/>
           <p:cNvSpPr/>
           <p:nvPr/>
         </p:nvSpPr>
@@ -41191,7 +41239,7 @@
       </p:sp>
       <p:sp>
         <p:nvSpPr>
-          <p:cNvPr id="995" name=""/>
+          <p:cNvPr id="997" name=""/>
           <p:cNvSpPr/>
           <p:nvPr/>
         </p:nvSpPr>
@@ -41319,7 +41367,7 @@
       </p:sp>
       <p:sp>
         <p:nvSpPr>
-          <p:cNvPr id="996" name=""/>
+          <p:cNvPr id="998" name=""/>
           <p:cNvSpPr txBox="1"/>
           <p:nvPr/>
         </p:nvSpPr>
@@ -41367,7 +41415,7 @@
       </p:sp>
       <p:sp>
         <p:nvSpPr>
-          <p:cNvPr id="997" name=""/>
+          <p:cNvPr id="999" name=""/>
           <p:cNvSpPr/>
           <p:nvPr/>
         </p:nvSpPr>
@@ -41495,7 +41543,7 @@
       </p:sp>
       <p:sp>
         <p:nvSpPr>
-          <p:cNvPr id="998" name=""/>
+          <p:cNvPr id="1000" name=""/>
           <p:cNvSpPr txBox="1"/>
           <p:nvPr/>
         </p:nvSpPr>
@@ -41543,7 +41591,7 @@
       </p:sp>
       <p:sp>
         <p:nvSpPr>
-          <p:cNvPr id="999" name=""/>
+          <p:cNvPr id="1001" name=""/>
           <p:cNvSpPr txBox="1"/>
           <p:nvPr/>
         </p:nvSpPr>
@@ -41591,7 +41639,7 @@
       </p:sp>
       <p:sp>
         <p:nvSpPr>
-          <p:cNvPr id="1000" name=""/>
+          <p:cNvPr id="1002" name=""/>
           <p:cNvSpPr txBox="1"/>
           <p:nvPr/>
         </p:nvSpPr>
@@ -41639,7 +41687,7 @@
       </p:sp>
       <p:sp>
         <p:nvSpPr>
-          <p:cNvPr id="1001" name=""/>
+          <p:cNvPr id="1003" name=""/>
           <p:cNvSpPr/>
           <p:nvPr/>
         </p:nvSpPr>
@@ -41767,7 +41815,7 @@
       </p:sp>
       <p:sp>
         <p:nvSpPr>
-          <p:cNvPr id="1002" name=""/>
+          <p:cNvPr id="1004" name=""/>
           <p:cNvSpPr txBox="1"/>
           <p:nvPr/>
         </p:nvSpPr>
@@ -41815,7 +41863,7 @@
       </p:sp>
       <p:sp>
         <p:nvSpPr>
-          <p:cNvPr id="1003" name=""/>
+          <p:cNvPr id="1005" name=""/>
           <p:cNvSpPr txBox="1"/>
           <p:nvPr/>
         </p:nvSpPr>
@@ -41863,7 +41911,7 @@
       </p:sp>
       <p:sp>
         <p:nvSpPr>
-          <p:cNvPr id="1004" name=""/>
+          <p:cNvPr id="1006" name=""/>
           <p:cNvSpPr txBox="1"/>
           <p:nvPr/>
         </p:nvSpPr>
@@ -41911,7 +41959,7 @@
       </p:sp>
       <p:sp>
         <p:nvSpPr>
-          <p:cNvPr id="1005" name=""/>
+          <p:cNvPr id="1007" name=""/>
           <p:cNvSpPr txBox="1"/>
           <p:nvPr/>
         </p:nvSpPr>
@@ -41959,7 +42007,7 @@
       </p:sp>
       <p:sp>
         <p:nvSpPr>
-          <p:cNvPr id="1006" name=""/>
+          <p:cNvPr id="1008" name=""/>
           <p:cNvSpPr txBox="1"/>
           <p:nvPr/>
         </p:nvSpPr>

--- a/slides/2026-07-01-ai-projects-intro.pptx
+++ b/slides/2026-07-01-ai-projects-intro.pptx
@@ -31892,7 +31892,7 @@
         <p:spPr>
           <a:xfrm>
             <a:off x="4577040" y="1399320"/>
-            <a:ext cx="1334160" cy="191160"/>
+            <a:ext cx="191160" cy="191160"/>
           </a:xfrm>
           <a:prstGeom prst="rect">
             <a:avLst/>
@@ -31918,7 +31918,7 @@
                 <a:latin typeface="HiraginoSans-W4"/>
                 <a:ea typeface="HiraginoSans-W4"/>
               </a:rPr>
-              <a:t>に⼀任し、⼀定</a:t>
+              <a:t>に</a:t>
             </a:r>
             <a:endParaRPr lang="en-US" sz="1500" b="0" u="none" strike="noStrike">
               <a:solidFill>
@@ -32068,7 +32068,7 @@
         <p:spPr>
           <a:xfrm>
             <a:off x="799920" y="1742040"/>
-            <a:ext cx="1143720" cy="191160"/>
+            <a:ext cx="2286720" cy="191160"/>
           </a:xfrm>
           <a:prstGeom prst="rect">
             <a:avLst/>
@@ -32094,7 +32094,7 @@
                 <a:latin typeface="HiraginoSans-W4"/>
                 <a:ea typeface="HiraginoSans-W4"/>
               </a:rPr>
-              <a:t>の精度を確保</a:t>
+              <a:t>⼀任し、⼀定の精度を確保</a:t>
             </a:r>
             <a:endParaRPr lang="en-US" sz="1500" b="0" u="none" strike="noStrike">
               <a:solidFill>
@@ -32212,7 +32212,7 @@
         <p:spPr>
           <a:xfrm>
             <a:off x="2239560" y="2132640"/>
-            <a:ext cx="3620160" cy="191160"/>
+            <a:ext cx="2477160" cy="191160"/>
           </a:xfrm>
           <a:prstGeom prst="rect">
             <a:avLst/>
@@ -32238,7 +32238,7 @@
                 <a:latin typeface="HiraginoSans-W4"/>
                 <a:ea typeface="HiraginoSans-W4"/>
               </a:rPr>
-              <a:t>ヶ⽉後、予測値に異常が⾒られたため要因</a:t>
+              <a:t>ヶ⽉後、予測値に異常が⾒ら</a:t>
             </a:r>
             <a:endParaRPr lang="en-US" sz="1500" b="0" u="none" strike="noStrike">
               <a:solidFill>
@@ -32388,7 +32388,7 @@
         <p:spPr>
           <a:xfrm>
             <a:off x="799920" y="2475720"/>
-            <a:ext cx="572400" cy="191160"/>
+            <a:ext cx="1715400" cy="191160"/>
           </a:xfrm>
           <a:prstGeom prst="rect">
             <a:avLst/>
@@ -32414,7 +32414,7 @@
                 <a:latin typeface="HiraginoSans-W4"/>
                 <a:ea typeface="HiraginoSans-W4"/>
               </a:rPr>
-              <a:t>を調査</a:t>
+              <a:t>れたため要因を調査</a:t>
             </a:r>
             <a:endParaRPr lang="en-US" sz="1500" b="0" u="none" strike="noStrike">
               <a:solidFill>
@@ -32484,7 +32484,7 @@
         <p:spPr>
           <a:xfrm>
             <a:off x="906120" y="2865960"/>
-            <a:ext cx="4953600" cy="191160"/>
+            <a:ext cx="3810600" cy="191160"/>
           </a:xfrm>
           <a:prstGeom prst="rect">
             <a:avLst/>
@@ -32510,7 +32510,7 @@
                 <a:latin typeface="HiraginoSans-W4"/>
                 <a:ea typeface="HiraginoSans-W4"/>
               </a:rPr>
-              <a:t>⽇前の⽇射量やその移動平均など、妥当性の低い説明変数</a:t>
+              <a:t>⽇前の⽇射量やその移動平均など、妥当性の</a:t>
             </a:r>
             <a:endParaRPr lang="en-US" sz="1500" b="0" u="none" strike="noStrike">
               <a:solidFill>
@@ -32660,7 +32660,7 @@
         <p:spPr>
           <a:xfrm>
             <a:off x="799920" y="3209040"/>
-            <a:ext cx="2286720" cy="191160"/>
+            <a:ext cx="3429720" cy="191160"/>
           </a:xfrm>
           <a:prstGeom prst="rect">
             <a:avLst/>
@@ -32686,7 +32686,7 @@
                 <a:latin typeface="HiraginoSans-W4"/>
                 <a:ea typeface="HiraginoSans-W4"/>
               </a:rPr>
-              <a:t>が含まれていたことが判明</a:t>
+              <a:t>低い説明変数が含まれていたことが判明</a:t>
             </a:r>
             <a:endParaRPr lang="en-US" sz="1500" b="0" u="none" strike="noStrike">
               <a:solidFill>
@@ -32707,8 +32707,8 @@
         </p:nvSpPr>
         <p:spPr>
           <a:xfrm>
-            <a:off x="6219720" y="1962000"/>
-            <a:ext cx="838440" cy="638640"/>
+            <a:off x="5124240" y="1962000"/>
+            <a:ext cx="810000" cy="638640"/>
           </a:xfrm>
           <a:custGeom>
             <a:avLst/>
@@ -32716,15 +32716,15 @@
             <a:ahLst/>
             <a:rect l="0" t="0" r="r" b="b"/>
             <a:pathLst>
-              <a:path w="2329" h="1774">
-                <a:moveTo>
-                  <a:pt x="0" y="0"/>
-                </a:moveTo>
-                <a:lnTo>
-                  <a:pt x="2329" y="0"/>
-                </a:lnTo>
-                <a:lnTo>
-                  <a:pt x="2329" y="1774"/>
+              <a:path w="2250" h="1774">
+                <a:moveTo>
+                  <a:pt x="0" y="0"/>
+                </a:moveTo>
+                <a:lnTo>
+                  <a:pt x="2250" y="0"/>
+                </a:lnTo>
+                <a:lnTo>
+                  <a:pt x="2250" y="1774"/>
                 </a:lnTo>
                 <a:lnTo>
                   <a:pt x="0" y="1774"/>
@@ -32767,8 +32767,8 @@
         </p:nvSpPr>
         <p:spPr>
           <a:xfrm>
-            <a:off x="7057800" y="1962000"/>
-            <a:ext cx="1286280" cy="638640"/>
+            <a:off x="5933880" y="1962000"/>
+            <a:ext cx="1200600" cy="638640"/>
           </a:xfrm>
           <a:custGeom>
             <a:avLst/>
@@ -32776,15 +32776,15 @@
             <a:ahLst/>
             <a:rect l="0" t="0" r="r" b="b"/>
             <a:pathLst>
-              <a:path w="3573" h="1774">
-                <a:moveTo>
-                  <a:pt x="0" y="0"/>
-                </a:moveTo>
-                <a:lnTo>
-                  <a:pt x="3573" y="0"/>
-                </a:lnTo>
-                <a:lnTo>
-                  <a:pt x="3573" y="1774"/>
+              <a:path w="3335" h="1774">
+                <a:moveTo>
+                  <a:pt x="0" y="0"/>
+                </a:moveTo>
+                <a:lnTo>
+                  <a:pt x="3335" y="0"/>
+                </a:lnTo>
+                <a:lnTo>
+                  <a:pt x="3335" y="1774"/>
                 </a:lnTo>
                 <a:lnTo>
                   <a:pt x="0" y="1774"/>
@@ -32827,8 +32827,8 @@
         </p:nvSpPr>
         <p:spPr>
           <a:xfrm>
-            <a:off x="8343720" y="1962000"/>
-            <a:ext cx="2476800" cy="638640"/>
+            <a:off x="7134120" y="1962000"/>
+            <a:ext cx="3715200" cy="638640"/>
           </a:xfrm>
           <a:custGeom>
             <a:avLst/>
@@ -32836,15 +32836,15 @@
             <a:ahLst/>
             <a:rect l="0" t="0" r="r" b="b"/>
             <a:pathLst>
-              <a:path w="6880" h="1774">
-                <a:moveTo>
-                  <a:pt x="0" y="0"/>
-                </a:moveTo>
-                <a:lnTo>
-                  <a:pt x="6880" y="0"/>
-                </a:lnTo>
-                <a:lnTo>
-                  <a:pt x="6880" y="1774"/>
+              <a:path w="10320" h="1774">
+                <a:moveTo>
+                  <a:pt x="0" y="0"/>
+                </a:moveTo>
+                <a:lnTo>
+                  <a:pt x="10320" y="0"/>
+                </a:lnTo>
+                <a:lnTo>
+                  <a:pt x="10320" y="1774"/>
                 </a:lnTo>
                 <a:lnTo>
                   <a:pt x="0" y="1774"/>
@@ -32887,8 +32887,8 @@
         </p:nvSpPr>
         <p:spPr>
           <a:xfrm>
-            <a:off x="10820160" y="1962000"/>
-            <a:ext cx="838440" cy="638640"/>
+            <a:off x="10848960" y="1962000"/>
+            <a:ext cx="809640" cy="638640"/>
           </a:xfrm>
           <a:custGeom>
             <a:avLst/>
@@ -32896,15 +32896,15 @@
             <a:ahLst/>
             <a:rect l="0" t="0" r="r" b="b"/>
             <a:pathLst>
-              <a:path w="2329" h="1774">
-                <a:moveTo>
-                  <a:pt x="0" y="0"/>
-                </a:moveTo>
-                <a:lnTo>
-                  <a:pt x="2329" y="0"/>
-                </a:lnTo>
-                <a:lnTo>
-                  <a:pt x="2329" y="1774"/>
+              <a:path w="2249" h="1774">
+                <a:moveTo>
+                  <a:pt x="0" y="0"/>
+                </a:moveTo>
+                <a:lnTo>
+                  <a:pt x="2249" y="0"/>
+                </a:lnTo>
+                <a:lnTo>
+                  <a:pt x="2249" y="1774"/>
                 </a:lnTo>
                 <a:lnTo>
                   <a:pt x="0" y="1774"/>
@@ -32947,8 +32947,8 @@
         </p:nvSpPr>
         <p:spPr>
           <a:xfrm>
-            <a:off x="6219720" y="1962000"/>
-            <a:ext cx="838440" cy="638640"/>
+            <a:off x="5124240" y="1962000"/>
+            <a:ext cx="810000" cy="638640"/>
           </a:xfrm>
           <a:custGeom>
             <a:avLst/>
@@ -32956,15 +32956,15 @@
             <a:ahLst/>
             <a:rect l="0" t="0" r="r" b="b"/>
             <a:pathLst>
-              <a:path w="2329" h="1774">
-                <a:moveTo>
-                  <a:pt x="0" y="0"/>
-                </a:moveTo>
-                <a:lnTo>
-                  <a:pt x="2329" y="0"/>
-                </a:lnTo>
-                <a:lnTo>
-                  <a:pt x="2329" y="1774"/>
+              <a:path w="2250" h="1774">
+                <a:moveTo>
+                  <a:pt x="0" y="0"/>
+                </a:moveTo>
+                <a:lnTo>
+                  <a:pt x="2250" y="0"/>
+                </a:lnTo>
+                <a:lnTo>
+                  <a:pt x="2250" y="1774"/>
                 </a:lnTo>
                 <a:lnTo>
                   <a:pt x="0" y="1774"/>
@@ -33007,8 +33007,8 @@
         </p:nvSpPr>
         <p:spPr>
           <a:xfrm>
-            <a:off x="7057800" y="1962000"/>
-            <a:ext cx="1286280" cy="638640"/>
+            <a:off x="5933880" y="1962000"/>
+            <a:ext cx="1200600" cy="638640"/>
           </a:xfrm>
           <a:custGeom>
             <a:avLst/>
@@ -33016,15 +33016,15 @@
             <a:ahLst/>
             <a:rect l="0" t="0" r="r" b="b"/>
             <a:pathLst>
-              <a:path w="3573" h="1774">
-                <a:moveTo>
-                  <a:pt x="0" y="0"/>
-                </a:moveTo>
-                <a:lnTo>
-                  <a:pt x="3573" y="0"/>
-                </a:lnTo>
-                <a:lnTo>
-                  <a:pt x="3573" y="1774"/>
+              <a:path w="3335" h="1774">
+                <a:moveTo>
+                  <a:pt x="0" y="0"/>
+                </a:moveTo>
+                <a:lnTo>
+                  <a:pt x="3335" y="0"/>
+                </a:lnTo>
+                <a:lnTo>
+                  <a:pt x="3335" y="1774"/>
                 </a:lnTo>
                 <a:lnTo>
                   <a:pt x="0" y="1774"/>
@@ -33067,8 +33067,8 @@
         </p:nvSpPr>
         <p:spPr>
           <a:xfrm>
-            <a:off x="8343720" y="1962000"/>
-            <a:ext cx="2476800" cy="638640"/>
+            <a:off x="7134120" y="1962000"/>
+            <a:ext cx="3715200" cy="638640"/>
           </a:xfrm>
           <a:custGeom>
             <a:avLst/>
@@ -33076,15 +33076,15 @@
             <a:ahLst/>
             <a:rect l="0" t="0" r="r" b="b"/>
             <a:pathLst>
-              <a:path w="6880" h="1774">
-                <a:moveTo>
-                  <a:pt x="0" y="0"/>
-                </a:moveTo>
-                <a:lnTo>
-                  <a:pt x="6880" y="0"/>
-                </a:lnTo>
-                <a:lnTo>
-                  <a:pt x="6880" y="1774"/>
+              <a:path w="10320" h="1774">
+                <a:moveTo>
+                  <a:pt x="0" y="0"/>
+                </a:moveTo>
+                <a:lnTo>
+                  <a:pt x="10320" y="0"/>
+                </a:lnTo>
+                <a:lnTo>
+                  <a:pt x="10320" y="1774"/>
                 </a:lnTo>
                 <a:lnTo>
                   <a:pt x="0" y="1774"/>
@@ -33127,8 +33127,8 @@
         </p:nvSpPr>
         <p:spPr>
           <a:xfrm>
-            <a:off x="10820160" y="1962000"/>
-            <a:ext cx="838440" cy="638640"/>
+            <a:off x="10848960" y="1962000"/>
+            <a:ext cx="809640" cy="638640"/>
           </a:xfrm>
           <a:custGeom>
             <a:avLst/>
@@ -33136,15 +33136,15 @@
             <a:ahLst/>
             <a:rect l="0" t="0" r="r" b="b"/>
             <a:pathLst>
-              <a:path w="2329" h="1774">
-                <a:moveTo>
-                  <a:pt x="0" y="0"/>
-                </a:moveTo>
-                <a:lnTo>
-                  <a:pt x="2329" y="0"/>
-                </a:lnTo>
-                <a:lnTo>
-                  <a:pt x="2329" y="1774"/>
+              <a:path w="2249" h="1774">
+                <a:moveTo>
+                  <a:pt x="0" y="0"/>
+                </a:moveTo>
+                <a:lnTo>
+                  <a:pt x="2249" y="0"/>
+                </a:lnTo>
+                <a:lnTo>
+                  <a:pt x="2249" y="1774"/>
                 </a:lnTo>
                 <a:lnTo>
                   <a:pt x="0" y="1774"/>
@@ -33187,8 +33187,8 @@
         </p:nvSpPr>
         <p:spPr>
           <a:xfrm>
-            <a:off x="6219720" y="2600280"/>
-            <a:ext cx="838440" cy="638280"/>
+            <a:off x="5124240" y="2600280"/>
+            <a:ext cx="810000" cy="638280"/>
           </a:xfrm>
           <a:custGeom>
             <a:avLst/>
@@ -33196,15 +33196,15 @@
             <a:ahLst/>
             <a:rect l="0" t="0" r="r" b="b"/>
             <a:pathLst>
-              <a:path w="2329" h="1773">
-                <a:moveTo>
-                  <a:pt x="0" y="0"/>
-                </a:moveTo>
-                <a:lnTo>
-                  <a:pt x="2329" y="0"/>
-                </a:lnTo>
-                <a:lnTo>
-                  <a:pt x="2329" y="1773"/>
+              <a:path w="2250" h="1773">
+                <a:moveTo>
+                  <a:pt x="0" y="0"/>
+                </a:moveTo>
+                <a:lnTo>
+                  <a:pt x="2250" y="0"/>
+                </a:lnTo>
+                <a:lnTo>
+                  <a:pt x="2250" y="1773"/>
                 </a:lnTo>
                 <a:lnTo>
                   <a:pt x="0" y="1773"/>
@@ -33247,8 +33247,8 @@
         </p:nvSpPr>
         <p:spPr>
           <a:xfrm>
-            <a:off x="7057800" y="2600280"/>
-            <a:ext cx="1286280" cy="638280"/>
+            <a:off x="5933880" y="2600280"/>
+            <a:ext cx="1200600" cy="638280"/>
           </a:xfrm>
           <a:custGeom>
             <a:avLst/>
@@ -33256,15 +33256,15 @@
             <a:ahLst/>
             <a:rect l="0" t="0" r="r" b="b"/>
             <a:pathLst>
-              <a:path w="3573" h="1773">
-                <a:moveTo>
-                  <a:pt x="0" y="0"/>
-                </a:moveTo>
-                <a:lnTo>
-                  <a:pt x="3573" y="0"/>
-                </a:lnTo>
-                <a:lnTo>
-                  <a:pt x="3573" y="1773"/>
+              <a:path w="3335" h="1773">
+                <a:moveTo>
+                  <a:pt x="0" y="0"/>
+                </a:moveTo>
+                <a:lnTo>
+                  <a:pt x="3335" y="0"/>
+                </a:lnTo>
+                <a:lnTo>
+                  <a:pt x="3335" y="1773"/>
                 </a:lnTo>
                 <a:lnTo>
                   <a:pt x="0" y="1773"/>
@@ -33307,8 +33307,8 @@
         </p:nvSpPr>
         <p:spPr>
           <a:xfrm>
-            <a:off x="8343720" y="2600280"/>
-            <a:ext cx="2476800" cy="638280"/>
+            <a:off x="7134120" y="2600280"/>
+            <a:ext cx="3715200" cy="638280"/>
           </a:xfrm>
           <a:custGeom>
             <a:avLst/>
@@ -33316,15 +33316,15 @@
             <a:ahLst/>
             <a:rect l="0" t="0" r="r" b="b"/>
             <a:pathLst>
-              <a:path w="6880" h="1773">
-                <a:moveTo>
-                  <a:pt x="0" y="0"/>
-                </a:moveTo>
-                <a:lnTo>
-                  <a:pt x="6880" y="0"/>
-                </a:lnTo>
-                <a:lnTo>
-                  <a:pt x="6880" y="1773"/>
+              <a:path w="10320" h="1773">
+                <a:moveTo>
+                  <a:pt x="0" y="0"/>
+                </a:moveTo>
+                <a:lnTo>
+                  <a:pt x="10320" y="0"/>
+                </a:lnTo>
+                <a:lnTo>
+                  <a:pt x="10320" y="1773"/>
                 </a:lnTo>
                 <a:lnTo>
                   <a:pt x="0" y="1773"/>
@@ -33367,8 +33367,8 @@
         </p:nvSpPr>
         <p:spPr>
           <a:xfrm>
-            <a:off x="10820160" y="2600280"/>
-            <a:ext cx="838440" cy="638280"/>
+            <a:off x="10848960" y="2600280"/>
+            <a:ext cx="809640" cy="638280"/>
           </a:xfrm>
           <a:custGeom>
             <a:avLst/>
@@ -33376,15 +33376,15 @@
             <a:ahLst/>
             <a:rect l="0" t="0" r="r" b="b"/>
             <a:pathLst>
-              <a:path w="2329" h="1773">
-                <a:moveTo>
-                  <a:pt x="0" y="0"/>
-                </a:moveTo>
-                <a:lnTo>
-                  <a:pt x="2329" y="0"/>
-                </a:lnTo>
-                <a:lnTo>
-                  <a:pt x="2329" y="1773"/>
+              <a:path w="2249" h="1773">
+                <a:moveTo>
+                  <a:pt x="0" y="0"/>
+                </a:moveTo>
+                <a:lnTo>
+                  <a:pt x="2249" y="0"/>
+                </a:lnTo>
+                <a:lnTo>
+                  <a:pt x="2249" y="1773"/>
                 </a:lnTo>
                 <a:lnTo>
                   <a:pt x="0" y="1773"/>
@@ -33427,8 +33427,8 @@
         </p:nvSpPr>
         <p:spPr>
           <a:xfrm>
-            <a:off x="6219720" y="3238200"/>
-            <a:ext cx="838440" cy="638640"/>
+            <a:off x="5124240" y="3238200"/>
+            <a:ext cx="810000" cy="638640"/>
           </a:xfrm>
           <a:custGeom>
             <a:avLst/>
@@ -33436,15 +33436,15 @@
             <a:ahLst/>
             <a:rect l="0" t="0" r="r" b="b"/>
             <a:pathLst>
-              <a:path w="2329" h="1774">
-                <a:moveTo>
-                  <a:pt x="0" y="0"/>
-                </a:moveTo>
-                <a:lnTo>
-                  <a:pt x="2329" y="0"/>
-                </a:lnTo>
-                <a:lnTo>
-                  <a:pt x="2329" y="1774"/>
+              <a:path w="2250" h="1774">
+                <a:moveTo>
+                  <a:pt x="0" y="0"/>
+                </a:moveTo>
+                <a:lnTo>
+                  <a:pt x="2250" y="0"/>
+                </a:lnTo>
+                <a:lnTo>
+                  <a:pt x="2250" y="1774"/>
                 </a:lnTo>
                 <a:lnTo>
                   <a:pt x="0" y="1774"/>
@@ -33487,8 +33487,8 @@
         </p:nvSpPr>
         <p:spPr>
           <a:xfrm>
-            <a:off x="7057800" y="3238200"/>
-            <a:ext cx="1286280" cy="638640"/>
+            <a:off x="5933880" y="3238200"/>
+            <a:ext cx="1200600" cy="638640"/>
           </a:xfrm>
           <a:custGeom>
             <a:avLst/>
@@ -33496,15 +33496,15 @@
             <a:ahLst/>
             <a:rect l="0" t="0" r="r" b="b"/>
             <a:pathLst>
-              <a:path w="3573" h="1774">
-                <a:moveTo>
-                  <a:pt x="0" y="0"/>
-                </a:moveTo>
-                <a:lnTo>
-                  <a:pt x="3573" y="0"/>
-                </a:lnTo>
-                <a:lnTo>
-                  <a:pt x="3573" y="1774"/>
+              <a:path w="3335" h="1774">
+                <a:moveTo>
+                  <a:pt x="0" y="0"/>
+                </a:moveTo>
+                <a:lnTo>
+                  <a:pt x="3335" y="0"/>
+                </a:lnTo>
+                <a:lnTo>
+                  <a:pt x="3335" y="1774"/>
                 </a:lnTo>
                 <a:lnTo>
                   <a:pt x="0" y="1774"/>
@@ -33547,8 +33547,8 @@
         </p:nvSpPr>
         <p:spPr>
           <a:xfrm>
-            <a:off x="8343720" y="3238200"/>
-            <a:ext cx="2476800" cy="638640"/>
+            <a:off x="7134120" y="3238200"/>
+            <a:ext cx="3715200" cy="638640"/>
           </a:xfrm>
           <a:custGeom>
             <a:avLst/>
@@ -33556,15 +33556,15 @@
             <a:ahLst/>
             <a:rect l="0" t="0" r="r" b="b"/>
             <a:pathLst>
-              <a:path w="6880" h="1774">
-                <a:moveTo>
-                  <a:pt x="0" y="0"/>
-                </a:moveTo>
-                <a:lnTo>
-                  <a:pt x="6880" y="0"/>
-                </a:lnTo>
-                <a:lnTo>
-                  <a:pt x="6880" y="1774"/>
+              <a:path w="10320" h="1774">
+                <a:moveTo>
+                  <a:pt x="0" y="0"/>
+                </a:moveTo>
+                <a:lnTo>
+                  <a:pt x="10320" y="0"/>
+                </a:lnTo>
+                <a:lnTo>
+                  <a:pt x="10320" y="1774"/>
                 </a:lnTo>
                 <a:lnTo>
                   <a:pt x="0" y="1774"/>
@@ -33607,8 +33607,8 @@
         </p:nvSpPr>
         <p:spPr>
           <a:xfrm>
-            <a:off x="10820160" y="3238200"/>
-            <a:ext cx="838440" cy="638640"/>
+            <a:off x="10848960" y="3238200"/>
+            <a:ext cx="809640" cy="638640"/>
           </a:xfrm>
           <a:custGeom>
             <a:avLst/>
@@ -33616,15 +33616,15 @@
             <a:ahLst/>
             <a:rect l="0" t="0" r="r" b="b"/>
             <a:pathLst>
-              <a:path w="2329" h="1774">
-                <a:moveTo>
-                  <a:pt x="0" y="0"/>
-                </a:moveTo>
-                <a:lnTo>
-                  <a:pt x="2329" y="0"/>
-                </a:lnTo>
-                <a:lnTo>
-                  <a:pt x="2329" y="1774"/>
+              <a:path w="2249" h="1774">
+                <a:moveTo>
+                  <a:pt x="0" y="0"/>
+                </a:moveTo>
+                <a:lnTo>
+                  <a:pt x="2249" y="0"/>
+                </a:lnTo>
+                <a:lnTo>
+                  <a:pt x="2249" y="1774"/>
                 </a:lnTo>
                 <a:lnTo>
                   <a:pt x="0" y="1774"/>
@@ -33667,8 +33667,8 @@
         </p:nvSpPr>
         <p:spPr>
           <a:xfrm>
-            <a:off x="6219720" y="3238200"/>
-            <a:ext cx="838440" cy="638640"/>
+            <a:off x="5124240" y="3238200"/>
+            <a:ext cx="810000" cy="638640"/>
           </a:xfrm>
           <a:custGeom>
             <a:avLst/>
@@ -33676,15 +33676,15 @@
             <a:ahLst/>
             <a:rect l="0" t="0" r="r" b="b"/>
             <a:pathLst>
-              <a:path w="2329" h="1774">
-                <a:moveTo>
-                  <a:pt x="0" y="0"/>
-                </a:moveTo>
-                <a:lnTo>
-                  <a:pt x="2329" y="0"/>
-                </a:lnTo>
-                <a:lnTo>
-                  <a:pt x="2329" y="1774"/>
+              <a:path w="2250" h="1774">
+                <a:moveTo>
+                  <a:pt x="0" y="0"/>
+                </a:moveTo>
+                <a:lnTo>
+                  <a:pt x="2250" y="0"/>
+                </a:lnTo>
+                <a:lnTo>
+                  <a:pt x="2250" y="1774"/>
                 </a:lnTo>
                 <a:lnTo>
                   <a:pt x="0" y="1774"/>
@@ -33727,8 +33727,8 @@
         </p:nvSpPr>
         <p:spPr>
           <a:xfrm>
-            <a:off x="7057800" y="3238200"/>
-            <a:ext cx="1286280" cy="638640"/>
+            <a:off x="5933880" y="3238200"/>
+            <a:ext cx="1200600" cy="638640"/>
           </a:xfrm>
           <a:custGeom>
             <a:avLst/>
@@ -33736,15 +33736,15 @@
             <a:ahLst/>
             <a:rect l="0" t="0" r="r" b="b"/>
             <a:pathLst>
-              <a:path w="3573" h="1774">
-                <a:moveTo>
-                  <a:pt x="0" y="0"/>
-                </a:moveTo>
-                <a:lnTo>
-                  <a:pt x="3573" y="0"/>
-                </a:lnTo>
-                <a:lnTo>
-                  <a:pt x="3573" y="1774"/>
+              <a:path w="3335" h="1774">
+                <a:moveTo>
+                  <a:pt x="0" y="0"/>
+                </a:moveTo>
+                <a:lnTo>
+                  <a:pt x="3335" y="0"/>
+                </a:lnTo>
+                <a:lnTo>
+                  <a:pt x="3335" y="1774"/>
                 </a:lnTo>
                 <a:lnTo>
                   <a:pt x="0" y="1774"/>
@@ -33787,8 +33787,8 @@
         </p:nvSpPr>
         <p:spPr>
           <a:xfrm>
-            <a:off x="8343720" y="3238200"/>
-            <a:ext cx="2476800" cy="638640"/>
+            <a:off x="7134120" y="3238200"/>
+            <a:ext cx="3715200" cy="638640"/>
           </a:xfrm>
           <a:custGeom>
             <a:avLst/>
@@ -33796,15 +33796,15 @@
             <a:ahLst/>
             <a:rect l="0" t="0" r="r" b="b"/>
             <a:pathLst>
-              <a:path w="6880" h="1774">
-                <a:moveTo>
-                  <a:pt x="0" y="0"/>
-                </a:moveTo>
-                <a:lnTo>
-                  <a:pt x="6880" y="0"/>
-                </a:lnTo>
-                <a:lnTo>
-                  <a:pt x="6880" y="1774"/>
+              <a:path w="10320" h="1774">
+                <a:moveTo>
+                  <a:pt x="0" y="0"/>
+                </a:moveTo>
+                <a:lnTo>
+                  <a:pt x="10320" y="0"/>
+                </a:lnTo>
+                <a:lnTo>
+                  <a:pt x="10320" y="1774"/>
                 </a:lnTo>
                 <a:lnTo>
                   <a:pt x="0" y="1774"/>
@@ -33847,8 +33847,8 @@
         </p:nvSpPr>
         <p:spPr>
           <a:xfrm>
-            <a:off x="10820160" y="3238200"/>
-            <a:ext cx="838440" cy="638640"/>
+            <a:off x="10848960" y="3238200"/>
+            <a:ext cx="809640" cy="638640"/>
           </a:xfrm>
           <a:custGeom>
             <a:avLst/>
@@ -33856,15 +33856,15 @@
             <a:ahLst/>
             <a:rect l="0" t="0" r="r" b="b"/>
             <a:pathLst>
-              <a:path w="2329" h="1774">
-                <a:moveTo>
-                  <a:pt x="0" y="0"/>
-                </a:moveTo>
-                <a:lnTo>
-                  <a:pt x="2329" y="0"/>
-                </a:lnTo>
-                <a:lnTo>
-                  <a:pt x="2329" y="1774"/>
+              <a:path w="2249" h="1774">
+                <a:moveTo>
+                  <a:pt x="0" y="0"/>
+                </a:moveTo>
+                <a:lnTo>
+                  <a:pt x="2249" y="0"/>
+                </a:lnTo>
+                <a:lnTo>
+                  <a:pt x="2249" y="1774"/>
                 </a:lnTo>
                 <a:lnTo>
                   <a:pt x="0" y="1774"/>
@@ -33907,8 +33907,8 @@
         </p:nvSpPr>
         <p:spPr>
           <a:xfrm>
-            <a:off x="6219720" y="3876480"/>
-            <a:ext cx="838440" cy="638640"/>
+            <a:off x="5124240" y="3876480"/>
+            <a:ext cx="810000" cy="638640"/>
           </a:xfrm>
           <a:custGeom>
             <a:avLst/>
@@ -33916,15 +33916,15 @@
             <a:ahLst/>
             <a:rect l="0" t="0" r="r" b="b"/>
             <a:pathLst>
-              <a:path w="2329" h="1774">
-                <a:moveTo>
-                  <a:pt x="0" y="0"/>
-                </a:moveTo>
-                <a:lnTo>
-                  <a:pt x="2329" y="0"/>
-                </a:lnTo>
-                <a:lnTo>
-                  <a:pt x="2329" y="1774"/>
+              <a:path w="2250" h="1774">
+                <a:moveTo>
+                  <a:pt x="0" y="0"/>
+                </a:moveTo>
+                <a:lnTo>
+                  <a:pt x="2250" y="0"/>
+                </a:lnTo>
+                <a:lnTo>
+                  <a:pt x="2250" y="1774"/>
                 </a:lnTo>
                 <a:lnTo>
                   <a:pt x="0" y="1774"/>
@@ -33967,8 +33967,8 @@
         </p:nvSpPr>
         <p:spPr>
           <a:xfrm>
-            <a:off x="7057800" y="3876480"/>
-            <a:ext cx="1286280" cy="638640"/>
+            <a:off x="5933880" y="3876480"/>
+            <a:ext cx="1200600" cy="638640"/>
           </a:xfrm>
           <a:custGeom>
             <a:avLst/>
@@ -33976,15 +33976,15 @@
             <a:ahLst/>
             <a:rect l="0" t="0" r="r" b="b"/>
             <a:pathLst>
-              <a:path w="3573" h="1774">
-                <a:moveTo>
-                  <a:pt x="0" y="0"/>
-                </a:moveTo>
-                <a:lnTo>
-                  <a:pt x="3573" y="0"/>
-                </a:lnTo>
-                <a:lnTo>
-                  <a:pt x="3573" y="1774"/>
+              <a:path w="3335" h="1774">
+                <a:moveTo>
+                  <a:pt x="0" y="0"/>
+                </a:moveTo>
+                <a:lnTo>
+                  <a:pt x="3335" y="0"/>
+                </a:lnTo>
+                <a:lnTo>
+                  <a:pt x="3335" y="1774"/>
                 </a:lnTo>
                 <a:lnTo>
                   <a:pt x="0" y="1774"/>
@@ -34027,8 +34027,8 @@
         </p:nvSpPr>
         <p:spPr>
           <a:xfrm>
-            <a:off x="8343720" y="3876480"/>
-            <a:ext cx="2476800" cy="638640"/>
+            <a:off x="7134120" y="3876480"/>
+            <a:ext cx="3715200" cy="638640"/>
           </a:xfrm>
           <a:custGeom>
             <a:avLst/>
@@ -34036,15 +34036,15 @@
             <a:ahLst/>
             <a:rect l="0" t="0" r="r" b="b"/>
             <a:pathLst>
-              <a:path w="6880" h="1774">
-                <a:moveTo>
-                  <a:pt x="0" y="0"/>
-                </a:moveTo>
-                <a:lnTo>
-                  <a:pt x="6880" y="0"/>
-                </a:lnTo>
-                <a:lnTo>
-                  <a:pt x="6880" y="1774"/>
+              <a:path w="10320" h="1774">
+                <a:moveTo>
+                  <a:pt x="0" y="0"/>
+                </a:moveTo>
+                <a:lnTo>
+                  <a:pt x="10320" y="0"/>
+                </a:lnTo>
+                <a:lnTo>
+                  <a:pt x="10320" y="1774"/>
                 </a:lnTo>
                 <a:lnTo>
                   <a:pt x="0" y="1774"/>
@@ -34087,8 +34087,8 @@
         </p:nvSpPr>
         <p:spPr>
           <a:xfrm>
-            <a:off x="10820160" y="3876480"/>
-            <a:ext cx="838440" cy="638640"/>
+            <a:off x="10848960" y="3876480"/>
+            <a:ext cx="809640" cy="638640"/>
           </a:xfrm>
           <a:custGeom>
             <a:avLst/>
@@ -34096,15 +34096,15 @@
             <a:ahLst/>
             <a:rect l="0" t="0" r="r" b="b"/>
             <a:pathLst>
-              <a:path w="2329" h="1774">
-                <a:moveTo>
-                  <a:pt x="0" y="0"/>
-                </a:moveTo>
-                <a:lnTo>
-                  <a:pt x="2329" y="0"/>
-                </a:lnTo>
-                <a:lnTo>
-                  <a:pt x="2329" y="1774"/>
+              <a:path w="2249" h="1774">
+                <a:moveTo>
+                  <a:pt x="0" y="0"/>
+                </a:moveTo>
+                <a:lnTo>
+                  <a:pt x="2249" y="0"/>
+                </a:lnTo>
+                <a:lnTo>
+                  <a:pt x="2249" y="1774"/>
                 </a:lnTo>
                 <a:lnTo>
                   <a:pt x="0" y="1774"/>
@@ -34147,8 +34147,8 @@
         </p:nvSpPr>
         <p:spPr>
           <a:xfrm>
-            <a:off x="6219720" y="4514760"/>
-            <a:ext cx="838440" cy="638280"/>
+            <a:off x="5124240" y="4514760"/>
+            <a:ext cx="810000" cy="638280"/>
           </a:xfrm>
           <a:custGeom>
             <a:avLst/>
@@ -34156,15 +34156,15 @@
             <a:ahLst/>
             <a:rect l="0" t="0" r="r" b="b"/>
             <a:pathLst>
-              <a:path w="2329" h="1773">
-                <a:moveTo>
-                  <a:pt x="0" y="0"/>
-                </a:moveTo>
-                <a:lnTo>
-                  <a:pt x="2329" y="0"/>
-                </a:lnTo>
-                <a:lnTo>
-                  <a:pt x="2329" y="1773"/>
+              <a:path w="2250" h="1773">
+                <a:moveTo>
+                  <a:pt x="0" y="0"/>
+                </a:moveTo>
+                <a:lnTo>
+                  <a:pt x="2250" y="0"/>
+                </a:lnTo>
+                <a:lnTo>
+                  <a:pt x="2250" y="1773"/>
                 </a:lnTo>
                 <a:lnTo>
                   <a:pt x="0" y="1773"/>
@@ -34207,8 +34207,8 @@
         </p:nvSpPr>
         <p:spPr>
           <a:xfrm>
-            <a:off x="7057800" y="4514760"/>
-            <a:ext cx="1286280" cy="638280"/>
+            <a:off x="5933880" y="4514760"/>
+            <a:ext cx="1200600" cy="638280"/>
           </a:xfrm>
           <a:custGeom>
             <a:avLst/>
@@ -34216,15 +34216,15 @@
             <a:ahLst/>
             <a:rect l="0" t="0" r="r" b="b"/>
             <a:pathLst>
-              <a:path w="3573" h="1773">
-                <a:moveTo>
-                  <a:pt x="0" y="0"/>
-                </a:moveTo>
-                <a:lnTo>
-                  <a:pt x="3573" y="0"/>
-                </a:lnTo>
-                <a:lnTo>
-                  <a:pt x="3573" y="1773"/>
+              <a:path w="3335" h="1773">
+                <a:moveTo>
+                  <a:pt x="0" y="0"/>
+                </a:moveTo>
+                <a:lnTo>
+                  <a:pt x="3335" y="0"/>
+                </a:lnTo>
+                <a:lnTo>
+                  <a:pt x="3335" y="1773"/>
                 </a:lnTo>
                 <a:lnTo>
                   <a:pt x="0" y="1773"/>
@@ -34267,8 +34267,8 @@
         </p:nvSpPr>
         <p:spPr>
           <a:xfrm>
-            <a:off x="8343720" y="4514760"/>
-            <a:ext cx="2476800" cy="638280"/>
+            <a:off x="7134120" y="4514760"/>
+            <a:ext cx="3715200" cy="638280"/>
           </a:xfrm>
           <a:custGeom>
             <a:avLst/>
@@ -34276,15 +34276,15 @@
             <a:ahLst/>
             <a:rect l="0" t="0" r="r" b="b"/>
             <a:pathLst>
-              <a:path w="6880" h="1773">
-                <a:moveTo>
-                  <a:pt x="0" y="0"/>
-                </a:moveTo>
-                <a:lnTo>
-                  <a:pt x="6880" y="0"/>
-                </a:lnTo>
-                <a:lnTo>
-                  <a:pt x="6880" y="1773"/>
+              <a:path w="10320" h="1773">
+                <a:moveTo>
+                  <a:pt x="0" y="0"/>
+                </a:moveTo>
+                <a:lnTo>
+                  <a:pt x="10320" y="0"/>
+                </a:lnTo>
+                <a:lnTo>
+                  <a:pt x="10320" y="1773"/>
                 </a:lnTo>
                 <a:lnTo>
                   <a:pt x="0" y="1773"/>
@@ -34327,8 +34327,8 @@
         </p:nvSpPr>
         <p:spPr>
           <a:xfrm>
-            <a:off x="10820160" y="4514760"/>
-            <a:ext cx="838440" cy="638280"/>
+            <a:off x="10848960" y="4514760"/>
+            <a:ext cx="809640" cy="638280"/>
           </a:xfrm>
           <a:custGeom>
             <a:avLst/>
@@ -34336,15 +34336,15 @@
             <a:ahLst/>
             <a:rect l="0" t="0" r="r" b="b"/>
             <a:pathLst>
-              <a:path w="2329" h="1773">
-                <a:moveTo>
-                  <a:pt x="0" y="0"/>
-                </a:moveTo>
-                <a:lnTo>
-                  <a:pt x="2329" y="0"/>
-                </a:lnTo>
-                <a:lnTo>
-                  <a:pt x="2329" y="1773"/>
+              <a:path w="2249" h="1773">
+                <a:moveTo>
+                  <a:pt x="0" y="0"/>
+                </a:moveTo>
+                <a:lnTo>
+                  <a:pt x="2249" y="0"/>
+                </a:lnTo>
+                <a:lnTo>
+                  <a:pt x="2249" y="1773"/>
                 </a:lnTo>
                 <a:lnTo>
                   <a:pt x="0" y="1773"/>
@@ -34387,8 +34387,8 @@
         </p:nvSpPr>
         <p:spPr>
           <a:xfrm>
-            <a:off x="6219720" y="4514760"/>
-            <a:ext cx="838440" cy="638280"/>
+            <a:off x="5124240" y="4514760"/>
+            <a:ext cx="810000" cy="638280"/>
           </a:xfrm>
           <a:custGeom>
             <a:avLst/>
@@ -34396,15 +34396,15 @@
             <a:ahLst/>
             <a:rect l="0" t="0" r="r" b="b"/>
             <a:pathLst>
-              <a:path w="2329" h="1773">
-                <a:moveTo>
-                  <a:pt x="0" y="0"/>
-                </a:moveTo>
-                <a:lnTo>
-                  <a:pt x="2329" y="0"/>
-                </a:lnTo>
-                <a:lnTo>
-                  <a:pt x="2329" y="1773"/>
+              <a:path w="2250" h="1773">
+                <a:moveTo>
+                  <a:pt x="0" y="0"/>
+                </a:moveTo>
+                <a:lnTo>
+                  <a:pt x="2250" y="0"/>
+                </a:lnTo>
+                <a:lnTo>
+                  <a:pt x="2250" y="1773"/>
                 </a:lnTo>
                 <a:lnTo>
                   <a:pt x="0" y="1773"/>
@@ -34447,8 +34447,8 @@
         </p:nvSpPr>
         <p:spPr>
           <a:xfrm>
-            <a:off x="7057800" y="4514760"/>
-            <a:ext cx="1286280" cy="638280"/>
+            <a:off x="5933880" y="4514760"/>
+            <a:ext cx="1200600" cy="638280"/>
           </a:xfrm>
           <a:custGeom>
             <a:avLst/>
@@ -34456,15 +34456,15 @@
             <a:ahLst/>
             <a:rect l="0" t="0" r="r" b="b"/>
             <a:pathLst>
-              <a:path w="3573" h="1773">
-                <a:moveTo>
-                  <a:pt x="0" y="0"/>
-                </a:moveTo>
-                <a:lnTo>
-                  <a:pt x="3573" y="0"/>
-                </a:lnTo>
-                <a:lnTo>
-                  <a:pt x="3573" y="1773"/>
+              <a:path w="3335" h="1773">
+                <a:moveTo>
+                  <a:pt x="0" y="0"/>
+                </a:moveTo>
+                <a:lnTo>
+                  <a:pt x="3335" y="0"/>
+                </a:lnTo>
+                <a:lnTo>
+                  <a:pt x="3335" y="1773"/>
                 </a:lnTo>
                 <a:lnTo>
                   <a:pt x="0" y="1773"/>
@@ -34507,8 +34507,8 @@
         </p:nvSpPr>
         <p:spPr>
           <a:xfrm>
-            <a:off x="8343720" y="4514760"/>
-            <a:ext cx="2476800" cy="638280"/>
+            <a:off x="7134120" y="4514760"/>
+            <a:ext cx="3715200" cy="638280"/>
           </a:xfrm>
           <a:custGeom>
             <a:avLst/>
@@ -34516,15 +34516,15 @@
             <a:ahLst/>
             <a:rect l="0" t="0" r="r" b="b"/>
             <a:pathLst>
-              <a:path w="6880" h="1773">
-                <a:moveTo>
-                  <a:pt x="0" y="0"/>
-                </a:moveTo>
-                <a:lnTo>
-                  <a:pt x="6880" y="0"/>
-                </a:lnTo>
-                <a:lnTo>
-                  <a:pt x="6880" y="1773"/>
+              <a:path w="10320" h="1773">
+                <a:moveTo>
+                  <a:pt x="0" y="0"/>
+                </a:moveTo>
+                <a:lnTo>
+                  <a:pt x="10320" y="0"/>
+                </a:lnTo>
+                <a:lnTo>
+                  <a:pt x="10320" y="1773"/>
                 </a:lnTo>
                 <a:lnTo>
                   <a:pt x="0" y="1773"/>
@@ -34567,8 +34567,8 @@
         </p:nvSpPr>
         <p:spPr>
           <a:xfrm>
-            <a:off x="10820160" y="4514760"/>
-            <a:ext cx="838440" cy="638280"/>
+            <a:off x="10848960" y="4514760"/>
+            <a:ext cx="809640" cy="638280"/>
           </a:xfrm>
           <a:custGeom>
             <a:avLst/>
@@ -34576,15 +34576,15 @@
             <a:ahLst/>
             <a:rect l="0" t="0" r="r" b="b"/>
             <a:pathLst>
-              <a:path w="2329" h="1773">
-                <a:moveTo>
-                  <a:pt x="0" y="0"/>
-                </a:moveTo>
-                <a:lnTo>
-                  <a:pt x="2329" y="0"/>
-                </a:lnTo>
-                <a:lnTo>
-                  <a:pt x="2329" y="1773"/>
+              <a:path w="2249" h="1773">
+                <a:moveTo>
+                  <a:pt x="0" y="0"/>
+                </a:moveTo>
+                <a:lnTo>
+                  <a:pt x="2249" y="0"/>
+                </a:lnTo>
+                <a:lnTo>
+                  <a:pt x="2249" y="1773"/>
                 </a:lnTo>
                 <a:lnTo>
                   <a:pt x="0" y="1773"/>
@@ -34627,7 +34627,7 @@
         </p:nvSpPr>
         <p:spPr>
           <a:xfrm>
-            <a:off x="6210000" y="1952280"/>
+            <a:off x="5124240" y="1952280"/>
             <a:ext cx="10440" cy="648360"/>
           </a:xfrm>
           <a:custGeom>
@@ -34687,8 +34687,8 @@
         </p:nvSpPr>
         <p:spPr>
           <a:xfrm>
-            <a:off x="6210000" y="1952280"/>
-            <a:ext cx="857880" cy="10080"/>
+            <a:off x="5124240" y="1952280"/>
+            <a:ext cx="810000" cy="10080"/>
           </a:xfrm>
           <a:custGeom>
             <a:avLst/>
@@ -34696,15 +34696,15 @@
             <a:ahLst/>
             <a:rect l="0" t="0" r="r" b="b"/>
             <a:pathLst>
-              <a:path w="2383" h="28">
-                <a:moveTo>
-                  <a:pt x="0" y="0"/>
-                </a:moveTo>
-                <a:lnTo>
-                  <a:pt x="2383" y="0"/>
-                </a:lnTo>
-                <a:lnTo>
-                  <a:pt x="2383" y="28"/>
+              <a:path w="2250" h="28">
+                <a:moveTo>
+                  <a:pt x="0" y="0"/>
+                </a:moveTo>
+                <a:lnTo>
+                  <a:pt x="2250" y="0"/>
+                </a:lnTo>
+                <a:lnTo>
+                  <a:pt x="2250" y="28"/>
                 </a:lnTo>
                 <a:lnTo>
                   <a:pt x="0" y="28"/>
@@ -34747,8 +34747,8 @@
         </p:nvSpPr>
         <p:spPr>
           <a:xfrm>
-            <a:off x="7057800" y="1952280"/>
-            <a:ext cx="10080" cy="648360"/>
+            <a:off x="5924520" y="1952280"/>
+            <a:ext cx="9720" cy="648360"/>
           </a:xfrm>
           <a:custGeom>
             <a:avLst/>
@@ -34756,15 +34756,15 @@
             <a:ahLst/>
             <a:rect l="0" t="0" r="r" b="b"/>
             <a:pathLst>
-              <a:path w="28" h="1801">
-                <a:moveTo>
-                  <a:pt x="0" y="0"/>
-                </a:moveTo>
-                <a:lnTo>
-                  <a:pt x="28" y="0"/>
-                </a:lnTo>
-                <a:lnTo>
-                  <a:pt x="28" y="1801"/>
+              <a:path w="27" h="1801">
+                <a:moveTo>
+                  <a:pt x="0" y="0"/>
+                </a:moveTo>
+                <a:lnTo>
+                  <a:pt x="27" y="0"/>
+                </a:lnTo>
+                <a:lnTo>
+                  <a:pt x="27" y="1801"/>
                 </a:lnTo>
                 <a:lnTo>
                   <a:pt x="0" y="1801"/>
@@ -34807,8 +34807,8 @@
         </p:nvSpPr>
         <p:spPr>
           <a:xfrm>
-            <a:off x="7067520" y="1952280"/>
-            <a:ext cx="1285920" cy="10080"/>
+            <a:off x="5933880" y="1952280"/>
+            <a:ext cx="1200600" cy="10080"/>
           </a:xfrm>
           <a:custGeom>
             <a:avLst/>
@@ -34816,15 +34816,15 @@
             <a:ahLst/>
             <a:rect l="0" t="0" r="r" b="b"/>
             <a:pathLst>
-              <a:path w="3572" h="28">
-                <a:moveTo>
-                  <a:pt x="0" y="0"/>
-                </a:moveTo>
-                <a:lnTo>
-                  <a:pt x="3572" y="0"/>
-                </a:lnTo>
-                <a:lnTo>
-                  <a:pt x="3572" y="28"/>
+              <a:path w="3335" h="28">
+                <a:moveTo>
+                  <a:pt x="0" y="0"/>
+                </a:moveTo>
+                <a:lnTo>
+                  <a:pt x="3335" y="0"/>
+                </a:lnTo>
+                <a:lnTo>
+                  <a:pt x="3335" y="28"/>
                 </a:lnTo>
                 <a:lnTo>
                   <a:pt x="0" y="28"/>
@@ -34867,8 +34867,8 @@
         </p:nvSpPr>
         <p:spPr>
           <a:xfrm>
-            <a:off x="8343720" y="1952280"/>
-            <a:ext cx="9720" cy="648360"/>
+            <a:off x="7124400" y="1952280"/>
+            <a:ext cx="10080" cy="648360"/>
           </a:xfrm>
           <a:custGeom>
             <a:avLst/>
@@ -34876,15 +34876,15 @@
             <a:ahLst/>
             <a:rect l="0" t="0" r="r" b="b"/>
             <a:pathLst>
-              <a:path w="27" h="1801">
-                <a:moveTo>
-                  <a:pt x="0" y="0"/>
-                </a:moveTo>
-                <a:lnTo>
-                  <a:pt x="27" y="0"/>
-                </a:lnTo>
-                <a:lnTo>
-                  <a:pt x="27" y="1801"/>
+              <a:path w="28" h="1801">
+                <a:moveTo>
+                  <a:pt x="0" y="0"/>
+                </a:moveTo>
+                <a:lnTo>
+                  <a:pt x="28" y="0"/>
+                </a:lnTo>
+                <a:lnTo>
+                  <a:pt x="28" y="1801"/>
                 </a:lnTo>
                 <a:lnTo>
                   <a:pt x="0" y="1801"/>
@@ -34927,8 +34927,8 @@
         </p:nvSpPr>
         <p:spPr>
           <a:xfrm>
-            <a:off x="8353080" y="1952280"/>
-            <a:ext cx="2467440" cy="10080"/>
+            <a:off x="7134120" y="1952280"/>
+            <a:ext cx="3715200" cy="10080"/>
           </a:xfrm>
           <a:custGeom>
             <a:avLst/>
@@ -34936,15 +34936,15 @@
             <a:ahLst/>
             <a:rect l="0" t="0" r="r" b="b"/>
             <a:pathLst>
-              <a:path w="6854" h="28">
-                <a:moveTo>
-                  <a:pt x="0" y="0"/>
-                </a:moveTo>
-                <a:lnTo>
-                  <a:pt x="6854" y="0"/>
-                </a:lnTo>
-                <a:lnTo>
-                  <a:pt x="6854" y="28"/>
+              <a:path w="10320" h="28">
+                <a:moveTo>
+                  <a:pt x="0" y="0"/>
+                </a:moveTo>
+                <a:lnTo>
+                  <a:pt x="10320" y="0"/>
+                </a:lnTo>
+                <a:lnTo>
+                  <a:pt x="10320" y="28"/>
                 </a:lnTo>
                 <a:lnTo>
                   <a:pt x="0" y="28"/>
@@ -34987,8 +34987,8 @@
         </p:nvSpPr>
         <p:spPr>
           <a:xfrm>
-            <a:off x="10810800" y="1952280"/>
-            <a:ext cx="9720" cy="648360"/>
+            <a:off x="10839240" y="1952280"/>
+            <a:ext cx="10080" cy="648360"/>
           </a:xfrm>
           <a:custGeom>
             <a:avLst/>
@@ -34996,15 +34996,15 @@
             <a:ahLst/>
             <a:rect l="0" t="0" r="r" b="b"/>
             <a:pathLst>
-              <a:path w="27" h="1801">
-                <a:moveTo>
-                  <a:pt x="0" y="0"/>
-                </a:moveTo>
-                <a:lnTo>
-                  <a:pt x="27" y="0"/>
-                </a:lnTo>
-                <a:lnTo>
-                  <a:pt x="27" y="1801"/>
+              <a:path w="28" h="1801">
+                <a:moveTo>
+                  <a:pt x="0" y="0"/>
+                </a:moveTo>
+                <a:lnTo>
+                  <a:pt x="28" y="0"/>
+                </a:lnTo>
+                <a:lnTo>
+                  <a:pt x="28" y="1801"/>
                 </a:lnTo>
                 <a:lnTo>
                   <a:pt x="0" y="1801"/>
@@ -35047,8 +35047,8 @@
         </p:nvSpPr>
         <p:spPr>
           <a:xfrm>
-            <a:off x="10820160" y="1952280"/>
-            <a:ext cx="838440" cy="10080"/>
+            <a:off x="10848960" y="1952280"/>
+            <a:ext cx="809640" cy="10080"/>
           </a:xfrm>
           <a:custGeom>
             <a:avLst/>
@@ -35056,15 +35056,15 @@
             <a:ahLst/>
             <a:rect l="0" t="0" r="r" b="b"/>
             <a:pathLst>
-              <a:path w="2329" h="28">
-                <a:moveTo>
-                  <a:pt x="0" y="0"/>
-                </a:moveTo>
-                <a:lnTo>
-                  <a:pt x="2329" y="0"/>
-                </a:lnTo>
-                <a:lnTo>
-                  <a:pt x="2329" y="28"/>
+              <a:path w="2249" h="28">
+                <a:moveTo>
+                  <a:pt x="0" y="0"/>
+                </a:moveTo>
+                <a:lnTo>
+                  <a:pt x="2249" y="0"/>
+                </a:lnTo>
+                <a:lnTo>
+                  <a:pt x="2249" y="28"/>
                 </a:lnTo>
                 <a:lnTo>
                   <a:pt x="0" y="28"/>
@@ -35167,8 +35167,8 @@
         </p:nvSpPr>
         <p:spPr>
           <a:xfrm>
-            <a:off x="6210000" y="2590560"/>
-            <a:ext cx="857880" cy="10080"/>
+            <a:off x="5124240" y="2590560"/>
+            <a:ext cx="810000" cy="10080"/>
           </a:xfrm>
           <a:custGeom>
             <a:avLst/>
@@ -35176,15 +35176,15 @@
             <a:ahLst/>
             <a:rect l="0" t="0" r="r" b="b"/>
             <a:pathLst>
-              <a:path w="2383" h="28">
-                <a:moveTo>
-                  <a:pt x="0" y="0"/>
-                </a:moveTo>
-                <a:lnTo>
-                  <a:pt x="2383" y="0"/>
-                </a:lnTo>
-                <a:lnTo>
-                  <a:pt x="2383" y="28"/>
+              <a:path w="2250" h="28">
+                <a:moveTo>
+                  <a:pt x="0" y="0"/>
+                </a:moveTo>
+                <a:lnTo>
+                  <a:pt x="2250" y="0"/>
+                </a:lnTo>
+                <a:lnTo>
+                  <a:pt x="2250" y="28"/>
                 </a:lnTo>
                 <a:lnTo>
                   <a:pt x="0" y="28"/>
@@ -35227,8 +35227,8 @@
         </p:nvSpPr>
         <p:spPr>
           <a:xfrm>
-            <a:off x="7067520" y="2590560"/>
-            <a:ext cx="1285920" cy="10080"/>
+            <a:off x="5933880" y="2590560"/>
+            <a:ext cx="1200600" cy="10080"/>
           </a:xfrm>
           <a:custGeom>
             <a:avLst/>
@@ -35236,15 +35236,15 @@
             <a:ahLst/>
             <a:rect l="0" t="0" r="r" b="b"/>
             <a:pathLst>
-              <a:path w="3572" h="28">
-                <a:moveTo>
-                  <a:pt x="0" y="0"/>
-                </a:moveTo>
-                <a:lnTo>
-                  <a:pt x="3572" y="0"/>
-                </a:lnTo>
-                <a:lnTo>
-                  <a:pt x="3572" y="28"/>
+              <a:path w="3335" h="28">
+                <a:moveTo>
+                  <a:pt x="0" y="0"/>
+                </a:moveTo>
+                <a:lnTo>
+                  <a:pt x="3335" y="0"/>
+                </a:lnTo>
+                <a:lnTo>
+                  <a:pt x="3335" y="28"/>
                 </a:lnTo>
                 <a:lnTo>
                   <a:pt x="0" y="28"/>
@@ -35287,8 +35287,8 @@
         </p:nvSpPr>
         <p:spPr>
           <a:xfrm>
-            <a:off x="8353080" y="2590560"/>
-            <a:ext cx="2467440" cy="10080"/>
+            <a:off x="7134120" y="2590560"/>
+            <a:ext cx="3715200" cy="10080"/>
           </a:xfrm>
           <a:custGeom>
             <a:avLst/>
@@ -35296,15 +35296,15 @@
             <a:ahLst/>
             <a:rect l="0" t="0" r="r" b="b"/>
             <a:pathLst>
-              <a:path w="6854" h="28">
-                <a:moveTo>
-                  <a:pt x="0" y="0"/>
-                </a:moveTo>
-                <a:lnTo>
-                  <a:pt x="6854" y="0"/>
-                </a:lnTo>
-                <a:lnTo>
-                  <a:pt x="6854" y="28"/>
+              <a:path w="10320" h="28">
+                <a:moveTo>
+                  <a:pt x="0" y="0"/>
+                </a:moveTo>
+                <a:lnTo>
+                  <a:pt x="10320" y="0"/>
+                </a:lnTo>
+                <a:lnTo>
+                  <a:pt x="10320" y="28"/>
                 </a:lnTo>
                 <a:lnTo>
                   <a:pt x="0" y="28"/>
@@ -35347,8 +35347,8 @@
         </p:nvSpPr>
         <p:spPr>
           <a:xfrm>
-            <a:off x="10820160" y="2590560"/>
-            <a:ext cx="838440" cy="10080"/>
+            <a:off x="10848960" y="2590560"/>
+            <a:ext cx="809640" cy="10080"/>
           </a:xfrm>
           <a:custGeom>
             <a:avLst/>
@@ -35356,15 +35356,15 @@
             <a:ahLst/>
             <a:rect l="0" t="0" r="r" b="b"/>
             <a:pathLst>
-              <a:path w="2329" h="28">
-                <a:moveTo>
-                  <a:pt x="0" y="0"/>
-                </a:moveTo>
-                <a:lnTo>
-                  <a:pt x="2329" y="0"/>
-                </a:lnTo>
-                <a:lnTo>
-                  <a:pt x="2329" y="28"/>
+              <a:path w="2249" h="28">
+                <a:moveTo>
+                  <a:pt x="0" y="0"/>
+                </a:moveTo>
+                <a:lnTo>
+                  <a:pt x="2249" y="0"/>
+                </a:lnTo>
+                <a:lnTo>
+                  <a:pt x="2249" y="28"/>
                 </a:lnTo>
                 <a:lnTo>
                   <a:pt x="0" y="28"/>
@@ -35407,7 +35407,7 @@
         </p:nvSpPr>
         <p:spPr>
           <a:xfrm>
-            <a:off x="6210000" y="2600280"/>
+            <a:off x="5124240" y="2600280"/>
             <a:ext cx="10440" cy="638280"/>
           </a:xfrm>
           <a:custGeom>
@@ -35467,8 +35467,8 @@
         </p:nvSpPr>
         <p:spPr>
           <a:xfrm>
-            <a:off x="7057800" y="2600280"/>
-            <a:ext cx="10080" cy="638280"/>
+            <a:off x="5924520" y="2600280"/>
+            <a:ext cx="9720" cy="638280"/>
           </a:xfrm>
           <a:custGeom>
             <a:avLst/>
@@ -35476,15 +35476,15 @@
             <a:ahLst/>
             <a:rect l="0" t="0" r="r" b="b"/>
             <a:pathLst>
-              <a:path w="28" h="1773">
-                <a:moveTo>
-                  <a:pt x="0" y="0"/>
-                </a:moveTo>
-                <a:lnTo>
-                  <a:pt x="28" y="0"/>
-                </a:lnTo>
-                <a:lnTo>
-                  <a:pt x="28" y="1773"/>
+              <a:path w="27" h="1773">
+                <a:moveTo>
+                  <a:pt x="0" y="0"/>
+                </a:moveTo>
+                <a:lnTo>
+                  <a:pt x="27" y="0"/>
+                </a:lnTo>
+                <a:lnTo>
+                  <a:pt x="27" y="1773"/>
                 </a:lnTo>
                 <a:lnTo>
                   <a:pt x="0" y="1773"/>
@@ -35527,8 +35527,8 @@
         </p:nvSpPr>
         <p:spPr>
           <a:xfrm>
-            <a:off x="8343720" y="2600280"/>
-            <a:ext cx="9720" cy="638280"/>
+            <a:off x="7124400" y="2600280"/>
+            <a:ext cx="10080" cy="638280"/>
           </a:xfrm>
           <a:custGeom>
             <a:avLst/>
@@ -35536,15 +35536,15 @@
             <a:ahLst/>
             <a:rect l="0" t="0" r="r" b="b"/>
             <a:pathLst>
-              <a:path w="27" h="1773">
-                <a:moveTo>
-                  <a:pt x="0" y="0"/>
-                </a:moveTo>
-                <a:lnTo>
-                  <a:pt x="27" y="0"/>
-                </a:lnTo>
-                <a:lnTo>
-                  <a:pt x="27" y="1773"/>
+              <a:path w="28" h="1773">
+                <a:moveTo>
+                  <a:pt x="0" y="0"/>
+                </a:moveTo>
+                <a:lnTo>
+                  <a:pt x="28" y="0"/>
+                </a:lnTo>
+                <a:lnTo>
+                  <a:pt x="28" y="1773"/>
                 </a:lnTo>
                 <a:lnTo>
                   <a:pt x="0" y="1773"/>
@@ -35587,8 +35587,8 @@
         </p:nvSpPr>
         <p:spPr>
           <a:xfrm>
-            <a:off x="10810800" y="2600280"/>
-            <a:ext cx="9720" cy="638280"/>
+            <a:off x="10839240" y="2600280"/>
+            <a:ext cx="10080" cy="638280"/>
           </a:xfrm>
           <a:custGeom>
             <a:avLst/>
@@ -35596,15 +35596,15 @@
             <a:ahLst/>
             <a:rect l="0" t="0" r="r" b="b"/>
             <a:pathLst>
-              <a:path w="27" h="1773">
-                <a:moveTo>
-                  <a:pt x="0" y="0"/>
-                </a:moveTo>
-                <a:lnTo>
-                  <a:pt x="27" y="0"/>
-                </a:lnTo>
-                <a:lnTo>
-                  <a:pt x="27" y="1773"/>
+              <a:path w="28" h="1773">
+                <a:moveTo>
+                  <a:pt x="0" y="0"/>
+                </a:moveTo>
+                <a:lnTo>
+                  <a:pt x="28" y="0"/>
+                </a:lnTo>
+                <a:lnTo>
+                  <a:pt x="28" y="1773"/>
                 </a:lnTo>
                 <a:lnTo>
                   <a:pt x="0" y="1773"/>
@@ -35707,7 +35707,7 @@
         </p:nvSpPr>
         <p:spPr>
           <a:xfrm>
-            <a:off x="6210000" y="3238200"/>
+            <a:off x="5124240" y="3238200"/>
             <a:ext cx="10440" cy="638640"/>
           </a:xfrm>
           <a:custGeom>
@@ -35767,8 +35767,8 @@
         </p:nvSpPr>
         <p:spPr>
           <a:xfrm>
-            <a:off x="6210000" y="3228840"/>
-            <a:ext cx="857880" cy="9720"/>
+            <a:off x="5124240" y="3228840"/>
+            <a:ext cx="810000" cy="9720"/>
           </a:xfrm>
           <a:custGeom>
             <a:avLst/>
@@ -35776,15 +35776,15 @@
             <a:ahLst/>
             <a:rect l="0" t="0" r="r" b="b"/>
             <a:pathLst>
-              <a:path w="2383" h="27">
-                <a:moveTo>
-                  <a:pt x="0" y="0"/>
-                </a:moveTo>
-                <a:lnTo>
-                  <a:pt x="2383" y="0"/>
-                </a:lnTo>
-                <a:lnTo>
-                  <a:pt x="2383" y="27"/>
+              <a:path w="2250" h="27">
+                <a:moveTo>
+                  <a:pt x="0" y="0"/>
+                </a:moveTo>
+                <a:lnTo>
+                  <a:pt x="2250" y="0"/>
+                </a:lnTo>
+                <a:lnTo>
+                  <a:pt x="2250" y="27"/>
                 </a:lnTo>
                 <a:lnTo>
                   <a:pt x="0" y="27"/>
@@ -35827,8 +35827,8 @@
         </p:nvSpPr>
         <p:spPr>
           <a:xfrm>
-            <a:off x="7057800" y="3238200"/>
-            <a:ext cx="10080" cy="638640"/>
+            <a:off x="5924520" y="3238200"/>
+            <a:ext cx="9720" cy="638640"/>
           </a:xfrm>
           <a:custGeom>
             <a:avLst/>
@@ -35836,15 +35836,15 @@
             <a:ahLst/>
             <a:rect l="0" t="0" r="r" b="b"/>
             <a:pathLst>
-              <a:path w="28" h="1774">
-                <a:moveTo>
-                  <a:pt x="0" y="0"/>
-                </a:moveTo>
-                <a:lnTo>
-                  <a:pt x="28" y="0"/>
-                </a:lnTo>
-                <a:lnTo>
-                  <a:pt x="28" y="1774"/>
+              <a:path w="27" h="1774">
+                <a:moveTo>
+                  <a:pt x="0" y="0"/>
+                </a:moveTo>
+                <a:lnTo>
+                  <a:pt x="27" y="0"/>
+                </a:lnTo>
+                <a:lnTo>
+                  <a:pt x="27" y="1774"/>
                 </a:lnTo>
                 <a:lnTo>
                   <a:pt x="0" y="1774"/>
@@ -35887,8 +35887,8 @@
         </p:nvSpPr>
         <p:spPr>
           <a:xfrm>
-            <a:off x="7067520" y="3228840"/>
-            <a:ext cx="1285920" cy="9720"/>
+            <a:off x="5933880" y="3228840"/>
+            <a:ext cx="1200600" cy="9720"/>
           </a:xfrm>
           <a:custGeom>
             <a:avLst/>
@@ -35896,15 +35896,15 @@
             <a:ahLst/>
             <a:rect l="0" t="0" r="r" b="b"/>
             <a:pathLst>
-              <a:path w="3572" h="27">
-                <a:moveTo>
-                  <a:pt x="0" y="0"/>
-                </a:moveTo>
-                <a:lnTo>
-                  <a:pt x="3572" y="0"/>
-                </a:lnTo>
-                <a:lnTo>
-                  <a:pt x="3572" y="27"/>
+              <a:path w="3335" h="27">
+                <a:moveTo>
+                  <a:pt x="0" y="0"/>
+                </a:moveTo>
+                <a:lnTo>
+                  <a:pt x="3335" y="0"/>
+                </a:lnTo>
+                <a:lnTo>
+                  <a:pt x="3335" y="27"/>
                 </a:lnTo>
                 <a:lnTo>
                   <a:pt x="0" y="27"/>
@@ -35947,8 +35947,8 @@
         </p:nvSpPr>
         <p:spPr>
           <a:xfrm>
-            <a:off x="8343720" y="3238200"/>
-            <a:ext cx="9720" cy="638640"/>
+            <a:off x="7124400" y="3238200"/>
+            <a:ext cx="10080" cy="638640"/>
           </a:xfrm>
           <a:custGeom>
             <a:avLst/>
@@ -35956,15 +35956,15 @@
             <a:ahLst/>
             <a:rect l="0" t="0" r="r" b="b"/>
             <a:pathLst>
-              <a:path w="27" h="1774">
-                <a:moveTo>
-                  <a:pt x="0" y="0"/>
-                </a:moveTo>
-                <a:lnTo>
-                  <a:pt x="27" y="0"/>
-                </a:lnTo>
-                <a:lnTo>
-                  <a:pt x="27" y="1774"/>
+              <a:path w="28" h="1774">
+                <a:moveTo>
+                  <a:pt x="0" y="0"/>
+                </a:moveTo>
+                <a:lnTo>
+                  <a:pt x="28" y="0"/>
+                </a:lnTo>
+                <a:lnTo>
+                  <a:pt x="28" y="1774"/>
                 </a:lnTo>
                 <a:lnTo>
                   <a:pt x="0" y="1774"/>
@@ -36007,8 +36007,8 @@
         </p:nvSpPr>
         <p:spPr>
           <a:xfrm>
-            <a:off x="8353080" y="3228840"/>
-            <a:ext cx="2467440" cy="9720"/>
+            <a:off x="7134120" y="3228840"/>
+            <a:ext cx="3715200" cy="9720"/>
           </a:xfrm>
           <a:custGeom>
             <a:avLst/>
@@ -36016,15 +36016,15 @@
             <a:ahLst/>
             <a:rect l="0" t="0" r="r" b="b"/>
             <a:pathLst>
-              <a:path w="6854" h="27">
-                <a:moveTo>
-                  <a:pt x="0" y="0"/>
-                </a:moveTo>
-                <a:lnTo>
-                  <a:pt x="6854" y="0"/>
-                </a:lnTo>
-                <a:lnTo>
-                  <a:pt x="6854" y="27"/>
+              <a:path w="10320" h="27">
+                <a:moveTo>
+                  <a:pt x="0" y="0"/>
+                </a:moveTo>
+                <a:lnTo>
+                  <a:pt x="10320" y="0"/>
+                </a:lnTo>
+                <a:lnTo>
+                  <a:pt x="10320" y="27"/>
                 </a:lnTo>
                 <a:lnTo>
                   <a:pt x="0" y="27"/>
@@ -36067,8 +36067,8 @@
         </p:nvSpPr>
         <p:spPr>
           <a:xfrm>
-            <a:off x="10810800" y="3238200"/>
-            <a:ext cx="9720" cy="638640"/>
+            <a:off x="10839240" y="3238200"/>
+            <a:ext cx="10080" cy="638640"/>
           </a:xfrm>
           <a:custGeom>
             <a:avLst/>
@@ -36076,15 +36076,15 @@
             <a:ahLst/>
             <a:rect l="0" t="0" r="r" b="b"/>
             <a:pathLst>
-              <a:path w="27" h="1774">
-                <a:moveTo>
-                  <a:pt x="0" y="0"/>
-                </a:moveTo>
-                <a:lnTo>
-                  <a:pt x="27" y="0"/>
-                </a:lnTo>
-                <a:lnTo>
-                  <a:pt x="27" y="1774"/>
+              <a:path w="28" h="1774">
+                <a:moveTo>
+                  <a:pt x="0" y="0"/>
+                </a:moveTo>
+                <a:lnTo>
+                  <a:pt x="28" y="0"/>
+                </a:lnTo>
+                <a:lnTo>
+                  <a:pt x="28" y="1774"/>
                 </a:lnTo>
                 <a:lnTo>
                   <a:pt x="0" y="1774"/>
@@ -36127,8 +36127,8 @@
         </p:nvSpPr>
         <p:spPr>
           <a:xfrm>
-            <a:off x="10820160" y="3228840"/>
-            <a:ext cx="838440" cy="9720"/>
+            <a:off x="10848960" y="3228840"/>
+            <a:ext cx="809640" cy="9720"/>
           </a:xfrm>
           <a:custGeom>
             <a:avLst/>
@@ -36136,15 +36136,15 @@
             <a:ahLst/>
             <a:rect l="0" t="0" r="r" b="b"/>
             <a:pathLst>
-              <a:path w="2329" h="27">
-                <a:moveTo>
-                  <a:pt x="0" y="0"/>
-                </a:moveTo>
-                <a:lnTo>
-                  <a:pt x="2329" y="0"/>
-                </a:lnTo>
-                <a:lnTo>
-                  <a:pt x="2329" y="27"/>
+              <a:path w="2249" h="27">
+                <a:moveTo>
+                  <a:pt x="0" y="0"/>
+                </a:moveTo>
+                <a:lnTo>
+                  <a:pt x="2249" y="0"/>
+                </a:lnTo>
+                <a:lnTo>
+                  <a:pt x="2249" y="27"/>
                 </a:lnTo>
                 <a:lnTo>
                   <a:pt x="0" y="27"/>
@@ -36247,7 +36247,7 @@
         </p:nvSpPr>
         <p:spPr>
           <a:xfrm>
-            <a:off x="6210000" y="3876480"/>
+            <a:off x="5124240" y="3876480"/>
             <a:ext cx="10440" cy="638640"/>
           </a:xfrm>
           <a:custGeom>
@@ -36307,8 +36307,8 @@
         </p:nvSpPr>
         <p:spPr>
           <a:xfrm>
-            <a:off x="6210000" y="3867120"/>
-            <a:ext cx="857880" cy="9720"/>
+            <a:off x="5124240" y="3867120"/>
+            <a:ext cx="810000" cy="9720"/>
           </a:xfrm>
           <a:custGeom>
             <a:avLst/>
@@ -36316,15 +36316,15 @@
             <a:ahLst/>
             <a:rect l="0" t="0" r="r" b="b"/>
             <a:pathLst>
-              <a:path w="2383" h="27">
-                <a:moveTo>
-                  <a:pt x="0" y="0"/>
-                </a:moveTo>
-                <a:lnTo>
-                  <a:pt x="2383" y="0"/>
-                </a:lnTo>
-                <a:lnTo>
-                  <a:pt x="2383" y="27"/>
+              <a:path w="2250" h="27">
+                <a:moveTo>
+                  <a:pt x="0" y="0"/>
+                </a:moveTo>
+                <a:lnTo>
+                  <a:pt x="2250" y="0"/>
+                </a:lnTo>
+                <a:lnTo>
+                  <a:pt x="2250" y="27"/>
                 </a:lnTo>
                 <a:lnTo>
                   <a:pt x="0" y="27"/>
@@ -36367,8 +36367,8 @@
         </p:nvSpPr>
         <p:spPr>
           <a:xfrm>
-            <a:off x="7057800" y="3876480"/>
-            <a:ext cx="10080" cy="638640"/>
+            <a:off x="5924520" y="3876480"/>
+            <a:ext cx="9720" cy="638640"/>
           </a:xfrm>
           <a:custGeom>
             <a:avLst/>
@@ -36376,15 +36376,15 @@
             <a:ahLst/>
             <a:rect l="0" t="0" r="r" b="b"/>
             <a:pathLst>
-              <a:path w="28" h="1774">
-                <a:moveTo>
-                  <a:pt x="0" y="0"/>
-                </a:moveTo>
-                <a:lnTo>
-                  <a:pt x="28" y="0"/>
-                </a:lnTo>
-                <a:lnTo>
-                  <a:pt x="28" y="1774"/>
+              <a:path w="27" h="1774">
+                <a:moveTo>
+                  <a:pt x="0" y="0"/>
+                </a:moveTo>
+                <a:lnTo>
+                  <a:pt x="27" y="0"/>
+                </a:lnTo>
+                <a:lnTo>
+                  <a:pt x="27" y="1774"/>
                 </a:lnTo>
                 <a:lnTo>
                   <a:pt x="0" y="1774"/>
@@ -36427,8 +36427,8 @@
         </p:nvSpPr>
         <p:spPr>
           <a:xfrm>
-            <a:off x="7067520" y="3867120"/>
-            <a:ext cx="1285920" cy="9720"/>
+            <a:off x="5933880" y="3867120"/>
+            <a:ext cx="1200600" cy="9720"/>
           </a:xfrm>
           <a:custGeom>
             <a:avLst/>
@@ -36436,15 +36436,15 @@
             <a:ahLst/>
             <a:rect l="0" t="0" r="r" b="b"/>
             <a:pathLst>
-              <a:path w="3572" h="27">
-                <a:moveTo>
-                  <a:pt x="0" y="0"/>
-                </a:moveTo>
-                <a:lnTo>
-                  <a:pt x="3572" y="0"/>
-                </a:lnTo>
-                <a:lnTo>
-                  <a:pt x="3572" y="27"/>
+              <a:path w="3335" h="27">
+                <a:moveTo>
+                  <a:pt x="0" y="0"/>
+                </a:moveTo>
+                <a:lnTo>
+                  <a:pt x="3335" y="0"/>
+                </a:lnTo>
+                <a:lnTo>
+                  <a:pt x="3335" y="27"/>
                 </a:lnTo>
                 <a:lnTo>
                   <a:pt x="0" y="27"/>
@@ -36487,8 +36487,8 @@
         </p:nvSpPr>
         <p:spPr>
           <a:xfrm>
-            <a:off x="8343720" y="3876480"/>
-            <a:ext cx="9720" cy="638640"/>
+            <a:off x="7124400" y="3876480"/>
+            <a:ext cx="10080" cy="638640"/>
           </a:xfrm>
           <a:custGeom>
             <a:avLst/>
@@ -36496,15 +36496,15 @@
             <a:ahLst/>
             <a:rect l="0" t="0" r="r" b="b"/>
             <a:pathLst>
-              <a:path w="27" h="1774">
-                <a:moveTo>
-                  <a:pt x="0" y="0"/>
-                </a:moveTo>
-                <a:lnTo>
-                  <a:pt x="27" y="0"/>
-                </a:lnTo>
-                <a:lnTo>
-                  <a:pt x="27" y="1774"/>
+              <a:path w="28" h="1774">
+                <a:moveTo>
+                  <a:pt x="0" y="0"/>
+                </a:moveTo>
+                <a:lnTo>
+                  <a:pt x="28" y="0"/>
+                </a:lnTo>
+                <a:lnTo>
+                  <a:pt x="28" y="1774"/>
                 </a:lnTo>
                 <a:lnTo>
                   <a:pt x="0" y="1774"/>
@@ -36547,8 +36547,8 @@
         </p:nvSpPr>
         <p:spPr>
           <a:xfrm>
-            <a:off x="8353080" y="3867120"/>
-            <a:ext cx="2467440" cy="9720"/>
+            <a:off x="7134120" y="3867120"/>
+            <a:ext cx="3715200" cy="9720"/>
           </a:xfrm>
           <a:custGeom>
             <a:avLst/>
@@ -36556,15 +36556,15 @@
             <a:ahLst/>
             <a:rect l="0" t="0" r="r" b="b"/>
             <a:pathLst>
-              <a:path w="6854" h="27">
-                <a:moveTo>
-                  <a:pt x="0" y="0"/>
-                </a:moveTo>
-                <a:lnTo>
-                  <a:pt x="6854" y="0"/>
-                </a:lnTo>
-                <a:lnTo>
-                  <a:pt x="6854" y="27"/>
+              <a:path w="10320" h="27">
+                <a:moveTo>
+                  <a:pt x="0" y="0"/>
+                </a:moveTo>
+                <a:lnTo>
+                  <a:pt x="10320" y="0"/>
+                </a:lnTo>
+                <a:lnTo>
+                  <a:pt x="10320" y="27"/>
                 </a:lnTo>
                 <a:lnTo>
                   <a:pt x="0" y="27"/>
@@ -36607,8 +36607,8 @@
         </p:nvSpPr>
         <p:spPr>
           <a:xfrm>
-            <a:off x="10810800" y="3876480"/>
-            <a:ext cx="9720" cy="638640"/>
+            <a:off x="10839240" y="3876480"/>
+            <a:ext cx="10080" cy="638640"/>
           </a:xfrm>
           <a:custGeom>
             <a:avLst/>
@@ -36616,15 +36616,15 @@
             <a:ahLst/>
             <a:rect l="0" t="0" r="r" b="b"/>
             <a:pathLst>
-              <a:path w="27" h="1774">
-                <a:moveTo>
-                  <a:pt x="0" y="0"/>
-                </a:moveTo>
-                <a:lnTo>
-                  <a:pt x="27" y="0"/>
-                </a:lnTo>
-                <a:lnTo>
-                  <a:pt x="27" y="1774"/>
+              <a:path w="28" h="1774">
+                <a:moveTo>
+                  <a:pt x="0" y="0"/>
+                </a:moveTo>
+                <a:lnTo>
+                  <a:pt x="28" y="0"/>
+                </a:lnTo>
+                <a:lnTo>
+                  <a:pt x="28" y="1774"/>
                 </a:lnTo>
                 <a:lnTo>
                   <a:pt x="0" y="1774"/>
@@ -36667,8 +36667,8 @@
         </p:nvSpPr>
         <p:spPr>
           <a:xfrm>
-            <a:off x="10820160" y="3867120"/>
-            <a:ext cx="838440" cy="9720"/>
+            <a:off x="10848960" y="3867120"/>
+            <a:ext cx="809640" cy="9720"/>
           </a:xfrm>
           <a:custGeom>
             <a:avLst/>
@@ -36676,15 +36676,15 @@
             <a:ahLst/>
             <a:rect l="0" t="0" r="r" b="b"/>
             <a:pathLst>
-              <a:path w="2329" h="27">
-                <a:moveTo>
-                  <a:pt x="0" y="0"/>
-                </a:moveTo>
-                <a:lnTo>
-                  <a:pt x="2329" y="0"/>
-                </a:lnTo>
-                <a:lnTo>
-                  <a:pt x="2329" y="27"/>
+              <a:path w="2249" h="27">
+                <a:moveTo>
+                  <a:pt x="0" y="0"/>
+                </a:moveTo>
+                <a:lnTo>
+                  <a:pt x="2249" y="0"/>
+                </a:lnTo>
+                <a:lnTo>
+                  <a:pt x="2249" y="27"/>
                 </a:lnTo>
                 <a:lnTo>
                   <a:pt x="0" y="27"/>
@@ -36787,7 +36787,7 @@
         </p:nvSpPr>
         <p:spPr>
           <a:xfrm>
-            <a:off x="6210000" y="4514760"/>
+            <a:off x="5124240" y="4514760"/>
             <a:ext cx="10440" cy="638280"/>
           </a:xfrm>
           <a:custGeom>
@@ -36847,8 +36847,8 @@
         </p:nvSpPr>
         <p:spPr>
           <a:xfrm>
-            <a:off x="6210000" y="4505040"/>
-            <a:ext cx="857880" cy="10080"/>
+            <a:off x="5124240" y="4505040"/>
+            <a:ext cx="810000" cy="10080"/>
           </a:xfrm>
           <a:custGeom>
             <a:avLst/>
@@ -36856,15 +36856,15 @@
             <a:ahLst/>
             <a:rect l="0" t="0" r="r" b="b"/>
             <a:pathLst>
-              <a:path w="2383" h="28">
-                <a:moveTo>
-                  <a:pt x="0" y="0"/>
-                </a:moveTo>
-                <a:lnTo>
-                  <a:pt x="2383" y="0"/>
-                </a:lnTo>
-                <a:lnTo>
-                  <a:pt x="2383" y="28"/>
+              <a:path w="2250" h="28">
+                <a:moveTo>
+                  <a:pt x="0" y="0"/>
+                </a:moveTo>
+                <a:lnTo>
+                  <a:pt x="2250" y="0"/>
+                </a:lnTo>
+                <a:lnTo>
+                  <a:pt x="2250" y="28"/>
                 </a:lnTo>
                 <a:lnTo>
                   <a:pt x="0" y="28"/>
@@ -36907,8 +36907,8 @@
         </p:nvSpPr>
         <p:spPr>
           <a:xfrm>
-            <a:off x="7057800" y="4514760"/>
-            <a:ext cx="10080" cy="638280"/>
+            <a:off x="5924520" y="4514760"/>
+            <a:ext cx="9720" cy="638280"/>
           </a:xfrm>
           <a:custGeom>
             <a:avLst/>
@@ -36916,15 +36916,15 @@
             <a:ahLst/>
             <a:rect l="0" t="0" r="r" b="b"/>
             <a:pathLst>
-              <a:path w="28" h="1773">
-                <a:moveTo>
-                  <a:pt x="0" y="0"/>
-                </a:moveTo>
-                <a:lnTo>
-                  <a:pt x="28" y="0"/>
-                </a:lnTo>
-                <a:lnTo>
-                  <a:pt x="28" y="1773"/>
+              <a:path w="27" h="1773">
+                <a:moveTo>
+                  <a:pt x="0" y="0"/>
+                </a:moveTo>
+                <a:lnTo>
+                  <a:pt x="27" y="0"/>
+                </a:lnTo>
+                <a:lnTo>
+                  <a:pt x="27" y="1773"/>
                 </a:lnTo>
                 <a:lnTo>
                   <a:pt x="0" y="1773"/>
@@ -36967,8 +36967,8 @@
         </p:nvSpPr>
         <p:spPr>
           <a:xfrm>
-            <a:off x="7067520" y="4505040"/>
-            <a:ext cx="1285920" cy="10080"/>
+            <a:off x="5933880" y="4505040"/>
+            <a:ext cx="1200600" cy="10080"/>
           </a:xfrm>
           <a:custGeom>
             <a:avLst/>
@@ -36976,15 +36976,15 @@
             <a:ahLst/>
             <a:rect l="0" t="0" r="r" b="b"/>
             <a:pathLst>
-              <a:path w="3572" h="28">
-                <a:moveTo>
-                  <a:pt x="0" y="0"/>
-                </a:moveTo>
-                <a:lnTo>
-                  <a:pt x="3572" y="0"/>
-                </a:lnTo>
-                <a:lnTo>
-                  <a:pt x="3572" y="28"/>
+              <a:path w="3335" h="28">
+                <a:moveTo>
+                  <a:pt x="0" y="0"/>
+                </a:moveTo>
+                <a:lnTo>
+                  <a:pt x="3335" y="0"/>
+                </a:lnTo>
+                <a:lnTo>
+                  <a:pt x="3335" y="28"/>
                 </a:lnTo>
                 <a:lnTo>
                   <a:pt x="0" y="28"/>
@@ -37027,8 +37027,8 @@
         </p:nvSpPr>
         <p:spPr>
           <a:xfrm>
-            <a:off x="8343720" y="4514760"/>
-            <a:ext cx="9720" cy="638280"/>
+            <a:off x="7124400" y="4514760"/>
+            <a:ext cx="10080" cy="638280"/>
           </a:xfrm>
           <a:custGeom>
             <a:avLst/>
@@ -37036,15 +37036,15 @@
             <a:ahLst/>
             <a:rect l="0" t="0" r="r" b="b"/>
             <a:pathLst>
-              <a:path w="27" h="1773">
-                <a:moveTo>
-                  <a:pt x="0" y="0"/>
-                </a:moveTo>
-                <a:lnTo>
-                  <a:pt x="27" y="0"/>
-                </a:lnTo>
-                <a:lnTo>
-                  <a:pt x="27" y="1773"/>
+              <a:path w="28" h="1773">
+                <a:moveTo>
+                  <a:pt x="0" y="0"/>
+                </a:moveTo>
+                <a:lnTo>
+                  <a:pt x="28" y="0"/>
+                </a:lnTo>
+                <a:lnTo>
+                  <a:pt x="28" y="1773"/>
                 </a:lnTo>
                 <a:lnTo>
                   <a:pt x="0" y="1773"/>
@@ -37087,8 +37087,8 @@
         </p:nvSpPr>
         <p:spPr>
           <a:xfrm>
-            <a:off x="8353080" y="4505040"/>
-            <a:ext cx="2467440" cy="10080"/>
+            <a:off x="7134120" y="4505040"/>
+            <a:ext cx="3715200" cy="10080"/>
           </a:xfrm>
           <a:custGeom>
             <a:avLst/>
@@ -37096,15 +37096,15 @@
             <a:ahLst/>
             <a:rect l="0" t="0" r="r" b="b"/>
             <a:pathLst>
-              <a:path w="6854" h="28">
-                <a:moveTo>
-                  <a:pt x="0" y="0"/>
-                </a:moveTo>
-                <a:lnTo>
-                  <a:pt x="6854" y="0"/>
-                </a:lnTo>
-                <a:lnTo>
-                  <a:pt x="6854" y="28"/>
+              <a:path w="10320" h="28">
+                <a:moveTo>
+                  <a:pt x="0" y="0"/>
+                </a:moveTo>
+                <a:lnTo>
+                  <a:pt x="10320" y="0"/>
+                </a:lnTo>
+                <a:lnTo>
+                  <a:pt x="10320" y="28"/>
                 </a:lnTo>
                 <a:lnTo>
                   <a:pt x="0" y="28"/>
@@ -37147,8 +37147,8 @@
         </p:nvSpPr>
         <p:spPr>
           <a:xfrm>
-            <a:off x="10810800" y="4514760"/>
-            <a:ext cx="9720" cy="638280"/>
+            <a:off x="10839240" y="4514760"/>
+            <a:ext cx="10080" cy="638280"/>
           </a:xfrm>
           <a:custGeom>
             <a:avLst/>
@@ -37156,15 +37156,15 @@
             <a:ahLst/>
             <a:rect l="0" t="0" r="r" b="b"/>
             <a:pathLst>
-              <a:path w="27" h="1773">
-                <a:moveTo>
-                  <a:pt x="0" y="0"/>
-                </a:moveTo>
-                <a:lnTo>
-                  <a:pt x="27" y="0"/>
-                </a:lnTo>
-                <a:lnTo>
-                  <a:pt x="27" y="1773"/>
+              <a:path w="28" h="1773">
+                <a:moveTo>
+                  <a:pt x="0" y="0"/>
+                </a:moveTo>
+                <a:lnTo>
+                  <a:pt x="28" y="0"/>
+                </a:lnTo>
+                <a:lnTo>
+                  <a:pt x="28" y="1773"/>
                 </a:lnTo>
                 <a:lnTo>
                   <a:pt x="0" y="1773"/>
@@ -37207,8 +37207,8 @@
         </p:nvSpPr>
         <p:spPr>
           <a:xfrm>
-            <a:off x="10820160" y="4505040"/>
-            <a:ext cx="838440" cy="10080"/>
+            <a:off x="10848960" y="4505040"/>
+            <a:ext cx="809640" cy="10080"/>
           </a:xfrm>
           <a:custGeom>
             <a:avLst/>
@@ -37216,15 +37216,15 @@
             <a:ahLst/>
             <a:rect l="0" t="0" r="r" b="b"/>
             <a:pathLst>
-              <a:path w="2329" h="28">
-                <a:moveTo>
-                  <a:pt x="0" y="0"/>
-                </a:moveTo>
-                <a:lnTo>
-                  <a:pt x="2329" y="0"/>
-                </a:lnTo>
-                <a:lnTo>
-                  <a:pt x="2329" y="28"/>
+              <a:path w="2249" h="28">
+                <a:moveTo>
+                  <a:pt x="0" y="0"/>
+                </a:moveTo>
+                <a:lnTo>
+                  <a:pt x="2249" y="0"/>
+                </a:lnTo>
+                <a:lnTo>
+                  <a:pt x="2249" y="28"/>
                 </a:lnTo>
                 <a:lnTo>
                   <a:pt x="0" y="28"/>
@@ -37327,8 +37327,8 @@
         </p:nvSpPr>
         <p:spPr>
           <a:xfrm>
-            <a:off x="6210000" y="5143320"/>
-            <a:ext cx="857880" cy="9720"/>
+            <a:off x="5124240" y="5143320"/>
+            <a:ext cx="810000" cy="9720"/>
           </a:xfrm>
           <a:custGeom>
             <a:avLst/>
@@ -37336,15 +37336,15 @@
             <a:ahLst/>
             <a:rect l="0" t="0" r="r" b="b"/>
             <a:pathLst>
-              <a:path w="2383" h="27">
-                <a:moveTo>
-                  <a:pt x="0" y="0"/>
-                </a:moveTo>
-                <a:lnTo>
-                  <a:pt x="2383" y="0"/>
-                </a:lnTo>
-                <a:lnTo>
-                  <a:pt x="2383" y="27"/>
+              <a:path w="2250" h="27">
+                <a:moveTo>
+                  <a:pt x="0" y="0"/>
+                </a:moveTo>
+                <a:lnTo>
+                  <a:pt x="2250" y="0"/>
+                </a:lnTo>
+                <a:lnTo>
+                  <a:pt x="2250" y="27"/>
                 </a:lnTo>
                 <a:lnTo>
                   <a:pt x="0" y="27"/>
@@ -37387,8 +37387,8 @@
         </p:nvSpPr>
         <p:spPr>
           <a:xfrm>
-            <a:off x="7067520" y="5143320"/>
-            <a:ext cx="1285920" cy="9720"/>
+            <a:off x="5933880" y="5143320"/>
+            <a:ext cx="1200600" cy="9720"/>
           </a:xfrm>
           <a:custGeom>
             <a:avLst/>
@@ -37396,15 +37396,15 @@
             <a:ahLst/>
             <a:rect l="0" t="0" r="r" b="b"/>
             <a:pathLst>
-              <a:path w="3572" h="27">
-                <a:moveTo>
-                  <a:pt x="0" y="0"/>
-                </a:moveTo>
-                <a:lnTo>
-                  <a:pt x="3572" y="0"/>
-                </a:lnTo>
-                <a:lnTo>
-                  <a:pt x="3572" y="27"/>
+              <a:path w="3335" h="27">
+                <a:moveTo>
+                  <a:pt x="0" y="0"/>
+                </a:moveTo>
+                <a:lnTo>
+                  <a:pt x="3335" y="0"/>
+                </a:lnTo>
+                <a:lnTo>
+                  <a:pt x="3335" y="27"/>
                 </a:lnTo>
                 <a:lnTo>
                   <a:pt x="0" y="27"/>
@@ -37447,8 +37447,8 @@
         </p:nvSpPr>
         <p:spPr>
           <a:xfrm>
-            <a:off x="8353080" y="5143320"/>
-            <a:ext cx="2467440" cy="9720"/>
+            <a:off x="7134120" y="5143320"/>
+            <a:ext cx="3715200" cy="9720"/>
           </a:xfrm>
           <a:custGeom>
             <a:avLst/>
@@ -37456,15 +37456,15 @@
             <a:ahLst/>
             <a:rect l="0" t="0" r="r" b="b"/>
             <a:pathLst>
-              <a:path w="6854" h="27">
-                <a:moveTo>
-                  <a:pt x="0" y="0"/>
-                </a:moveTo>
-                <a:lnTo>
-                  <a:pt x="6854" y="0"/>
-                </a:lnTo>
-                <a:lnTo>
-                  <a:pt x="6854" y="27"/>
+              <a:path w="10320" h="27">
+                <a:moveTo>
+                  <a:pt x="0" y="0"/>
+                </a:moveTo>
+                <a:lnTo>
+                  <a:pt x="10320" y="0"/>
+                </a:lnTo>
+                <a:lnTo>
+                  <a:pt x="10320" y="27"/>
                 </a:lnTo>
                 <a:lnTo>
                   <a:pt x="0" y="27"/>
@@ -37507,8 +37507,8 @@
         </p:nvSpPr>
         <p:spPr>
           <a:xfrm>
-            <a:off x="10820160" y="5143320"/>
-            <a:ext cx="838440" cy="9720"/>
+            <a:off x="10848960" y="5143320"/>
+            <a:ext cx="809640" cy="9720"/>
           </a:xfrm>
           <a:custGeom>
             <a:avLst/>
@@ -37516,15 +37516,15 @@
             <a:ahLst/>
             <a:rect l="0" t="0" r="r" b="b"/>
             <a:pathLst>
-              <a:path w="2329" h="27">
-                <a:moveTo>
-                  <a:pt x="0" y="0"/>
-                </a:moveTo>
-                <a:lnTo>
-                  <a:pt x="2329" y="0"/>
-                </a:lnTo>
-                <a:lnTo>
-                  <a:pt x="2329" y="27"/>
+              <a:path w="2249" h="27">
+                <a:moveTo>
+                  <a:pt x="0" y="0"/>
+                </a:moveTo>
+                <a:lnTo>
+                  <a:pt x="2249" y="0"/>
+                </a:lnTo>
+                <a:lnTo>
+                  <a:pt x="2249" y="27"/>
                 </a:lnTo>
                 <a:lnTo>
                   <a:pt x="0" y="27"/>
@@ -37615,7 +37615,7 @@
         </p:nvSpPr>
         <p:spPr>
           <a:xfrm>
-            <a:off x="6210360" y="1572480"/>
+            <a:off x="5120640" y="1572480"/>
             <a:ext cx="1044720" cy="209160"/>
           </a:xfrm>
           <a:prstGeom prst="rect">
@@ -37663,7 +37663,7 @@
         </p:nvSpPr>
         <p:spPr>
           <a:xfrm>
-            <a:off x="6343560" y="2054520"/>
+            <a:off x="5253840" y="2054520"/>
             <a:ext cx="512640" cy="171000"/>
           </a:xfrm>
           <a:prstGeom prst="rect">
@@ -37711,7 +37711,7 @@
         </p:nvSpPr>
         <p:spPr>
           <a:xfrm>
-            <a:off x="6343560" y="2311920"/>
+            <a:off x="5253840" y="2311920"/>
             <a:ext cx="342000" cy="171000"/>
           </a:xfrm>
           <a:prstGeom prst="rect">
@@ -37759,7 +37759,7 @@
         </p:nvSpPr>
         <p:spPr>
           <a:xfrm>
-            <a:off x="7189920" y="2188080"/>
+            <a:off x="6058080" y="2188080"/>
             <a:ext cx="342000" cy="171000"/>
           </a:xfrm>
           <a:prstGeom prst="rect">
@@ -37807,7 +37807,7 @@
         </p:nvSpPr>
         <p:spPr>
           <a:xfrm>
-            <a:off x="8472600" y="2188080"/>
+            <a:off x="7261920" y="2188080"/>
             <a:ext cx="683640" cy="171000"/>
           </a:xfrm>
           <a:prstGeom prst="rect">
@@ -37855,7 +37855,7 @@
         </p:nvSpPr>
         <p:spPr>
           <a:xfrm>
-            <a:off x="10946880" y="2046600"/>
+            <a:off x="10973520" y="2046600"/>
             <a:ext cx="234720" cy="203040"/>
           </a:xfrm>
           <a:prstGeom prst="rect">
@@ -37903,7 +37903,7 @@
         </p:nvSpPr>
         <p:spPr>
           <a:xfrm>
-            <a:off x="10946880" y="2303640"/>
+            <a:off x="10973520" y="2303640"/>
             <a:ext cx="383040" cy="203040"/>
           </a:xfrm>
           <a:prstGeom prst="rect">
@@ -37951,7 +37951,7 @@
         </p:nvSpPr>
         <p:spPr>
           <a:xfrm>
-            <a:off x="6343560" y="2818080"/>
+            <a:off x="5253840" y="2818080"/>
             <a:ext cx="181080" cy="200160"/>
           </a:xfrm>
           <a:prstGeom prst="rect">
@@ -37999,7 +37999,7 @@
         </p:nvSpPr>
         <p:spPr>
           <a:xfrm>
-            <a:off x="7189920" y="2692800"/>
+            <a:off x="6058080" y="2692800"/>
             <a:ext cx="171360" cy="171000"/>
           </a:xfrm>
           <a:prstGeom prst="rect">
@@ -38047,7 +38047,7 @@
         </p:nvSpPr>
         <p:spPr>
           <a:xfrm>
-            <a:off x="7361280" y="2684880"/>
+            <a:off x="6229440" y="2684880"/>
             <a:ext cx="703080" cy="200160"/>
           </a:xfrm>
           <a:prstGeom prst="rect">
@@ -38095,7 +38095,7 @@
         </p:nvSpPr>
         <p:spPr>
           <a:xfrm>
-            <a:off x="7189920" y="2941920"/>
+            <a:off x="6058080" y="2941920"/>
             <a:ext cx="190440" cy="200160"/>
           </a:xfrm>
           <a:prstGeom prst="rect">
@@ -38143,7 +38143,7 @@
         </p:nvSpPr>
         <p:spPr>
           <a:xfrm>
-            <a:off x="8472600" y="2684880"/>
+            <a:off x="7261920" y="2684880"/>
             <a:ext cx="171000" cy="200160"/>
           </a:xfrm>
           <a:prstGeom prst="rect">
@@ -38191,7 +38191,7 @@
         </p:nvSpPr>
         <p:spPr>
           <a:xfrm>
-            <a:off x="8568000" y="2692800"/>
+            <a:off x="7356960" y="2692800"/>
             <a:ext cx="512640" cy="171000"/>
           </a:xfrm>
           <a:prstGeom prst="rect">
@@ -38239,7 +38239,7 @@
         </p:nvSpPr>
         <p:spPr>
           <a:xfrm>
-            <a:off x="9082440" y="2684880"/>
+            <a:off x="7871400" y="2684880"/>
             <a:ext cx="357840" cy="200160"/>
           </a:xfrm>
           <a:prstGeom prst="rect">
@@ -38287,7 +38287,7 @@
         </p:nvSpPr>
         <p:spPr>
           <a:xfrm>
-            <a:off x="9441000" y="2692800"/>
+            <a:off x="8229960" y="2692800"/>
             <a:ext cx="171360" cy="171000"/>
           </a:xfrm>
           <a:prstGeom prst="rect">
@@ -38335,7 +38335,7 @@
         </p:nvSpPr>
         <p:spPr>
           <a:xfrm>
-            <a:off x="9612360" y="2684880"/>
+            <a:off x="8401680" y="2684880"/>
             <a:ext cx="768960" cy="200160"/>
           </a:xfrm>
           <a:prstGeom prst="rect">
@@ -38383,7 +38383,103 @@
         </p:nvSpPr>
         <p:spPr>
           <a:xfrm>
-            <a:off x="10384200" y="2692800"/>
+            <a:off x="9173160" y="2692800"/>
+            <a:ext cx="342000" cy="171000"/>
+          </a:xfrm>
+          <a:prstGeom prst="rect">
+            <a:avLst/>
+          </a:prstGeom>
+          <a:noFill/>
+          <a:ln w="0">
+            <a:noFill/>
+          </a:ln>
+        </p:spPr>
+        <p:txBody>
+          <a:bodyPr wrap="none" lIns="0" tIns="0" rIns="0" bIns="0" anchor="t">
+            <a:spAutoFit/>
+          </a:bodyPr>
+          <a:p>
+            <a:pPr/>
+            <a:r>
+              <a:rPr lang="ja-JP" sz="1350" b="0" u="none" strike="noStrike">
+                <a:solidFill>
+                  <a:srgbClr val="1A1A2E"/>
+                </a:solidFill>
+                <a:effectLst/>
+                <a:uFillTx/>
+                <a:latin typeface="HiraginoSans-W4"/>
+                <a:ea typeface="HiraginoSans-W4"/>
+              </a:rPr>
+              <a:t>・⽉</a:t>
+            </a:r>
+            <a:endParaRPr lang="en-US" sz="1350" b="0" u="none" strike="noStrike">
+              <a:solidFill>
+                <a:srgbClr val="000000"/>
+              </a:solidFill>
+              <a:effectLst/>
+              <a:uFillTx/>
+              <a:latin typeface="游明朝体"/>
+            </a:endParaRPr>
+          </a:p>
+        </p:txBody>
+      </p:sp>
+      <p:sp>
+        <p:nvSpPr>
+          <p:cNvPr id="936" name=""/>
+          <p:cNvSpPr txBox="1"/>
+          <p:nvPr/>
+        </p:nvSpPr>
+        <p:spPr>
+          <a:xfrm>
+            <a:off x="9516240" y="2684880"/>
+            <a:ext cx="550800" cy="200160"/>
+          </a:xfrm>
+          <a:prstGeom prst="rect">
+            <a:avLst/>
+          </a:prstGeom>
+          <a:noFill/>
+          <a:ln w="0">
+            <a:noFill/>
+          </a:ln>
+        </p:spPr>
+        <p:txBody>
+          <a:bodyPr wrap="none" lIns="0" tIns="0" rIns="0" bIns="0" anchor="t">
+            <a:spAutoFit/>
+          </a:bodyPr>
+          <a:p>
+            <a:pPr/>
+            <a:r>
+              <a:rPr lang="en-US" sz="1350" b="0" u="none" strike="noStrike">
+                <a:solidFill>
+                  <a:srgbClr val="1A1A2E"/>
+                </a:solidFill>
+                <a:effectLst/>
+                <a:uFillTx/>
+                <a:latin typeface="HelveticaNeue"/>
+                <a:ea typeface="HelveticaNeue"/>
+              </a:rPr>
+              <a:t>sin/cos</a:t>
+            </a:r>
+            <a:endParaRPr lang="en-US" sz="1350" b="0" u="none" strike="noStrike">
+              <a:solidFill>
+                <a:srgbClr val="000000"/>
+              </a:solidFill>
+              <a:effectLst/>
+              <a:uFillTx/>
+              <a:latin typeface="游明朝体"/>
+            </a:endParaRPr>
+          </a:p>
+        </p:txBody>
+      </p:sp>
+      <p:sp>
+        <p:nvSpPr>
+          <p:cNvPr id="937" name=""/>
+          <p:cNvSpPr txBox="1"/>
+          <p:nvPr/>
+        </p:nvSpPr>
+        <p:spPr>
+          <a:xfrm>
+            <a:off x="10068480" y="2692800"/>
             <a:ext cx="171360" cy="171000"/>
           </a:xfrm>
           <a:prstGeom prst="rect">
@@ -38425,13 +38521,61 @@
       </p:sp>
       <p:sp>
         <p:nvSpPr>
-          <p:cNvPr id="936" name=""/>
+          <p:cNvPr id="938" name=""/>
           <p:cNvSpPr txBox="1"/>
           <p:nvPr/>
         </p:nvSpPr>
         <p:spPr>
           <a:xfrm>
-            <a:off x="8472600" y="2949840"/>
+            <a:off x="7261920" y="2941920"/>
+            <a:ext cx="1176480" cy="200160"/>
+          </a:xfrm>
+          <a:prstGeom prst="rect">
+            <a:avLst/>
+          </a:prstGeom>
+          <a:noFill/>
+          <a:ln w="0">
+            <a:noFill/>
+          </a:ln>
+        </p:spPr>
+        <p:txBody>
+          <a:bodyPr wrap="none" lIns="0" tIns="0" rIns="0" bIns="0" anchor="t">
+            <a:spAutoFit/>
+          </a:bodyPr>
+          <a:p>
+            <a:pPr/>
+            <a:r>
+              <a:rPr lang="en-US" sz="1350" b="0" u="none" strike="noStrike">
+                <a:solidFill>
+                  <a:srgbClr val="1A1A2E"/>
+                </a:solidFill>
+                <a:effectLst/>
+                <a:uFillTx/>
+                <a:latin typeface="HelveticaNeue"/>
+                <a:ea typeface="HelveticaNeue"/>
+              </a:rPr>
+              <a:t>GSR_5day_avg</a:t>
+            </a:r>
+            <a:endParaRPr lang="en-US" sz="1350" b="0" u="none" strike="noStrike">
+              <a:solidFill>
+                <a:srgbClr val="000000"/>
+              </a:solidFill>
+              <a:effectLst/>
+              <a:uFillTx/>
+              <a:latin typeface="游明朝体"/>
+            </a:endParaRPr>
+          </a:p>
+        </p:txBody>
+      </p:sp>
+      <p:sp>
+        <p:nvSpPr>
+          <p:cNvPr id="939" name=""/>
+          <p:cNvSpPr txBox="1"/>
+          <p:nvPr/>
+        </p:nvSpPr>
+        <p:spPr>
+          <a:xfrm>
+            <a:off x="8442720" y="2949840"/>
             <a:ext cx="171360" cy="171000"/>
           </a:xfrm>
           <a:prstGeom prst="rect">
@@ -38458,7 +38602,7 @@
                 <a:latin typeface="HiraginoSans-W4"/>
                 <a:ea typeface="HiraginoSans-W4"/>
               </a:rPr>
-              <a:t>⽉</a:t>
+              <a:t>・</a:t>
             </a:r>
             <a:endParaRPr lang="en-US" sz="1350" b="0" u="none" strike="noStrike">
               <a:solidFill>
@@ -38473,14 +38617,14 @@
       </p:sp>
       <p:sp>
         <p:nvSpPr>
-          <p:cNvPr id="937" name=""/>
+          <p:cNvPr id="940" name=""/>
           <p:cNvSpPr txBox="1"/>
           <p:nvPr/>
         </p:nvSpPr>
         <p:spPr>
           <a:xfrm>
-            <a:off x="8643960" y="2941920"/>
-            <a:ext cx="597960" cy="200160"/>
+            <a:off x="8614440" y="2941920"/>
+            <a:ext cx="1189080" cy="200160"/>
           </a:xfrm>
           <a:prstGeom prst="rect">
             <a:avLst/>
@@ -38506,7 +38650,7 @@
                 <a:latin typeface="HelveticaNeue"/>
                 <a:ea typeface="HelveticaNeue"/>
               </a:rPr>
-              <a:t>sin/cos </a:t>
+              <a:t>GSR_5day_ago</a:t>
             </a:r>
             <a:endParaRPr lang="en-US" sz="1350" b="0" u="none" strike="noStrike">
               <a:solidFill>
@@ -38521,13 +38665,13 @@
       </p:sp>
       <p:sp>
         <p:nvSpPr>
-          <p:cNvPr id="938" name=""/>
+          <p:cNvPr id="941" name=""/>
           <p:cNvSpPr txBox="1"/>
           <p:nvPr/>
         </p:nvSpPr>
         <p:spPr>
           <a:xfrm>
-            <a:off x="9244080" y="2949840"/>
+            <a:off x="9808200" y="2949840"/>
             <a:ext cx="342000" cy="171000"/>
           </a:xfrm>
           <a:prstGeom prst="rect">
@@ -38569,13 +38713,13 @@
       </p:sp>
       <p:sp>
         <p:nvSpPr>
-          <p:cNvPr id="939" name=""/>
+          <p:cNvPr id="942" name=""/>
           <p:cNvSpPr txBox="1"/>
           <p:nvPr/>
         </p:nvSpPr>
         <p:spPr>
           <a:xfrm>
-            <a:off x="10946880" y="2818080"/>
+            <a:off x="10973520" y="2818080"/>
             <a:ext cx="171360" cy="200160"/>
           </a:xfrm>
           <a:prstGeom prst="rect">
@@ -38617,13 +38761,13 @@
       </p:sp>
       <p:sp>
         <p:nvSpPr>
-          <p:cNvPr id="940" name=""/>
+          <p:cNvPr id="943" name=""/>
           <p:cNvSpPr txBox="1"/>
           <p:nvPr/>
         </p:nvSpPr>
         <p:spPr>
           <a:xfrm>
-            <a:off x="6343560" y="3456360"/>
+            <a:off x="5253840" y="3456360"/>
             <a:ext cx="181080" cy="200160"/>
           </a:xfrm>
           <a:prstGeom prst="rect">
@@ -38665,13 +38809,13 @@
       </p:sp>
       <p:sp>
         <p:nvSpPr>
-          <p:cNvPr id="941" name=""/>
+          <p:cNvPr id="944" name=""/>
           <p:cNvSpPr txBox="1"/>
           <p:nvPr/>
         </p:nvSpPr>
         <p:spPr>
           <a:xfrm>
-            <a:off x="7189920" y="3322800"/>
+            <a:off x="6058080" y="3322800"/>
             <a:ext cx="703080" cy="200160"/>
           </a:xfrm>
           <a:prstGeom prst="rect">
@@ -38713,13 +38857,13 @@
       </p:sp>
       <p:sp>
         <p:nvSpPr>
-          <p:cNvPr id="942" name=""/>
+          <p:cNvPr id="945" name=""/>
           <p:cNvSpPr txBox="1"/>
           <p:nvPr/>
         </p:nvSpPr>
         <p:spPr>
           <a:xfrm>
-            <a:off x="7189920" y="3580200"/>
+            <a:off x="6058080" y="3580200"/>
             <a:ext cx="190440" cy="200160"/>
           </a:xfrm>
           <a:prstGeom prst="rect">
@@ -38761,13 +38905,13 @@
       </p:sp>
       <p:sp>
         <p:nvSpPr>
-          <p:cNvPr id="943" name=""/>
+          <p:cNvPr id="946" name=""/>
           <p:cNvSpPr txBox="1"/>
           <p:nvPr/>
         </p:nvSpPr>
         <p:spPr>
           <a:xfrm>
-            <a:off x="7380360" y="3588120"/>
+            <a:off x="6248880" y="3588120"/>
             <a:ext cx="171360" cy="171000"/>
           </a:xfrm>
           <a:prstGeom prst="rect">
@@ -38809,13 +38953,13 @@
       </p:sp>
       <p:sp>
         <p:nvSpPr>
-          <p:cNvPr id="944" name=""/>
+          <p:cNvPr id="947" name=""/>
           <p:cNvSpPr txBox="1"/>
           <p:nvPr/>
         </p:nvSpPr>
         <p:spPr>
           <a:xfrm>
-            <a:off x="7552080" y="3580200"/>
+            <a:off x="6420240" y="3580200"/>
             <a:ext cx="446760" cy="200160"/>
           </a:xfrm>
           <a:prstGeom prst="rect">
@@ -38857,13 +39001,13 @@
       </p:sp>
       <p:sp>
         <p:nvSpPr>
-          <p:cNvPr id="945" name=""/>
+          <p:cNvPr id="948" name=""/>
           <p:cNvSpPr txBox="1"/>
           <p:nvPr/>
         </p:nvSpPr>
         <p:spPr>
           <a:xfrm>
-            <a:off x="8472600" y="3322800"/>
+            <a:off x="7261920" y="3456360"/>
             <a:ext cx="171000" cy="200160"/>
           </a:xfrm>
           <a:prstGeom prst="rect">
@@ -38905,13 +39049,13 @@
       </p:sp>
       <p:sp>
         <p:nvSpPr>
-          <p:cNvPr id="946" name=""/>
+          <p:cNvPr id="949" name=""/>
           <p:cNvSpPr txBox="1"/>
           <p:nvPr/>
         </p:nvSpPr>
         <p:spPr>
           <a:xfrm>
-            <a:off x="8568000" y="3331080"/>
+            <a:off x="7356960" y="3464280"/>
             <a:ext cx="512640" cy="171000"/>
           </a:xfrm>
           <a:prstGeom prst="rect">
@@ -38953,13 +39097,13 @@
       </p:sp>
       <p:sp>
         <p:nvSpPr>
-          <p:cNvPr id="947" name=""/>
+          <p:cNvPr id="950" name=""/>
           <p:cNvSpPr txBox="1"/>
           <p:nvPr/>
         </p:nvSpPr>
         <p:spPr>
           <a:xfrm>
-            <a:off x="9082440" y="3322800"/>
+            <a:off x="7871400" y="3456360"/>
             <a:ext cx="357840" cy="200160"/>
           </a:xfrm>
           <a:prstGeom prst="rect">
@@ -39001,13 +39145,13 @@
       </p:sp>
       <p:sp>
         <p:nvSpPr>
-          <p:cNvPr id="948" name=""/>
+          <p:cNvPr id="951" name=""/>
           <p:cNvSpPr txBox="1"/>
           <p:nvPr/>
         </p:nvSpPr>
         <p:spPr>
           <a:xfrm>
-            <a:off x="9441000" y="3331080"/>
+            <a:off x="8229960" y="3464280"/>
             <a:ext cx="171360" cy="171000"/>
           </a:xfrm>
           <a:prstGeom prst="rect">
@@ -39049,13 +39193,13 @@
       </p:sp>
       <p:sp>
         <p:nvSpPr>
-          <p:cNvPr id="949" name=""/>
+          <p:cNvPr id="952" name=""/>
           <p:cNvSpPr txBox="1"/>
           <p:nvPr/>
         </p:nvSpPr>
         <p:spPr>
           <a:xfrm>
-            <a:off x="9612360" y="3322800"/>
+            <a:off x="8401680" y="3456360"/>
             <a:ext cx="781200" cy="200160"/>
           </a:xfrm>
           <a:prstGeom prst="rect">
@@ -39097,13 +39241,13 @@
       </p:sp>
       <p:sp>
         <p:nvSpPr>
-          <p:cNvPr id="950" name=""/>
+          <p:cNvPr id="953" name=""/>
           <p:cNvSpPr txBox="1"/>
           <p:nvPr/>
         </p:nvSpPr>
         <p:spPr>
           <a:xfrm>
-            <a:off x="10396440" y="3331080"/>
+            <a:off x="9185760" y="3464280"/>
             <a:ext cx="171360" cy="171000"/>
           </a:xfrm>
           <a:prstGeom prst="rect">
@@ -39145,13 +39289,13 @@
       </p:sp>
       <p:sp>
         <p:nvSpPr>
-          <p:cNvPr id="951" name=""/>
+          <p:cNvPr id="954" name=""/>
           <p:cNvSpPr txBox="1"/>
           <p:nvPr/>
         </p:nvSpPr>
         <p:spPr>
           <a:xfrm>
-            <a:off x="8472600" y="3580200"/>
+            <a:off x="9357120" y="3456360"/>
             <a:ext cx="816480" cy="200160"/>
           </a:xfrm>
           <a:prstGeom prst="rect">
@@ -39193,13 +39337,13 @@
       </p:sp>
       <p:sp>
         <p:nvSpPr>
-          <p:cNvPr id="952" name=""/>
+          <p:cNvPr id="955" name=""/>
           <p:cNvSpPr txBox="1"/>
           <p:nvPr/>
         </p:nvSpPr>
         <p:spPr>
           <a:xfrm>
-            <a:off x="9291960" y="3588120"/>
+            <a:off x="10176480" y="3464280"/>
             <a:ext cx="342000" cy="171000"/>
           </a:xfrm>
           <a:prstGeom prst="rect">
@@ -39241,13 +39385,13 @@
       </p:sp>
       <p:sp>
         <p:nvSpPr>
-          <p:cNvPr id="953" name=""/>
+          <p:cNvPr id="956" name=""/>
           <p:cNvSpPr txBox="1"/>
           <p:nvPr/>
         </p:nvSpPr>
         <p:spPr>
           <a:xfrm>
-            <a:off x="10946880" y="3322800"/>
+            <a:off x="10973520" y="3322800"/>
             <a:ext cx="333000" cy="200160"/>
           </a:xfrm>
           <a:prstGeom prst="rect">
@@ -39289,13 +39433,13 @@
       </p:sp>
       <p:sp>
         <p:nvSpPr>
-          <p:cNvPr id="954" name=""/>
+          <p:cNvPr id="957" name=""/>
           <p:cNvSpPr txBox="1"/>
           <p:nvPr/>
         </p:nvSpPr>
         <p:spPr>
           <a:xfrm>
-            <a:off x="10946880" y="3580200"/>
+            <a:off x="10973520" y="3580200"/>
             <a:ext cx="342360" cy="200160"/>
           </a:xfrm>
           <a:prstGeom prst="rect">
@@ -39337,13 +39481,13 @@
       </p:sp>
       <p:sp>
         <p:nvSpPr>
-          <p:cNvPr id="955" name=""/>
+          <p:cNvPr id="958" name=""/>
           <p:cNvSpPr txBox="1"/>
           <p:nvPr/>
         </p:nvSpPr>
         <p:spPr>
           <a:xfrm>
-            <a:off x="6343560" y="4094280"/>
+            <a:off x="5253840" y="4094280"/>
             <a:ext cx="184320" cy="203040"/>
           </a:xfrm>
           <a:prstGeom prst="rect">
@@ -39385,13 +39529,13 @@
       </p:sp>
       <p:sp>
         <p:nvSpPr>
-          <p:cNvPr id="956" name=""/>
+          <p:cNvPr id="959" name=""/>
           <p:cNvSpPr txBox="1"/>
           <p:nvPr/>
         </p:nvSpPr>
         <p:spPr>
           <a:xfrm>
-            <a:off x="7189920" y="3961080"/>
+            <a:off x="6058080" y="3961080"/>
             <a:ext cx="709200" cy="203040"/>
           </a:xfrm>
           <a:prstGeom prst="rect">
@@ -39433,13 +39577,13 @@
       </p:sp>
       <p:sp>
         <p:nvSpPr>
-          <p:cNvPr id="957" name=""/>
+          <p:cNvPr id="960" name=""/>
           <p:cNvSpPr txBox="1"/>
           <p:nvPr/>
         </p:nvSpPr>
         <p:spPr>
           <a:xfrm>
-            <a:off x="7189920" y="4218120"/>
+            <a:off x="6058080" y="4218120"/>
             <a:ext cx="190440" cy="203040"/>
           </a:xfrm>
           <a:prstGeom prst="rect">
@@ -39481,13 +39625,13 @@
       </p:sp>
       <p:sp>
         <p:nvSpPr>
-          <p:cNvPr id="958" name=""/>
+          <p:cNvPr id="961" name=""/>
           <p:cNvSpPr txBox="1"/>
           <p:nvPr/>
         </p:nvSpPr>
         <p:spPr>
           <a:xfrm>
-            <a:off x="7380360" y="4226400"/>
+            <a:off x="6248880" y="4226400"/>
             <a:ext cx="171360" cy="171000"/>
           </a:xfrm>
           <a:prstGeom prst="rect">
@@ -39529,13 +39673,13 @@
       </p:sp>
       <p:sp>
         <p:nvSpPr>
-          <p:cNvPr id="959" name=""/>
+          <p:cNvPr id="962" name=""/>
           <p:cNvSpPr txBox="1"/>
           <p:nvPr/>
         </p:nvSpPr>
         <p:spPr>
           <a:xfrm>
-            <a:off x="8472600" y="3961080"/>
+            <a:off x="7261920" y="4094280"/>
             <a:ext cx="171000" cy="203040"/>
           </a:xfrm>
           <a:prstGeom prst="rect">
@@ -39577,13 +39721,13 @@
       </p:sp>
       <p:sp>
         <p:nvSpPr>
-          <p:cNvPr id="960" name=""/>
+          <p:cNvPr id="963" name=""/>
           <p:cNvSpPr txBox="1"/>
           <p:nvPr/>
         </p:nvSpPr>
         <p:spPr>
           <a:xfrm>
-            <a:off x="8568000" y="3969000"/>
+            <a:off x="7356960" y="4102560"/>
             <a:ext cx="512640" cy="171000"/>
           </a:xfrm>
           <a:prstGeom prst="rect">
@@ -39625,13 +39769,13 @@
       </p:sp>
       <p:sp>
         <p:nvSpPr>
-          <p:cNvPr id="961" name=""/>
+          <p:cNvPr id="964" name=""/>
           <p:cNvSpPr txBox="1"/>
           <p:nvPr/>
         </p:nvSpPr>
         <p:spPr>
           <a:xfrm>
-            <a:off x="9082440" y="3961080"/>
+            <a:off x="7871400" y="4094280"/>
             <a:ext cx="364320" cy="203040"/>
           </a:xfrm>
           <a:prstGeom prst="rect">
@@ -39673,13 +39817,13 @@
       </p:sp>
       <p:sp>
         <p:nvSpPr>
-          <p:cNvPr id="962" name=""/>
+          <p:cNvPr id="965" name=""/>
           <p:cNvSpPr txBox="1"/>
           <p:nvPr/>
         </p:nvSpPr>
         <p:spPr>
           <a:xfrm>
-            <a:off x="9447480" y="3969000"/>
+            <a:off x="8236800" y="4102560"/>
             <a:ext cx="171360" cy="171000"/>
           </a:xfrm>
           <a:prstGeom prst="rect">
@@ -39721,13 +39865,13 @@
       </p:sp>
       <p:sp>
         <p:nvSpPr>
-          <p:cNvPr id="963" name=""/>
+          <p:cNvPr id="966" name=""/>
           <p:cNvSpPr txBox="1"/>
           <p:nvPr/>
         </p:nvSpPr>
         <p:spPr>
           <a:xfrm>
-            <a:off x="9618840" y="3961080"/>
+            <a:off x="8408160" y="4094280"/>
             <a:ext cx="822240" cy="203040"/>
           </a:xfrm>
           <a:prstGeom prst="rect">
@@ -39769,13 +39913,13 @@
       </p:sp>
       <p:sp>
         <p:nvSpPr>
-          <p:cNvPr id="964" name=""/>
+          <p:cNvPr id="967" name=""/>
           <p:cNvSpPr txBox="1"/>
           <p:nvPr/>
         </p:nvSpPr>
         <p:spPr>
           <a:xfrm>
-            <a:off x="10444320" y="3969000"/>
+            <a:off x="9233280" y="4102560"/>
             <a:ext cx="171360" cy="171000"/>
           </a:xfrm>
           <a:prstGeom prst="rect">
@@ -39817,13 +39961,13 @@
       </p:sp>
       <p:sp>
         <p:nvSpPr>
-          <p:cNvPr id="965" name=""/>
+          <p:cNvPr id="968" name=""/>
           <p:cNvSpPr txBox="1"/>
           <p:nvPr/>
         </p:nvSpPr>
         <p:spPr>
           <a:xfrm>
-            <a:off x="8472600" y="4218120"/>
+            <a:off x="9405000" y="4094280"/>
             <a:ext cx="348840" cy="203040"/>
           </a:xfrm>
           <a:prstGeom prst="rect">
@@ -39865,13 +40009,13 @@
       </p:sp>
       <p:sp>
         <p:nvSpPr>
-          <p:cNvPr id="966" name=""/>
+          <p:cNvPr id="969" name=""/>
           <p:cNvSpPr txBox="1"/>
           <p:nvPr/>
         </p:nvSpPr>
         <p:spPr>
           <a:xfrm>
-            <a:off x="8822160" y="4226400"/>
+            <a:off x="9754560" y="4102560"/>
             <a:ext cx="171360" cy="171000"/>
           </a:xfrm>
           <a:prstGeom prst="rect">
@@ -39913,13 +40057,13 @@
       </p:sp>
       <p:sp>
         <p:nvSpPr>
-          <p:cNvPr id="967" name=""/>
+          <p:cNvPr id="970" name=""/>
           <p:cNvSpPr txBox="1"/>
           <p:nvPr/>
         </p:nvSpPr>
         <p:spPr>
           <a:xfrm>
-            <a:off x="10946880" y="3961080"/>
+            <a:off x="10973520" y="3961080"/>
             <a:ext cx="333000" cy="203040"/>
           </a:xfrm>
           <a:prstGeom prst="rect">
@@ -39961,13 +40105,13 @@
       </p:sp>
       <p:sp>
         <p:nvSpPr>
-          <p:cNvPr id="968" name=""/>
+          <p:cNvPr id="971" name=""/>
           <p:cNvSpPr txBox="1"/>
           <p:nvPr/>
         </p:nvSpPr>
         <p:spPr>
           <a:xfrm>
-            <a:off x="10946880" y="4218120"/>
+            <a:off x="10973520" y="4218120"/>
             <a:ext cx="361080" cy="203040"/>
           </a:xfrm>
           <a:prstGeom prst="rect">
@@ -40009,13 +40153,13 @@
       </p:sp>
       <p:sp>
         <p:nvSpPr>
-          <p:cNvPr id="969" name=""/>
+          <p:cNvPr id="972" name=""/>
           <p:cNvSpPr txBox="1"/>
           <p:nvPr/>
         </p:nvSpPr>
         <p:spPr>
           <a:xfrm>
-            <a:off x="6343560" y="4732560"/>
+            <a:off x="5253840" y="4732560"/>
             <a:ext cx="282240" cy="200160"/>
           </a:xfrm>
           <a:prstGeom prst="rect">
@@ -40057,13 +40201,13 @@
       </p:sp>
       <p:sp>
         <p:nvSpPr>
-          <p:cNvPr id="970" name=""/>
+          <p:cNvPr id="973" name=""/>
           <p:cNvSpPr txBox="1"/>
           <p:nvPr/>
         </p:nvSpPr>
         <p:spPr>
           <a:xfrm>
-            <a:off x="7189920" y="4599360"/>
+            <a:off x="6058080" y="4599360"/>
             <a:ext cx="703080" cy="200160"/>
           </a:xfrm>
           <a:prstGeom prst="rect">
@@ -40105,13 +40249,13 @@
       </p:sp>
       <p:sp>
         <p:nvSpPr>
-          <p:cNvPr id="971" name=""/>
+          <p:cNvPr id="974" name=""/>
           <p:cNvSpPr txBox="1"/>
           <p:nvPr/>
         </p:nvSpPr>
         <p:spPr>
           <a:xfrm>
-            <a:off x="7189920" y="4856400"/>
+            <a:off x="6058080" y="4856400"/>
             <a:ext cx="190440" cy="200160"/>
           </a:xfrm>
           <a:prstGeom prst="rect">
@@ -40153,13 +40297,13 @@
       </p:sp>
       <p:sp>
         <p:nvSpPr>
-          <p:cNvPr id="972" name=""/>
+          <p:cNvPr id="975" name=""/>
           <p:cNvSpPr txBox="1"/>
           <p:nvPr/>
         </p:nvSpPr>
         <p:spPr>
           <a:xfrm>
-            <a:off x="7380360" y="4864680"/>
+            <a:off x="6248880" y="4864680"/>
             <a:ext cx="171360" cy="171000"/>
           </a:xfrm>
           <a:prstGeom prst="rect">
@@ -40201,13 +40345,13 @@
       </p:sp>
       <p:sp>
         <p:nvSpPr>
-          <p:cNvPr id="973" name=""/>
+          <p:cNvPr id="976" name=""/>
           <p:cNvSpPr txBox="1"/>
           <p:nvPr/>
         </p:nvSpPr>
         <p:spPr>
           <a:xfrm>
-            <a:off x="8472600" y="4599360"/>
+            <a:off x="7261920" y="4732560"/>
             <a:ext cx="171000" cy="200160"/>
           </a:xfrm>
           <a:prstGeom prst="rect">
@@ -40249,13 +40393,13 @@
       </p:sp>
       <p:sp>
         <p:nvSpPr>
-          <p:cNvPr id="974" name=""/>
+          <p:cNvPr id="977" name=""/>
           <p:cNvSpPr txBox="1"/>
           <p:nvPr/>
         </p:nvSpPr>
         <p:spPr>
           <a:xfrm>
-            <a:off x="8568000" y="4607280"/>
+            <a:off x="7356960" y="4740840"/>
             <a:ext cx="512640" cy="171000"/>
           </a:xfrm>
           <a:prstGeom prst="rect">
@@ -40297,13 +40441,13 @@
       </p:sp>
       <p:sp>
         <p:nvSpPr>
-          <p:cNvPr id="975" name=""/>
+          <p:cNvPr id="978" name=""/>
           <p:cNvSpPr txBox="1"/>
           <p:nvPr/>
         </p:nvSpPr>
         <p:spPr>
           <a:xfrm>
-            <a:off x="9082440" y="4599360"/>
+            <a:off x="7871400" y="4732560"/>
             <a:ext cx="357840" cy="200160"/>
           </a:xfrm>
           <a:prstGeom prst="rect">
@@ -40345,13 +40489,13 @@
       </p:sp>
       <p:sp>
         <p:nvSpPr>
-          <p:cNvPr id="976" name=""/>
+          <p:cNvPr id="979" name=""/>
           <p:cNvSpPr txBox="1"/>
           <p:nvPr/>
         </p:nvSpPr>
         <p:spPr>
           <a:xfrm>
-            <a:off x="9441000" y="4607280"/>
+            <a:off x="8229960" y="4740840"/>
             <a:ext cx="171360" cy="171000"/>
           </a:xfrm>
           <a:prstGeom prst="rect">
@@ -40393,13 +40537,13 @@
       </p:sp>
       <p:sp>
         <p:nvSpPr>
-          <p:cNvPr id="977" name=""/>
+          <p:cNvPr id="980" name=""/>
           <p:cNvSpPr txBox="1"/>
           <p:nvPr/>
         </p:nvSpPr>
         <p:spPr>
           <a:xfrm>
-            <a:off x="9612360" y="4599360"/>
+            <a:off x="8401680" y="4732560"/>
             <a:ext cx="781200" cy="200160"/>
           </a:xfrm>
           <a:prstGeom prst="rect">
@@ -40441,13 +40585,13 @@
       </p:sp>
       <p:sp>
         <p:nvSpPr>
-          <p:cNvPr id="978" name=""/>
+          <p:cNvPr id="981" name=""/>
           <p:cNvSpPr txBox="1"/>
           <p:nvPr/>
         </p:nvSpPr>
         <p:spPr>
           <a:xfrm>
-            <a:off x="10396440" y="4607280"/>
+            <a:off x="9185760" y="4740840"/>
             <a:ext cx="171360" cy="171000"/>
           </a:xfrm>
           <a:prstGeom prst="rect">
@@ -40489,13 +40633,13 @@
       </p:sp>
       <p:sp>
         <p:nvSpPr>
-          <p:cNvPr id="979" name=""/>
+          <p:cNvPr id="982" name=""/>
           <p:cNvSpPr txBox="1"/>
           <p:nvPr/>
         </p:nvSpPr>
         <p:spPr>
           <a:xfrm>
-            <a:off x="8472600" y="4856400"/>
+            <a:off x="9357120" y="4732560"/>
             <a:ext cx="342000" cy="200160"/>
           </a:xfrm>
           <a:prstGeom prst="rect">
@@ -40537,13 +40681,13 @@
       </p:sp>
       <p:sp>
         <p:nvSpPr>
-          <p:cNvPr id="980" name=""/>
+          <p:cNvPr id="983" name=""/>
           <p:cNvSpPr txBox="1"/>
           <p:nvPr/>
         </p:nvSpPr>
         <p:spPr>
           <a:xfrm>
-            <a:off x="8815680" y="4864680"/>
+            <a:off x="9699840" y="4740840"/>
             <a:ext cx="512640" cy="171000"/>
           </a:xfrm>
           <a:prstGeom prst="rect">
@@ -40585,13 +40729,13 @@
       </p:sp>
       <p:sp>
         <p:nvSpPr>
-          <p:cNvPr id="981" name=""/>
+          <p:cNvPr id="984" name=""/>
           <p:cNvSpPr txBox="1"/>
           <p:nvPr/>
         </p:nvSpPr>
         <p:spPr>
           <a:xfrm>
-            <a:off x="10946880" y="4599360"/>
+            <a:off x="10973520" y="4599360"/>
             <a:ext cx="333000" cy="200160"/>
           </a:xfrm>
           <a:prstGeom prst="rect">
@@ -40633,13 +40777,13 @@
       </p:sp>
       <p:sp>
         <p:nvSpPr>
-          <p:cNvPr id="982" name=""/>
+          <p:cNvPr id="985" name=""/>
           <p:cNvSpPr txBox="1"/>
           <p:nvPr/>
         </p:nvSpPr>
         <p:spPr>
           <a:xfrm>
-            <a:off x="10946880" y="4856400"/>
+            <a:off x="10973520" y="4856400"/>
             <a:ext cx="342360" cy="200160"/>
           </a:xfrm>
           <a:prstGeom prst="rect">
@@ -40681,13 +40825,13 @@
       </p:sp>
       <p:sp>
         <p:nvSpPr>
-          <p:cNvPr id="983" name=""/>
+          <p:cNvPr id="986" name=""/>
           <p:cNvSpPr txBox="1"/>
           <p:nvPr/>
         </p:nvSpPr>
         <p:spPr>
           <a:xfrm>
-            <a:off x="6210360" y="5333040"/>
+            <a:off x="5120640" y="5333040"/>
             <a:ext cx="3048840" cy="191160"/>
           </a:xfrm>
           <a:prstGeom prst="rect">
@@ -40729,13 +40873,13 @@
       </p:sp>
       <p:sp>
         <p:nvSpPr>
-          <p:cNvPr id="984" name=""/>
+          <p:cNvPr id="987" name=""/>
           <p:cNvSpPr txBox="1"/>
           <p:nvPr/>
         </p:nvSpPr>
         <p:spPr>
           <a:xfrm>
-            <a:off x="9258120" y="5324040"/>
+            <a:off x="8168760" y="5324040"/>
             <a:ext cx="1136880" cy="222840"/>
           </a:xfrm>
           <a:prstGeom prst="rect">
@@ -40777,13 +40921,13 @@
       </p:sp>
       <p:sp>
         <p:nvSpPr>
-          <p:cNvPr id="985" name=""/>
+          <p:cNvPr id="988" name=""/>
           <p:cNvSpPr txBox="1"/>
           <p:nvPr/>
         </p:nvSpPr>
         <p:spPr>
           <a:xfrm>
-            <a:off x="10394640" y="5333040"/>
+            <a:off x="9304920" y="5333040"/>
             <a:ext cx="191160" cy="212040"/>
           </a:xfrm>
           <a:prstGeom prst="rect">
@@ -40825,13 +40969,13 @@
       </p:sp>
       <p:sp>
         <p:nvSpPr>
-          <p:cNvPr id="986" name=""/>
+          <p:cNvPr id="989" name=""/>
           <p:cNvSpPr txBox="1"/>
           <p:nvPr/>
         </p:nvSpPr>
         <p:spPr>
           <a:xfrm>
-            <a:off x="10585080" y="5324040"/>
+            <a:off x="9495360" y="5324040"/>
             <a:ext cx="805680" cy="222840"/>
           </a:xfrm>
           <a:prstGeom prst="rect">
@@ -40873,13 +41017,13 @@
       </p:sp>
       <p:sp>
         <p:nvSpPr>
-          <p:cNvPr id="987" name=""/>
+          <p:cNvPr id="990" name=""/>
           <p:cNvSpPr txBox="1"/>
           <p:nvPr/>
         </p:nvSpPr>
         <p:spPr>
           <a:xfrm>
-            <a:off x="11390040" y="5333040"/>
+            <a:off x="10300320" y="5333040"/>
             <a:ext cx="191160" cy="191160"/>
           </a:xfrm>
           <a:prstGeom prst="rect">
@@ -40921,7 +41065,7 @@
       </p:sp>
       <p:sp>
         <p:nvSpPr>
-          <p:cNvPr id="988" name=""/>
+          <p:cNvPr id="991" name=""/>
           <p:cNvSpPr txBox="1"/>
           <p:nvPr/>
         </p:nvSpPr>
@@ -40969,7 +41113,7 @@
       </p:sp>
       <p:sp>
         <p:nvSpPr>
-          <p:cNvPr id="989" name=""/>
+          <p:cNvPr id="992" name=""/>
           <p:cNvSpPr txBox="1"/>
           <p:nvPr/>
         </p:nvSpPr>
@@ -41047,7 +41191,7 @@
       </p:grpSpPr>
       <p:sp>
         <p:nvSpPr>
-          <p:cNvPr id="990" name=""/>
+          <p:cNvPr id="993" name=""/>
           <p:cNvSpPr/>
           <p:nvPr/>
         </p:nvSpPr>
@@ -41107,7 +41251,7 @@
       </p:sp>
       <p:sp>
         <p:nvSpPr>
-          <p:cNvPr id="991" name=""/>
+          <p:cNvPr id="994" name=""/>
           <p:cNvSpPr/>
           <p:nvPr/>
         </p:nvSpPr>
@@ -41167,7 +41311,7 @@
       </p:sp>
       <p:sp>
         <p:nvSpPr>
-          <p:cNvPr id="992" name=""/>
+          <p:cNvPr id="995" name=""/>
           <p:cNvSpPr/>
           <p:nvPr/>
         </p:nvSpPr>
@@ -41227,7 +41371,7 @@
       </p:sp>
       <p:sp>
         <p:nvSpPr>
-          <p:cNvPr id="993" name=""/>
+          <p:cNvPr id="996" name=""/>
           <p:cNvSpPr/>
           <p:nvPr/>
         </p:nvSpPr>
@@ -41287,7 +41431,7 @@
       </p:sp>
       <p:sp>
         <p:nvSpPr>
-          <p:cNvPr id="994" name=""/>
+          <p:cNvPr id="997" name=""/>
           <p:cNvSpPr/>
           <p:nvPr/>
         </p:nvSpPr>
@@ -41415,7 +41559,7 @@
       </p:sp>
       <p:sp>
         <p:nvSpPr>
-          <p:cNvPr id="995" name=""/>
+          <p:cNvPr id="998" name=""/>
           <p:cNvSpPr txBox="1"/>
           <p:nvPr/>
         </p:nvSpPr>
@@ -41463,7 +41607,7 @@
       </p:sp>
       <p:sp>
         <p:nvSpPr>
-          <p:cNvPr id="996" name=""/>
+          <p:cNvPr id="999" name=""/>
           <p:cNvSpPr/>
           <p:nvPr/>
         </p:nvSpPr>
@@ -41591,7 +41735,7 @@
       </p:sp>
       <p:sp>
         <p:nvSpPr>
-          <p:cNvPr id="997" name=""/>
+          <p:cNvPr id="1000" name=""/>
           <p:cNvSpPr txBox="1"/>
           <p:nvPr/>
         </p:nvSpPr>
@@ -41639,7 +41783,7 @@
       </p:sp>
       <p:sp>
         <p:nvSpPr>
-          <p:cNvPr id="998" name=""/>
+          <p:cNvPr id="1001" name=""/>
           <p:cNvSpPr txBox="1"/>
           <p:nvPr/>
         </p:nvSpPr>
@@ -41687,7 +41831,7 @@
       </p:sp>
       <p:sp>
         <p:nvSpPr>
-          <p:cNvPr id="999" name=""/>
+          <p:cNvPr id="1002" name=""/>
           <p:cNvSpPr txBox="1"/>
           <p:nvPr/>
         </p:nvSpPr>
@@ -41735,7 +41879,7 @@
       </p:sp>
       <p:sp>
         <p:nvSpPr>
-          <p:cNvPr id="1000" name=""/>
+          <p:cNvPr id="1003" name=""/>
           <p:cNvSpPr/>
           <p:nvPr/>
         </p:nvSpPr>
@@ -41863,7 +42007,7 @@
       </p:sp>
       <p:sp>
         <p:nvSpPr>
-          <p:cNvPr id="1001" name=""/>
+          <p:cNvPr id="1004" name=""/>
           <p:cNvSpPr txBox="1"/>
           <p:nvPr/>
         </p:nvSpPr>
@@ -41911,7 +42055,7 @@
       </p:sp>
       <p:sp>
         <p:nvSpPr>
-          <p:cNvPr id="1002" name=""/>
+          <p:cNvPr id="1005" name=""/>
           <p:cNvSpPr txBox="1"/>
           <p:nvPr/>
         </p:nvSpPr>
@@ -41959,7 +42103,7 @@
       </p:sp>
       <p:sp>
         <p:nvSpPr>
-          <p:cNvPr id="1003" name=""/>
+          <p:cNvPr id="1006" name=""/>
           <p:cNvSpPr txBox="1"/>
           <p:nvPr/>
         </p:nvSpPr>
@@ -42007,14 +42151,14 @@
       </p:sp>
       <p:sp>
         <p:nvSpPr>
-          <p:cNvPr id="1004" name=""/>
+          <p:cNvPr id="1007" name=""/>
           <p:cNvSpPr txBox="1"/>
           <p:nvPr/>
         </p:nvSpPr>
         <p:spPr>
           <a:xfrm>
             <a:off x="1858680" y="3904200"/>
-            <a:ext cx="4572720" cy="191160"/>
+            <a:ext cx="5715720" cy="191160"/>
           </a:xfrm>
           <a:prstGeom prst="rect">
             <a:avLst/>
@@ -42040,7 +42184,7 @@
                 <a:latin typeface="HiraginoSans-W4"/>
                 <a:ea typeface="HiraginoSans-W4"/>
               </a:rPr>
-              <a:t>撮影した地⾐類（コケ類）画像の⾃動分類⼿法の検討</a:t>
+              <a:t>撮影した地⾐類（藻類と菌類の共⽣体）画像の⾃動分類⼿法の検討</a:t>
             </a:r>
             <a:endParaRPr lang="en-US" sz="1500" b="0" u="none" strike="noStrike">
               <a:solidFill>
@@ -42055,7 +42199,7 @@
       </p:sp>
       <p:sp>
         <p:nvSpPr>
-          <p:cNvPr id="1005" name=""/>
+          <p:cNvPr id="1008" name=""/>
           <p:cNvSpPr txBox="1"/>
           <p:nvPr/>
         </p:nvSpPr>

--- a/slides/2026-07-01-ai-projects-intro.pptx
+++ b/slides/2026-07-01-ai-projects-intro.pptx
@@ -51337,7 +51337,7 @@
         <p:spPr>
           <a:xfrm>
             <a:off x="5313600" y="2287800"/>
-            <a:ext cx="177120" cy="2395800"/>
+            <a:ext cx="108720" cy="2395800"/>
           </a:xfrm>
           <a:custGeom>
             <a:avLst/>
@@ -51345,13 +51345,13 @@
             <a:ahLst/>
             <a:rect l="0" t="0" r="r" b="b"/>
             <a:pathLst>
-              <a:path fill="none" w="492" h="6655">
+              <a:path fill="none" w="302" h="6655">
                 <a:moveTo>
                   <a:pt x="0" y="6655"/>
                 </a:moveTo>
                 <a:cubicBezTo>
-                  <a:pt x="656" y="6655"/>
-                  <a:pt x="656" y="0"/>
+                  <a:pt x="402" y="6655"/>
+                  <a:pt x="402" y="0"/>
                   <a:pt x="0" y="0"/>
                 </a:cubicBezTo>
               </a:path>
@@ -53624,7 +53624,7 @@
         </p:nvSpPr>
         <p:spPr>
           <a:xfrm rot="5400000">
-            <a:off x="4837320" y="3472200"/>
+            <a:off x="4994280" y="3472200"/>
             <a:ext cx="1268640" cy="97920"/>
           </a:xfrm>
           <a:prstGeom prst="rect">
@@ -57544,8 +57544,8 @@
         </p:nvSpPr>
         <p:spPr>
           <a:xfrm>
-            <a:off x="6053400" y="2287800"/>
-            <a:ext cx="177120" cy="2395800"/>
+            <a:off x="6122160" y="2287800"/>
+            <a:ext cx="108720" cy="2395800"/>
           </a:xfrm>
           <a:custGeom>
             <a:avLst/>
@@ -57553,14 +57553,14 @@
             <a:ahLst/>
             <a:rect l="0" t="0" r="r" b="b"/>
             <a:pathLst>
-              <a:path fill="none" w="492" h="6655">
-                <a:moveTo>
-                  <a:pt x="492" y="6655"/>
-                </a:moveTo>
-                <a:cubicBezTo>
-                  <a:pt x="-164" y="6655"/>
-                  <a:pt x="-164" y="0"/>
-                  <a:pt x="492" y="0"/>
+              <a:path fill="none" w="302" h="6655">
+                <a:moveTo>
+                  <a:pt x="302" y="6655"/>
+                </a:moveTo>
+                <a:cubicBezTo>
+                  <a:pt x="-101" y="6655"/>
+                  <a:pt x="-101" y="0"/>
+                  <a:pt x="302" y="0"/>
                 </a:cubicBezTo>
               </a:path>
             </a:pathLst>
@@ -57921,7 +57921,7 @@
         </p:nvSpPr>
         <p:spPr>
           <a:xfrm rot="5400000">
-            <a:off x="5518440" y="3475080"/>
+            <a:off x="5361120" y="3475080"/>
             <a:ext cx="1268640" cy="97920"/>
           </a:xfrm>
           <a:prstGeom prst="rect">
